--- a/presentation/PRESENTATION-G4-Les_Hadoop_Riders.pptx
+++ b/presentation/PRESENTATION-G4-Les_Hadoop_Riders.pptx
@@ -513,7 +513,7 @@
           <a:lstStyle/>
           <a:p>
             <a:r>
-              <a:t>Bonjour, nous sommes Les_Hadoop_Riders, groupe G4. On présente notre cluster Hadoop (HDFS + YARN) déployé avec Docker. Durée prévue : environ 8 à 10 minutes.</a:t>
+              <a:t>Introduire le groupe. Montrer qu’on a une vraie UI avec 5 DataNodes. Citer Hub + GitHub.</a:t>
             </a:r>
           </a:p>
         </p:txBody>
@@ -583,7 +583,7 @@
           <a:lstStyle/>
           <a:p>
             <a:r>
-              <a:t>Si possible ouvrir les UI en live. Sinon montrer les captures du rapport.</a:t>
+              <a:t>Montrer les deux captures. Cliquer les liens si connexion live.</a:t>
             </a:r>
           </a:p>
         </p:txBody>
@@ -653,7 +653,7 @@
           <a:lstStyle/>
           <a:p>
             <a:r>
-              <a:t>Montrer qu’on a débogué pour de vrai. Une phrase cause → solution pour chaque point.</a:t>
+              <a:t>3 problèmes, 3 solutions. Lien Hub pour prouver la publication.</a:t>
             </a:r>
           </a:p>
         </p:txBody>
@@ -723,7 +723,7 @@
           <a:lstStyle/>
           <a:p>
             <a:r>
-              <a:t>Récap en 20 secondes, puis ouvrir les questions. Rappeler Hub + GitHub si demandé.</a:t>
+              <a:t>Récap 20 s. Pointer Hub + GitHub. Ouvrir les questions.</a:t>
             </a:r>
           </a:p>
         </p:txBody>
@@ -793,7 +793,7 @@
           <a:lstStyle/>
           <a:p>
             <a:r>
-              <a:t>Voici le plan. Chacun présente sa partie. On commence par le contexte théorique.</a:t>
+              <a:t>Annoncer le plan rapidement, sans lire chaque carte.</a:t>
             </a:r>
           </a:p>
         </p:txBody>
@@ -863,7 +863,7 @@
           <a:lstStyle/>
           <a:p>
             <a:r>
-              <a:t>On a choisi l’e-commerce. Expliquer chaque V avec un exemple concret. HDFS pour stocker, YARN pour traiter.</a:t>
+              <a:t>Un exemple concret par V. Finir sur HDFS + YARN.</a:t>
             </a:r>
           </a:p>
         </p:txBody>
@@ -933,7 +933,7 @@
           <a:lstStyle/>
           <a:p>
             <a:r>
-              <a:t>Comparer clairement local vs HDFS. Insister sur blocs + réplication + rôle NameNode.</a:t>
+              <a:t>Pointer le schéma : NameNode en haut, DataNodes en bas avec réplication.</a:t>
             </a:r>
           </a:p>
         </p:txBody>
@@ -1003,7 +1003,7 @@
           <a:lstStyle/>
           <a:p>
             <a:r>
-              <a:t>Bien séparer RM et NM. Si le prof demande ApplicationMaster : c’est le chef du job, lancé grâce au RM, qui négocie les ressources.</a:t>
+              <a:t>Suivre les 3 boîtes. Montrer la capture YARN.</a:t>
             </a:r>
           </a:p>
         </p:txBody>
@@ -1073,7 +1073,7 @@
           <a:lstStyle/>
           <a:p>
             <a:r>
-              <a:t>Montrer mentalement le schéma : 1 master, 5 workers. Citer les ports utiles pour la démo.</a:t>
+              <a:t>Montrer le schéma master au-dessus, 5 workers en dessous.</a:t>
             </a:r>
           </a:p>
         </p:txBody>
@@ -1143,7 +1143,7 @@
           <a:lstStyle/>
           <a:p>
             <a:r>
-              <a:t>Dire les commandes à voix haute. Rappeler que Docker Hub impose les minuscules (g4).</a:t>
+              <a:t>Montrer le terminal. Rappeler Hub en minuscules.</a:t>
             </a:r>
           </a:p>
         </p:txBody>
@@ -1213,7 +1213,7 @@
           <a:lstStyle/>
           <a:p>
             <a:r>
-              <a:t>Parcourir les étapes dans l’ordre. Fichier petit = 1 seul bloc (normal, bloc 128 Mo).</a:t>
+              <a:t>Parcourir la liste en montrant la capture.</a:t>
             </a:r>
           </a:p>
         </p:txBody>
@@ -1283,7 +1283,7 @@
           <a:lstStyle/>
           <a:p>
             <a:r>
-              <a:t>Expliquer vite Monte Carlo (points aléatoires). Insister sur SUCCEEDED et le numéro d’app.</a:t>
+              <a:t>Insister SUCCEEDED + numéro d’app. Capture UI à droite.</a:t>
             </a:r>
           </a:p>
         </p:txBody>
@@ -4340,8 +4340,8 @@
         </p:nvSpPr>
         <p:spPr>
           <a:xfrm>
-            <a:off x="0" y="5303520"/>
-            <a:ext cx="12191695" cy="1554480"/>
+            <a:off x="7498079" y="0"/>
+            <a:ext cx="4754880" cy="6858000"/>
           </a:xfrm>
           <a:prstGeom prst="rect">
             <a:avLst/>
@@ -4375,16 +4375,250 @@
           </a:p>
         </p:txBody>
       </p:sp>
-      <p:sp>
-        <p:nvSpPr>
-          <p:cNvPr id="4" name="TextBox 3"/>
+      <p:pic>
+        <p:nvPicPr>
+          <p:cNvPr id="4" name="Picture 3" descr="screenshot-datanodes.png"/>
+          <p:cNvPicPr>
+            <a:picLocks noChangeAspect="1"/>
+          </p:cNvPicPr>
+          <p:nvPr/>
+        </p:nvPicPr>
+        <p:blipFill>
+          <a:blip r:embed="rId2"/>
+          <a:stretch>
+            <a:fillRect/>
+          </a:stretch>
+        </p:blipFill>
+        <p:spPr>
+          <a:xfrm>
+            <a:off x="7726679" y="1280160"/>
+            <a:ext cx="4297680" cy="3069771"/>
+          </a:xfrm>
+          <a:prstGeom prst="rect">
+            <a:avLst/>
+          </a:prstGeom>
+        </p:spPr>
+      </p:pic>
+      <p:sp>
+        <p:nvSpPr>
+          <p:cNvPr id="5" name="TextBox 4"/>
           <p:cNvSpPr txBox="1"/>
           <p:nvPr/>
         </p:nvSpPr>
         <p:spPr>
           <a:xfrm>
-            <a:off x="731520" y="1645920"/>
-            <a:ext cx="10515600" cy="1097280"/>
+            <a:off x="7726679" y="5074920"/>
+            <a:ext cx="4297680" cy="274320"/>
+          </a:xfrm>
+          <a:prstGeom prst="rect">
+            <a:avLst/>
+          </a:prstGeom>
+          <a:noFill/>
+        </p:spPr>
+        <p:txBody>
+          <a:bodyPr wrap="square">
+            <a:spAutoFit/>
+          </a:bodyPr>
+          <a:lstStyle/>
+          <a:p>
+            <a:pPr algn="l">
+              <a:spcAft>
+                <a:spcPts val="600"/>
+              </a:spcAft>
+            </a:pPr>
+            <a:r>
+              <a:rPr sz="1100" b="0">
+                <a:solidFill>
+                  <a:srgbClr val="64748B"/>
+                </a:solidFill>
+                <a:latin typeface="Calibri"/>
+              </a:rPr>
+              <a:t>Capture UI — 5 DataNodes actifs</a:t>
+            </a:r>
+          </a:p>
+        </p:txBody>
+      </p:sp>
+      <p:sp>
+        <p:nvSpPr>
+          <p:cNvPr id="6" name="TextBox 5"/>
+          <p:cNvSpPr txBox="1"/>
+          <p:nvPr/>
+        </p:nvSpPr>
+        <p:spPr>
+          <a:xfrm>
+            <a:off x="548640" y="1371600"/>
+            <a:ext cx="6583680" cy="1097280"/>
+          </a:xfrm>
+          <a:prstGeom prst="rect">
+            <a:avLst/>
+          </a:prstGeom>
+          <a:noFill/>
+        </p:spPr>
+        <p:txBody>
+          <a:bodyPr wrap="square">
+            <a:spAutoFit/>
+          </a:bodyPr>
+          <a:lstStyle/>
+          <a:p>
+            <a:pPr algn="l">
+              <a:spcAft>
+                <a:spcPts val="400"/>
+              </a:spcAft>
+            </a:pPr>
+            <a:r>
+              <a:rPr sz="3800" b="1">
+                <a:solidFill>
+                  <a:srgbClr val="FFFFFF"/>
+                </a:solidFill>
+                <a:latin typeface="Calibri"/>
+              </a:rPr>
+              <a:t>Cluster Hadoop</a:t>
+            </a:r>
+          </a:p>
+          <a:p>
+            <a:pPr algn="l">
+              <a:spcAft>
+                <a:spcPts val="600"/>
+              </a:spcAft>
+            </a:pPr>
+            <a:r>
+              <a:rPr sz="3400" b="1">
+                <a:solidFill>
+                  <a:srgbClr val="D1FAE5"/>
+                </a:solidFill>
+                <a:latin typeface="Calibri"/>
+              </a:rPr>
+              <a:t>avec Docker</a:t>
+            </a:r>
+          </a:p>
+        </p:txBody>
+      </p:sp>
+      <p:sp>
+        <p:nvSpPr>
+          <p:cNvPr id="7" name="TextBox 6"/>
+          <p:cNvSpPr txBox="1"/>
+          <p:nvPr/>
+        </p:nvSpPr>
+        <p:spPr>
+          <a:xfrm>
+            <a:off x="548640" y="3017520"/>
+            <a:ext cx="6583680" cy="1280160"/>
+          </a:xfrm>
+          <a:prstGeom prst="rect">
+            <a:avLst/>
+          </a:prstGeom>
+          <a:noFill/>
+        </p:spPr>
+        <p:txBody>
+          <a:bodyPr wrap="square">
+            <a:spAutoFit/>
+          </a:bodyPr>
+          <a:lstStyle/>
+          <a:p>
+            <a:pPr algn="l">
+              <a:spcAft>
+                <a:spcPts val="800"/>
+              </a:spcAft>
+            </a:pPr>
+            <a:r>
+              <a:rPr sz="1800" b="0">
+                <a:solidFill>
+                  <a:srgbClr val="FFFFFF"/>
+                </a:solidFill>
+                <a:latin typeface="Calibri"/>
+              </a:rPr>
+              <a:t>UA1 — Projet 1  |  Groupe G4</a:t>
+            </a:r>
+          </a:p>
+          <a:p>
+            <a:pPr algn="l">
+              <a:spcAft>
+                <a:spcPts val="1000"/>
+              </a:spcAft>
+            </a:pPr>
+            <a:r>
+              <a:rPr sz="2200" b="1">
+                <a:solidFill>
+                  <a:srgbClr val="FFFFFF"/>
+                </a:solidFill>
+                <a:latin typeface="Calibri"/>
+              </a:rPr>
+              <a:t>Les_Hadoop_Riders</a:t>
+            </a:r>
+          </a:p>
+          <a:p>
+            <a:pPr algn="l">
+              <a:spcAft>
+                <a:spcPts val="600"/>
+              </a:spcAft>
+            </a:pPr>
+            <a:r>
+              <a:rPr sz="1400" b="0">
+                <a:solidFill>
+                  <a:srgbClr val="CBD5E1"/>
+                </a:solidFill>
+                <a:latin typeface="Calibri"/>
+              </a:rPr>
+              <a:t>HDFS · YARN · Docker Compose · MapReduce π</a:t>
+            </a:r>
+          </a:p>
+        </p:txBody>
+      </p:sp>
+      <p:sp>
+        <p:nvSpPr>
+          <p:cNvPr id="8" name="Rounded Rectangle 7"/>
+          <p:cNvSpPr/>
+          <p:nvPr/>
+        </p:nvSpPr>
+        <p:spPr>
+          <a:xfrm>
+            <a:off x="548640" y="4754880"/>
+            <a:ext cx="3017520" cy="384048"/>
+          </a:xfrm>
+          <a:prstGeom prst="roundRect">
+            <a:avLst>
+              <a:gd name="adj" fmla="val 8000"/>
+            </a:avLst>
+          </a:prstGeom>
+          <a:solidFill>
+            <a:srgbClr val="147A66"/>
+          </a:solidFill>
+          <a:ln>
+            <a:noFill/>
+          </a:ln>
+        </p:spPr>
+        <p:style>
+          <a:lnRef idx="1">
+            <a:schemeClr val="accent1"/>
+          </a:lnRef>
+          <a:fillRef idx="3">
+            <a:schemeClr val="accent1"/>
+          </a:fillRef>
+          <a:effectRef idx="2">
+            <a:schemeClr val="accent1"/>
+          </a:effectRef>
+          <a:fontRef idx="minor">
+            <a:schemeClr val="lt1"/>
+          </a:fontRef>
+        </p:style>
+        <p:txBody>
+          <a:bodyPr rtlCol="0" anchor="ctr"/>
+          <a:lstStyle/>
+          <a:p>
+            <a:pPr algn="ctr"/>
+          </a:p>
+        </p:txBody>
+      </p:sp>
+      <p:sp>
+        <p:nvSpPr>
+          <p:cNvPr id="9" name="TextBox 8"/>
+          <p:cNvSpPr txBox="1"/>
+          <p:nvPr/>
+        </p:nvSpPr>
+        <p:spPr>
+          <a:xfrm>
+            <a:off x="548640" y="4800600"/>
+            <a:ext cx="3017520" cy="320040"/>
           </a:xfrm>
           <a:prstGeom prst="rect">
             <a:avLst/>
@@ -4397,28 +4631,75 @@
           </a:bodyPr>
           <a:lstStyle/>
           <a:p>
-            <a:r>
-              <a:rPr sz="4000" b="1">
+            <a:pPr algn="ctr"/>
+            <a:r>
+              <a:rPr sz="1200" b="1">
                 <a:solidFill>
                   <a:srgbClr val="FFFFFF"/>
                 </a:solidFill>
                 <a:latin typeface="Calibri"/>
-              </a:rPr>
-              <a:t>Cluster Hadoop avec Docker</a:t>
-            </a:r>
-          </a:p>
-        </p:txBody>
-      </p:sp>
-      <p:sp>
-        <p:nvSpPr>
-          <p:cNvPr id="5" name="TextBox 4"/>
+                <a:hlinkClick r:id="rId3"/>
+              </a:rPr>
+              <a:t>Docker Hub →</a:t>
+            </a:r>
+          </a:p>
+        </p:txBody>
+      </p:sp>
+      <p:sp>
+        <p:nvSpPr>
+          <p:cNvPr id="10" name="Rounded Rectangle 9"/>
+          <p:cNvSpPr/>
+          <p:nvPr/>
+        </p:nvSpPr>
+        <p:spPr>
+          <a:xfrm>
+            <a:off x="3749039" y="4754880"/>
+            <a:ext cx="2743200" cy="384048"/>
+          </a:xfrm>
+          <a:prstGeom prst="roundRect">
+            <a:avLst>
+              <a:gd name="adj" fmla="val 8000"/>
+            </a:avLst>
+          </a:prstGeom>
+          <a:solidFill>
+            <a:srgbClr val="1D4E89"/>
+          </a:solidFill>
+          <a:ln>
+            <a:noFill/>
+          </a:ln>
+        </p:spPr>
+        <p:style>
+          <a:lnRef idx="1">
+            <a:schemeClr val="accent1"/>
+          </a:lnRef>
+          <a:fillRef idx="3">
+            <a:schemeClr val="accent1"/>
+          </a:fillRef>
+          <a:effectRef idx="2">
+            <a:schemeClr val="accent1"/>
+          </a:effectRef>
+          <a:fontRef idx="minor">
+            <a:schemeClr val="lt1"/>
+          </a:fontRef>
+        </p:style>
+        <p:txBody>
+          <a:bodyPr rtlCol="0" anchor="ctr"/>
+          <a:lstStyle/>
+          <a:p>
+            <a:pPr algn="ctr"/>
+          </a:p>
+        </p:txBody>
+      </p:sp>
+      <p:sp>
+        <p:nvSpPr>
+          <p:cNvPr id="11" name="TextBox 10"/>
           <p:cNvSpPr txBox="1"/>
           <p:nvPr/>
         </p:nvSpPr>
         <p:spPr>
           <a:xfrm>
-            <a:off x="731520" y="2834640"/>
-            <a:ext cx="10515600" cy="548640"/>
+            <a:off x="3749039" y="4800600"/>
+            <a:ext cx="2743200" cy="320040"/>
           </a:xfrm>
           <a:prstGeom prst="rect">
             <a:avLst/>
@@ -4431,66 +4712,23 @@
           </a:bodyPr>
           <a:lstStyle/>
           <a:p>
-            <a:r>
-              <a:rPr sz="2200" b="0">
-                <a:solidFill>
-                  <a:srgbClr val="D1FAE5"/>
-                </a:solidFill>
-                <a:latin typeface="Calibri"/>
-              </a:rPr>
-              <a:t>UA1 — Projet 1 | Groupe G4 — Les_Hadoop_Riders</a:t>
-            </a:r>
-          </a:p>
-        </p:txBody>
-      </p:sp>
-      <p:sp>
-        <p:nvSpPr>
-          <p:cNvPr id="6" name="TextBox 5"/>
-          <p:cNvSpPr txBox="1"/>
-          <p:nvPr/>
-        </p:nvSpPr>
-        <p:spPr>
-          <a:xfrm>
-            <a:off x="731520" y="5577840"/>
-            <a:ext cx="10515600" cy="914400"/>
-          </a:xfrm>
-          <a:prstGeom prst="rect">
-            <a:avLst/>
-          </a:prstGeom>
-          <a:noFill/>
-        </p:spPr>
-        <p:txBody>
-          <a:bodyPr wrap="none">
-            <a:spAutoFit/>
-          </a:bodyPr>
-          <a:lstStyle/>
-          <a:p>
-            <a:r>
-              <a:rPr sz="1600" b="0">
+            <a:pPr algn="ctr"/>
+            <a:r>
+              <a:rPr sz="1200" b="1">
                 <a:solidFill>
                   <a:srgbClr val="FFFFFF"/>
                 </a:solidFill>
                 <a:latin typeface="Calibri"/>
-              </a:rPr>
-              <a:t>Komla · Kassoum · Joel · Forbes · Frank · Wren</a:t>
-            </a:r>
-          </a:p>
-          <a:p>
-            <a:r>
-              <a:rPr sz="1400" b="0">
-                <a:solidFill>
-                  <a:srgbClr val="CBD5E1"/>
-                </a:solidFill>
-                <a:latin typeface="Calibri"/>
-              </a:rPr>
-              <a:t>Image : leshadoopriders/hadoop-tp-g4:1.0</a:t>
-            </a:r>
-          </a:p>
-        </p:txBody>
-      </p:sp>
-      <p:sp>
-        <p:nvSpPr>
-          <p:cNvPr id="7" name="Rectangle 6"/>
+                <a:hlinkClick r:id="rId4"/>
+              </a:rPr>
+              <a:t>GitHub →</a:t>
+            </a:r>
+          </a:p>
+        </p:txBody>
+      </p:sp>
+      <p:sp>
+        <p:nvSpPr>
+          <p:cNvPr id="12" name="Rectangle 11"/>
           <p:cNvSpPr/>
           <p:nvPr/>
         </p:nvSpPr>
@@ -4533,14 +4771,14 @@
       </p:sp>
       <p:sp>
         <p:nvSpPr>
-          <p:cNvPr id="8" name="TextBox 7"/>
+          <p:cNvPr id="13" name="TextBox 12"/>
           <p:cNvSpPr txBox="1"/>
           <p:nvPr/>
         </p:nvSpPr>
         <p:spPr>
           <a:xfrm>
-            <a:off x="365760" y="6446520"/>
-            <a:ext cx="9144000" cy="320040"/>
+            <a:off x="320040" y="6446520"/>
+            <a:ext cx="9326880" cy="320040"/>
           </a:xfrm>
           <a:prstGeom prst="rect">
             <a:avLst/>
@@ -4567,14 +4805,14 @@
       </p:sp>
       <p:sp>
         <p:nvSpPr>
-          <p:cNvPr id="9" name="TextBox 8"/>
+          <p:cNvPr id="14" name="TextBox 13"/>
           <p:cNvSpPr txBox="1"/>
           <p:nvPr/>
         </p:nvSpPr>
         <p:spPr>
           <a:xfrm>
-            <a:off x="10515600" y="6446520"/>
-            <a:ext cx="1371600" cy="320040"/>
+            <a:off x="10424160" y="6446520"/>
+            <a:ext cx="1463040" cy="320040"/>
           </a:xfrm>
           <a:prstGeom prst="rect">
             <a:avLst/>
@@ -4633,7 +4871,7 @@
             <a:avLst/>
           </a:prstGeom>
           <a:solidFill>
-            <a:srgbClr val="F8FAF9"/>
+            <a:srgbClr val="F1F5F4"/>
           </a:solidFill>
           <a:ln>
             <a:noFill/>
@@ -4670,7 +4908,7 @@
         <p:spPr>
           <a:xfrm>
             <a:off x="0" y="0"/>
-            <a:ext cx="12191695" cy="1051560"/>
+            <a:ext cx="12191695" cy="960120"/>
           </a:xfrm>
           <a:prstGeom prst="rect">
             <a:avLst/>
@@ -4712,8 +4950,8 @@
         </p:nvSpPr>
         <p:spPr>
           <a:xfrm>
-            <a:off x="0" y="1051560"/>
-            <a:ext cx="12191695" cy="73152"/>
+            <a:off x="0" y="960120"/>
+            <a:ext cx="12191695" cy="64008"/>
           </a:xfrm>
           <a:prstGeom prst="rect">
             <a:avLst/>
@@ -4755,8 +4993,8 @@
         </p:nvSpPr>
         <p:spPr>
           <a:xfrm>
-            <a:off x="457200" y="274320"/>
-            <a:ext cx="11247120" cy="640080"/>
+            <a:off x="411480" y="256032"/>
+            <a:ext cx="11338560" cy="548640"/>
           </a:xfrm>
           <a:prstGeom prst="rect">
             <a:avLst/>
@@ -4770,27 +5008,51 @@
           <a:lstStyle/>
           <a:p>
             <a:r>
-              <a:rPr sz="2800" b="1">
+              <a:rPr sz="2600" b="1">
                 <a:solidFill>
                   <a:srgbClr val="FFFFFF"/>
                 </a:solidFill>
                 <a:latin typeface="Calibri"/>
               </a:rPr>
-              <a:t>Monitoring : interfaces web</a:t>
-            </a:r>
-          </a:p>
-        </p:txBody>
-      </p:sp>
-      <p:sp>
-        <p:nvSpPr>
-          <p:cNvPr id="6" name="TextBox 5"/>
+              <a:t>Monitoring — interfaces web</a:t>
+            </a:r>
+          </a:p>
+        </p:txBody>
+      </p:sp>
+      <p:pic>
+        <p:nvPicPr>
+          <p:cNvPr id="6" name="Picture 5" descr="screenshot-namenode.png"/>
+          <p:cNvPicPr>
+            <a:picLocks noChangeAspect="1"/>
+          </p:cNvPicPr>
+          <p:nvPr/>
+        </p:nvPicPr>
+        <p:blipFill>
+          <a:blip r:embed="rId2"/>
+          <a:stretch>
+            <a:fillRect/>
+          </a:stretch>
+        </p:blipFill>
+        <p:spPr>
+          <a:xfrm>
+            <a:off x="320040" y="1188720"/>
+            <a:ext cx="5669280" cy="4049486"/>
+          </a:xfrm>
+          <a:prstGeom prst="rect">
+            <a:avLst/>
+          </a:prstGeom>
+        </p:spPr>
+      </p:pic>
+      <p:sp>
+        <p:nvSpPr>
+          <p:cNvPr id="7" name="TextBox 6"/>
           <p:cNvSpPr txBox="1"/>
           <p:nvPr/>
         </p:nvSpPr>
         <p:spPr>
           <a:xfrm>
-            <a:off x="457200" y="1371600"/>
-            <a:ext cx="11247120" cy="4754880"/>
+            <a:off x="320040" y="4160520"/>
+            <a:ext cx="5669280" cy="274320"/>
           </a:xfrm>
           <a:prstGeom prst="rect">
             <a:avLst/>
@@ -4803,106 +5065,371 @@
           </a:bodyPr>
           <a:lstStyle/>
           <a:p>
-            <a:pPr>
+            <a:pPr algn="l">
               <a:spcAft>
-                <a:spcPts val="1000"/>
+                <a:spcPts val="600"/>
               </a:spcAft>
             </a:pPr>
             <a:r>
-              <a:rPr sz="2000" b="1">
-                <a:solidFill>
-                  <a:srgbClr val="0F5C4C"/>
-                </a:solidFill>
-                <a:latin typeface="Calibri"/>
-              </a:rPr>
-              <a:t>NameNode UI — localhost:9870</a:t>
-            </a:r>
-          </a:p>
-          <a:p>
-            <a:pPr>
+              <a:rPr sz="1100" b="0">
+                <a:solidFill>
+                  <a:srgbClr val="64748B"/>
+                </a:solidFill>
+                <a:latin typeface="Calibri"/>
+              </a:rPr>
+              <a:t>NameNode — localhost:9870</a:t>
+            </a:r>
+          </a:p>
+        </p:txBody>
+      </p:sp>
+      <p:pic>
+        <p:nvPicPr>
+          <p:cNvPr id="8" name="Picture 7" descr="screenshot-datanodes.png"/>
+          <p:cNvPicPr>
+            <a:picLocks noChangeAspect="1"/>
+          </p:cNvPicPr>
+          <p:nvPr/>
+        </p:nvPicPr>
+        <p:blipFill>
+          <a:blip r:embed="rId3"/>
+          <a:stretch>
+            <a:fillRect/>
+          </a:stretch>
+        </p:blipFill>
+        <p:spPr>
+          <a:xfrm>
+            <a:off x="6217920" y="1188720"/>
+            <a:ext cx="5577840" cy="3984171"/>
+          </a:xfrm>
+          <a:prstGeom prst="rect">
+            <a:avLst/>
+          </a:prstGeom>
+        </p:spPr>
+      </p:pic>
+      <p:sp>
+        <p:nvSpPr>
+          <p:cNvPr id="9" name="TextBox 8"/>
+          <p:cNvSpPr txBox="1"/>
+          <p:nvPr/>
+        </p:nvSpPr>
+        <p:spPr>
+          <a:xfrm>
+            <a:off x="6217920" y="4160520"/>
+            <a:ext cx="5577840" cy="274320"/>
+          </a:xfrm>
+          <a:prstGeom prst="rect">
+            <a:avLst/>
+          </a:prstGeom>
+          <a:noFill/>
+        </p:spPr>
+        <p:txBody>
+          <a:bodyPr wrap="square">
+            <a:spAutoFit/>
+          </a:bodyPr>
+          <a:lstStyle/>
+          <a:p>
+            <a:pPr algn="l">
               <a:spcAft>
-                <a:spcPts val="1000"/>
+                <a:spcPts val="600"/>
               </a:spcAft>
             </a:pPr>
             <a:r>
-              <a:rPr sz="2000" b="0">
-                <a:solidFill>
-                  <a:srgbClr val="1E293B"/>
-                </a:solidFill>
-                <a:latin typeface="Calibri"/>
-              </a:rPr>
-              <a:t>5 DataNodes actifs, pas de missing block</a:t>
-            </a:r>
-          </a:p>
-          <a:p>
-            <a:pPr>
+              <a:rPr sz="1100" b="0">
+                <a:solidFill>
+                  <a:srgbClr val="64748B"/>
+                </a:solidFill>
+                <a:latin typeface="Calibri"/>
+              </a:rPr>
+              <a:t>DataNodes — 5 Live</a:t>
+            </a:r>
+          </a:p>
+        </p:txBody>
+      </p:sp>
+      <p:sp>
+        <p:nvSpPr>
+          <p:cNvPr id="10" name="Rounded Rectangle 9"/>
+          <p:cNvSpPr/>
+          <p:nvPr/>
+        </p:nvSpPr>
+        <p:spPr>
+          <a:xfrm>
+            <a:off x="320040" y="4572000"/>
+            <a:ext cx="3200400" cy="384048"/>
+          </a:xfrm>
+          <a:prstGeom prst="roundRect">
+            <a:avLst>
+              <a:gd name="adj" fmla="val 8000"/>
+            </a:avLst>
+          </a:prstGeom>
+          <a:solidFill>
+            <a:srgbClr val="147A66"/>
+          </a:solidFill>
+          <a:ln>
+            <a:noFill/>
+          </a:ln>
+        </p:spPr>
+        <p:style>
+          <a:lnRef idx="1">
+            <a:schemeClr val="accent1"/>
+          </a:lnRef>
+          <a:fillRef idx="3">
+            <a:schemeClr val="accent1"/>
+          </a:fillRef>
+          <a:effectRef idx="2">
+            <a:schemeClr val="accent1"/>
+          </a:effectRef>
+          <a:fontRef idx="minor">
+            <a:schemeClr val="lt1"/>
+          </a:fontRef>
+        </p:style>
+        <p:txBody>
+          <a:bodyPr rtlCol="0" anchor="ctr"/>
+          <a:lstStyle/>
+          <a:p>
+            <a:pPr algn="ctr"/>
+          </a:p>
+        </p:txBody>
+      </p:sp>
+      <p:sp>
+        <p:nvSpPr>
+          <p:cNvPr id="11" name="TextBox 10"/>
+          <p:cNvSpPr txBox="1"/>
+          <p:nvPr/>
+        </p:nvSpPr>
+        <p:spPr>
+          <a:xfrm>
+            <a:off x="320040" y="4617720"/>
+            <a:ext cx="3200400" cy="320040"/>
+          </a:xfrm>
+          <a:prstGeom prst="rect">
+            <a:avLst/>
+          </a:prstGeom>
+          <a:noFill/>
+        </p:spPr>
+        <p:txBody>
+          <a:bodyPr wrap="none">
+            <a:spAutoFit/>
+          </a:bodyPr>
+          <a:lstStyle/>
+          <a:p>
+            <a:pPr algn="ctr"/>
+            <a:r>
+              <a:rPr sz="1200" b="1">
+                <a:solidFill>
+                  <a:srgbClr val="FFFFFF"/>
+                </a:solidFill>
+                <a:latin typeface="Calibri"/>
+                <a:hlinkClick r:id="rId4"/>
+              </a:rPr>
+              <a:t>Ouvrir NameNode →</a:t>
+            </a:r>
+          </a:p>
+        </p:txBody>
+      </p:sp>
+      <p:sp>
+        <p:nvSpPr>
+          <p:cNvPr id="12" name="Rounded Rectangle 11"/>
+          <p:cNvSpPr/>
+          <p:nvPr/>
+        </p:nvSpPr>
+        <p:spPr>
+          <a:xfrm>
+            <a:off x="3657600" y="4572000"/>
+            <a:ext cx="3200400" cy="384048"/>
+          </a:xfrm>
+          <a:prstGeom prst="roundRect">
+            <a:avLst>
+              <a:gd name="adj" fmla="val 8000"/>
+            </a:avLst>
+          </a:prstGeom>
+          <a:solidFill>
+            <a:srgbClr val="1D4E89"/>
+          </a:solidFill>
+          <a:ln>
+            <a:noFill/>
+          </a:ln>
+        </p:spPr>
+        <p:style>
+          <a:lnRef idx="1">
+            <a:schemeClr val="accent1"/>
+          </a:lnRef>
+          <a:fillRef idx="3">
+            <a:schemeClr val="accent1"/>
+          </a:fillRef>
+          <a:effectRef idx="2">
+            <a:schemeClr val="accent1"/>
+          </a:effectRef>
+          <a:fontRef idx="minor">
+            <a:schemeClr val="lt1"/>
+          </a:fontRef>
+        </p:style>
+        <p:txBody>
+          <a:bodyPr rtlCol="0" anchor="ctr"/>
+          <a:lstStyle/>
+          <a:p>
+            <a:pPr algn="ctr"/>
+          </a:p>
+        </p:txBody>
+      </p:sp>
+      <p:sp>
+        <p:nvSpPr>
+          <p:cNvPr id="13" name="TextBox 12"/>
+          <p:cNvSpPr txBox="1"/>
+          <p:nvPr/>
+        </p:nvSpPr>
+        <p:spPr>
+          <a:xfrm>
+            <a:off x="3657600" y="4617720"/>
+            <a:ext cx="3200400" cy="320040"/>
+          </a:xfrm>
+          <a:prstGeom prst="rect">
+            <a:avLst/>
+          </a:prstGeom>
+          <a:noFill/>
+        </p:spPr>
+        <p:txBody>
+          <a:bodyPr wrap="none">
+            <a:spAutoFit/>
+          </a:bodyPr>
+          <a:lstStyle/>
+          <a:p>
+            <a:pPr algn="ctr"/>
+            <a:r>
+              <a:rPr sz="1200" b="1">
+                <a:solidFill>
+                  <a:srgbClr val="FFFFFF"/>
+                </a:solidFill>
+                <a:latin typeface="Calibri"/>
+                <a:hlinkClick r:id="rId5"/>
+              </a:rPr>
+              <a:t>Liste DataNodes →</a:t>
+            </a:r>
+          </a:p>
+        </p:txBody>
+      </p:sp>
+      <p:sp>
+        <p:nvSpPr>
+          <p:cNvPr id="14" name="Rounded Rectangle 13"/>
+          <p:cNvSpPr/>
+          <p:nvPr/>
+        </p:nvSpPr>
+        <p:spPr>
+          <a:xfrm>
+            <a:off x="7040880" y="4572000"/>
+            <a:ext cx="3200400" cy="384048"/>
+          </a:xfrm>
+          <a:prstGeom prst="roundRect">
+            <a:avLst>
+              <a:gd name="adj" fmla="val 8000"/>
+            </a:avLst>
+          </a:prstGeom>
+          <a:solidFill>
+            <a:srgbClr val="EA580C"/>
+          </a:solidFill>
+          <a:ln>
+            <a:noFill/>
+          </a:ln>
+        </p:spPr>
+        <p:style>
+          <a:lnRef idx="1">
+            <a:schemeClr val="accent1"/>
+          </a:lnRef>
+          <a:fillRef idx="3">
+            <a:schemeClr val="accent1"/>
+          </a:fillRef>
+          <a:effectRef idx="2">
+            <a:schemeClr val="accent1"/>
+          </a:effectRef>
+          <a:fontRef idx="minor">
+            <a:schemeClr val="lt1"/>
+          </a:fontRef>
+        </p:style>
+        <p:txBody>
+          <a:bodyPr rtlCol="0" anchor="ctr"/>
+          <a:lstStyle/>
+          <a:p>
+            <a:pPr algn="ctr"/>
+          </a:p>
+        </p:txBody>
+      </p:sp>
+      <p:sp>
+        <p:nvSpPr>
+          <p:cNvPr id="15" name="TextBox 14"/>
+          <p:cNvSpPr txBox="1"/>
+          <p:nvPr/>
+        </p:nvSpPr>
+        <p:spPr>
+          <a:xfrm>
+            <a:off x="7040880" y="4617720"/>
+            <a:ext cx="3200400" cy="320040"/>
+          </a:xfrm>
+          <a:prstGeom prst="rect">
+            <a:avLst/>
+          </a:prstGeom>
+          <a:noFill/>
+        </p:spPr>
+        <p:txBody>
+          <a:bodyPr wrap="none">
+            <a:spAutoFit/>
+          </a:bodyPr>
+          <a:lstStyle/>
+          <a:p>
+            <a:pPr algn="ctr"/>
+            <a:r>
+              <a:rPr sz="1200" b="1">
+                <a:solidFill>
+                  <a:srgbClr val="FFFFFF"/>
+                </a:solidFill>
+                <a:latin typeface="Calibri"/>
+                <a:hlinkClick r:id="rId6"/>
+              </a:rPr>
+              <a:t>Ouvrir YARN →</a:t>
+            </a:r>
+          </a:p>
+        </p:txBody>
+      </p:sp>
+      <p:sp>
+        <p:nvSpPr>
+          <p:cNvPr id="16" name="TextBox 15"/>
+          <p:cNvSpPr txBox="1"/>
+          <p:nvPr/>
+        </p:nvSpPr>
+        <p:spPr>
+          <a:xfrm>
+            <a:off x="365760" y="5120640"/>
+            <a:ext cx="11155680" cy="914400"/>
+          </a:xfrm>
+          <a:prstGeom prst="rect">
+            <a:avLst/>
+          </a:prstGeom>
+          <a:noFill/>
+        </p:spPr>
+        <p:txBody>
+          <a:bodyPr wrap="square">
+            <a:spAutoFit/>
+          </a:bodyPr>
+          <a:lstStyle/>
+          <a:p>
+            <a:pPr algn="l">
               <a:spcAft>
-                <a:spcPts val="1000"/>
+                <a:spcPts val="600"/>
               </a:spcAft>
             </a:pPr>
             <a:r>
-              <a:rPr sz="2000" b="1">
-                <a:solidFill>
-                  <a:srgbClr val="0F5C4C"/>
-                </a:solidFill>
-                <a:latin typeface="Calibri"/>
-              </a:rPr>
-              <a:t>YARN UI — localhost:8088</a:t>
-            </a:r>
-          </a:p>
-          <a:p>
-            <a:pPr>
-              <a:spcAft>
-                <a:spcPts val="1000"/>
-              </a:spcAft>
-            </a:pPr>
-            <a:r>
-              <a:rPr sz="2000" b="0">
+              <a:rPr sz="1400" b="0">
                 <a:solidFill>
                   <a:srgbClr val="1E293B"/>
                 </a:solidFill>
                 <a:latin typeface="Calibri"/>
               </a:rPr>
-              <a:t>Job pi en FINISHED / SUCCEEDED</a:t>
-            </a:r>
-          </a:p>
-          <a:p>
-            <a:pPr>
-              <a:spcAft>
-                <a:spcPts val="1000"/>
-              </a:spcAft>
-            </a:pPr>
-            <a:r>
-              <a:rPr sz="2000" b="0">
-                <a:solidFill>
-                  <a:srgbClr val="1E293B"/>
-                </a:solidFill>
-                <a:latin typeface="Calibri"/>
-              </a:rPr>
-              <a:t>Métriques : mémoire et vcores consommés</a:t>
-            </a:r>
-          </a:p>
-          <a:p>
-            <a:pPr>
-              <a:spcAft>
-                <a:spcPts val="1000"/>
-              </a:spcAft>
-            </a:pPr>
-            <a:r>
-              <a:rPr sz="2000" b="0">
-                <a:solidFill>
-                  <a:srgbClr val="1E293B"/>
-                </a:solidFill>
-                <a:latin typeface="Calibri"/>
-              </a:rPr>
-              <a:t>setrep : NameNode met à jour la cible de réplication</a:t>
-            </a:r>
-          </a:p>
-        </p:txBody>
-      </p:sp>
-      <p:sp>
-        <p:nvSpPr>
-          <p:cNvPr id="7" name="Rectangle 6"/>
+              <a:t>Pas de missing block  ·  setrep met à jour la cible de réplication sur le NameNode</a:t>
+            </a:r>
+          </a:p>
+        </p:txBody>
+      </p:sp>
+      <p:sp>
+        <p:nvSpPr>
+          <p:cNvPr id="17" name="Rectangle 16"/>
           <p:cNvSpPr/>
           <p:nvPr/>
         </p:nvSpPr>
@@ -4945,14 +5472,14 @@
       </p:sp>
       <p:sp>
         <p:nvSpPr>
-          <p:cNvPr id="8" name="TextBox 7"/>
+          <p:cNvPr id="18" name="TextBox 17"/>
           <p:cNvSpPr txBox="1"/>
           <p:nvPr/>
         </p:nvSpPr>
         <p:spPr>
           <a:xfrm>
-            <a:off x="365760" y="6446520"/>
-            <a:ext cx="9144000" cy="320040"/>
+            <a:off x="320040" y="6446520"/>
+            <a:ext cx="9326880" cy="320040"/>
           </a:xfrm>
           <a:prstGeom prst="rect">
             <a:avLst/>
@@ -4979,14 +5506,14 @@
       </p:sp>
       <p:sp>
         <p:nvSpPr>
-          <p:cNvPr id="9" name="TextBox 8"/>
+          <p:cNvPr id="19" name="TextBox 18"/>
           <p:cNvSpPr txBox="1"/>
           <p:nvPr/>
         </p:nvSpPr>
         <p:spPr>
           <a:xfrm>
-            <a:off x="10515600" y="6446520"/>
-            <a:ext cx="1371600" cy="320040"/>
+            <a:off x="10424160" y="6446520"/>
+            <a:ext cx="1463040" cy="320040"/>
           </a:xfrm>
           <a:prstGeom prst="rect">
             <a:avLst/>
@@ -5045,7 +5572,7 @@
             <a:avLst/>
           </a:prstGeom>
           <a:solidFill>
-            <a:srgbClr val="F8FAF9"/>
+            <a:srgbClr val="F1F5F4"/>
           </a:solidFill>
           <a:ln>
             <a:noFill/>
@@ -5082,7 +5609,7 @@
         <p:spPr>
           <a:xfrm>
             <a:off x="0" y="0"/>
-            <a:ext cx="12191695" cy="1051560"/>
+            <a:ext cx="12191695" cy="960120"/>
           </a:xfrm>
           <a:prstGeom prst="rect">
             <a:avLst/>
@@ -5124,8 +5651,8 @@
         </p:nvSpPr>
         <p:spPr>
           <a:xfrm>
-            <a:off x="0" y="1051560"/>
-            <a:ext cx="12191695" cy="73152"/>
+            <a:off x="0" y="960120"/>
+            <a:ext cx="12191695" cy="64008"/>
           </a:xfrm>
           <a:prstGeom prst="rect">
             <a:avLst/>
@@ -5167,8 +5694,8 @@
         </p:nvSpPr>
         <p:spPr>
           <a:xfrm>
-            <a:off x="457200" y="274320"/>
-            <a:ext cx="11247120" cy="640080"/>
+            <a:off x="411480" y="256032"/>
+            <a:ext cx="11338560" cy="548640"/>
           </a:xfrm>
           <a:prstGeom prst="rect">
             <a:avLst/>
@@ -5182,27 +5709,117 @@
           <a:lstStyle/>
           <a:p>
             <a:r>
-              <a:rPr sz="2800" b="1">
+              <a:rPr sz="2600" b="1">
                 <a:solidFill>
                   <a:srgbClr val="FFFFFF"/>
                 </a:solidFill>
                 <a:latin typeface="Calibri"/>
               </a:rPr>
-              <a:t>Problèmes rencontrés (et solutions)</a:t>
-            </a:r>
-          </a:p>
-        </p:txBody>
-      </p:sp>
-      <p:sp>
-        <p:nvSpPr>
-          <p:cNvPr id="6" name="TextBox 5"/>
+              <a:t>Problèmes rencontrés → solutions</a:t>
+            </a:r>
+          </a:p>
+        </p:txBody>
+      </p:sp>
+      <p:sp>
+        <p:nvSpPr>
+          <p:cNvPr id="6" name="Rounded Rectangle 5"/>
+          <p:cNvSpPr/>
+          <p:nvPr/>
+        </p:nvSpPr>
+        <p:spPr>
+          <a:xfrm>
+            <a:off x="411480" y="1234440"/>
+            <a:ext cx="11338560" cy="1417320"/>
+          </a:xfrm>
+          <a:prstGeom prst="roundRect">
+            <a:avLst>
+              <a:gd name="adj" fmla="val 8000"/>
+            </a:avLst>
+          </a:prstGeom>
+          <a:solidFill>
+            <a:srgbClr val="FFFFFF"/>
+          </a:solidFill>
+          <a:ln w="15875">
+            <a:solidFill>
+              <a:srgbClr val="C2410C"/>
+            </a:solidFill>
+          </a:ln>
+        </p:spPr>
+        <p:style>
+          <a:lnRef idx="1">
+            <a:schemeClr val="accent1"/>
+          </a:lnRef>
+          <a:fillRef idx="3">
+            <a:schemeClr val="accent1"/>
+          </a:fillRef>
+          <a:effectRef idx="2">
+            <a:schemeClr val="accent1"/>
+          </a:effectRef>
+          <a:fontRef idx="minor">
+            <a:schemeClr val="lt1"/>
+          </a:fontRef>
+        </p:style>
+        <p:txBody>
+          <a:bodyPr rtlCol="0" anchor="ctr"/>
+          <a:lstStyle/>
+          <a:p>
+            <a:pPr algn="ctr"/>
+          </a:p>
+        </p:txBody>
+      </p:sp>
+      <p:sp>
+        <p:nvSpPr>
+          <p:cNvPr id="7" name="Rectangle 6"/>
+          <p:cNvSpPr/>
+          <p:nvPr/>
+        </p:nvSpPr>
+        <p:spPr>
+          <a:xfrm>
+            <a:off x="411480" y="1234440"/>
+            <a:ext cx="164592" cy="1417320"/>
+          </a:xfrm>
+          <a:prstGeom prst="rect">
+            <a:avLst/>
+          </a:prstGeom>
+          <a:solidFill>
+            <a:srgbClr val="C2410C"/>
+          </a:solidFill>
+          <a:ln>
+            <a:noFill/>
+          </a:ln>
+        </p:spPr>
+        <p:style>
+          <a:lnRef idx="1">
+            <a:schemeClr val="accent1"/>
+          </a:lnRef>
+          <a:fillRef idx="3">
+            <a:schemeClr val="accent1"/>
+          </a:fillRef>
+          <a:effectRef idx="2">
+            <a:schemeClr val="accent1"/>
+          </a:effectRef>
+          <a:fontRef idx="minor">
+            <a:schemeClr val="lt1"/>
+          </a:fontRef>
+        </p:style>
+        <p:txBody>
+          <a:bodyPr rtlCol="0" anchor="ctr"/>
+          <a:lstStyle/>
+          <a:p>
+            <a:pPr algn="ctr"/>
+          </a:p>
+        </p:txBody>
+      </p:sp>
+      <p:sp>
+        <p:nvSpPr>
+          <p:cNvPr id="8" name="TextBox 7"/>
           <p:cNvSpPr txBox="1"/>
           <p:nvPr/>
         </p:nvSpPr>
         <p:spPr>
           <a:xfrm>
-            <a:off x="457200" y="1371600"/>
-            <a:ext cx="11247120" cy="4754880"/>
+            <a:off x="777240" y="1371600"/>
+            <a:ext cx="10698480" cy="1188720"/>
           </a:xfrm>
           <a:prstGeom prst="rect">
             <a:avLst/>
@@ -5215,106 +5832,380 @@
           </a:bodyPr>
           <a:lstStyle/>
           <a:p>
-            <a:pPr>
+            <a:pPr algn="l">
               <a:spcAft>
-                <a:spcPts val="1000"/>
+                <a:spcPts val="400"/>
               </a:spcAft>
             </a:pPr>
             <a:r>
-              <a:rPr sz="2000" b="1">
+              <a:rPr sz="1700" b="1">
                 <a:solidFill>
                   <a:srgbClr val="1E293B"/>
                 </a:solidFill>
                 <a:latin typeface="Calibri"/>
               </a:rPr>
-              <a:t>1. pull access denied (image pas encore sur Hub)</a:t>
-            </a:r>
-          </a:p>
-          <a:p>
-            <a:pPr lvl="1">
+              <a:t>1. Pull access denied</a:t>
+            </a:r>
+          </a:p>
+          <a:p>
+            <a:pPr algn="l">
               <a:spcAft>
-                <a:spcPts val="1000"/>
+                <a:spcPts val="400"/>
               </a:spcAft>
             </a:pPr>
             <a:r>
-              <a:rPr sz="1800" b="0">
-                <a:solidFill>
-                  <a:srgbClr val="1E293B"/>
-                </a:solidFill>
-                <a:latin typeface="Calibri"/>
-              </a:rPr>
-              <a:t>→ pull_policy: never + build local</a:t>
-            </a:r>
-          </a:p>
-          <a:p>
-            <a:pPr>
+              <a:rPr sz="1400" b="0">
+                <a:solidFill>
+                  <a:srgbClr val="64748B"/>
+                </a:solidFill>
+                <a:latin typeface="Calibri"/>
+              </a:rPr>
+              <a:t>Cause : Image pas encore sur Hub</a:t>
+            </a:r>
+          </a:p>
+          <a:p>
+            <a:pPr algn="l">
               <a:spcAft>
-                <a:spcPts val="1000"/>
+                <a:spcPts val="600"/>
               </a:spcAft>
             </a:pPr>
             <a:r>
-              <a:rPr sz="2000" b="1">
-                <a:solidFill>
-                  <a:srgbClr val="1E293B"/>
-                </a:solidFill>
-                <a:latin typeface="Calibri"/>
-              </a:rPr>
-              <a:t>2. Tag avec majuscules refusé par Docker Hub</a:t>
-            </a:r>
-          </a:p>
-          <a:p>
-            <a:pPr lvl="1">
+              <a:rPr sz="1500" b="1">
+                <a:solidFill>
+                  <a:srgbClr val="0F5C4C"/>
+                </a:solidFill>
+                <a:latin typeface="Calibri"/>
+              </a:rPr>
+              <a:t>Solution : pull_policy: never + build local</a:t>
+            </a:r>
+          </a:p>
+        </p:txBody>
+      </p:sp>
+      <p:sp>
+        <p:nvSpPr>
+          <p:cNvPr id="9" name="Rounded Rectangle 8"/>
+          <p:cNvSpPr/>
+          <p:nvPr/>
+        </p:nvSpPr>
+        <p:spPr>
+          <a:xfrm>
+            <a:off x="411480" y="2788920"/>
+            <a:ext cx="11338560" cy="1417320"/>
+          </a:xfrm>
+          <a:prstGeom prst="roundRect">
+            <a:avLst>
+              <a:gd name="adj" fmla="val 8000"/>
+            </a:avLst>
+          </a:prstGeom>
+          <a:solidFill>
+            <a:srgbClr val="FFFFFF"/>
+          </a:solidFill>
+          <a:ln w="15875">
+            <a:solidFill>
+              <a:srgbClr val="EA580C"/>
+            </a:solidFill>
+          </a:ln>
+        </p:spPr>
+        <p:style>
+          <a:lnRef idx="1">
+            <a:schemeClr val="accent1"/>
+          </a:lnRef>
+          <a:fillRef idx="3">
+            <a:schemeClr val="accent1"/>
+          </a:fillRef>
+          <a:effectRef idx="2">
+            <a:schemeClr val="accent1"/>
+          </a:effectRef>
+          <a:fontRef idx="minor">
+            <a:schemeClr val="lt1"/>
+          </a:fontRef>
+        </p:style>
+        <p:txBody>
+          <a:bodyPr rtlCol="0" anchor="ctr"/>
+          <a:lstStyle/>
+          <a:p>
+            <a:pPr algn="ctr"/>
+          </a:p>
+        </p:txBody>
+      </p:sp>
+      <p:sp>
+        <p:nvSpPr>
+          <p:cNvPr id="10" name="Rectangle 9"/>
+          <p:cNvSpPr/>
+          <p:nvPr/>
+        </p:nvSpPr>
+        <p:spPr>
+          <a:xfrm>
+            <a:off x="411480" y="2788920"/>
+            <a:ext cx="164592" cy="1417320"/>
+          </a:xfrm>
+          <a:prstGeom prst="rect">
+            <a:avLst/>
+          </a:prstGeom>
+          <a:solidFill>
+            <a:srgbClr val="EA580C"/>
+          </a:solidFill>
+          <a:ln>
+            <a:noFill/>
+          </a:ln>
+        </p:spPr>
+        <p:style>
+          <a:lnRef idx="1">
+            <a:schemeClr val="accent1"/>
+          </a:lnRef>
+          <a:fillRef idx="3">
+            <a:schemeClr val="accent1"/>
+          </a:fillRef>
+          <a:effectRef idx="2">
+            <a:schemeClr val="accent1"/>
+          </a:effectRef>
+          <a:fontRef idx="minor">
+            <a:schemeClr val="lt1"/>
+          </a:fontRef>
+        </p:style>
+        <p:txBody>
+          <a:bodyPr rtlCol="0" anchor="ctr"/>
+          <a:lstStyle/>
+          <a:p>
+            <a:pPr algn="ctr"/>
+          </a:p>
+        </p:txBody>
+      </p:sp>
+      <p:sp>
+        <p:nvSpPr>
+          <p:cNvPr id="11" name="TextBox 10"/>
+          <p:cNvSpPr txBox="1"/>
+          <p:nvPr/>
+        </p:nvSpPr>
+        <p:spPr>
+          <a:xfrm>
+            <a:off x="777240" y="2926079"/>
+            <a:ext cx="10698480" cy="1188720"/>
+          </a:xfrm>
+          <a:prstGeom prst="rect">
+            <a:avLst/>
+          </a:prstGeom>
+          <a:noFill/>
+        </p:spPr>
+        <p:txBody>
+          <a:bodyPr wrap="square">
+            <a:spAutoFit/>
+          </a:bodyPr>
+          <a:lstStyle/>
+          <a:p>
+            <a:pPr algn="l">
               <a:spcAft>
-                <a:spcPts val="1000"/>
+                <a:spcPts val="400"/>
               </a:spcAft>
             </a:pPr>
             <a:r>
-              <a:rPr sz="1800" b="0">
+              <a:rPr sz="1700" b="1">
                 <a:solidFill>
                   <a:srgbClr val="1E293B"/>
                 </a:solidFill>
                 <a:latin typeface="Calibri"/>
               </a:rPr>
-              <a:t>→ leshadoopriders/hadoop-tp-g4:1.0 (minuscules)</a:t>
-            </a:r>
-          </a:p>
-          <a:p>
-            <a:pPr>
+              <a:t>2. Tag majuscules</a:t>
+            </a:r>
+          </a:p>
+          <a:p>
+            <a:pPr algn="l">
               <a:spcAft>
-                <a:spcPts val="1000"/>
+                <a:spcPts val="400"/>
               </a:spcAft>
             </a:pPr>
             <a:r>
-              <a:rPr sz="2000" b="1">
-                <a:solidFill>
-                  <a:srgbClr val="1E293B"/>
-                </a:solidFill>
-                <a:latin typeface="Calibri"/>
-              </a:rPr>
-              <a:t>3. Téléchargement Hadoop trop lent</a:t>
-            </a:r>
-          </a:p>
-          <a:p>
-            <a:pPr lvl="1">
+              <a:rPr sz="1400" b="0">
+                <a:solidFill>
+                  <a:srgbClr val="64748B"/>
+                </a:solidFill>
+                <a:latin typeface="Calibri"/>
+              </a:rPr>
+              <a:t>Cause : Docker Hub refuse G4</a:t>
+            </a:r>
+          </a:p>
+          <a:p>
+            <a:pPr algn="l">
               <a:spcAft>
-                <a:spcPts val="1000"/>
+                <a:spcPts val="600"/>
               </a:spcAft>
             </a:pPr>
             <a:r>
-              <a:rPr sz="1800" b="0">
+              <a:rPr sz="1500" b="1">
+                <a:solidFill>
+                  <a:srgbClr val="0F5C4C"/>
+                </a:solidFill>
+                <a:latin typeface="Calibri"/>
+              </a:rPr>
+              <a:t>Solution : leshadoopriders/hadoop-tp-g4:1.0</a:t>
+            </a:r>
+          </a:p>
+        </p:txBody>
+      </p:sp>
+      <p:sp>
+        <p:nvSpPr>
+          <p:cNvPr id="12" name="Rounded Rectangle 11"/>
+          <p:cNvSpPr/>
+          <p:nvPr/>
+        </p:nvSpPr>
+        <p:spPr>
+          <a:xfrm>
+            <a:off x="411480" y="4343400"/>
+            <a:ext cx="11338560" cy="1417320"/>
+          </a:xfrm>
+          <a:prstGeom prst="roundRect">
+            <a:avLst>
+              <a:gd name="adj" fmla="val 8000"/>
+            </a:avLst>
+          </a:prstGeom>
+          <a:solidFill>
+            <a:srgbClr val="FFFFFF"/>
+          </a:solidFill>
+          <a:ln w="15875">
+            <a:solidFill>
+              <a:srgbClr val="1D4E89"/>
+            </a:solidFill>
+          </a:ln>
+        </p:spPr>
+        <p:style>
+          <a:lnRef idx="1">
+            <a:schemeClr val="accent1"/>
+          </a:lnRef>
+          <a:fillRef idx="3">
+            <a:schemeClr val="accent1"/>
+          </a:fillRef>
+          <a:effectRef idx="2">
+            <a:schemeClr val="accent1"/>
+          </a:effectRef>
+          <a:fontRef idx="minor">
+            <a:schemeClr val="lt1"/>
+          </a:fontRef>
+        </p:style>
+        <p:txBody>
+          <a:bodyPr rtlCol="0" anchor="ctr"/>
+          <a:lstStyle/>
+          <a:p>
+            <a:pPr algn="ctr"/>
+          </a:p>
+        </p:txBody>
+      </p:sp>
+      <p:sp>
+        <p:nvSpPr>
+          <p:cNvPr id="13" name="Rectangle 12"/>
+          <p:cNvSpPr/>
+          <p:nvPr/>
+        </p:nvSpPr>
+        <p:spPr>
+          <a:xfrm>
+            <a:off x="411480" y="4343400"/>
+            <a:ext cx="164592" cy="1417320"/>
+          </a:xfrm>
+          <a:prstGeom prst="rect">
+            <a:avLst/>
+          </a:prstGeom>
+          <a:solidFill>
+            <a:srgbClr val="1D4E89"/>
+          </a:solidFill>
+          <a:ln>
+            <a:noFill/>
+          </a:ln>
+        </p:spPr>
+        <p:style>
+          <a:lnRef idx="1">
+            <a:schemeClr val="accent1"/>
+          </a:lnRef>
+          <a:fillRef idx="3">
+            <a:schemeClr val="accent1"/>
+          </a:fillRef>
+          <a:effectRef idx="2">
+            <a:schemeClr val="accent1"/>
+          </a:effectRef>
+          <a:fontRef idx="minor">
+            <a:schemeClr val="lt1"/>
+          </a:fontRef>
+        </p:style>
+        <p:txBody>
+          <a:bodyPr rtlCol="0" anchor="ctr"/>
+          <a:lstStyle/>
+          <a:p>
+            <a:pPr algn="ctr"/>
+          </a:p>
+        </p:txBody>
+      </p:sp>
+      <p:sp>
+        <p:nvSpPr>
+          <p:cNvPr id="14" name="TextBox 13"/>
+          <p:cNvSpPr txBox="1"/>
+          <p:nvPr/>
+        </p:nvSpPr>
+        <p:spPr>
+          <a:xfrm>
+            <a:off x="777240" y="4480560"/>
+            <a:ext cx="10698480" cy="1188720"/>
+          </a:xfrm>
+          <a:prstGeom prst="rect">
+            <a:avLst/>
+          </a:prstGeom>
+          <a:noFill/>
+        </p:spPr>
+        <p:txBody>
+          <a:bodyPr wrap="square">
+            <a:spAutoFit/>
+          </a:bodyPr>
+          <a:lstStyle/>
+          <a:p>
+            <a:pPr algn="l">
+              <a:spcAft>
+                <a:spcPts val="400"/>
+              </a:spcAft>
+            </a:pPr>
+            <a:r>
+              <a:rPr sz="1700" b="1">
                 <a:solidFill>
                   <a:srgbClr val="1E293B"/>
                 </a:solidFill>
                 <a:latin typeface="Calibri"/>
               </a:rPr>
-              <a:t>→ image de base apache/hadoop:3.3.6 + notre config</a:t>
-            </a:r>
-          </a:p>
-        </p:txBody>
-      </p:sp>
-      <p:sp>
-        <p:nvSpPr>
-          <p:cNvPr id="7" name="Rectangle 6"/>
+              <a:t>3. Download trop lent</a:t>
+            </a:r>
+          </a:p>
+          <a:p>
+            <a:pPr algn="l">
+              <a:spcAft>
+                <a:spcPts val="400"/>
+              </a:spcAft>
+            </a:pPr>
+            <a:r>
+              <a:rPr sz="1400" b="0">
+                <a:solidFill>
+                  <a:srgbClr val="64748B"/>
+                </a:solidFill>
+                <a:latin typeface="Calibri"/>
+              </a:rPr>
+              <a:t>Cause : archive.apache.org bloqué</a:t>
+            </a:r>
+          </a:p>
+          <a:p>
+            <a:pPr algn="l">
+              <a:spcAft>
+                <a:spcPts val="600"/>
+              </a:spcAft>
+            </a:pPr>
+            <a:r>
+              <a:rPr sz="1500" b="1">
+                <a:solidFill>
+                  <a:srgbClr val="0F5C4C"/>
+                </a:solidFill>
+                <a:latin typeface="Calibri"/>
+              </a:rPr>
+              <a:t>Solution : Base apache/hadoop:3.3.6</a:t>
+            </a:r>
+          </a:p>
+        </p:txBody>
+      </p:sp>
+      <p:sp>
+        <p:nvSpPr>
+          <p:cNvPr id="15" name="Rectangle 14"/>
           <p:cNvSpPr/>
           <p:nvPr/>
         </p:nvSpPr>
@@ -5357,14 +6248,14 @@
       </p:sp>
       <p:sp>
         <p:nvSpPr>
-          <p:cNvPr id="8" name="TextBox 7"/>
+          <p:cNvPr id="16" name="TextBox 15"/>
           <p:cNvSpPr txBox="1"/>
           <p:nvPr/>
         </p:nvSpPr>
         <p:spPr>
           <a:xfrm>
-            <a:off x="365760" y="6446520"/>
-            <a:ext cx="9144000" cy="320040"/>
+            <a:off x="320040" y="6446520"/>
+            <a:ext cx="9326880" cy="320040"/>
           </a:xfrm>
           <a:prstGeom prst="rect">
             <a:avLst/>
@@ -5391,14 +6282,14 @@
       </p:sp>
       <p:sp>
         <p:nvSpPr>
-          <p:cNvPr id="9" name="TextBox 8"/>
+          <p:cNvPr id="17" name="TextBox 16"/>
           <p:cNvSpPr txBox="1"/>
           <p:nvPr/>
         </p:nvSpPr>
         <p:spPr>
           <a:xfrm>
-            <a:off x="10515600" y="6446520"/>
-            <a:ext cx="1371600" cy="320040"/>
+            <a:off x="10424160" y="6446520"/>
+            <a:ext cx="1463040" cy="320040"/>
           </a:xfrm>
           <a:prstGeom prst="rect">
             <a:avLst/>
@@ -5457,7 +6348,7 @@
             <a:avLst/>
           </a:prstGeom>
           <a:solidFill>
-            <a:srgbClr val="F8FAF9"/>
+            <a:srgbClr val="F1F5F4"/>
           </a:solidFill>
           <a:ln>
             <a:noFill/>
@@ -5494,7 +6385,7 @@
         <p:spPr>
           <a:xfrm>
             <a:off x="0" y="0"/>
-            <a:ext cx="12191695" cy="1051560"/>
+            <a:ext cx="12191695" cy="960120"/>
           </a:xfrm>
           <a:prstGeom prst="rect">
             <a:avLst/>
@@ -5536,8 +6427,8 @@
         </p:nvSpPr>
         <p:spPr>
           <a:xfrm>
-            <a:off x="0" y="1051560"/>
-            <a:ext cx="12191695" cy="73152"/>
+            <a:off x="0" y="960120"/>
+            <a:ext cx="12191695" cy="64008"/>
           </a:xfrm>
           <a:prstGeom prst="rect">
             <a:avLst/>
@@ -5579,8 +6470,8 @@
         </p:nvSpPr>
         <p:spPr>
           <a:xfrm>
-            <a:off x="457200" y="274320"/>
-            <a:ext cx="11247120" cy="640080"/>
+            <a:off x="411480" y="256032"/>
+            <a:ext cx="11338560" cy="548640"/>
           </a:xfrm>
           <a:prstGeom prst="rect">
             <a:avLst/>
@@ -5594,27 +6485,74 @@
           <a:lstStyle/>
           <a:p>
             <a:r>
-              <a:rPr sz="2800" b="1">
+              <a:rPr sz="2600" b="1">
                 <a:solidFill>
                   <a:srgbClr val="FFFFFF"/>
                 </a:solidFill>
                 <a:latin typeface="Calibri"/>
               </a:rPr>
-              <a:t>Conclusion</a:t>
-            </a:r>
-          </a:p>
-        </p:txBody>
-      </p:sp>
-      <p:sp>
-        <p:nvSpPr>
-          <p:cNvPr id="6" name="TextBox 5"/>
+              <a:t>Conclusion — merci !</a:t>
+            </a:r>
+          </a:p>
+        </p:txBody>
+      </p:sp>
+      <p:sp>
+        <p:nvSpPr>
+          <p:cNvPr id="6" name="Rounded Rectangle 5"/>
+          <p:cNvSpPr/>
+          <p:nvPr/>
+        </p:nvSpPr>
+        <p:spPr>
+          <a:xfrm>
+            <a:off x="457200" y="1234440"/>
+            <a:ext cx="7132320" cy="658368"/>
+          </a:xfrm>
+          <a:prstGeom prst="roundRect">
+            <a:avLst>
+              <a:gd name="adj" fmla="val 8000"/>
+            </a:avLst>
+          </a:prstGeom>
+          <a:solidFill>
+            <a:srgbClr val="FFFFFF"/>
+          </a:solidFill>
+          <a:ln w="15875">
+            <a:solidFill>
+              <a:srgbClr val="147A66"/>
+            </a:solidFill>
+          </a:ln>
+        </p:spPr>
+        <p:style>
+          <a:lnRef idx="1">
+            <a:schemeClr val="accent1"/>
+          </a:lnRef>
+          <a:fillRef idx="3">
+            <a:schemeClr val="accent1"/>
+          </a:fillRef>
+          <a:effectRef idx="2">
+            <a:schemeClr val="accent1"/>
+          </a:effectRef>
+          <a:fontRef idx="minor">
+            <a:schemeClr val="lt1"/>
+          </a:fontRef>
+        </p:style>
+        <p:txBody>
+          <a:bodyPr rtlCol="0" anchor="ctr"/>
+          <a:lstStyle/>
+          <a:p>
+            <a:pPr algn="ctr"/>
+          </a:p>
+        </p:txBody>
+      </p:sp>
+      <p:sp>
+        <p:nvSpPr>
+          <p:cNvPr id="7" name="TextBox 6"/>
           <p:cNvSpPr txBox="1"/>
           <p:nvPr/>
         </p:nvSpPr>
         <p:spPr>
           <a:xfrm>
-            <a:off x="457200" y="1371600"/>
-            <a:ext cx="11247120" cy="4754880"/>
+            <a:off x="685800" y="1399032"/>
+            <a:ext cx="6766560" cy="457200"/>
           </a:xfrm>
           <a:prstGeom prst="rect">
             <a:avLst/>
@@ -5627,90 +6565,564 @@
           </a:bodyPr>
           <a:lstStyle/>
           <a:p>
-            <a:pPr>
+            <a:pPr algn="l">
               <a:spcAft>
-                <a:spcPts val="1000"/>
+                <a:spcPts val="600"/>
               </a:spcAft>
             </a:pPr>
             <a:r>
-              <a:rPr sz="2200" b="0">
+              <a:rPr sz="1600" b="1">
                 <a:solidFill>
                   <a:srgbClr val="1E293B"/>
                 </a:solidFill>
                 <a:latin typeface="Calibri"/>
               </a:rPr>
-              <a:t>Cluster opérationnel : 1 master + 5 DataNodes</a:t>
-            </a:r>
-          </a:p>
-          <a:p>
-            <a:pPr>
+              <a:t>✓  Cluster 1 master + 5 DataNodes opérationnel</a:t>
+            </a:r>
+          </a:p>
+        </p:txBody>
+      </p:sp>
+      <p:sp>
+        <p:nvSpPr>
+          <p:cNvPr id="8" name="Rounded Rectangle 7"/>
+          <p:cNvSpPr/>
+          <p:nvPr/>
+        </p:nvSpPr>
+        <p:spPr>
+          <a:xfrm>
+            <a:off x="457200" y="2011680"/>
+            <a:ext cx="7132320" cy="658368"/>
+          </a:xfrm>
+          <a:prstGeom prst="roundRect">
+            <a:avLst>
+              <a:gd name="adj" fmla="val 8000"/>
+            </a:avLst>
+          </a:prstGeom>
+          <a:solidFill>
+            <a:srgbClr val="FFFFFF"/>
+          </a:solidFill>
+          <a:ln w="15875">
+            <a:solidFill>
+              <a:srgbClr val="147A66"/>
+            </a:solidFill>
+          </a:ln>
+        </p:spPr>
+        <p:style>
+          <a:lnRef idx="1">
+            <a:schemeClr val="accent1"/>
+          </a:lnRef>
+          <a:fillRef idx="3">
+            <a:schemeClr val="accent1"/>
+          </a:fillRef>
+          <a:effectRef idx="2">
+            <a:schemeClr val="accent1"/>
+          </a:effectRef>
+          <a:fontRef idx="minor">
+            <a:schemeClr val="lt1"/>
+          </a:fontRef>
+        </p:style>
+        <p:txBody>
+          <a:bodyPr rtlCol="0" anchor="ctr"/>
+          <a:lstStyle/>
+          <a:p>
+            <a:pPr algn="ctr"/>
+          </a:p>
+        </p:txBody>
+      </p:sp>
+      <p:sp>
+        <p:nvSpPr>
+          <p:cNvPr id="9" name="TextBox 8"/>
+          <p:cNvSpPr txBox="1"/>
+          <p:nvPr/>
+        </p:nvSpPr>
+        <p:spPr>
+          <a:xfrm>
+            <a:off x="685800" y="2176272"/>
+            <a:ext cx="6766560" cy="457200"/>
+          </a:xfrm>
+          <a:prstGeom prst="rect">
+            <a:avLst/>
+          </a:prstGeom>
+          <a:noFill/>
+        </p:spPr>
+        <p:txBody>
+          <a:bodyPr wrap="square">
+            <a:spAutoFit/>
+          </a:bodyPr>
+          <a:lstStyle/>
+          <a:p>
+            <a:pPr algn="l">
               <a:spcAft>
-                <a:spcPts val="1000"/>
+                <a:spcPts val="600"/>
               </a:spcAft>
             </a:pPr>
             <a:r>
-              <a:rPr sz="2200" b="0">
+              <a:rPr sz="1600" b="1">
                 <a:solidFill>
                   <a:srgbClr val="1E293B"/>
                 </a:solidFill>
                 <a:latin typeface="Calibri"/>
               </a:rPr>
-              <a:t>HDFS manipulé (droits, fsck, merge, trash, setrep)</a:t>
-            </a:r>
-          </a:p>
-          <a:p>
-            <a:pPr>
+              <a:t>✓  HDFS : droits, fsck, merge, trash, setrep</a:t>
+            </a:r>
+          </a:p>
+        </p:txBody>
+      </p:sp>
+      <p:sp>
+        <p:nvSpPr>
+          <p:cNvPr id="10" name="Rounded Rectangle 9"/>
+          <p:cNvSpPr/>
+          <p:nvPr/>
+        </p:nvSpPr>
+        <p:spPr>
+          <a:xfrm>
+            <a:off x="457200" y="2788920"/>
+            <a:ext cx="7132320" cy="658368"/>
+          </a:xfrm>
+          <a:prstGeom prst="roundRect">
+            <a:avLst>
+              <a:gd name="adj" fmla="val 8000"/>
+            </a:avLst>
+          </a:prstGeom>
+          <a:solidFill>
+            <a:srgbClr val="FFFFFF"/>
+          </a:solidFill>
+          <a:ln w="15875">
+            <a:solidFill>
+              <a:srgbClr val="147A66"/>
+            </a:solidFill>
+          </a:ln>
+        </p:spPr>
+        <p:style>
+          <a:lnRef idx="1">
+            <a:schemeClr val="accent1"/>
+          </a:lnRef>
+          <a:fillRef idx="3">
+            <a:schemeClr val="accent1"/>
+          </a:fillRef>
+          <a:effectRef idx="2">
+            <a:schemeClr val="accent1"/>
+          </a:effectRef>
+          <a:fontRef idx="minor">
+            <a:schemeClr val="lt1"/>
+          </a:fontRef>
+        </p:style>
+        <p:txBody>
+          <a:bodyPr rtlCol="0" anchor="ctr"/>
+          <a:lstStyle/>
+          <a:p>
+            <a:pPr algn="ctr"/>
+          </a:p>
+        </p:txBody>
+      </p:sp>
+      <p:sp>
+        <p:nvSpPr>
+          <p:cNvPr id="11" name="TextBox 10"/>
+          <p:cNvSpPr txBox="1"/>
+          <p:nvPr/>
+        </p:nvSpPr>
+        <p:spPr>
+          <a:xfrm>
+            <a:off x="685800" y="2953512"/>
+            <a:ext cx="6766560" cy="457200"/>
+          </a:xfrm>
+          <a:prstGeom prst="rect">
+            <a:avLst/>
+          </a:prstGeom>
+          <a:noFill/>
+        </p:spPr>
+        <p:txBody>
+          <a:bodyPr wrap="square">
+            <a:spAutoFit/>
+          </a:bodyPr>
+          <a:lstStyle/>
+          <a:p>
+            <a:pPr algn="l">
               <a:spcAft>
-                <a:spcPts val="1000"/>
+                <a:spcPts val="600"/>
               </a:spcAft>
             </a:pPr>
             <a:r>
-              <a:rPr sz="2200" b="0">
+              <a:rPr sz="1600" b="1">
                 <a:solidFill>
                   <a:srgbClr val="1E293B"/>
                 </a:solidFill>
                 <a:latin typeface="Calibri"/>
               </a:rPr>
-              <a:t>Job MapReduce π terminé avec succès (SUCCEEDED)</a:t>
-            </a:r>
-          </a:p>
-          <a:p>
-            <a:pPr>
+              <a:t>✓  Job MapReduce π → SUCCEEDED (π ≈ 3.14)</a:t>
+            </a:r>
+          </a:p>
+        </p:txBody>
+      </p:sp>
+      <p:sp>
+        <p:nvSpPr>
+          <p:cNvPr id="12" name="Rounded Rectangle 11"/>
+          <p:cNvSpPr/>
+          <p:nvPr/>
+        </p:nvSpPr>
+        <p:spPr>
+          <a:xfrm>
+            <a:off x="457200" y="3566160"/>
+            <a:ext cx="7132320" cy="658368"/>
+          </a:xfrm>
+          <a:prstGeom prst="roundRect">
+            <a:avLst>
+              <a:gd name="adj" fmla="val 8000"/>
+            </a:avLst>
+          </a:prstGeom>
+          <a:solidFill>
+            <a:srgbClr val="FFFFFF"/>
+          </a:solidFill>
+          <a:ln w="15875">
+            <a:solidFill>
+              <a:srgbClr val="147A66"/>
+            </a:solidFill>
+          </a:ln>
+        </p:spPr>
+        <p:style>
+          <a:lnRef idx="1">
+            <a:schemeClr val="accent1"/>
+          </a:lnRef>
+          <a:fillRef idx="3">
+            <a:schemeClr val="accent1"/>
+          </a:fillRef>
+          <a:effectRef idx="2">
+            <a:schemeClr val="accent1"/>
+          </a:effectRef>
+          <a:fontRef idx="minor">
+            <a:schemeClr val="lt1"/>
+          </a:fontRef>
+        </p:style>
+        <p:txBody>
+          <a:bodyPr rtlCol="0" anchor="ctr"/>
+          <a:lstStyle/>
+          <a:p>
+            <a:pPr algn="ctr"/>
+          </a:p>
+        </p:txBody>
+      </p:sp>
+      <p:sp>
+        <p:nvSpPr>
+          <p:cNvPr id="13" name="TextBox 12"/>
+          <p:cNvSpPr txBox="1"/>
+          <p:nvPr/>
+        </p:nvSpPr>
+        <p:spPr>
+          <a:xfrm>
+            <a:off x="685800" y="3730752"/>
+            <a:ext cx="6766560" cy="457200"/>
+          </a:xfrm>
+          <a:prstGeom prst="rect">
+            <a:avLst/>
+          </a:prstGeom>
+          <a:noFill/>
+        </p:spPr>
+        <p:txBody>
+          <a:bodyPr wrap="square">
+            <a:spAutoFit/>
+          </a:bodyPr>
+          <a:lstStyle/>
+          <a:p>
+            <a:pPr algn="l">
               <a:spcAft>
-                <a:spcPts val="1000"/>
+                <a:spcPts val="600"/>
               </a:spcAft>
             </a:pPr>
             <a:r>
-              <a:rPr sz="2200" b="0">
+              <a:rPr sz="1600" b="1">
                 <a:solidFill>
                   <a:srgbClr val="1E293B"/>
                 </a:solidFill>
                 <a:latin typeface="Calibri"/>
               </a:rPr>
-              <a:t>Image publiée sur Docker Hub</a:t>
-            </a:r>
-          </a:p>
-          <a:p>
-            <a:pPr>
+              <a:t>✓  Image publique sur Docker Hub</a:t>
+            </a:r>
+          </a:p>
+        </p:txBody>
+      </p:sp>
+      <p:pic>
+        <p:nvPicPr>
+          <p:cNvPr id="14" name="Picture 13" descr="screenshot-yarn-app.png"/>
+          <p:cNvPicPr>
+            <a:picLocks noChangeAspect="1"/>
+          </p:cNvPicPr>
+          <p:nvPr/>
+        </p:nvPicPr>
+        <p:blipFill>
+          <a:blip r:embed="rId2"/>
+          <a:stretch>
+            <a:fillRect/>
+          </a:stretch>
+        </p:blipFill>
+        <p:spPr>
+          <a:xfrm>
+            <a:off x="7863840" y="1234440"/>
+            <a:ext cx="3931920" cy="2808514"/>
+          </a:xfrm>
+          <a:prstGeom prst="rect">
+            <a:avLst/>
+          </a:prstGeom>
+        </p:spPr>
+      </p:pic>
+      <p:sp>
+        <p:nvSpPr>
+          <p:cNvPr id="15" name="TextBox 14"/>
+          <p:cNvSpPr txBox="1"/>
+          <p:nvPr/>
+        </p:nvSpPr>
+        <p:spPr>
+          <a:xfrm>
+            <a:off x="7863840" y="3931920"/>
+            <a:ext cx="3931920" cy="274320"/>
+          </a:xfrm>
+          <a:prstGeom prst="rect">
+            <a:avLst/>
+          </a:prstGeom>
+          <a:noFill/>
+        </p:spPr>
+        <p:txBody>
+          <a:bodyPr wrap="square">
+            <a:spAutoFit/>
+          </a:bodyPr>
+          <a:lstStyle/>
+          <a:p>
+            <a:pPr algn="l">
               <a:spcAft>
-                <a:spcPts val="1000"/>
+                <a:spcPts val="600"/>
               </a:spcAft>
             </a:pPr>
             <a:r>
-              <a:rPr sz="2400" b="1">
+              <a:rPr sz="1100" b="0">
+                <a:solidFill>
+                  <a:srgbClr val="64748B"/>
+                </a:solidFill>
+                <a:latin typeface="Calibri"/>
+              </a:rPr>
+              <a:t>Preuve job SUCCEEDED</a:t>
+            </a:r>
+          </a:p>
+        </p:txBody>
+      </p:sp>
+      <p:sp>
+        <p:nvSpPr>
+          <p:cNvPr id="16" name="Rounded Rectangle 15"/>
+          <p:cNvSpPr/>
+          <p:nvPr/>
+        </p:nvSpPr>
+        <p:spPr>
+          <a:xfrm>
+            <a:off x="7863840" y="4297680"/>
+            <a:ext cx="3931920" cy="384048"/>
+          </a:xfrm>
+          <a:prstGeom prst="roundRect">
+            <a:avLst>
+              <a:gd name="adj" fmla="val 8000"/>
+            </a:avLst>
+          </a:prstGeom>
+          <a:solidFill>
+            <a:srgbClr val="147A66"/>
+          </a:solidFill>
+          <a:ln>
+            <a:noFill/>
+          </a:ln>
+        </p:spPr>
+        <p:style>
+          <a:lnRef idx="1">
+            <a:schemeClr val="accent1"/>
+          </a:lnRef>
+          <a:fillRef idx="3">
+            <a:schemeClr val="accent1"/>
+          </a:fillRef>
+          <a:effectRef idx="2">
+            <a:schemeClr val="accent1"/>
+          </a:effectRef>
+          <a:fontRef idx="minor">
+            <a:schemeClr val="lt1"/>
+          </a:fontRef>
+        </p:style>
+        <p:txBody>
+          <a:bodyPr rtlCol="0" anchor="ctr"/>
+          <a:lstStyle/>
+          <a:p>
+            <a:pPr algn="ctr"/>
+          </a:p>
+        </p:txBody>
+      </p:sp>
+      <p:sp>
+        <p:nvSpPr>
+          <p:cNvPr id="17" name="TextBox 16"/>
+          <p:cNvSpPr txBox="1"/>
+          <p:nvPr/>
+        </p:nvSpPr>
+        <p:spPr>
+          <a:xfrm>
+            <a:off x="7863840" y="4343400"/>
+            <a:ext cx="3931920" cy="320040"/>
+          </a:xfrm>
+          <a:prstGeom prst="rect">
+            <a:avLst/>
+          </a:prstGeom>
+          <a:noFill/>
+        </p:spPr>
+        <p:txBody>
+          <a:bodyPr wrap="none">
+            <a:spAutoFit/>
+          </a:bodyPr>
+          <a:lstStyle/>
+          <a:p>
+            <a:pPr algn="ctr"/>
+            <a:r>
+              <a:rPr sz="1200" b="1">
+                <a:solidFill>
+                  <a:srgbClr val="FFFFFF"/>
+                </a:solidFill>
+                <a:latin typeface="Calibri"/>
+                <a:hlinkClick r:id="rId3"/>
+              </a:rPr>
+              <a:t>Docker Hub →</a:t>
+            </a:r>
+          </a:p>
+        </p:txBody>
+      </p:sp>
+      <p:sp>
+        <p:nvSpPr>
+          <p:cNvPr id="18" name="Rounded Rectangle 17"/>
+          <p:cNvSpPr/>
+          <p:nvPr/>
+        </p:nvSpPr>
+        <p:spPr>
+          <a:xfrm>
+            <a:off x="7863840" y="4846320"/>
+            <a:ext cx="3931920" cy="384048"/>
+          </a:xfrm>
+          <a:prstGeom prst="roundRect">
+            <a:avLst>
+              <a:gd name="adj" fmla="val 8000"/>
+            </a:avLst>
+          </a:prstGeom>
+          <a:solidFill>
+            <a:srgbClr val="1D4E89"/>
+          </a:solidFill>
+          <a:ln>
+            <a:noFill/>
+          </a:ln>
+        </p:spPr>
+        <p:style>
+          <a:lnRef idx="1">
+            <a:schemeClr val="accent1"/>
+          </a:lnRef>
+          <a:fillRef idx="3">
+            <a:schemeClr val="accent1"/>
+          </a:fillRef>
+          <a:effectRef idx="2">
+            <a:schemeClr val="accent1"/>
+          </a:effectRef>
+          <a:fontRef idx="minor">
+            <a:schemeClr val="lt1"/>
+          </a:fontRef>
+        </p:style>
+        <p:txBody>
+          <a:bodyPr rtlCol="0" anchor="ctr"/>
+          <a:lstStyle/>
+          <a:p>
+            <a:pPr algn="ctr"/>
+          </a:p>
+        </p:txBody>
+      </p:sp>
+      <p:sp>
+        <p:nvSpPr>
+          <p:cNvPr id="19" name="TextBox 18"/>
+          <p:cNvSpPr txBox="1"/>
+          <p:nvPr/>
+        </p:nvSpPr>
+        <p:spPr>
+          <a:xfrm>
+            <a:off x="7863840" y="4892040"/>
+            <a:ext cx="3931920" cy="320040"/>
+          </a:xfrm>
+          <a:prstGeom prst="rect">
+            <a:avLst/>
+          </a:prstGeom>
+          <a:noFill/>
+        </p:spPr>
+        <p:txBody>
+          <a:bodyPr wrap="none">
+            <a:spAutoFit/>
+          </a:bodyPr>
+          <a:lstStyle/>
+          <a:p>
+            <a:pPr algn="ctr"/>
+            <a:r>
+              <a:rPr sz="1200" b="1">
+                <a:solidFill>
+                  <a:srgbClr val="FFFFFF"/>
+                </a:solidFill>
+                <a:latin typeface="Calibri"/>
+                <a:hlinkClick r:id="rId4"/>
+              </a:rPr>
+              <a:t>GitHub du projet →</a:t>
+            </a:r>
+          </a:p>
+        </p:txBody>
+      </p:sp>
+      <p:sp>
+        <p:nvSpPr>
+          <p:cNvPr id="20" name="TextBox 19"/>
+          <p:cNvSpPr txBox="1"/>
+          <p:nvPr/>
+        </p:nvSpPr>
+        <p:spPr>
+          <a:xfrm>
+            <a:off x="457200" y="4572000"/>
+            <a:ext cx="7132320" cy="1280160"/>
+          </a:xfrm>
+          <a:prstGeom prst="rect">
+            <a:avLst/>
+          </a:prstGeom>
+          <a:noFill/>
+        </p:spPr>
+        <p:txBody>
+          <a:bodyPr wrap="square">
+            <a:spAutoFit/>
+          </a:bodyPr>
+          <a:lstStyle/>
+          <a:p>
+            <a:pPr algn="l">
+              <a:spcAft>
+                <a:spcPts val="600"/>
+              </a:spcAft>
+            </a:pPr>
+            <a:r>
+              <a:rPr sz="2800" b="1">
                 <a:solidFill>
                   <a:srgbClr val="0F5C4C"/>
                 </a:solidFill>
                 <a:latin typeface="Calibri"/>
               </a:rPr>
-              <a:t>Merci — questions ?</a:t>
-            </a:r>
-          </a:p>
-        </p:txBody>
-      </p:sp>
-      <p:sp>
-        <p:nvSpPr>
-          <p:cNvPr id="7" name="Rectangle 6"/>
+              <a:t>Questions ?</a:t>
+            </a:r>
+          </a:p>
+          <a:p>
+            <a:pPr algn="l">
+              <a:spcAft>
+                <a:spcPts val="600"/>
+              </a:spcAft>
+            </a:pPr>
+            <a:r>
+              <a:rPr sz="1300" b="0">
+                <a:solidFill>
+                  <a:srgbClr val="64748B"/>
+                </a:solidFill>
+                <a:latin typeface="Calibri"/>
+              </a:rPr>
+              <a:t>Komla · Kassoum · Joel · Forbes · Frank · Wren</a:t>
+            </a:r>
+          </a:p>
+        </p:txBody>
+      </p:sp>
+      <p:sp>
+        <p:nvSpPr>
+          <p:cNvPr id="21" name="Rectangle 20"/>
           <p:cNvSpPr/>
           <p:nvPr/>
         </p:nvSpPr>
@@ -5753,14 +7165,14 @@
       </p:sp>
       <p:sp>
         <p:nvSpPr>
-          <p:cNvPr id="8" name="TextBox 7"/>
+          <p:cNvPr id="22" name="TextBox 21"/>
           <p:cNvSpPr txBox="1"/>
           <p:nvPr/>
         </p:nvSpPr>
         <p:spPr>
           <a:xfrm>
-            <a:off x="365760" y="6446520"/>
-            <a:ext cx="9144000" cy="320040"/>
+            <a:off x="320040" y="6446520"/>
+            <a:ext cx="9326880" cy="320040"/>
           </a:xfrm>
           <a:prstGeom prst="rect">
             <a:avLst/>
@@ -5787,14 +7199,14 @@
       </p:sp>
       <p:sp>
         <p:nvSpPr>
-          <p:cNvPr id="9" name="TextBox 8"/>
+          <p:cNvPr id="23" name="TextBox 22"/>
           <p:cNvSpPr txBox="1"/>
           <p:nvPr/>
         </p:nvSpPr>
         <p:spPr>
           <a:xfrm>
-            <a:off x="10515600" y="6446520"/>
-            <a:ext cx="1371600" cy="320040"/>
+            <a:off x="10424160" y="6446520"/>
+            <a:ext cx="1463040" cy="320040"/>
           </a:xfrm>
           <a:prstGeom prst="rect">
             <a:avLst/>
@@ -5853,7 +7265,7 @@
             <a:avLst/>
           </a:prstGeom>
           <a:solidFill>
-            <a:srgbClr val="F8FAF9"/>
+            <a:srgbClr val="F1F5F4"/>
           </a:solidFill>
           <a:ln>
             <a:noFill/>
@@ -5890,7 +7302,7 @@
         <p:spPr>
           <a:xfrm>
             <a:off x="0" y="0"/>
-            <a:ext cx="12191695" cy="1051560"/>
+            <a:ext cx="12191695" cy="960120"/>
           </a:xfrm>
           <a:prstGeom prst="rect">
             <a:avLst/>
@@ -5932,8 +7344,8 @@
         </p:nvSpPr>
         <p:spPr>
           <a:xfrm>
-            <a:off x="0" y="1051560"/>
-            <a:ext cx="12191695" cy="73152"/>
+            <a:off x="0" y="960120"/>
+            <a:ext cx="12191695" cy="64008"/>
           </a:xfrm>
           <a:prstGeom prst="rect">
             <a:avLst/>
@@ -5975,8 +7387,8 @@
         </p:nvSpPr>
         <p:spPr>
           <a:xfrm>
-            <a:off x="457200" y="274320"/>
-            <a:ext cx="11247120" cy="640080"/>
+            <a:off x="411480" y="256032"/>
+            <a:ext cx="11338560" cy="548640"/>
           </a:xfrm>
           <a:prstGeom prst="rect">
             <a:avLst/>
@@ -5990,7 +7402,7 @@
           <a:lstStyle/>
           <a:p>
             <a:r>
-              <a:rPr sz="2800" b="1">
+              <a:rPr sz="2600" b="1">
                 <a:solidFill>
                   <a:srgbClr val="FFFFFF"/>
                 </a:solidFill>
@@ -6003,14 +7415,61 @@
       </p:sp>
       <p:sp>
         <p:nvSpPr>
-          <p:cNvPr id="6" name="TextBox 5"/>
+          <p:cNvPr id="6" name="Rounded Rectangle 5"/>
+          <p:cNvSpPr/>
+          <p:nvPr/>
+        </p:nvSpPr>
+        <p:spPr>
+          <a:xfrm>
+            <a:off x="411480" y="1325880"/>
+            <a:ext cx="2743200" cy="1920240"/>
+          </a:xfrm>
+          <a:prstGeom prst="roundRect">
+            <a:avLst>
+              <a:gd name="adj" fmla="val 8000"/>
+            </a:avLst>
+          </a:prstGeom>
+          <a:solidFill>
+            <a:srgbClr val="FFFFFF"/>
+          </a:solidFill>
+          <a:ln w="15875">
+            <a:solidFill>
+              <a:srgbClr val="147A66"/>
+            </a:solidFill>
+          </a:ln>
+        </p:spPr>
+        <p:style>
+          <a:lnRef idx="1">
+            <a:schemeClr val="accent1"/>
+          </a:lnRef>
+          <a:fillRef idx="3">
+            <a:schemeClr val="accent1"/>
+          </a:fillRef>
+          <a:effectRef idx="2">
+            <a:schemeClr val="accent1"/>
+          </a:effectRef>
+          <a:fontRef idx="minor">
+            <a:schemeClr val="lt1"/>
+          </a:fontRef>
+        </p:style>
+        <p:txBody>
+          <a:bodyPr rtlCol="0" anchor="ctr"/>
+          <a:lstStyle/>
+          <a:p>
+            <a:pPr algn="ctr"/>
+          </a:p>
+        </p:txBody>
+      </p:sp>
+      <p:sp>
+        <p:nvSpPr>
+          <p:cNvPr id="7" name="TextBox 6"/>
           <p:cNvSpPr txBox="1"/>
           <p:nvPr/>
         </p:nvSpPr>
         <p:spPr>
           <a:xfrm>
-            <a:off x="457200" y="1371600"/>
-            <a:ext cx="11247120" cy="4754880"/>
+            <a:off x="548640" y="1554480"/>
+            <a:ext cx="2468880" cy="1554480"/>
           </a:xfrm>
           <a:prstGeom prst="rect">
             <a:avLst/>
@@ -6023,138 +7482,884 @@
           </a:bodyPr>
           <a:lstStyle/>
           <a:p>
-            <a:pPr>
+            <a:pPr algn="l">
               <a:spcAft>
-                <a:spcPts val="1000"/>
+                <a:spcPts val="600"/>
               </a:spcAft>
             </a:pPr>
             <a:r>
               <a:rPr sz="2200" b="1">
                 <a:solidFill>
-                  <a:srgbClr val="1E293B"/>
-                </a:solidFill>
-                <a:latin typeface="Calibri"/>
-              </a:rPr>
-              <a:t>1. Cas d’usage Big Data (e-commerce) et les 3V</a:t>
-            </a:r>
-          </a:p>
-          <a:p>
-            <a:pPr>
+                  <a:srgbClr val="0F5C4C"/>
+                </a:solidFill>
+                <a:latin typeface="Calibri"/>
+              </a:rPr>
+              <a:t>01</a:t>
+            </a:r>
+          </a:p>
+          <a:p>
+            <a:pPr algn="l">
               <a:spcAft>
-                <a:spcPts val="1000"/>
+                <a:spcPts val="800"/>
               </a:spcAft>
             </a:pPr>
             <a:r>
-              <a:rPr sz="2200" b="0">
+              <a:rPr sz="1600" b="1">
                 <a:solidFill>
                   <a:srgbClr val="1E293B"/>
                 </a:solidFill>
                 <a:latin typeface="Calibri"/>
               </a:rPr>
-              <a:t>2. HDFS vs système de fichiers classique</a:t>
-            </a:r>
-          </a:p>
-          <a:p>
-            <a:pPr>
+              <a:t>E-commerce &amp; 3V</a:t>
+            </a:r>
+          </a:p>
+          <a:p>
+            <a:pPr algn="l">
               <a:spcAft>
-                <a:spcPts val="1000"/>
+                <a:spcPts val="600"/>
               </a:spcAft>
             </a:pPr>
             <a:r>
-              <a:rPr sz="2200" b="0">
-                <a:solidFill>
-                  <a:srgbClr val="1E293B"/>
-                </a:solidFill>
-                <a:latin typeface="Calibri"/>
-              </a:rPr>
-              <a:t>3. YARN : ResourceManager et NodeManager</a:t>
-            </a:r>
-          </a:p>
-          <a:p>
-            <a:pPr>
+              <a:rPr sz="1300" b="0">
+                <a:solidFill>
+                  <a:srgbClr val="64748B"/>
+                </a:solidFill>
+                <a:latin typeface="Calibri"/>
+              </a:rPr>
+              <a:t>Kassoum</a:t>
+            </a:r>
+          </a:p>
+        </p:txBody>
+      </p:sp>
+      <p:sp>
+        <p:nvSpPr>
+          <p:cNvPr id="8" name="Rounded Rectangle 7"/>
+          <p:cNvSpPr/>
+          <p:nvPr/>
+        </p:nvSpPr>
+        <p:spPr>
+          <a:xfrm>
+            <a:off x="3337560" y="1325880"/>
+            <a:ext cx="2743200" cy="1920240"/>
+          </a:xfrm>
+          <a:prstGeom prst="roundRect">
+            <a:avLst>
+              <a:gd name="adj" fmla="val 8000"/>
+            </a:avLst>
+          </a:prstGeom>
+          <a:solidFill>
+            <a:srgbClr val="FFFFFF"/>
+          </a:solidFill>
+          <a:ln w="15875">
+            <a:solidFill>
+              <a:srgbClr val="147A66"/>
+            </a:solidFill>
+          </a:ln>
+        </p:spPr>
+        <p:style>
+          <a:lnRef idx="1">
+            <a:schemeClr val="accent1"/>
+          </a:lnRef>
+          <a:fillRef idx="3">
+            <a:schemeClr val="accent1"/>
+          </a:fillRef>
+          <a:effectRef idx="2">
+            <a:schemeClr val="accent1"/>
+          </a:effectRef>
+          <a:fontRef idx="minor">
+            <a:schemeClr val="lt1"/>
+          </a:fontRef>
+        </p:style>
+        <p:txBody>
+          <a:bodyPr rtlCol="0" anchor="ctr"/>
+          <a:lstStyle/>
+          <a:p>
+            <a:pPr algn="ctr"/>
+          </a:p>
+        </p:txBody>
+      </p:sp>
+      <p:sp>
+        <p:nvSpPr>
+          <p:cNvPr id="9" name="TextBox 8"/>
+          <p:cNvSpPr txBox="1"/>
+          <p:nvPr/>
+        </p:nvSpPr>
+        <p:spPr>
+          <a:xfrm>
+            <a:off x="3474720" y="1554480"/>
+            <a:ext cx="2468880" cy="1554480"/>
+          </a:xfrm>
+          <a:prstGeom prst="rect">
+            <a:avLst/>
+          </a:prstGeom>
+          <a:noFill/>
+        </p:spPr>
+        <p:txBody>
+          <a:bodyPr wrap="square">
+            <a:spAutoFit/>
+          </a:bodyPr>
+          <a:lstStyle/>
+          <a:p>
+            <a:pPr algn="l">
               <a:spcAft>
-                <a:spcPts val="1000"/>
+                <a:spcPts val="600"/>
               </a:spcAft>
             </a:pPr>
             <a:r>
-              <a:rPr sz="2200" b="0">
-                <a:solidFill>
-                  <a:srgbClr val="1E293B"/>
-                </a:solidFill>
-                <a:latin typeface="Calibri"/>
-              </a:rPr>
-              <a:t>4. Architecture Docker (1 master + 5 workers)</a:t>
-            </a:r>
-          </a:p>
-          <a:p>
-            <a:pPr>
+              <a:rPr sz="2200" b="1">
+                <a:solidFill>
+                  <a:srgbClr val="0F5C4C"/>
+                </a:solidFill>
+                <a:latin typeface="Calibri"/>
+              </a:rPr>
+              <a:t>02</a:t>
+            </a:r>
+          </a:p>
+          <a:p>
+            <a:pPr algn="l">
               <a:spcAft>
-                <a:spcPts val="1000"/>
+                <a:spcPts val="800"/>
               </a:spcAft>
             </a:pPr>
             <a:r>
-              <a:rPr sz="2200" b="0">
+              <a:rPr sz="1600" b="1">
                 <a:solidFill>
                   <a:srgbClr val="1E293B"/>
                 </a:solidFill>
                 <a:latin typeface="Calibri"/>
               </a:rPr>
-              <a:t>5. Déploiement, image Docker Hub</a:t>
-            </a:r>
-          </a:p>
-          <a:p>
-            <a:pPr>
+              <a:t>HDFS vs FS local</a:t>
+            </a:r>
+          </a:p>
+          <a:p>
+            <a:pPr algn="l">
               <a:spcAft>
-                <a:spcPts val="1000"/>
+                <a:spcPts val="600"/>
               </a:spcAft>
             </a:pPr>
             <a:r>
-              <a:rPr sz="2200" b="0">
-                <a:solidFill>
-                  <a:srgbClr val="1E293B"/>
-                </a:solidFill>
-                <a:latin typeface="Calibri"/>
-              </a:rPr>
-              <a:t>6. Manipulations HDFS et job π sur YARN</a:t>
-            </a:r>
-          </a:p>
-          <a:p>
-            <a:pPr>
+              <a:rPr sz="1300" b="0">
+                <a:solidFill>
+                  <a:srgbClr val="64748B"/>
+                </a:solidFill>
+                <a:latin typeface="Calibri"/>
+              </a:rPr>
+              <a:t>Joel</a:t>
+            </a:r>
+          </a:p>
+        </p:txBody>
+      </p:sp>
+      <p:sp>
+        <p:nvSpPr>
+          <p:cNvPr id="10" name="Rounded Rectangle 9"/>
+          <p:cNvSpPr/>
+          <p:nvPr/>
+        </p:nvSpPr>
+        <p:spPr>
+          <a:xfrm>
+            <a:off x="6263640" y="1325880"/>
+            <a:ext cx="2743200" cy="1920240"/>
+          </a:xfrm>
+          <a:prstGeom prst="roundRect">
+            <a:avLst>
+              <a:gd name="adj" fmla="val 8000"/>
+            </a:avLst>
+          </a:prstGeom>
+          <a:solidFill>
+            <a:srgbClr val="FFFFFF"/>
+          </a:solidFill>
+          <a:ln w="15875">
+            <a:solidFill>
+              <a:srgbClr val="147A66"/>
+            </a:solidFill>
+          </a:ln>
+        </p:spPr>
+        <p:style>
+          <a:lnRef idx="1">
+            <a:schemeClr val="accent1"/>
+          </a:lnRef>
+          <a:fillRef idx="3">
+            <a:schemeClr val="accent1"/>
+          </a:fillRef>
+          <a:effectRef idx="2">
+            <a:schemeClr val="accent1"/>
+          </a:effectRef>
+          <a:fontRef idx="minor">
+            <a:schemeClr val="lt1"/>
+          </a:fontRef>
+        </p:style>
+        <p:txBody>
+          <a:bodyPr rtlCol="0" anchor="ctr"/>
+          <a:lstStyle/>
+          <a:p>
+            <a:pPr algn="ctr"/>
+          </a:p>
+        </p:txBody>
+      </p:sp>
+      <p:sp>
+        <p:nvSpPr>
+          <p:cNvPr id="11" name="TextBox 10"/>
+          <p:cNvSpPr txBox="1"/>
+          <p:nvPr/>
+        </p:nvSpPr>
+        <p:spPr>
+          <a:xfrm>
+            <a:off x="6400800" y="1554480"/>
+            <a:ext cx="2468880" cy="1554480"/>
+          </a:xfrm>
+          <a:prstGeom prst="rect">
+            <a:avLst/>
+          </a:prstGeom>
+          <a:noFill/>
+        </p:spPr>
+        <p:txBody>
+          <a:bodyPr wrap="square">
+            <a:spAutoFit/>
+          </a:bodyPr>
+          <a:lstStyle/>
+          <a:p>
+            <a:pPr algn="l">
               <a:spcAft>
-                <a:spcPts val="1000"/>
+                <a:spcPts val="600"/>
               </a:spcAft>
             </a:pPr>
             <a:r>
-              <a:rPr sz="2200" b="0">
-                <a:solidFill>
-                  <a:srgbClr val="1E293B"/>
-                </a:solidFill>
-                <a:latin typeface="Calibri"/>
-              </a:rPr>
-              <a:t>7. Monitoring, setrep, problèmes rencontrés</a:t>
-            </a:r>
-          </a:p>
-          <a:p>
-            <a:pPr>
+              <a:rPr sz="2200" b="1">
+                <a:solidFill>
+                  <a:srgbClr val="0F5C4C"/>
+                </a:solidFill>
+                <a:latin typeface="Calibri"/>
+              </a:rPr>
+              <a:t>03</a:t>
+            </a:r>
+          </a:p>
+          <a:p>
+            <a:pPr algn="l">
               <a:spcAft>
-                <a:spcPts val="1000"/>
+                <a:spcPts val="800"/>
               </a:spcAft>
             </a:pPr>
             <a:r>
-              <a:rPr sz="2200" b="0">
+              <a:rPr sz="1600" b="1">
                 <a:solidFill>
                   <a:srgbClr val="1E293B"/>
                 </a:solidFill>
                 <a:latin typeface="Calibri"/>
               </a:rPr>
-              <a:t>8. Conclusion</a:t>
-            </a:r>
-          </a:p>
-        </p:txBody>
-      </p:sp>
-      <p:sp>
-        <p:nvSpPr>
-          <p:cNvPr id="7" name="Rectangle 6"/>
+              <a:t>YARN (RM / NM)</a:t>
+            </a:r>
+          </a:p>
+          <a:p>
+            <a:pPr algn="l">
+              <a:spcAft>
+                <a:spcPts val="600"/>
+              </a:spcAft>
+            </a:pPr>
+            <a:r>
+              <a:rPr sz="1300" b="0">
+                <a:solidFill>
+                  <a:srgbClr val="64748B"/>
+                </a:solidFill>
+                <a:latin typeface="Calibri"/>
+              </a:rPr>
+              <a:t>Forbes</a:t>
+            </a:r>
+          </a:p>
+        </p:txBody>
+      </p:sp>
+      <p:sp>
+        <p:nvSpPr>
+          <p:cNvPr id="12" name="Rounded Rectangle 11"/>
+          <p:cNvSpPr/>
+          <p:nvPr/>
+        </p:nvSpPr>
+        <p:spPr>
+          <a:xfrm>
+            <a:off x="9189720" y="1325880"/>
+            <a:ext cx="2743200" cy="1920240"/>
+          </a:xfrm>
+          <a:prstGeom prst="roundRect">
+            <a:avLst>
+              <a:gd name="adj" fmla="val 8000"/>
+            </a:avLst>
+          </a:prstGeom>
+          <a:solidFill>
+            <a:srgbClr val="FFFFFF"/>
+          </a:solidFill>
+          <a:ln w="15875">
+            <a:solidFill>
+              <a:srgbClr val="147A66"/>
+            </a:solidFill>
+          </a:ln>
+        </p:spPr>
+        <p:style>
+          <a:lnRef idx="1">
+            <a:schemeClr val="accent1"/>
+          </a:lnRef>
+          <a:fillRef idx="3">
+            <a:schemeClr val="accent1"/>
+          </a:fillRef>
+          <a:effectRef idx="2">
+            <a:schemeClr val="accent1"/>
+          </a:effectRef>
+          <a:fontRef idx="minor">
+            <a:schemeClr val="lt1"/>
+          </a:fontRef>
+        </p:style>
+        <p:txBody>
+          <a:bodyPr rtlCol="0" anchor="ctr"/>
+          <a:lstStyle/>
+          <a:p>
+            <a:pPr algn="ctr"/>
+          </a:p>
+        </p:txBody>
+      </p:sp>
+      <p:sp>
+        <p:nvSpPr>
+          <p:cNvPr id="13" name="TextBox 12"/>
+          <p:cNvSpPr txBox="1"/>
+          <p:nvPr/>
+        </p:nvSpPr>
+        <p:spPr>
+          <a:xfrm>
+            <a:off x="9326880" y="1554480"/>
+            <a:ext cx="2468880" cy="1554480"/>
+          </a:xfrm>
+          <a:prstGeom prst="rect">
+            <a:avLst/>
+          </a:prstGeom>
+          <a:noFill/>
+        </p:spPr>
+        <p:txBody>
+          <a:bodyPr wrap="square">
+            <a:spAutoFit/>
+          </a:bodyPr>
+          <a:lstStyle/>
+          <a:p>
+            <a:pPr algn="l">
+              <a:spcAft>
+                <a:spcPts val="600"/>
+              </a:spcAft>
+            </a:pPr>
+            <a:r>
+              <a:rPr sz="2200" b="1">
+                <a:solidFill>
+                  <a:srgbClr val="0F5C4C"/>
+                </a:solidFill>
+                <a:latin typeface="Calibri"/>
+              </a:rPr>
+              <a:t>04</a:t>
+            </a:r>
+          </a:p>
+          <a:p>
+            <a:pPr algn="l">
+              <a:spcAft>
+                <a:spcPts val="800"/>
+              </a:spcAft>
+            </a:pPr>
+            <a:r>
+              <a:rPr sz="1600" b="1">
+                <a:solidFill>
+                  <a:srgbClr val="1E293B"/>
+                </a:solidFill>
+                <a:latin typeface="Calibri"/>
+              </a:rPr>
+              <a:t>Architecture Docker</a:t>
+            </a:r>
+          </a:p>
+          <a:p>
+            <a:pPr algn="l">
+              <a:spcAft>
+                <a:spcPts val="600"/>
+              </a:spcAft>
+            </a:pPr>
+            <a:r>
+              <a:rPr sz="1300" b="0">
+                <a:solidFill>
+                  <a:srgbClr val="64748B"/>
+                </a:solidFill>
+                <a:latin typeface="Calibri"/>
+              </a:rPr>
+              <a:t>Frank</a:t>
+            </a:r>
+          </a:p>
+        </p:txBody>
+      </p:sp>
+      <p:sp>
+        <p:nvSpPr>
+          <p:cNvPr id="14" name="Rounded Rectangle 13"/>
+          <p:cNvSpPr/>
+          <p:nvPr/>
+        </p:nvSpPr>
+        <p:spPr>
+          <a:xfrm>
+            <a:off x="411480" y="3520439"/>
+            <a:ext cx="2743200" cy="1920240"/>
+          </a:xfrm>
+          <a:prstGeom prst="roundRect">
+            <a:avLst>
+              <a:gd name="adj" fmla="val 8000"/>
+            </a:avLst>
+          </a:prstGeom>
+          <a:solidFill>
+            <a:srgbClr val="FFFFFF"/>
+          </a:solidFill>
+          <a:ln w="15875">
+            <a:solidFill>
+              <a:srgbClr val="147A66"/>
+            </a:solidFill>
+          </a:ln>
+        </p:spPr>
+        <p:style>
+          <a:lnRef idx="1">
+            <a:schemeClr val="accent1"/>
+          </a:lnRef>
+          <a:fillRef idx="3">
+            <a:schemeClr val="accent1"/>
+          </a:fillRef>
+          <a:effectRef idx="2">
+            <a:schemeClr val="accent1"/>
+          </a:effectRef>
+          <a:fontRef idx="minor">
+            <a:schemeClr val="lt1"/>
+          </a:fontRef>
+        </p:style>
+        <p:txBody>
+          <a:bodyPr rtlCol="0" anchor="ctr"/>
+          <a:lstStyle/>
+          <a:p>
+            <a:pPr algn="ctr"/>
+          </a:p>
+        </p:txBody>
+      </p:sp>
+      <p:sp>
+        <p:nvSpPr>
+          <p:cNvPr id="15" name="TextBox 14"/>
+          <p:cNvSpPr txBox="1"/>
+          <p:nvPr/>
+        </p:nvSpPr>
+        <p:spPr>
+          <a:xfrm>
+            <a:off x="548640" y="3749039"/>
+            <a:ext cx="2468880" cy="1554480"/>
+          </a:xfrm>
+          <a:prstGeom prst="rect">
+            <a:avLst/>
+          </a:prstGeom>
+          <a:noFill/>
+        </p:spPr>
+        <p:txBody>
+          <a:bodyPr wrap="square">
+            <a:spAutoFit/>
+          </a:bodyPr>
+          <a:lstStyle/>
+          <a:p>
+            <a:pPr algn="l">
+              <a:spcAft>
+                <a:spcPts val="600"/>
+              </a:spcAft>
+            </a:pPr>
+            <a:r>
+              <a:rPr sz="2200" b="1">
+                <a:solidFill>
+                  <a:srgbClr val="0F5C4C"/>
+                </a:solidFill>
+                <a:latin typeface="Calibri"/>
+              </a:rPr>
+              <a:t>05</a:t>
+            </a:r>
+          </a:p>
+          <a:p>
+            <a:pPr algn="l">
+              <a:spcAft>
+                <a:spcPts val="800"/>
+              </a:spcAft>
+            </a:pPr>
+            <a:r>
+              <a:rPr sz="1600" b="1">
+                <a:solidFill>
+                  <a:srgbClr val="1E293B"/>
+                </a:solidFill>
+                <a:latin typeface="Calibri"/>
+              </a:rPr>
+              <a:t>Déploiement &amp; Hub</a:t>
+            </a:r>
+          </a:p>
+          <a:p>
+            <a:pPr algn="l">
+              <a:spcAft>
+                <a:spcPts val="600"/>
+              </a:spcAft>
+            </a:pPr>
+            <a:r>
+              <a:rPr sz="1300" b="0">
+                <a:solidFill>
+                  <a:srgbClr val="64748B"/>
+                </a:solidFill>
+                <a:latin typeface="Calibri"/>
+              </a:rPr>
+              <a:t>Frank</a:t>
+            </a:r>
+          </a:p>
+        </p:txBody>
+      </p:sp>
+      <p:sp>
+        <p:nvSpPr>
+          <p:cNvPr id="16" name="Rounded Rectangle 15"/>
+          <p:cNvSpPr/>
+          <p:nvPr/>
+        </p:nvSpPr>
+        <p:spPr>
+          <a:xfrm>
+            <a:off x="3337560" y="3520439"/>
+            <a:ext cx="2743200" cy="1920240"/>
+          </a:xfrm>
+          <a:prstGeom prst="roundRect">
+            <a:avLst>
+              <a:gd name="adj" fmla="val 8000"/>
+            </a:avLst>
+          </a:prstGeom>
+          <a:solidFill>
+            <a:srgbClr val="FFFFFF"/>
+          </a:solidFill>
+          <a:ln w="15875">
+            <a:solidFill>
+              <a:srgbClr val="147A66"/>
+            </a:solidFill>
+          </a:ln>
+        </p:spPr>
+        <p:style>
+          <a:lnRef idx="1">
+            <a:schemeClr val="accent1"/>
+          </a:lnRef>
+          <a:fillRef idx="3">
+            <a:schemeClr val="accent1"/>
+          </a:fillRef>
+          <a:effectRef idx="2">
+            <a:schemeClr val="accent1"/>
+          </a:effectRef>
+          <a:fontRef idx="minor">
+            <a:schemeClr val="lt1"/>
+          </a:fontRef>
+        </p:style>
+        <p:txBody>
+          <a:bodyPr rtlCol="0" anchor="ctr"/>
+          <a:lstStyle/>
+          <a:p>
+            <a:pPr algn="ctr"/>
+          </a:p>
+        </p:txBody>
+      </p:sp>
+      <p:sp>
+        <p:nvSpPr>
+          <p:cNvPr id="17" name="TextBox 16"/>
+          <p:cNvSpPr txBox="1"/>
+          <p:nvPr/>
+        </p:nvSpPr>
+        <p:spPr>
+          <a:xfrm>
+            <a:off x="3474720" y="3749039"/>
+            <a:ext cx="2468880" cy="1554480"/>
+          </a:xfrm>
+          <a:prstGeom prst="rect">
+            <a:avLst/>
+          </a:prstGeom>
+          <a:noFill/>
+        </p:spPr>
+        <p:txBody>
+          <a:bodyPr wrap="square">
+            <a:spAutoFit/>
+          </a:bodyPr>
+          <a:lstStyle/>
+          <a:p>
+            <a:pPr algn="l">
+              <a:spcAft>
+                <a:spcPts val="600"/>
+              </a:spcAft>
+            </a:pPr>
+            <a:r>
+              <a:rPr sz="2200" b="1">
+                <a:solidFill>
+                  <a:srgbClr val="0F5C4C"/>
+                </a:solidFill>
+                <a:latin typeface="Calibri"/>
+              </a:rPr>
+              <a:t>06</a:t>
+            </a:r>
+          </a:p>
+          <a:p>
+            <a:pPr algn="l">
+              <a:spcAft>
+                <a:spcPts val="800"/>
+              </a:spcAft>
+            </a:pPr>
+            <a:r>
+              <a:rPr sz="1600" b="1">
+                <a:solidFill>
+                  <a:srgbClr val="1E293B"/>
+                </a:solidFill>
+                <a:latin typeface="Calibri"/>
+              </a:rPr>
+              <a:t>Manipulations HDFS</a:t>
+            </a:r>
+          </a:p>
+          <a:p>
+            <a:pPr algn="l">
+              <a:spcAft>
+                <a:spcPts val="600"/>
+              </a:spcAft>
+            </a:pPr>
+            <a:r>
+              <a:rPr sz="1300" b="0">
+                <a:solidFill>
+                  <a:srgbClr val="64748B"/>
+                </a:solidFill>
+                <a:latin typeface="Calibri"/>
+              </a:rPr>
+              <a:t>Wren</a:t>
+            </a:r>
+          </a:p>
+        </p:txBody>
+      </p:sp>
+      <p:sp>
+        <p:nvSpPr>
+          <p:cNvPr id="18" name="Rounded Rectangle 17"/>
+          <p:cNvSpPr/>
+          <p:nvPr/>
+        </p:nvSpPr>
+        <p:spPr>
+          <a:xfrm>
+            <a:off x="6263640" y="3520439"/>
+            <a:ext cx="2743200" cy="1920240"/>
+          </a:xfrm>
+          <a:prstGeom prst="roundRect">
+            <a:avLst>
+              <a:gd name="adj" fmla="val 8000"/>
+            </a:avLst>
+          </a:prstGeom>
+          <a:solidFill>
+            <a:srgbClr val="FFFFFF"/>
+          </a:solidFill>
+          <a:ln w="15875">
+            <a:solidFill>
+              <a:srgbClr val="147A66"/>
+            </a:solidFill>
+          </a:ln>
+        </p:spPr>
+        <p:style>
+          <a:lnRef idx="1">
+            <a:schemeClr val="accent1"/>
+          </a:lnRef>
+          <a:fillRef idx="3">
+            <a:schemeClr val="accent1"/>
+          </a:fillRef>
+          <a:effectRef idx="2">
+            <a:schemeClr val="accent1"/>
+          </a:effectRef>
+          <a:fontRef idx="minor">
+            <a:schemeClr val="lt1"/>
+          </a:fontRef>
+        </p:style>
+        <p:txBody>
+          <a:bodyPr rtlCol="0" anchor="ctr"/>
+          <a:lstStyle/>
+          <a:p>
+            <a:pPr algn="ctr"/>
+          </a:p>
+        </p:txBody>
+      </p:sp>
+      <p:sp>
+        <p:nvSpPr>
+          <p:cNvPr id="19" name="TextBox 18"/>
+          <p:cNvSpPr txBox="1"/>
+          <p:nvPr/>
+        </p:nvSpPr>
+        <p:spPr>
+          <a:xfrm>
+            <a:off x="6400800" y="3749039"/>
+            <a:ext cx="2468880" cy="1554480"/>
+          </a:xfrm>
+          <a:prstGeom prst="rect">
+            <a:avLst/>
+          </a:prstGeom>
+          <a:noFill/>
+        </p:spPr>
+        <p:txBody>
+          <a:bodyPr wrap="square">
+            <a:spAutoFit/>
+          </a:bodyPr>
+          <a:lstStyle/>
+          <a:p>
+            <a:pPr algn="l">
+              <a:spcAft>
+                <a:spcPts val="600"/>
+              </a:spcAft>
+            </a:pPr>
+            <a:r>
+              <a:rPr sz="2200" b="1">
+                <a:solidFill>
+                  <a:srgbClr val="0F5C4C"/>
+                </a:solidFill>
+                <a:latin typeface="Calibri"/>
+              </a:rPr>
+              <a:t>07</a:t>
+            </a:r>
+          </a:p>
+          <a:p>
+            <a:pPr algn="l">
+              <a:spcAft>
+                <a:spcPts val="800"/>
+              </a:spcAft>
+            </a:pPr>
+            <a:r>
+              <a:rPr sz="1600" b="1">
+                <a:solidFill>
+                  <a:srgbClr val="1E293B"/>
+                </a:solidFill>
+                <a:latin typeface="Calibri"/>
+              </a:rPr>
+              <a:t>Job π + monitoring</a:t>
+            </a:r>
+          </a:p>
+          <a:p>
+            <a:pPr algn="l">
+              <a:spcAft>
+                <a:spcPts val="600"/>
+              </a:spcAft>
+            </a:pPr>
+            <a:r>
+              <a:rPr sz="1300" b="0">
+                <a:solidFill>
+                  <a:srgbClr val="64748B"/>
+                </a:solidFill>
+                <a:latin typeface="Calibri"/>
+              </a:rPr>
+              <a:t>Forbes / Joel</a:t>
+            </a:r>
+          </a:p>
+        </p:txBody>
+      </p:sp>
+      <p:sp>
+        <p:nvSpPr>
+          <p:cNvPr id="20" name="Rounded Rectangle 19"/>
+          <p:cNvSpPr/>
+          <p:nvPr/>
+        </p:nvSpPr>
+        <p:spPr>
+          <a:xfrm>
+            <a:off x="9189720" y="3520439"/>
+            <a:ext cx="2743200" cy="1920240"/>
+          </a:xfrm>
+          <a:prstGeom prst="roundRect">
+            <a:avLst>
+              <a:gd name="adj" fmla="val 8000"/>
+            </a:avLst>
+          </a:prstGeom>
+          <a:solidFill>
+            <a:srgbClr val="FFFFFF"/>
+          </a:solidFill>
+          <a:ln w="15875">
+            <a:solidFill>
+              <a:srgbClr val="147A66"/>
+            </a:solidFill>
+          </a:ln>
+        </p:spPr>
+        <p:style>
+          <a:lnRef idx="1">
+            <a:schemeClr val="accent1"/>
+          </a:lnRef>
+          <a:fillRef idx="3">
+            <a:schemeClr val="accent1"/>
+          </a:fillRef>
+          <a:effectRef idx="2">
+            <a:schemeClr val="accent1"/>
+          </a:effectRef>
+          <a:fontRef idx="minor">
+            <a:schemeClr val="lt1"/>
+          </a:fontRef>
+        </p:style>
+        <p:txBody>
+          <a:bodyPr rtlCol="0" anchor="ctr"/>
+          <a:lstStyle/>
+          <a:p>
+            <a:pPr algn="ctr"/>
+          </a:p>
+        </p:txBody>
+      </p:sp>
+      <p:sp>
+        <p:nvSpPr>
+          <p:cNvPr id="21" name="TextBox 20"/>
+          <p:cNvSpPr txBox="1"/>
+          <p:nvPr/>
+        </p:nvSpPr>
+        <p:spPr>
+          <a:xfrm>
+            <a:off x="9326880" y="3749039"/>
+            <a:ext cx="2468880" cy="1554480"/>
+          </a:xfrm>
+          <a:prstGeom prst="rect">
+            <a:avLst/>
+          </a:prstGeom>
+          <a:noFill/>
+        </p:spPr>
+        <p:txBody>
+          <a:bodyPr wrap="square">
+            <a:spAutoFit/>
+          </a:bodyPr>
+          <a:lstStyle/>
+          <a:p>
+            <a:pPr algn="l">
+              <a:spcAft>
+                <a:spcPts val="600"/>
+              </a:spcAft>
+            </a:pPr>
+            <a:r>
+              <a:rPr sz="2200" b="1">
+                <a:solidFill>
+                  <a:srgbClr val="0F5C4C"/>
+                </a:solidFill>
+                <a:latin typeface="Calibri"/>
+              </a:rPr>
+              <a:t>08</a:t>
+            </a:r>
+          </a:p>
+          <a:p>
+            <a:pPr algn="l">
+              <a:spcAft>
+                <a:spcPts val="800"/>
+              </a:spcAft>
+            </a:pPr>
+            <a:r>
+              <a:rPr sz="1600" b="1">
+                <a:solidFill>
+                  <a:srgbClr val="1E293B"/>
+                </a:solidFill>
+                <a:latin typeface="Calibri"/>
+              </a:rPr>
+              <a:t>Troubles &amp; conclusion</a:t>
+            </a:r>
+          </a:p>
+          <a:p>
+            <a:pPr algn="l">
+              <a:spcAft>
+                <a:spcPts val="600"/>
+              </a:spcAft>
+            </a:pPr>
+            <a:r>
+              <a:rPr sz="1300" b="0">
+                <a:solidFill>
+                  <a:srgbClr val="64748B"/>
+                </a:solidFill>
+                <a:latin typeface="Calibri"/>
+              </a:rPr>
+              <a:t>Kassoum / Komla</a:t>
+            </a:r>
+          </a:p>
+        </p:txBody>
+      </p:sp>
+      <p:sp>
+        <p:nvSpPr>
+          <p:cNvPr id="22" name="Rectangle 21"/>
           <p:cNvSpPr/>
           <p:nvPr/>
         </p:nvSpPr>
@@ -6197,14 +8402,14 @@
       </p:sp>
       <p:sp>
         <p:nvSpPr>
-          <p:cNvPr id="8" name="TextBox 7"/>
+          <p:cNvPr id="23" name="TextBox 22"/>
           <p:cNvSpPr txBox="1"/>
           <p:nvPr/>
         </p:nvSpPr>
         <p:spPr>
           <a:xfrm>
-            <a:off x="365760" y="6446520"/>
-            <a:ext cx="9144000" cy="320040"/>
+            <a:off x="320040" y="6446520"/>
+            <a:ext cx="9326880" cy="320040"/>
           </a:xfrm>
           <a:prstGeom prst="rect">
             <a:avLst/>
@@ -6231,14 +8436,14 @@
       </p:sp>
       <p:sp>
         <p:nvSpPr>
-          <p:cNvPr id="9" name="TextBox 8"/>
+          <p:cNvPr id="24" name="TextBox 23"/>
           <p:cNvSpPr txBox="1"/>
           <p:nvPr/>
         </p:nvSpPr>
         <p:spPr>
           <a:xfrm>
-            <a:off x="10515600" y="6446520"/>
-            <a:ext cx="1371600" cy="320040"/>
+            <a:off x="10424160" y="6446520"/>
+            <a:ext cx="1463040" cy="320040"/>
           </a:xfrm>
           <a:prstGeom prst="rect">
             <a:avLst/>
@@ -6297,7 +8502,7 @@
             <a:avLst/>
           </a:prstGeom>
           <a:solidFill>
-            <a:srgbClr val="F8FAF9"/>
+            <a:srgbClr val="F1F5F4"/>
           </a:solidFill>
           <a:ln>
             <a:noFill/>
@@ -6334,7 +8539,7 @@
         <p:spPr>
           <a:xfrm>
             <a:off x="0" y="0"/>
-            <a:ext cx="12191695" cy="1051560"/>
+            <a:ext cx="12191695" cy="960120"/>
           </a:xfrm>
           <a:prstGeom prst="rect">
             <a:avLst/>
@@ -6376,8 +8581,8 @@
         </p:nvSpPr>
         <p:spPr>
           <a:xfrm>
-            <a:off x="0" y="1051560"/>
-            <a:ext cx="12191695" cy="73152"/>
+            <a:off x="0" y="960120"/>
+            <a:ext cx="12191695" cy="64008"/>
           </a:xfrm>
           <a:prstGeom prst="rect">
             <a:avLst/>
@@ -6419,8 +8624,8 @@
         </p:nvSpPr>
         <p:spPr>
           <a:xfrm>
-            <a:off x="457200" y="274320"/>
-            <a:ext cx="11247120" cy="640080"/>
+            <a:off x="411480" y="256032"/>
+            <a:ext cx="11338560" cy="548640"/>
           </a:xfrm>
           <a:prstGeom prst="rect">
             <a:avLst/>
@@ -6434,27 +8639,117 @@
           <a:lstStyle/>
           <a:p>
             <a:r>
-              <a:rPr sz="2800" b="1">
+              <a:rPr sz="2600" b="1">
                 <a:solidFill>
                   <a:srgbClr val="FFFFFF"/>
                 </a:solidFill>
                 <a:latin typeface="Calibri"/>
               </a:rPr>
-              <a:t>Cas d’usage : e-commerce et les 3V</a:t>
-            </a:r>
-          </a:p>
-        </p:txBody>
-      </p:sp>
-      <p:sp>
-        <p:nvSpPr>
-          <p:cNvPr id="6" name="TextBox 5"/>
+              <a:t>Cas d’usage e-commerce — les 3V</a:t>
+            </a:r>
+          </a:p>
+        </p:txBody>
+      </p:sp>
+      <p:sp>
+        <p:nvSpPr>
+          <p:cNvPr id="6" name="Rounded Rectangle 5"/>
+          <p:cNvSpPr/>
+          <p:nvPr/>
+        </p:nvSpPr>
+        <p:spPr>
+          <a:xfrm>
+            <a:off x="365760" y="1280160"/>
+            <a:ext cx="3520440" cy="3108960"/>
+          </a:xfrm>
+          <a:prstGeom prst="roundRect">
+            <a:avLst>
+              <a:gd name="adj" fmla="val 8000"/>
+            </a:avLst>
+          </a:prstGeom>
+          <a:solidFill>
+            <a:srgbClr val="FFFFFF"/>
+          </a:solidFill>
+          <a:ln w="15875">
+            <a:solidFill>
+              <a:srgbClr val="1D4E89"/>
+            </a:solidFill>
+          </a:ln>
+        </p:spPr>
+        <p:style>
+          <a:lnRef idx="1">
+            <a:schemeClr val="accent1"/>
+          </a:lnRef>
+          <a:fillRef idx="3">
+            <a:schemeClr val="accent1"/>
+          </a:fillRef>
+          <a:effectRef idx="2">
+            <a:schemeClr val="accent1"/>
+          </a:effectRef>
+          <a:fontRef idx="minor">
+            <a:schemeClr val="lt1"/>
+          </a:fontRef>
+        </p:style>
+        <p:txBody>
+          <a:bodyPr rtlCol="0" anchor="ctr"/>
+          <a:lstStyle/>
+          <a:p>
+            <a:pPr algn="ctr"/>
+          </a:p>
+        </p:txBody>
+      </p:sp>
+      <p:sp>
+        <p:nvSpPr>
+          <p:cNvPr id="7" name="Rectangle 6"/>
+          <p:cNvSpPr/>
+          <p:nvPr/>
+        </p:nvSpPr>
+        <p:spPr>
+          <a:xfrm>
+            <a:off x="365760" y="1280160"/>
+            <a:ext cx="3520440" cy="640080"/>
+          </a:xfrm>
+          <a:prstGeom prst="rect">
+            <a:avLst/>
+          </a:prstGeom>
+          <a:solidFill>
+            <a:srgbClr val="1D4E89"/>
+          </a:solidFill>
+          <a:ln>
+            <a:noFill/>
+          </a:ln>
+        </p:spPr>
+        <p:style>
+          <a:lnRef idx="1">
+            <a:schemeClr val="accent1"/>
+          </a:lnRef>
+          <a:fillRef idx="3">
+            <a:schemeClr val="accent1"/>
+          </a:fillRef>
+          <a:effectRef idx="2">
+            <a:schemeClr val="accent1"/>
+          </a:effectRef>
+          <a:fontRef idx="minor">
+            <a:schemeClr val="lt1"/>
+          </a:fontRef>
+        </p:style>
+        <p:txBody>
+          <a:bodyPr rtlCol="0" anchor="ctr"/>
+          <a:lstStyle/>
+          <a:p>
+            <a:pPr algn="ctr"/>
+          </a:p>
+        </p:txBody>
+      </p:sp>
+      <p:sp>
+        <p:nvSpPr>
+          <p:cNvPr id="8" name="TextBox 7"/>
           <p:cNvSpPr txBox="1"/>
           <p:nvPr/>
         </p:nvSpPr>
         <p:spPr>
           <a:xfrm>
-            <a:off x="457200" y="1371600"/>
-            <a:ext cx="11247120" cy="4754880"/>
+            <a:off x="548640" y="1371600"/>
+            <a:ext cx="3108960" cy="457200"/>
           </a:xfrm>
           <a:prstGeom prst="rect">
             <a:avLst/>
@@ -6467,106 +8762,504 @@
           </a:bodyPr>
           <a:lstStyle/>
           <a:p>
-            <a:pPr>
+            <a:pPr algn="l">
               <a:spcAft>
-                <a:spcPts val="1000"/>
+                <a:spcPts val="600"/>
               </a:spcAft>
             </a:pPr>
             <a:r>
-              <a:rPr sz="2200" b="1">
-                <a:solidFill>
-                  <a:srgbClr val="1E293B"/>
-                </a:solidFill>
-                <a:latin typeface="Calibri"/>
-              </a:rPr>
-              <a:t>Contexte : chaîne de magasins (ventes, logs web, stocks)</a:t>
-            </a:r>
-          </a:p>
-          <a:p>
-            <a:pPr>
+              <a:rPr sz="2000" b="1">
+                <a:solidFill>
+                  <a:srgbClr val="FFFFFF"/>
+                </a:solidFill>
+                <a:latin typeface="Calibri"/>
+              </a:rPr>
+              <a:t>📦  Volume</a:t>
+            </a:r>
+          </a:p>
+        </p:txBody>
+      </p:sp>
+      <p:sp>
+        <p:nvSpPr>
+          <p:cNvPr id="9" name="TextBox 8"/>
+          <p:cNvSpPr txBox="1"/>
+          <p:nvPr/>
+        </p:nvSpPr>
+        <p:spPr>
+          <a:xfrm>
+            <a:off x="594360" y="2194560"/>
+            <a:ext cx="3108960" cy="1828800"/>
+          </a:xfrm>
+          <a:prstGeom prst="rect">
+            <a:avLst/>
+          </a:prstGeom>
+          <a:noFill/>
+        </p:spPr>
+        <p:txBody>
+          <a:bodyPr wrap="square">
+            <a:spAutoFit/>
+          </a:bodyPr>
+          <a:lstStyle/>
+          <a:p>
+            <a:pPr algn="l">
               <a:spcAft>
-                <a:spcPts val="1000"/>
+                <a:spcPts val="800"/>
               </a:spcAft>
             </a:pPr>
             <a:r>
-              <a:rPr sz="2200" b="0">
+              <a:rPr sz="1600" b="0">
                 <a:solidFill>
                   <a:srgbClr val="1E293B"/>
                 </a:solidFill>
                 <a:latin typeface="Calibri"/>
               </a:rPr>
-              <a:t>Volume — millions d’événements, historique long</a:t>
-            </a:r>
-          </a:p>
-          <a:p>
-            <a:pPr>
+              <a:t>Millions d’événements</a:t>
+            </a:r>
+          </a:p>
+          <a:p>
+            <a:pPr algn="l">
               <a:spcAft>
-                <a:spcPts val="1000"/>
+                <a:spcPts val="800"/>
               </a:spcAft>
             </a:pPr>
             <a:r>
-              <a:rPr sz="2200" b="0">
+              <a:rPr sz="1600" b="0">
                 <a:solidFill>
                   <a:srgbClr val="1E293B"/>
                 </a:solidFill>
                 <a:latin typeface="Calibri"/>
               </a:rPr>
-              <a:t>Vélocité — commandes / paiements en continu</a:t>
-            </a:r>
-          </a:p>
-          <a:p>
-            <a:pPr>
+              <a:t>historique multi-années</a:t>
+            </a:r>
+          </a:p>
+        </p:txBody>
+      </p:sp>
+      <p:sp>
+        <p:nvSpPr>
+          <p:cNvPr id="10" name="Rounded Rectangle 9"/>
+          <p:cNvSpPr/>
+          <p:nvPr/>
+        </p:nvSpPr>
+        <p:spPr>
+          <a:xfrm>
+            <a:off x="4160520" y="1280160"/>
+            <a:ext cx="3520440" cy="3108960"/>
+          </a:xfrm>
+          <a:prstGeom prst="roundRect">
+            <a:avLst>
+              <a:gd name="adj" fmla="val 8000"/>
+            </a:avLst>
+          </a:prstGeom>
+          <a:solidFill>
+            <a:srgbClr val="FFFFFF"/>
+          </a:solidFill>
+          <a:ln w="15875">
+            <a:solidFill>
+              <a:srgbClr val="EA580C"/>
+            </a:solidFill>
+          </a:ln>
+        </p:spPr>
+        <p:style>
+          <a:lnRef idx="1">
+            <a:schemeClr val="accent1"/>
+          </a:lnRef>
+          <a:fillRef idx="3">
+            <a:schemeClr val="accent1"/>
+          </a:fillRef>
+          <a:effectRef idx="2">
+            <a:schemeClr val="accent1"/>
+          </a:effectRef>
+          <a:fontRef idx="minor">
+            <a:schemeClr val="lt1"/>
+          </a:fontRef>
+        </p:style>
+        <p:txBody>
+          <a:bodyPr rtlCol="0" anchor="ctr"/>
+          <a:lstStyle/>
+          <a:p>
+            <a:pPr algn="ctr"/>
+          </a:p>
+        </p:txBody>
+      </p:sp>
+      <p:sp>
+        <p:nvSpPr>
+          <p:cNvPr id="11" name="Rectangle 10"/>
+          <p:cNvSpPr/>
+          <p:nvPr/>
+        </p:nvSpPr>
+        <p:spPr>
+          <a:xfrm>
+            <a:off x="4160520" y="1280160"/>
+            <a:ext cx="3520440" cy="640080"/>
+          </a:xfrm>
+          <a:prstGeom prst="rect">
+            <a:avLst/>
+          </a:prstGeom>
+          <a:solidFill>
+            <a:srgbClr val="EA580C"/>
+          </a:solidFill>
+          <a:ln>
+            <a:noFill/>
+          </a:ln>
+        </p:spPr>
+        <p:style>
+          <a:lnRef idx="1">
+            <a:schemeClr val="accent1"/>
+          </a:lnRef>
+          <a:fillRef idx="3">
+            <a:schemeClr val="accent1"/>
+          </a:fillRef>
+          <a:effectRef idx="2">
+            <a:schemeClr val="accent1"/>
+          </a:effectRef>
+          <a:fontRef idx="minor">
+            <a:schemeClr val="lt1"/>
+          </a:fontRef>
+        </p:style>
+        <p:txBody>
+          <a:bodyPr rtlCol="0" anchor="ctr"/>
+          <a:lstStyle/>
+          <a:p>
+            <a:pPr algn="ctr"/>
+          </a:p>
+        </p:txBody>
+      </p:sp>
+      <p:sp>
+        <p:nvSpPr>
+          <p:cNvPr id="12" name="TextBox 11"/>
+          <p:cNvSpPr txBox="1"/>
+          <p:nvPr/>
+        </p:nvSpPr>
+        <p:spPr>
+          <a:xfrm>
+            <a:off x="4343400" y="1371600"/>
+            <a:ext cx="3108960" cy="457200"/>
+          </a:xfrm>
+          <a:prstGeom prst="rect">
+            <a:avLst/>
+          </a:prstGeom>
+          <a:noFill/>
+        </p:spPr>
+        <p:txBody>
+          <a:bodyPr wrap="square">
+            <a:spAutoFit/>
+          </a:bodyPr>
+          <a:lstStyle/>
+          <a:p>
+            <a:pPr algn="l">
               <a:spcAft>
-                <a:spcPts val="1000"/>
+                <a:spcPts val="600"/>
               </a:spcAft>
             </a:pPr>
             <a:r>
-              <a:rPr sz="2200" b="0">
-                <a:solidFill>
-                  <a:srgbClr val="1E293B"/>
-                </a:solidFill>
-                <a:latin typeface="Calibri"/>
-              </a:rPr>
-              <a:t>Variété — CSV, JSON, logs, images produits</a:t>
-            </a:r>
-          </a:p>
-          <a:p>
-            <a:pPr>
+              <a:rPr sz="2000" b="1">
+                <a:solidFill>
+                  <a:srgbClr val="FFFFFF"/>
+                </a:solidFill>
+                <a:latin typeface="Calibri"/>
+              </a:rPr>
+              <a:t>⚡  Vélocité</a:t>
+            </a:r>
+          </a:p>
+        </p:txBody>
+      </p:sp>
+      <p:sp>
+        <p:nvSpPr>
+          <p:cNvPr id="13" name="TextBox 12"/>
+          <p:cNvSpPr txBox="1"/>
+          <p:nvPr/>
+        </p:nvSpPr>
+        <p:spPr>
+          <a:xfrm>
+            <a:off x="4389120" y="2194560"/>
+            <a:ext cx="3108960" cy="1828800"/>
+          </a:xfrm>
+          <a:prstGeom prst="rect">
+            <a:avLst/>
+          </a:prstGeom>
+          <a:noFill/>
+        </p:spPr>
+        <p:txBody>
+          <a:bodyPr wrap="square">
+            <a:spAutoFit/>
+          </a:bodyPr>
+          <a:lstStyle/>
+          <a:p>
+            <a:pPr algn="l">
               <a:spcAft>
-                <a:spcPts val="1000"/>
+                <a:spcPts val="800"/>
               </a:spcAft>
             </a:pPr>
             <a:r>
-              <a:rPr sz="2200" b="1">
-                <a:solidFill>
-                  <a:srgbClr val="0F5C4C"/>
-                </a:solidFill>
-                <a:latin typeface="Calibri"/>
-              </a:rPr>
-              <a:t>Pourquoi Hadoop ?</a:t>
-            </a:r>
-          </a:p>
-          <a:p>
-            <a:pPr>
+              <a:rPr sz="1600" b="0">
+                <a:solidFill>
+                  <a:srgbClr val="1E293B"/>
+                </a:solidFill>
+                <a:latin typeface="Calibri"/>
+              </a:rPr>
+              <a:t>Commandes &amp; paiements</a:t>
+            </a:r>
+          </a:p>
+          <a:p>
+            <a:pPr algn="l">
               <a:spcAft>
-                <a:spcPts val="1000"/>
+                <a:spcPts val="800"/>
               </a:spcAft>
             </a:pPr>
             <a:r>
-              <a:rPr sz="2200" b="0">
+              <a:rPr sz="1600" b="0">
                 <a:solidFill>
                   <a:srgbClr val="1E293B"/>
                 </a:solidFill>
                 <a:latin typeface="Calibri"/>
               </a:rPr>
-              <a:t>HDFS → stocker en distribué  |  YARN → lancer les traitements</a:t>
-            </a:r>
-          </a:p>
-        </p:txBody>
-      </p:sp>
-      <p:sp>
-        <p:nvSpPr>
-          <p:cNvPr id="7" name="Rectangle 6"/>
+              <a:t>en continu</a:t>
+            </a:r>
+          </a:p>
+        </p:txBody>
+      </p:sp>
+      <p:sp>
+        <p:nvSpPr>
+          <p:cNvPr id="14" name="Rounded Rectangle 13"/>
+          <p:cNvSpPr/>
+          <p:nvPr/>
+        </p:nvSpPr>
+        <p:spPr>
+          <a:xfrm>
+            <a:off x="7955279" y="1280160"/>
+            <a:ext cx="3520440" cy="3108960"/>
+          </a:xfrm>
+          <a:prstGeom prst="roundRect">
+            <a:avLst>
+              <a:gd name="adj" fmla="val 8000"/>
+            </a:avLst>
+          </a:prstGeom>
+          <a:solidFill>
+            <a:srgbClr val="FFFFFF"/>
+          </a:solidFill>
+          <a:ln w="15875">
+            <a:solidFill>
+              <a:srgbClr val="15803D"/>
+            </a:solidFill>
+          </a:ln>
+        </p:spPr>
+        <p:style>
+          <a:lnRef idx="1">
+            <a:schemeClr val="accent1"/>
+          </a:lnRef>
+          <a:fillRef idx="3">
+            <a:schemeClr val="accent1"/>
+          </a:fillRef>
+          <a:effectRef idx="2">
+            <a:schemeClr val="accent1"/>
+          </a:effectRef>
+          <a:fontRef idx="minor">
+            <a:schemeClr val="lt1"/>
+          </a:fontRef>
+        </p:style>
+        <p:txBody>
+          <a:bodyPr rtlCol="0" anchor="ctr"/>
+          <a:lstStyle/>
+          <a:p>
+            <a:pPr algn="ctr"/>
+          </a:p>
+        </p:txBody>
+      </p:sp>
+      <p:sp>
+        <p:nvSpPr>
+          <p:cNvPr id="15" name="Rectangle 14"/>
+          <p:cNvSpPr/>
+          <p:nvPr/>
+        </p:nvSpPr>
+        <p:spPr>
+          <a:xfrm>
+            <a:off x="7955279" y="1280160"/>
+            <a:ext cx="3520440" cy="640080"/>
+          </a:xfrm>
+          <a:prstGeom prst="rect">
+            <a:avLst/>
+          </a:prstGeom>
+          <a:solidFill>
+            <a:srgbClr val="15803D"/>
+          </a:solidFill>
+          <a:ln>
+            <a:noFill/>
+          </a:ln>
+        </p:spPr>
+        <p:style>
+          <a:lnRef idx="1">
+            <a:schemeClr val="accent1"/>
+          </a:lnRef>
+          <a:fillRef idx="3">
+            <a:schemeClr val="accent1"/>
+          </a:fillRef>
+          <a:effectRef idx="2">
+            <a:schemeClr val="accent1"/>
+          </a:effectRef>
+          <a:fontRef idx="minor">
+            <a:schemeClr val="lt1"/>
+          </a:fontRef>
+        </p:style>
+        <p:txBody>
+          <a:bodyPr rtlCol="0" anchor="ctr"/>
+          <a:lstStyle/>
+          <a:p>
+            <a:pPr algn="ctr"/>
+          </a:p>
+        </p:txBody>
+      </p:sp>
+      <p:sp>
+        <p:nvSpPr>
+          <p:cNvPr id="16" name="TextBox 15"/>
+          <p:cNvSpPr txBox="1"/>
+          <p:nvPr/>
+        </p:nvSpPr>
+        <p:spPr>
+          <a:xfrm>
+            <a:off x="8138159" y="1371600"/>
+            <a:ext cx="3108960" cy="457200"/>
+          </a:xfrm>
+          <a:prstGeom prst="rect">
+            <a:avLst/>
+          </a:prstGeom>
+          <a:noFill/>
+        </p:spPr>
+        <p:txBody>
+          <a:bodyPr wrap="square">
+            <a:spAutoFit/>
+          </a:bodyPr>
+          <a:lstStyle/>
+          <a:p>
+            <a:pPr algn="l">
+              <a:spcAft>
+                <a:spcPts val="600"/>
+              </a:spcAft>
+            </a:pPr>
+            <a:r>
+              <a:rPr sz="2000" b="1">
+                <a:solidFill>
+                  <a:srgbClr val="FFFFFF"/>
+                </a:solidFill>
+                <a:latin typeface="Calibri"/>
+              </a:rPr>
+              <a:t>🧩  Variété</a:t>
+            </a:r>
+          </a:p>
+        </p:txBody>
+      </p:sp>
+      <p:sp>
+        <p:nvSpPr>
+          <p:cNvPr id="17" name="TextBox 16"/>
+          <p:cNvSpPr txBox="1"/>
+          <p:nvPr/>
+        </p:nvSpPr>
+        <p:spPr>
+          <a:xfrm>
+            <a:off x="8183879" y="2194560"/>
+            <a:ext cx="3108960" cy="1828800"/>
+          </a:xfrm>
+          <a:prstGeom prst="rect">
+            <a:avLst/>
+          </a:prstGeom>
+          <a:noFill/>
+        </p:spPr>
+        <p:txBody>
+          <a:bodyPr wrap="square">
+            <a:spAutoFit/>
+          </a:bodyPr>
+          <a:lstStyle/>
+          <a:p>
+            <a:pPr algn="l">
+              <a:spcAft>
+                <a:spcPts val="800"/>
+              </a:spcAft>
+            </a:pPr>
+            <a:r>
+              <a:rPr sz="1600" b="0">
+                <a:solidFill>
+                  <a:srgbClr val="1E293B"/>
+                </a:solidFill>
+                <a:latin typeface="Calibri"/>
+              </a:rPr>
+              <a:t>CSV, JSON, logs,</a:t>
+            </a:r>
+          </a:p>
+          <a:p>
+            <a:pPr algn="l">
+              <a:spcAft>
+                <a:spcPts val="800"/>
+              </a:spcAft>
+            </a:pPr>
+            <a:r>
+              <a:rPr sz="1600" b="0">
+                <a:solidFill>
+                  <a:srgbClr val="1E293B"/>
+                </a:solidFill>
+                <a:latin typeface="Calibri"/>
+              </a:rPr>
+              <a:t>images produits</a:t>
+            </a:r>
+          </a:p>
+        </p:txBody>
+      </p:sp>
+      <p:sp>
+        <p:nvSpPr>
+          <p:cNvPr id="18" name="TextBox 17"/>
+          <p:cNvSpPr txBox="1"/>
+          <p:nvPr/>
+        </p:nvSpPr>
+        <p:spPr>
+          <a:xfrm>
+            <a:off x="457200" y="4663440"/>
+            <a:ext cx="11155680" cy="1280160"/>
+          </a:xfrm>
+          <a:prstGeom prst="rect">
+            <a:avLst/>
+          </a:prstGeom>
+          <a:noFill/>
+        </p:spPr>
+        <p:txBody>
+          <a:bodyPr wrap="square">
+            <a:spAutoFit/>
+          </a:bodyPr>
+          <a:lstStyle/>
+          <a:p>
+            <a:pPr algn="l">
+              <a:spcAft>
+                <a:spcPts val="600"/>
+              </a:spcAft>
+            </a:pPr>
+            <a:r>
+              <a:rPr sz="1600" b="1">
+                <a:solidFill>
+                  <a:srgbClr val="0F5C4C"/>
+                </a:solidFill>
+                <a:latin typeface="Calibri"/>
+              </a:rPr>
+              <a:t>Chaîne de magasins : tickets de caisse + logs web + stocks</a:t>
+            </a:r>
+          </a:p>
+          <a:p>
+            <a:pPr algn="l">
+              <a:spcAft>
+                <a:spcPts val="600"/>
+              </a:spcAft>
+            </a:pPr>
+            <a:r>
+              <a:rPr sz="1600" b="0">
+                <a:solidFill>
+                  <a:srgbClr val="1E293B"/>
+                </a:solidFill>
+                <a:latin typeface="Calibri"/>
+              </a:rPr>
+              <a:t>HDFS → stockage distribué     |     YARN → traitements (MapReduce, etc.)</a:t>
+            </a:r>
+          </a:p>
+        </p:txBody>
+      </p:sp>
+      <p:sp>
+        <p:nvSpPr>
+          <p:cNvPr id="19" name="Rectangle 18"/>
           <p:cNvSpPr/>
           <p:nvPr/>
         </p:nvSpPr>
@@ -6609,14 +9302,14 @@
       </p:sp>
       <p:sp>
         <p:nvSpPr>
-          <p:cNvPr id="8" name="TextBox 7"/>
+          <p:cNvPr id="20" name="TextBox 19"/>
           <p:cNvSpPr txBox="1"/>
           <p:nvPr/>
         </p:nvSpPr>
         <p:spPr>
           <a:xfrm>
-            <a:off x="365760" y="6446520"/>
-            <a:ext cx="9144000" cy="320040"/>
+            <a:off x="320040" y="6446520"/>
+            <a:ext cx="9326880" cy="320040"/>
           </a:xfrm>
           <a:prstGeom prst="rect">
             <a:avLst/>
@@ -6643,14 +9336,14 @@
       </p:sp>
       <p:sp>
         <p:nvSpPr>
-          <p:cNvPr id="9" name="TextBox 8"/>
+          <p:cNvPr id="21" name="TextBox 20"/>
           <p:cNvSpPr txBox="1"/>
           <p:nvPr/>
         </p:nvSpPr>
         <p:spPr>
           <a:xfrm>
-            <a:off x="10515600" y="6446520"/>
-            <a:ext cx="1371600" cy="320040"/>
+            <a:off x="10424160" y="6446520"/>
+            <a:ext cx="1463040" cy="320040"/>
           </a:xfrm>
           <a:prstGeom prst="rect">
             <a:avLst/>
@@ -6709,7 +9402,7 @@
             <a:avLst/>
           </a:prstGeom>
           <a:solidFill>
-            <a:srgbClr val="F8FAF9"/>
+            <a:srgbClr val="F1F5F4"/>
           </a:solidFill>
           <a:ln>
             <a:noFill/>
@@ -6746,7 +9439,7 @@
         <p:spPr>
           <a:xfrm>
             <a:off x="0" y="0"/>
-            <a:ext cx="12191695" cy="1051560"/>
+            <a:ext cx="12191695" cy="960120"/>
           </a:xfrm>
           <a:prstGeom prst="rect">
             <a:avLst/>
@@ -6788,8 +9481,8 @@
         </p:nvSpPr>
         <p:spPr>
           <a:xfrm>
-            <a:off x="0" y="1051560"/>
-            <a:ext cx="12191695" cy="73152"/>
+            <a:off x="0" y="960120"/>
+            <a:ext cx="12191695" cy="64008"/>
           </a:xfrm>
           <a:prstGeom prst="rect">
             <a:avLst/>
@@ -6831,8 +9524,8 @@
         </p:nvSpPr>
         <p:spPr>
           <a:xfrm>
-            <a:off x="457200" y="274320"/>
-            <a:ext cx="11247120" cy="640080"/>
+            <a:off x="411480" y="256032"/>
+            <a:ext cx="11338560" cy="548640"/>
           </a:xfrm>
           <a:prstGeom prst="rect">
             <a:avLst/>
@@ -6846,7 +9539,7 @@
           <a:lstStyle/>
           <a:p>
             <a:r>
-              <a:rPr sz="2800" b="1">
+              <a:rPr sz="2600" b="1">
                 <a:solidFill>
                   <a:srgbClr val="FFFFFF"/>
                 </a:solidFill>
@@ -6859,23 +9552,27 @@
       </p:sp>
       <p:sp>
         <p:nvSpPr>
-          <p:cNvPr id="6" name="Rectangle 5"/>
+          <p:cNvPr id="6" name="Rounded Rectangle 5"/>
           <p:cNvSpPr/>
           <p:nvPr/>
         </p:nvSpPr>
         <p:spPr>
           <a:xfrm>
-            <a:off x="457200" y="1371600"/>
-            <a:ext cx="5303520" cy="4480560"/>
-          </a:xfrm>
-          <a:prstGeom prst="rect">
-            <a:avLst/>
+            <a:off x="365760" y="1234440"/>
+            <a:ext cx="5394960" cy="4754880"/>
+          </a:xfrm>
+          <a:prstGeom prst="roundRect">
+            <a:avLst>
+              <a:gd name="adj" fmla="val 8000"/>
+            </a:avLst>
           </a:prstGeom>
           <a:solidFill>
             <a:srgbClr val="FFFFFF"/>
           </a:solidFill>
-          <a:ln>
-            <a:noFill/>
+          <a:ln w="15875">
+            <a:solidFill>
+              <a:srgbClr val="475569"/>
+            </a:solidFill>
           </a:ln>
         </p:spPr>
         <p:style>
@@ -6902,20 +9599,61 @@
       </p:sp>
       <p:sp>
         <p:nvSpPr>
-          <p:cNvPr id="7" name="Rectangle 6"/>
+          <p:cNvPr id="7" name="TextBox 6"/>
+          <p:cNvSpPr txBox="1"/>
+          <p:nvPr/>
+        </p:nvSpPr>
+        <p:spPr>
+          <a:xfrm>
+            <a:off x="548640" y="1371600"/>
+            <a:ext cx="5029200" cy="457200"/>
+          </a:xfrm>
+          <a:prstGeom prst="rect">
+            <a:avLst/>
+          </a:prstGeom>
+          <a:noFill/>
+        </p:spPr>
+        <p:txBody>
+          <a:bodyPr wrap="square">
+            <a:spAutoFit/>
+          </a:bodyPr>
+          <a:lstStyle/>
+          <a:p>
+            <a:pPr algn="l">
+              <a:spcAft>
+                <a:spcPts val="600"/>
+              </a:spcAft>
+            </a:pPr>
+            <a:r>
+              <a:rPr sz="1800" b="1">
+                <a:solidFill>
+                  <a:srgbClr val="475569"/>
+                </a:solidFill>
+                <a:latin typeface="Calibri"/>
+              </a:rPr>
+              <a:t>FS classique (NTFS / ext4)</a:t>
+            </a:r>
+          </a:p>
+        </p:txBody>
+      </p:sp>
+      <p:sp>
+        <p:nvSpPr>
+          <p:cNvPr id="8" name="Rounded Rectangle 7"/>
           <p:cNvSpPr/>
           <p:nvPr/>
         </p:nvSpPr>
         <p:spPr>
           <a:xfrm>
-            <a:off x="6309360" y="1371600"/>
-            <a:ext cx="5303520" cy="4480560"/>
-          </a:xfrm>
-          <a:prstGeom prst="rect">
-            <a:avLst/>
+            <a:off x="1554480" y="2194560"/>
+            <a:ext cx="2926080" cy="1463040"/>
+          </a:xfrm>
+          <a:prstGeom prst="roundRect">
+            <a:avLst>
+              <a:gd name="adj" fmla="val 8000"/>
+            </a:avLst>
           </a:prstGeom>
           <a:solidFill>
-            <a:srgbClr val="FFFFFF"/>
+            <a:srgbClr val="1E293B"/>
           </a:solidFill>
           <a:ln>
             <a:noFill/>
@@ -6945,14 +9683,14 @@
       </p:sp>
       <p:sp>
         <p:nvSpPr>
-          <p:cNvPr id="8" name="TextBox 7"/>
+          <p:cNvPr id="9" name="TextBox 8"/>
           <p:cNvSpPr txBox="1"/>
           <p:nvPr/>
         </p:nvSpPr>
         <p:spPr>
           <a:xfrm>
-            <a:off x="640080" y="1554480"/>
-            <a:ext cx="4937760" cy="4114800"/>
+            <a:off x="1645920" y="2267712"/>
+            <a:ext cx="2743200" cy="1325880"/>
           </a:xfrm>
           <a:prstGeom prst="rect">
             <a:avLst/>
@@ -6965,81 +9703,65 @@
           </a:bodyPr>
           <a:lstStyle/>
           <a:p>
-            <a:pPr>
+            <a:pPr algn="l">
               <a:spcAft>
-                <a:spcPts val="1000"/>
+                <a:spcPts val="400"/>
               </a:spcAft>
             </a:pPr>
             <a:r>
-              <a:rPr sz="2000" b="1">
-                <a:solidFill>
-                  <a:srgbClr val="0F5C4C"/>
-                </a:solidFill>
-                <a:latin typeface="Calibri"/>
-              </a:rPr>
-              <a:t>FS classique (NTFS, ext4)</a:t>
-            </a:r>
-          </a:p>
-          <a:p>
-            <a:pPr>
+              <a:rPr sz="1400" b="1">
+                <a:solidFill>
+                  <a:srgbClr val="FFFFFF"/>
+                </a:solidFill>
+                <a:latin typeface="Calibri"/>
+              </a:rPr>
+              <a:t>1 machine</a:t>
+            </a:r>
+          </a:p>
+          <a:p>
+            <a:pPr algn="l">
               <a:spcAft>
-                <a:spcPts val="1000"/>
+                <a:spcPts val="200"/>
               </a:spcAft>
             </a:pPr>
             <a:r>
-              <a:rPr sz="1800" b="0">
-                <a:solidFill>
-                  <a:srgbClr val="1E293B"/>
-                </a:solidFill>
-                <a:latin typeface="Calibri"/>
-              </a:rPr>
-              <a:t>Fichier sur une seule machine</a:t>
-            </a:r>
-          </a:p>
-          <a:p>
-            <a:pPr>
+              <a:rPr sz="1100" b="0">
+                <a:solidFill>
+                  <a:srgbClr val="FFFFFF"/>
+                </a:solidFill>
+                <a:latin typeface="Calibri"/>
+              </a:rPr>
+              <a:t>Fichier entier</a:t>
+            </a:r>
+          </a:p>
+          <a:p>
+            <a:pPr algn="l">
               <a:spcAft>
-                <a:spcPts val="1000"/>
+                <a:spcPts val="200"/>
               </a:spcAft>
             </a:pPr>
             <a:r>
-              <a:rPr sz="1800" b="0">
-                <a:solidFill>
-                  <a:srgbClr val="1E293B"/>
-                </a:solidFill>
-                <a:latin typeface="Calibri"/>
-              </a:rPr>
-              <a:t>Métadonnées gérées par l’OS local</a:t>
-            </a:r>
-          </a:p>
-          <a:p>
-            <a:pPr>
-              <a:spcAft>
-                <a:spcPts val="1000"/>
-              </a:spcAft>
-            </a:pPr>
-            <a:r>
-              <a:rPr sz="1800" b="0">
-                <a:solidFill>
-                  <a:srgbClr val="1E293B"/>
-                </a:solidFill>
-                <a:latin typeface="Calibri"/>
-              </a:rPr>
-              <a:t>Si le disque tombe → données perdues</a:t>
-            </a:r>
-          </a:p>
-        </p:txBody>
-      </p:sp>
-      <p:sp>
-        <p:nvSpPr>
-          <p:cNvPr id="9" name="TextBox 8"/>
+              <a:rPr sz="1100" b="0">
+                <a:solidFill>
+                  <a:srgbClr val="FFFFFF"/>
+                </a:solidFill>
+                <a:latin typeface="Calibri"/>
+              </a:rPr>
+              <a:t>OS local = métadonnées</a:t>
+            </a:r>
+          </a:p>
+        </p:txBody>
+      </p:sp>
+      <p:sp>
+        <p:nvSpPr>
+          <p:cNvPr id="10" name="TextBox 9"/>
           <p:cNvSpPr txBox="1"/>
           <p:nvPr/>
         </p:nvSpPr>
         <p:spPr>
           <a:xfrm>
-            <a:off x="6492240" y="1554480"/>
-            <a:ext cx="4937760" cy="4114800"/>
+            <a:off x="640080" y="4023360"/>
+            <a:ext cx="4846320" cy="1463040"/>
           </a:xfrm>
           <a:prstGeom prst="rect">
             <a:avLst/>
@@ -7052,100 +9774,156 @@
           </a:bodyPr>
           <a:lstStyle/>
           <a:p>
-            <a:pPr>
+            <a:pPr algn="l">
               <a:spcAft>
-                <a:spcPts val="1000"/>
+                <a:spcPts val="600"/>
               </a:spcAft>
             </a:pPr>
             <a:r>
-              <a:rPr sz="2000" b="1">
-                <a:solidFill>
-                  <a:srgbClr val="0F5C4C"/>
-                </a:solidFill>
-                <a:latin typeface="Calibri"/>
-              </a:rPr>
-              <a:t>HDFS</a:t>
-            </a:r>
-          </a:p>
-          <a:p>
-            <a:pPr>
+              <a:rPr sz="1500" b="0">
+                <a:solidFill>
+                  <a:srgbClr val="1E293B"/>
+                </a:solidFill>
+                <a:latin typeface="Calibri"/>
+              </a:rPr>
+              <a:t>• Un seul point de défaillance</a:t>
+            </a:r>
+          </a:p>
+          <a:p>
+            <a:pPr algn="l">
               <a:spcAft>
-                <a:spcPts val="1000"/>
+                <a:spcPts val="600"/>
               </a:spcAft>
             </a:pPr>
             <a:r>
-              <a:rPr sz="1800" b="0">
+              <a:rPr sz="1500" b="0">
                 <a:solidFill>
                   <a:srgbClr val="1E293B"/>
                 </a:solidFill>
                 <a:latin typeface="Calibri"/>
               </a:rPr>
-              <a:t>Fichier découpé en blocs</a:t>
-            </a:r>
-          </a:p>
-          <a:p>
-            <a:pPr>
+              <a:t>• Pas de réplication native</a:t>
+            </a:r>
+          </a:p>
+          <a:p>
+            <a:pPr algn="l">
               <a:spcAft>
-                <a:spcPts val="1000"/>
+                <a:spcPts val="600"/>
               </a:spcAft>
             </a:pPr>
             <a:r>
-              <a:rPr sz="1800" b="0">
+              <a:rPr sz="1500" b="0">
                 <a:solidFill>
                   <a:srgbClr val="1E293B"/>
                 </a:solidFill>
                 <a:latin typeface="Calibri"/>
               </a:rPr>
-              <a:t>Blocs répliqués sur plusieurs DataNodes</a:t>
-            </a:r>
-          </a:p>
-          <a:p>
-            <a:pPr>
+              <a:t>• Limité à la capacité du disque</a:t>
+            </a:r>
+          </a:p>
+        </p:txBody>
+      </p:sp>
+      <p:sp>
+        <p:nvSpPr>
+          <p:cNvPr id="11" name="Rounded Rectangle 10"/>
+          <p:cNvSpPr/>
+          <p:nvPr/>
+        </p:nvSpPr>
+        <p:spPr>
+          <a:xfrm>
+            <a:off x="6126480" y="1234440"/>
+            <a:ext cx="5669280" cy="4754880"/>
+          </a:xfrm>
+          <a:prstGeom prst="roundRect">
+            <a:avLst>
+              <a:gd name="adj" fmla="val 8000"/>
+            </a:avLst>
+          </a:prstGeom>
+          <a:solidFill>
+            <a:srgbClr val="FFFFFF"/>
+          </a:solidFill>
+          <a:ln w="15875">
+            <a:solidFill>
+              <a:srgbClr val="0F5C4C"/>
+            </a:solidFill>
+          </a:ln>
+        </p:spPr>
+        <p:style>
+          <a:lnRef idx="1">
+            <a:schemeClr val="accent1"/>
+          </a:lnRef>
+          <a:fillRef idx="3">
+            <a:schemeClr val="accent1"/>
+          </a:fillRef>
+          <a:effectRef idx="2">
+            <a:schemeClr val="accent1"/>
+          </a:effectRef>
+          <a:fontRef idx="minor">
+            <a:schemeClr val="lt1"/>
+          </a:fontRef>
+        </p:style>
+        <p:txBody>
+          <a:bodyPr rtlCol="0" anchor="ctr"/>
+          <a:lstStyle/>
+          <a:p>
+            <a:pPr algn="ctr"/>
+          </a:p>
+        </p:txBody>
+      </p:sp>
+      <p:sp>
+        <p:nvSpPr>
+          <p:cNvPr id="12" name="TextBox 11"/>
+          <p:cNvSpPr txBox="1"/>
+          <p:nvPr/>
+        </p:nvSpPr>
+        <p:spPr>
+          <a:xfrm>
+            <a:off x="6309360" y="1371600"/>
+            <a:ext cx="5303520" cy="411480"/>
+          </a:xfrm>
+          <a:prstGeom prst="rect">
+            <a:avLst/>
+          </a:prstGeom>
+          <a:noFill/>
+        </p:spPr>
+        <p:txBody>
+          <a:bodyPr wrap="square">
+            <a:spAutoFit/>
+          </a:bodyPr>
+          <a:lstStyle/>
+          <a:p>
+            <a:pPr algn="l">
               <a:spcAft>
-                <a:spcPts val="1000"/>
+                <a:spcPts val="600"/>
               </a:spcAft>
             </a:pPr>
             <a:r>
-              <a:rPr sz="1800" b="0">
-                <a:solidFill>
-                  <a:srgbClr val="1E293B"/>
-                </a:solidFill>
-                <a:latin typeface="Calibri"/>
-              </a:rPr>
-              <a:t>NameNode = namespace (noms + emplacements)</a:t>
-            </a:r>
-          </a:p>
-          <a:p>
-            <a:pPr>
-              <a:spcAft>
-                <a:spcPts val="1000"/>
-              </a:spcAft>
-            </a:pPr>
-            <a:r>
-              <a:rPr sz="1800" b="0">
-                <a:solidFill>
-                  <a:srgbClr val="1E293B"/>
-                </a:solidFill>
-                <a:latin typeface="Calibri"/>
-              </a:rPr>
-              <a:t>Tolérance aux pannes par réplication</a:t>
-            </a:r>
-          </a:p>
-        </p:txBody>
-      </p:sp>
-      <p:sp>
-        <p:nvSpPr>
-          <p:cNvPr id="10" name="Rectangle 9"/>
+              <a:rPr sz="1800" b="1">
+                <a:solidFill>
+                  <a:srgbClr val="0F5C4C"/>
+                </a:solidFill>
+                <a:latin typeface="Calibri"/>
+              </a:rPr>
+              <a:t>HDFS (distribué)</a:t>
+            </a:r>
+          </a:p>
+        </p:txBody>
+      </p:sp>
+      <p:sp>
+        <p:nvSpPr>
+          <p:cNvPr id="13" name="Rounded Rectangle 12"/>
           <p:cNvSpPr/>
           <p:nvPr/>
         </p:nvSpPr>
         <p:spPr>
           <a:xfrm>
-            <a:off x="0" y="6355080"/>
-            <a:ext cx="12191695" cy="502920"/>
-          </a:xfrm>
-          <a:prstGeom prst="rect">
-            <a:avLst/>
+            <a:off x="7589520" y="1965960"/>
+            <a:ext cx="2560320" cy="914400"/>
+          </a:xfrm>
+          <a:prstGeom prst="roundRect">
+            <a:avLst>
+              <a:gd name="adj" fmla="val 8000"/>
+            </a:avLst>
           </a:prstGeom>
           <a:solidFill>
             <a:srgbClr val="0F5C4C"/>
@@ -7178,14 +9956,467 @@
       </p:sp>
       <p:sp>
         <p:nvSpPr>
-          <p:cNvPr id="11" name="TextBox 10"/>
+          <p:cNvPr id="14" name="TextBox 13"/>
           <p:cNvSpPr txBox="1"/>
           <p:nvPr/>
         </p:nvSpPr>
         <p:spPr>
           <a:xfrm>
-            <a:off x="365760" y="6446520"/>
-            <a:ext cx="9144000" cy="320040"/>
+            <a:off x="7680960" y="2039112"/>
+            <a:ext cx="2377439" cy="777240"/>
+          </a:xfrm>
+          <a:prstGeom prst="rect">
+            <a:avLst/>
+          </a:prstGeom>
+          <a:noFill/>
+        </p:spPr>
+        <p:txBody>
+          <a:bodyPr wrap="square">
+            <a:spAutoFit/>
+          </a:bodyPr>
+          <a:lstStyle/>
+          <a:p>
+            <a:pPr algn="l">
+              <a:spcAft>
+                <a:spcPts val="400"/>
+              </a:spcAft>
+            </a:pPr>
+            <a:r>
+              <a:rPr sz="1400" b="1">
+                <a:solidFill>
+                  <a:srgbClr val="FFFFFF"/>
+                </a:solidFill>
+                <a:latin typeface="Calibri"/>
+              </a:rPr>
+              <a:t>NameNode</a:t>
+            </a:r>
+          </a:p>
+          <a:p>
+            <a:pPr algn="l">
+              <a:spcAft>
+                <a:spcPts val="200"/>
+              </a:spcAft>
+            </a:pPr>
+            <a:r>
+              <a:rPr sz="1100" b="0">
+                <a:solidFill>
+                  <a:srgbClr val="FFFFFF"/>
+                </a:solidFill>
+                <a:latin typeface="Calibri"/>
+              </a:rPr>
+              <a:t>namespace + blocs</a:t>
+            </a:r>
+          </a:p>
+        </p:txBody>
+      </p:sp>
+      <p:sp>
+        <p:nvSpPr>
+          <p:cNvPr id="15" name="Rounded Rectangle 14"/>
+          <p:cNvSpPr/>
+          <p:nvPr/>
+        </p:nvSpPr>
+        <p:spPr>
+          <a:xfrm>
+            <a:off x="6400800" y="3200400"/>
+            <a:ext cx="1645920" cy="1051560"/>
+          </a:xfrm>
+          <a:prstGeom prst="roundRect">
+            <a:avLst>
+              <a:gd name="adj" fmla="val 8000"/>
+            </a:avLst>
+          </a:prstGeom>
+          <a:solidFill>
+            <a:srgbClr val="147A66"/>
+          </a:solidFill>
+          <a:ln>
+            <a:noFill/>
+          </a:ln>
+        </p:spPr>
+        <p:style>
+          <a:lnRef idx="1">
+            <a:schemeClr val="accent1"/>
+          </a:lnRef>
+          <a:fillRef idx="3">
+            <a:schemeClr val="accent1"/>
+          </a:fillRef>
+          <a:effectRef idx="2">
+            <a:schemeClr val="accent1"/>
+          </a:effectRef>
+          <a:fontRef idx="minor">
+            <a:schemeClr val="lt1"/>
+          </a:fontRef>
+        </p:style>
+        <p:txBody>
+          <a:bodyPr rtlCol="0" anchor="ctr"/>
+          <a:lstStyle/>
+          <a:p>
+            <a:pPr algn="ctr"/>
+          </a:p>
+        </p:txBody>
+      </p:sp>
+      <p:sp>
+        <p:nvSpPr>
+          <p:cNvPr id="16" name="TextBox 15"/>
+          <p:cNvSpPr txBox="1"/>
+          <p:nvPr/>
+        </p:nvSpPr>
+        <p:spPr>
+          <a:xfrm>
+            <a:off x="6492240" y="3273552"/>
+            <a:ext cx="1463040" cy="914399"/>
+          </a:xfrm>
+          <a:prstGeom prst="rect">
+            <a:avLst/>
+          </a:prstGeom>
+          <a:noFill/>
+        </p:spPr>
+        <p:txBody>
+          <a:bodyPr wrap="square">
+            <a:spAutoFit/>
+          </a:bodyPr>
+          <a:lstStyle/>
+          <a:p>
+            <a:pPr algn="l">
+              <a:spcAft>
+                <a:spcPts val="400"/>
+              </a:spcAft>
+            </a:pPr>
+            <a:r>
+              <a:rPr sz="1400" b="1">
+                <a:solidFill>
+                  <a:srgbClr val="FFFFFF"/>
+                </a:solidFill>
+                <a:latin typeface="Calibri"/>
+              </a:rPr>
+              <a:t>DN1</a:t>
+            </a:r>
+          </a:p>
+          <a:p>
+            <a:pPr algn="l">
+              <a:spcAft>
+                <a:spcPts val="200"/>
+              </a:spcAft>
+            </a:pPr>
+            <a:r>
+              <a:rPr sz="1100" b="0">
+                <a:solidFill>
+                  <a:srgbClr val="FFFFFF"/>
+                </a:solidFill>
+                <a:latin typeface="Calibri"/>
+              </a:rPr>
+              <a:t>blocs répliqués</a:t>
+            </a:r>
+          </a:p>
+        </p:txBody>
+      </p:sp>
+      <p:sp>
+        <p:nvSpPr>
+          <p:cNvPr id="17" name="Rounded Rectangle 16"/>
+          <p:cNvSpPr/>
+          <p:nvPr/>
+        </p:nvSpPr>
+        <p:spPr>
+          <a:xfrm>
+            <a:off x="8229600" y="3200400"/>
+            <a:ext cx="1645920" cy="1051560"/>
+          </a:xfrm>
+          <a:prstGeom prst="roundRect">
+            <a:avLst>
+              <a:gd name="adj" fmla="val 8000"/>
+            </a:avLst>
+          </a:prstGeom>
+          <a:solidFill>
+            <a:srgbClr val="147A66"/>
+          </a:solidFill>
+          <a:ln>
+            <a:noFill/>
+          </a:ln>
+        </p:spPr>
+        <p:style>
+          <a:lnRef idx="1">
+            <a:schemeClr val="accent1"/>
+          </a:lnRef>
+          <a:fillRef idx="3">
+            <a:schemeClr val="accent1"/>
+          </a:fillRef>
+          <a:effectRef idx="2">
+            <a:schemeClr val="accent1"/>
+          </a:effectRef>
+          <a:fontRef idx="minor">
+            <a:schemeClr val="lt1"/>
+          </a:fontRef>
+        </p:style>
+        <p:txBody>
+          <a:bodyPr rtlCol="0" anchor="ctr"/>
+          <a:lstStyle/>
+          <a:p>
+            <a:pPr algn="ctr"/>
+          </a:p>
+        </p:txBody>
+      </p:sp>
+      <p:sp>
+        <p:nvSpPr>
+          <p:cNvPr id="18" name="TextBox 17"/>
+          <p:cNvSpPr txBox="1"/>
+          <p:nvPr/>
+        </p:nvSpPr>
+        <p:spPr>
+          <a:xfrm>
+            <a:off x="8321040" y="3273552"/>
+            <a:ext cx="1463040" cy="914399"/>
+          </a:xfrm>
+          <a:prstGeom prst="rect">
+            <a:avLst/>
+          </a:prstGeom>
+          <a:noFill/>
+        </p:spPr>
+        <p:txBody>
+          <a:bodyPr wrap="square">
+            <a:spAutoFit/>
+          </a:bodyPr>
+          <a:lstStyle/>
+          <a:p>
+            <a:pPr algn="l">
+              <a:spcAft>
+                <a:spcPts val="400"/>
+              </a:spcAft>
+            </a:pPr>
+            <a:r>
+              <a:rPr sz="1400" b="1">
+                <a:solidFill>
+                  <a:srgbClr val="FFFFFF"/>
+                </a:solidFill>
+                <a:latin typeface="Calibri"/>
+              </a:rPr>
+              <a:t>DN2</a:t>
+            </a:r>
+          </a:p>
+          <a:p>
+            <a:pPr algn="l">
+              <a:spcAft>
+                <a:spcPts val="200"/>
+              </a:spcAft>
+            </a:pPr>
+            <a:r>
+              <a:rPr sz="1100" b="0">
+                <a:solidFill>
+                  <a:srgbClr val="FFFFFF"/>
+                </a:solidFill>
+                <a:latin typeface="Calibri"/>
+              </a:rPr>
+              <a:t>blocs répliqués</a:t>
+            </a:r>
+          </a:p>
+        </p:txBody>
+      </p:sp>
+      <p:sp>
+        <p:nvSpPr>
+          <p:cNvPr id="19" name="Rounded Rectangle 18"/>
+          <p:cNvSpPr/>
+          <p:nvPr/>
+        </p:nvSpPr>
+        <p:spPr>
+          <a:xfrm>
+            <a:off x="10058400" y="3200400"/>
+            <a:ext cx="1645920" cy="1051560"/>
+          </a:xfrm>
+          <a:prstGeom prst="roundRect">
+            <a:avLst>
+              <a:gd name="adj" fmla="val 8000"/>
+            </a:avLst>
+          </a:prstGeom>
+          <a:solidFill>
+            <a:srgbClr val="147A66"/>
+          </a:solidFill>
+          <a:ln>
+            <a:noFill/>
+          </a:ln>
+        </p:spPr>
+        <p:style>
+          <a:lnRef idx="1">
+            <a:schemeClr val="accent1"/>
+          </a:lnRef>
+          <a:fillRef idx="3">
+            <a:schemeClr val="accent1"/>
+          </a:fillRef>
+          <a:effectRef idx="2">
+            <a:schemeClr val="accent1"/>
+          </a:effectRef>
+          <a:fontRef idx="minor">
+            <a:schemeClr val="lt1"/>
+          </a:fontRef>
+        </p:style>
+        <p:txBody>
+          <a:bodyPr rtlCol="0" anchor="ctr"/>
+          <a:lstStyle/>
+          <a:p>
+            <a:pPr algn="ctr"/>
+          </a:p>
+        </p:txBody>
+      </p:sp>
+      <p:sp>
+        <p:nvSpPr>
+          <p:cNvPr id="20" name="TextBox 19"/>
+          <p:cNvSpPr txBox="1"/>
+          <p:nvPr/>
+        </p:nvSpPr>
+        <p:spPr>
+          <a:xfrm>
+            <a:off x="10149840" y="3273552"/>
+            <a:ext cx="1463040" cy="914399"/>
+          </a:xfrm>
+          <a:prstGeom prst="rect">
+            <a:avLst/>
+          </a:prstGeom>
+          <a:noFill/>
+        </p:spPr>
+        <p:txBody>
+          <a:bodyPr wrap="square">
+            <a:spAutoFit/>
+          </a:bodyPr>
+          <a:lstStyle/>
+          <a:p>
+            <a:pPr algn="l">
+              <a:spcAft>
+                <a:spcPts val="400"/>
+              </a:spcAft>
+            </a:pPr>
+            <a:r>
+              <a:rPr sz="1400" b="1">
+                <a:solidFill>
+                  <a:srgbClr val="FFFFFF"/>
+                </a:solidFill>
+                <a:latin typeface="Calibri"/>
+              </a:rPr>
+              <a:t>DN3</a:t>
+            </a:r>
+          </a:p>
+          <a:p>
+            <a:pPr algn="l">
+              <a:spcAft>
+                <a:spcPts val="200"/>
+              </a:spcAft>
+            </a:pPr>
+            <a:r>
+              <a:rPr sz="1100" b="0">
+                <a:solidFill>
+                  <a:srgbClr val="FFFFFF"/>
+                </a:solidFill>
+                <a:latin typeface="Calibri"/>
+              </a:rPr>
+              <a:t>blocs répliqués</a:t>
+            </a:r>
+          </a:p>
+        </p:txBody>
+      </p:sp>
+      <p:sp>
+        <p:nvSpPr>
+          <p:cNvPr id="21" name="TextBox 20"/>
+          <p:cNvSpPr txBox="1"/>
+          <p:nvPr/>
+        </p:nvSpPr>
+        <p:spPr>
+          <a:xfrm>
+            <a:off x="6309360" y="4572000"/>
+            <a:ext cx="5303520" cy="1097280"/>
+          </a:xfrm>
+          <a:prstGeom prst="rect">
+            <a:avLst/>
+          </a:prstGeom>
+          <a:noFill/>
+        </p:spPr>
+        <p:txBody>
+          <a:bodyPr wrap="square">
+            <a:spAutoFit/>
+          </a:bodyPr>
+          <a:lstStyle/>
+          <a:p>
+            <a:pPr algn="l">
+              <a:spcAft>
+                <a:spcPts val="400"/>
+              </a:spcAft>
+            </a:pPr>
+            <a:r>
+              <a:rPr sz="1400" b="1">
+                <a:solidFill>
+                  <a:srgbClr val="1E293B"/>
+                </a:solidFill>
+                <a:latin typeface="Calibri"/>
+              </a:rPr>
+              <a:t>Fichier découpé en blocs + réplication</a:t>
+            </a:r>
+          </a:p>
+          <a:p>
+            <a:pPr algn="l">
+              <a:spcAft>
+                <a:spcPts val="600"/>
+              </a:spcAft>
+            </a:pPr>
+            <a:r>
+              <a:rPr sz="1400" b="0">
+                <a:solidFill>
+                  <a:srgbClr val="1E293B"/>
+                </a:solidFill>
+                <a:latin typeface="Calibri"/>
+              </a:rPr>
+              <a:t>Tolérance aux pannes sur plusieurs nœuds</a:t>
+            </a:r>
+          </a:p>
+        </p:txBody>
+      </p:sp>
+      <p:sp>
+        <p:nvSpPr>
+          <p:cNvPr id="22" name="Rectangle 21"/>
+          <p:cNvSpPr/>
+          <p:nvPr/>
+        </p:nvSpPr>
+        <p:spPr>
+          <a:xfrm>
+            <a:off x="0" y="6355080"/>
+            <a:ext cx="12191695" cy="502920"/>
+          </a:xfrm>
+          <a:prstGeom prst="rect">
+            <a:avLst/>
+          </a:prstGeom>
+          <a:solidFill>
+            <a:srgbClr val="0F5C4C"/>
+          </a:solidFill>
+          <a:ln>
+            <a:noFill/>
+          </a:ln>
+        </p:spPr>
+        <p:style>
+          <a:lnRef idx="1">
+            <a:schemeClr val="accent1"/>
+          </a:lnRef>
+          <a:fillRef idx="3">
+            <a:schemeClr val="accent1"/>
+          </a:fillRef>
+          <a:effectRef idx="2">
+            <a:schemeClr val="accent1"/>
+          </a:effectRef>
+          <a:fontRef idx="minor">
+            <a:schemeClr val="lt1"/>
+          </a:fontRef>
+        </p:style>
+        <p:txBody>
+          <a:bodyPr rtlCol="0" anchor="ctr"/>
+          <a:lstStyle/>
+          <a:p>
+            <a:pPr algn="ctr"/>
+          </a:p>
+        </p:txBody>
+      </p:sp>
+      <p:sp>
+        <p:nvSpPr>
+          <p:cNvPr id="23" name="TextBox 22"/>
+          <p:cNvSpPr txBox="1"/>
+          <p:nvPr/>
+        </p:nvSpPr>
+        <p:spPr>
+          <a:xfrm>
+            <a:off x="320040" y="6446520"/>
+            <a:ext cx="9326880" cy="320040"/>
           </a:xfrm>
           <a:prstGeom prst="rect">
             <a:avLst/>
@@ -7212,14 +10443,14 @@
       </p:sp>
       <p:sp>
         <p:nvSpPr>
-          <p:cNvPr id="12" name="TextBox 11"/>
+          <p:cNvPr id="24" name="TextBox 23"/>
           <p:cNvSpPr txBox="1"/>
           <p:nvPr/>
         </p:nvSpPr>
         <p:spPr>
           <a:xfrm>
-            <a:off x="10515600" y="6446520"/>
-            <a:ext cx="1371600" cy="320040"/>
+            <a:off x="10424160" y="6446520"/>
+            <a:ext cx="1463040" cy="320040"/>
           </a:xfrm>
           <a:prstGeom prst="rect">
             <a:avLst/>
@@ -7278,7 +10509,7 @@
             <a:avLst/>
           </a:prstGeom>
           <a:solidFill>
-            <a:srgbClr val="F8FAF9"/>
+            <a:srgbClr val="F1F5F4"/>
           </a:solidFill>
           <a:ln>
             <a:noFill/>
@@ -7315,7 +10546,7 @@
         <p:spPr>
           <a:xfrm>
             <a:off x="0" y="0"/>
-            <a:ext cx="12191695" cy="1051560"/>
+            <a:ext cx="12191695" cy="960120"/>
           </a:xfrm>
           <a:prstGeom prst="rect">
             <a:avLst/>
@@ -7357,8 +10588,8 @@
         </p:nvSpPr>
         <p:spPr>
           <a:xfrm>
-            <a:off x="0" y="1051560"/>
-            <a:ext cx="12191695" cy="73152"/>
+            <a:off x="0" y="960120"/>
+            <a:ext cx="12191695" cy="64008"/>
           </a:xfrm>
           <a:prstGeom prst="rect">
             <a:avLst/>
@@ -7400,8 +10631,8 @@
         </p:nvSpPr>
         <p:spPr>
           <a:xfrm>
-            <a:off x="457200" y="274320"/>
-            <a:ext cx="11247120" cy="640080"/>
+            <a:off x="411480" y="256032"/>
+            <a:ext cx="11338560" cy="548640"/>
           </a:xfrm>
           <a:prstGeom prst="rect">
             <a:avLst/>
@@ -7415,7 +10646,7 @@
           <a:lstStyle/>
           <a:p>
             <a:r>
-              <a:rPr sz="2800" b="1">
+              <a:rPr sz="2600" b="1">
                 <a:solidFill>
                   <a:srgbClr val="FFFFFF"/>
                 </a:solidFill>
@@ -7428,14 +10659,59 @@
       </p:sp>
       <p:sp>
         <p:nvSpPr>
-          <p:cNvPr id="6" name="TextBox 5"/>
+          <p:cNvPr id="6" name="Rounded Rectangle 5"/>
+          <p:cNvSpPr/>
+          <p:nvPr/>
+        </p:nvSpPr>
+        <p:spPr>
+          <a:xfrm>
+            <a:off x="457200" y="1371600"/>
+            <a:ext cx="3291840" cy="2011680"/>
+          </a:xfrm>
+          <a:prstGeom prst="roundRect">
+            <a:avLst>
+              <a:gd name="adj" fmla="val 8000"/>
+            </a:avLst>
+          </a:prstGeom>
+          <a:solidFill>
+            <a:srgbClr val="1D4E89"/>
+          </a:solidFill>
+          <a:ln>
+            <a:noFill/>
+          </a:ln>
+        </p:spPr>
+        <p:style>
+          <a:lnRef idx="1">
+            <a:schemeClr val="accent1"/>
+          </a:lnRef>
+          <a:fillRef idx="3">
+            <a:schemeClr val="accent1"/>
+          </a:fillRef>
+          <a:effectRef idx="2">
+            <a:schemeClr val="accent1"/>
+          </a:effectRef>
+          <a:fontRef idx="minor">
+            <a:schemeClr val="lt1"/>
+          </a:fontRef>
+        </p:style>
+        <p:txBody>
+          <a:bodyPr rtlCol="0" anchor="ctr"/>
+          <a:lstStyle/>
+          <a:p>
+            <a:pPr algn="ctr"/>
+          </a:p>
+        </p:txBody>
+      </p:sp>
+      <p:sp>
+        <p:nvSpPr>
+          <p:cNvPr id="7" name="TextBox 6"/>
           <p:cNvSpPr txBox="1"/>
           <p:nvPr/>
         </p:nvSpPr>
         <p:spPr>
           <a:xfrm>
-            <a:off x="457200" y="1371600"/>
-            <a:ext cx="11247120" cy="4754880"/>
+            <a:off x="548640" y="1444752"/>
+            <a:ext cx="3108960" cy="1874520"/>
           </a:xfrm>
           <a:prstGeom prst="rect">
             <a:avLst/>
@@ -7448,132 +10724,70 @@
           </a:bodyPr>
           <a:lstStyle/>
           <a:p>
-            <a:pPr>
+            <a:pPr algn="l">
               <a:spcAft>
-                <a:spcPts val="1000"/>
+                <a:spcPts val="400"/>
               </a:spcAft>
             </a:pPr>
             <a:r>
-              <a:rPr sz="2000" b="1">
-                <a:solidFill>
-                  <a:srgbClr val="0F5C4C"/>
-                </a:solidFill>
-                <a:latin typeface="Calibri"/>
-              </a:rPr>
-              <a:t>ResourceManager (master)</a:t>
-            </a:r>
-          </a:p>
-          <a:p>
-            <a:pPr>
+              <a:rPr sz="1400" b="1">
+                <a:solidFill>
+                  <a:srgbClr val="FFFFFF"/>
+                </a:solidFill>
+                <a:latin typeface="Calibri"/>
+              </a:rPr>
+              <a:t>1. Client</a:t>
+            </a:r>
+          </a:p>
+          <a:p>
+            <a:pPr algn="l">
               <a:spcAft>
-                <a:spcPts val="1000"/>
+                <a:spcPts val="200"/>
               </a:spcAft>
             </a:pPr>
             <a:r>
-              <a:rPr sz="2000" b="0">
-                <a:solidFill>
-                  <a:srgbClr val="1E293B"/>
-                </a:solidFill>
-                <a:latin typeface="Calibri"/>
-              </a:rPr>
-              <a:t>Reçoit la demande de job, connaît les ressources du cluster</a:t>
-            </a:r>
-          </a:p>
-          <a:p>
-            <a:pPr>
+              <a:rPr sz="1100" b="0">
+                <a:solidFill>
+                  <a:srgbClr val="FFFFFF"/>
+                </a:solidFill>
+                <a:latin typeface="Calibri"/>
+              </a:rPr>
+              <a:t>soumet le job</a:t>
+            </a:r>
+          </a:p>
+          <a:p>
+            <a:pPr algn="l">
               <a:spcAft>
-                <a:spcPts val="1000"/>
+                <a:spcPts val="200"/>
               </a:spcAft>
             </a:pPr>
             <a:r>
-              <a:rPr sz="2000" b="0">
-                <a:solidFill>
-                  <a:srgbClr val="1E293B"/>
-                </a:solidFill>
-                <a:latin typeface="Calibri"/>
-              </a:rPr>
-              <a:t>Alloue des conteneurs, démarre l’ApplicationMaster</a:t>
-            </a:r>
-          </a:p>
-          <a:p>
-            <a:pPr>
-              <a:spcAft>
-                <a:spcPts val="1000"/>
-              </a:spcAft>
-            </a:pPr>
-            <a:r>
-              <a:rPr sz="2000" b="1">
-                <a:solidFill>
-                  <a:srgbClr val="0F5C4C"/>
-                </a:solidFill>
-                <a:latin typeface="Calibri"/>
-              </a:rPr>
-              <a:t>NodeManager (chaque worker)</a:t>
-            </a:r>
-          </a:p>
-          <a:p>
-            <a:pPr>
-              <a:spcAft>
-                <a:spcPts val="1000"/>
-              </a:spcAft>
-            </a:pPr>
-            <a:r>
-              <a:rPr sz="2000" b="0">
-                <a:solidFill>
-                  <a:srgbClr val="1E293B"/>
-                </a:solidFill>
-                <a:latin typeface="Calibri"/>
-              </a:rPr>
-              <a:t>Lance et surveille les conteneurs sur sa machine</a:t>
-            </a:r>
-          </a:p>
-          <a:p>
-            <a:pPr>
-              <a:spcAft>
-                <a:spcPts val="1000"/>
-              </a:spcAft>
-            </a:pPr>
-            <a:r>
-              <a:rPr sz="2000" b="0">
-                <a:solidFill>
-                  <a:srgbClr val="1E293B"/>
-                </a:solidFill>
-                <a:latin typeface="Calibri"/>
-              </a:rPr>
-              <a:t>Remonte l’état au ResourceManager</a:t>
-            </a:r>
-          </a:p>
-          <a:p>
-            <a:pPr>
-              <a:spcAft>
-                <a:spcPts val="1000"/>
-              </a:spcAft>
-            </a:pPr>
-            <a:r>
-              <a:rPr sz="2000" b="1">
-                <a:solidFill>
-                  <a:srgbClr val="1E293B"/>
-                </a:solidFill>
-                <a:latin typeface="Calibri"/>
-              </a:rPr>
-              <a:t>En une phrase : RM orchestre, NM exécute localement.</a:t>
-            </a:r>
-          </a:p>
-        </p:txBody>
-      </p:sp>
-      <p:sp>
-        <p:nvSpPr>
-          <p:cNvPr id="7" name="Rectangle 6"/>
+              <a:rPr sz="1100" b="0">
+                <a:solidFill>
+                  <a:srgbClr val="FFFFFF"/>
+                </a:solidFill>
+                <a:latin typeface="Calibri"/>
+              </a:rPr>
+              <a:t>yarn jar … pi 4 1000</a:t>
+            </a:r>
+          </a:p>
+        </p:txBody>
+      </p:sp>
+      <p:sp>
+        <p:nvSpPr>
+          <p:cNvPr id="8" name="Rounded Rectangle 7"/>
           <p:cNvSpPr/>
           <p:nvPr/>
         </p:nvSpPr>
         <p:spPr>
           <a:xfrm>
-            <a:off x="0" y="6355080"/>
-            <a:ext cx="12191695" cy="502920"/>
-          </a:xfrm>
-          <a:prstGeom prst="rect">
-            <a:avLst/>
+            <a:off x="4389120" y="1371600"/>
+            <a:ext cx="3474720" cy="2011680"/>
+          </a:xfrm>
+          <a:prstGeom prst="roundRect">
+            <a:avLst>
+              <a:gd name="adj" fmla="val 8000"/>
+            </a:avLst>
           </a:prstGeom>
           <a:solidFill>
             <a:srgbClr val="0F5C4C"/>
@@ -7606,14 +10820,411 @@
       </p:sp>
       <p:sp>
         <p:nvSpPr>
-          <p:cNvPr id="8" name="TextBox 7"/>
+          <p:cNvPr id="9" name="TextBox 8"/>
           <p:cNvSpPr txBox="1"/>
           <p:nvPr/>
         </p:nvSpPr>
         <p:spPr>
           <a:xfrm>
-            <a:off x="365760" y="6446520"/>
-            <a:ext cx="9144000" cy="320040"/>
+            <a:off x="4480559" y="1444752"/>
+            <a:ext cx="3291839" cy="1874520"/>
+          </a:xfrm>
+          <a:prstGeom prst="rect">
+            <a:avLst/>
+          </a:prstGeom>
+          <a:noFill/>
+        </p:spPr>
+        <p:txBody>
+          <a:bodyPr wrap="square">
+            <a:spAutoFit/>
+          </a:bodyPr>
+          <a:lstStyle/>
+          <a:p>
+            <a:pPr algn="l">
+              <a:spcAft>
+                <a:spcPts val="400"/>
+              </a:spcAft>
+            </a:pPr>
+            <a:r>
+              <a:rPr sz="1400" b="1">
+                <a:solidFill>
+                  <a:srgbClr val="FFFFFF"/>
+                </a:solidFill>
+                <a:latin typeface="Calibri"/>
+              </a:rPr>
+              <a:t>2. ResourceManager</a:t>
+            </a:r>
+          </a:p>
+          <a:p>
+            <a:pPr algn="l">
+              <a:spcAft>
+                <a:spcPts val="200"/>
+              </a:spcAft>
+            </a:pPr>
+            <a:r>
+              <a:rPr sz="1100" b="0">
+                <a:solidFill>
+                  <a:srgbClr val="FFFFFF"/>
+                </a:solidFill>
+                <a:latin typeface="Calibri"/>
+              </a:rPr>
+              <a:t>master</a:t>
+            </a:r>
+          </a:p>
+          <a:p>
+            <a:pPr algn="l">
+              <a:spcAft>
+                <a:spcPts val="200"/>
+              </a:spcAft>
+            </a:pPr>
+            <a:r>
+              <a:rPr sz="1100" b="0">
+                <a:solidFill>
+                  <a:srgbClr val="FFFFFF"/>
+                </a:solidFill>
+                <a:latin typeface="Calibri"/>
+              </a:rPr>
+              <a:t>alloue conteneurs</a:t>
+            </a:r>
+          </a:p>
+          <a:p>
+            <a:pPr algn="l">
+              <a:spcAft>
+                <a:spcPts val="200"/>
+              </a:spcAft>
+            </a:pPr>
+            <a:r>
+              <a:rPr sz="1100" b="0">
+                <a:solidFill>
+                  <a:srgbClr val="FFFFFF"/>
+                </a:solidFill>
+                <a:latin typeface="Calibri"/>
+              </a:rPr>
+              <a:t>lance ApplicationMaster</a:t>
+            </a:r>
+          </a:p>
+        </p:txBody>
+      </p:sp>
+      <p:sp>
+        <p:nvSpPr>
+          <p:cNvPr id="10" name="Rounded Rectangle 9"/>
+          <p:cNvSpPr/>
+          <p:nvPr/>
+        </p:nvSpPr>
+        <p:spPr>
+          <a:xfrm>
+            <a:off x="8503920" y="1371600"/>
+            <a:ext cx="3200400" cy="2011680"/>
+          </a:xfrm>
+          <a:prstGeom prst="roundRect">
+            <a:avLst>
+              <a:gd name="adj" fmla="val 8000"/>
+            </a:avLst>
+          </a:prstGeom>
+          <a:solidFill>
+            <a:srgbClr val="147A66"/>
+          </a:solidFill>
+          <a:ln>
+            <a:noFill/>
+          </a:ln>
+        </p:spPr>
+        <p:style>
+          <a:lnRef idx="1">
+            <a:schemeClr val="accent1"/>
+          </a:lnRef>
+          <a:fillRef idx="3">
+            <a:schemeClr val="accent1"/>
+          </a:fillRef>
+          <a:effectRef idx="2">
+            <a:schemeClr val="accent1"/>
+          </a:effectRef>
+          <a:fontRef idx="minor">
+            <a:schemeClr val="lt1"/>
+          </a:fontRef>
+        </p:style>
+        <p:txBody>
+          <a:bodyPr rtlCol="0" anchor="ctr"/>
+          <a:lstStyle/>
+          <a:p>
+            <a:pPr algn="ctr"/>
+          </a:p>
+        </p:txBody>
+      </p:sp>
+      <p:sp>
+        <p:nvSpPr>
+          <p:cNvPr id="11" name="TextBox 10"/>
+          <p:cNvSpPr txBox="1"/>
+          <p:nvPr/>
+        </p:nvSpPr>
+        <p:spPr>
+          <a:xfrm>
+            <a:off x="8595360" y="1444752"/>
+            <a:ext cx="3017520" cy="1874520"/>
+          </a:xfrm>
+          <a:prstGeom prst="rect">
+            <a:avLst/>
+          </a:prstGeom>
+          <a:noFill/>
+        </p:spPr>
+        <p:txBody>
+          <a:bodyPr wrap="square">
+            <a:spAutoFit/>
+          </a:bodyPr>
+          <a:lstStyle/>
+          <a:p>
+            <a:pPr algn="l">
+              <a:spcAft>
+                <a:spcPts val="400"/>
+              </a:spcAft>
+            </a:pPr>
+            <a:r>
+              <a:rPr sz="1400" b="1">
+                <a:solidFill>
+                  <a:srgbClr val="FFFFFF"/>
+                </a:solidFill>
+                <a:latin typeface="Calibri"/>
+              </a:rPr>
+              <a:t>3. NodeManagers</a:t>
+            </a:r>
+          </a:p>
+          <a:p>
+            <a:pPr algn="l">
+              <a:spcAft>
+                <a:spcPts val="200"/>
+              </a:spcAft>
+            </a:pPr>
+            <a:r>
+              <a:rPr sz="1100" b="0">
+                <a:solidFill>
+                  <a:srgbClr val="FFFFFF"/>
+                </a:solidFill>
+                <a:latin typeface="Calibri"/>
+              </a:rPr>
+              <a:t>sur chaque worker</a:t>
+            </a:r>
+          </a:p>
+          <a:p>
+            <a:pPr algn="l">
+              <a:spcAft>
+                <a:spcPts val="200"/>
+              </a:spcAft>
+            </a:pPr>
+            <a:r>
+              <a:rPr sz="1100" b="0">
+                <a:solidFill>
+                  <a:srgbClr val="FFFFFF"/>
+                </a:solidFill>
+                <a:latin typeface="Calibri"/>
+              </a:rPr>
+              <a:t>exécutent les tâches</a:t>
+            </a:r>
+          </a:p>
+        </p:txBody>
+      </p:sp>
+      <p:pic>
+        <p:nvPicPr>
+          <p:cNvPr id="12" name="Picture 11" descr="screenshot-yarn.png"/>
+          <p:cNvPicPr>
+            <a:picLocks noChangeAspect="1"/>
+          </p:cNvPicPr>
+          <p:nvPr/>
+        </p:nvPicPr>
+        <p:blipFill>
+          <a:blip r:embed="rId2"/>
+          <a:stretch>
+            <a:fillRect/>
+          </a:stretch>
+        </p:blipFill>
+        <p:spPr>
+          <a:xfrm>
+            <a:off x="457200" y="3657600"/>
+            <a:ext cx="7132320" cy="5094514"/>
+          </a:xfrm>
+          <a:prstGeom prst="rect">
+            <a:avLst/>
+          </a:prstGeom>
+        </p:spPr>
+      </p:pic>
+      <p:sp>
+        <p:nvSpPr>
+          <p:cNvPr id="13" name="TextBox 12"/>
+          <p:cNvSpPr txBox="1"/>
+          <p:nvPr/>
+        </p:nvSpPr>
+        <p:spPr>
+          <a:xfrm>
+            <a:off x="457200" y="5897880"/>
+            <a:ext cx="7132320" cy="274320"/>
+          </a:xfrm>
+          <a:prstGeom prst="rect">
+            <a:avLst/>
+          </a:prstGeom>
+          <a:noFill/>
+        </p:spPr>
+        <p:txBody>
+          <a:bodyPr wrap="square">
+            <a:spAutoFit/>
+          </a:bodyPr>
+          <a:lstStyle/>
+          <a:p>
+            <a:pPr algn="l">
+              <a:spcAft>
+                <a:spcPts val="600"/>
+              </a:spcAft>
+            </a:pPr>
+            <a:r>
+              <a:rPr sz="1100" b="0">
+                <a:solidFill>
+                  <a:srgbClr val="64748B"/>
+                </a:solidFill>
+                <a:latin typeface="Calibri"/>
+              </a:rPr>
+              <a:t>UI YARN — http://localhost:8088</a:t>
+            </a:r>
+          </a:p>
+        </p:txBody>
+      </p:sp>
+      <p:sp>
+        <p:nvSpPr>
+          <p:cNvPr id="14" name="TextBox 13"/>
+          <p:cNvSpPr txBox="1"/>
+          <p:nvPr/>
+        </p:nvSpPr>
+        <p:spPr>
+          <a:xfrm>
+            <a:off x="7772400" y="3657600"/>
+            <a:ext cx="4023360" cy="2286000"/>
+          </a:xfrm>
+          <a:prstGeom prst="rect">
+            <a:avLst/>
+          </a:prstGeom>
+          <a:noFill/>
+        </p:spPr>
+        <p:txBody>
+          <a:bodyPr wrap="square">
+            <a:spAutoFit/>
+          </a:bodyPr>
+          <a:lstStyle/>
+          <a:p>
+            <a:pPr algn="l">
+              <a:spcAft>
+                <a:spcPts val="800"/>
+              </a:spcAft>
+            </a:pPr>
+            <a:r>
+              <a:rPr sz="1600" b="1">
+                <a:solidFill>
+                  <a:srgbClr val="0F5C4C"/>
+                </a:solidFill>
+                <a:latin typeface="Calibri"/>
+              </a:rPr>
+              <a:t>En résumé</a:t>
+            </a:r>
+          </a:p>
+          <a:p>
+            <a:pPr algn="l">
+              <a:spcAft>
+                <a:spcPts val="600"/>
+              </a:spcAft>
+            </a:pPr>
+            <a:r>
+              <a:rPr sz="1500" b="0">
+                <a:solidFill>
+                  <a:srgbClr val="1E293B"/>
+                </a:solidFill>
+                <a:latin typeface="Calibri"/>
+              </a:rPr>
+              <a:t>RM orchestre</a:t>
+            </a:r>
+          </a:p>
+          <a:p>
+            <a:pPr algn="l">
+              <a:spcAft>
+                <a:spcPts val="1000"/>
+              </a:spcAft>
+            </a:pPr>
+            <a:r>
+              <a:rPr sz="1500" b="0">
+                <a:solidFill>
+                  <a:srgbClr val="1E293B"/>
+                </a:solidFill>
+                <a:latin typeface="Calibri"/>
+              </a:rPr>
+              <a:t>NM exécute localement</a:t>
+            </a:r>
+          </a:p>
+          <a:p>
+            <a:pPr algn="l">
+              <a:spcAft>
+                <a:spcPts val="600"/>
+              </a:spcAft>
+            </a:pPr>
+            <a:r>
+              <a:rPr sz="1400" b="1">
+                <a:solidFill>
+                  <a:srgbClr val="1D4E89"/>
+                </a:solidFill>
+                <a:latin typeface="Calibri"/>
+                <a:hlinkClick r:id="rId3"/>
+              </a:rPr>
+              <a:t>Ouvrir l’UI →</a:t>
+            </a:r>
+          </a:p>
+        </p:txBody>
+      </p:sp>
+      <p:sp>
+        <p:nvSpPr>
+          <p:cNvPr id="15" name="Rectangle 14"/>
+          <p:cNvSpPr/>
+          <p:nvPr/>
+        </p:nvSpPr>
+        <p:spPr>
+          <a:xfrm>
+            <a:off x="0" y="6355080"/>
+            <a:ext cx="12191695" cy="502920"/>
+          </a:xfrm>
+          <a:prstGeom prst="rect">
+            <a:avLst/>
+          </a:prstGeom>
+          <a:solidFill>
+            <a:srgbClr val="0F5C4C"/>
+          </a:solidFill>
+          <a:ln>
+            <a:noFill/>
+          </a:ln>
+        </p:spPr>
+        <p:style>
+          <a:lnRef idx="1">
+            <a:schemeClr val="accent1"/>
+          </a:lnRef>
+          <a:fillRef idx="3">
+            <a:schemeClr val="accent1"/>
+          </a:fillRef>
+          <a:effectRef idx="2">
+            <a:schemeClr val="accent1"/>
+          </a:effectRef>
+          <a:fontRef idx="minor">
+            <a:schemeClr val="lt1"/>
+          </a:fontRef>
+        </p:style>
+        <p:txBody>
+          <a:bodyPr rtlCol="0" anchor="ctr"/>
+          <a:lstStyle/>
+          <a:p>
+            <a:pPr algn="ctr"/>
+          </a:p>
+        </p:txBody>
+      </p:sp>
+      <p:sp>
+        <p:nvSpPr>
+          <p:cNvPr id="16" name="TextBox 15"/>
+          <p:cNvSpPr txBox="1"/>
+          <p:nvPr/>
+        </p:nvSpPr>
+        <p:spPr>
+          <a:xfrm>
+            <a:off x="320040" y="6446520"/>
+            <a:ext cx="9326880" cy="320040"/>
           </a:xfrm>
           <a:prstGeom prst="rect">
             <a:avLst/>
@@ -7640,14 +11251,14 @@
       </p:sp>
       <p:sp>
         <p:nvSpPr>
-          <p:cNvPr id="9" name="TextBox 8"/>
+          <p:cNvPr id="17" name="TextBox 16"/>
           <p:cNvSpPr txBox="1"/>
           <p:nvPr/>
         </p:nvSpPr>
         <p:spPr>
           <a:xfrm>
-            <a:off x="10515600" y="6446520"/>
-            <a:ext cx="1371600" cy="320040"/>
+            <a:off x="10424160" y="6446520"/>
+            <a:ext cx="1463040" cy="320040"/>
           </a:xfrm>
           <a:prstGeom prst="rect">
             <a:avLst/>
@@ -7706,7 +11317,7 @@
             <a:avLst/>
           </a:prstGeom>
           <a:solidFill>
-            <a:srgbClr val="F8FAF9"/>
+            <a:srgbClr val="F1F5F4"/>
           </a:solidFill>
           <a:ln>
             <a:noFill/>
@@ -7743,7 +11354,7 @@
         <p:spPr>
           <a:xfrm>
             <a:off x="0" y="0"/>
-            <a:ext cx="12191695" cy="1051560"/>
+            <a:ext cx="12191695" cy="960120"/>
           </a:xfrm>
           <a:prstGeom prst="rect">
             <a:avLst/>
@@ -7785,8 +11396,8 @@
         </p:nvSpPr>
         <p:spPr>
           <a:xfrm>
-            <a:off x="0" y="1051560"/>
-            <a:ext cx="12191695" cy="73152"/>
+            <a:off x="0" y="960120"/>
+            <a:ext cx="12191695" cy="64008"/>
           </a:xfrm>
           <a:prstGeom prst="rect">
             <a:avLst/>
@@ -7828,8 +11439,8 @@
         </p:nvSpPr>
         <p:spPr>
           <a:xfrm>
-            <a:off x="457200" y="274320"/>
-            <a:ext cx="11247120" cy="640080"/>
+            <a:off x="411480" y="256032"/>
+            <a:ext cx="11338560" cy="548640"/>
           </a:xfrm>
           <a:prstGeom prst="rect">
             <a:avLst/>
@@ -7843,165 +11454,32 @@
           <a:lstStyle/>
           <a:p>
             <a:r>
-              <a:rPr sz="2800" b="1">
+              <a:rPr sz="2600" b="1">
                 <a:solidFill>
                   <a:srgbClr val="FFFFFF"/>
                 </a:solidFill>
                 <a:latin typeface="Calibri"/>
               </a:rPr>
-              <a:t>Architecture : 1 master + 5 workers</a:t>
-            </a:r>
-          </a:p>
-        </p:txBody>
-      </p:sp>
-      <p:sp>
-        <p:nvSpPr>
-          <p:cNvPr id="6" name="TextBox 5"/>
-          <p:cNvSpPr txBox="1"/>
-          <p:nvPr/>
-        </p:nvSpPr>
-        <p:spPr>
-          <a:xfrm>
-            <a:off x="457200" y="1371600"/>
-            <a:ext cx="11247120" cy="4754880"/>
-          </a:xfrm>
-          <a:prstGeom prst="rect">
-            <a:avLst/>
-          </a:prstGeom>
-          <a:noFill/>
-        </p:spPr>
-        <p:txBody>
-          <a:bodyPr wrap="square">
-            <a:spAutoFit/>
-          </a:bodyPr>
-          <a:lstStyle/>
-          <a:p>
-            <a:pPr>
-              <a:spcAft>
-                <a:spcPts val="1000"/>
-              </a:spcAft>
-            </a:pPr>
-            <a:r>
-              <a:rPr sz="2000" b="1">
-                <a:solidFill>
-                  <a:srgbClr val="0F5C4C"/>
-                </a:solidFill>
-                <a:latin typeface="Calibri"/>
-              </a:rPr>
-              <a:t>hadoop-master</a:t>
-            </a:r>
-          </a:p>
-          <a:p>
-            <a:pPr>
-              <a:spcAft>
-                <a:spcPts val="1000"/>
-              </a:spcAft>
-            </a:pPr>
-            <a:r>
-              <a:rPr sz="2000" b="0">
-                <a:solidFill>
-                  <a:srgbClr val="1E293B"/>
-                </a:solidFill>
-                <a:latin typeface="Calibri"/>
-              </a:rPr>
-              <a:t>NameNode + ResourceManager + SecondaryNameNode</a:t>
-            </a:r>
-          </a:p>
-          <a:p>
-            <a:pPr>
-              <a:spcAft>
-                <a:spcPts val="1000"/>
-              </a:spcAft>
-            </a:pPr>
-            <a:r>
-              <a:rPr sz="2000" b="1">
-                <a:solidFill>
-                  <a:srgbClr val="0F5C4C"/>
-                </a:solidFill>
-                <a:latin typeface="Calibri"/>
-              </a:rPr>
-              <a:t>hadoop-worker1 … worker5</a:t>
-            </a:r>
-          </a:p>
-          <a:p>
-            <a:pPr>
-              <a:spcAft>
-                <a:spcPts val="1000"/>
-              </a:spcAft>
-            </a:pPr>
-            <a:r>
-              <a:rPr sz="2000" b="0">
-                <a:solidFill>
-                  <a:srgbClr val="1E293B"/>
-                </a:solidFill>
-                <a:latin typeface="Calibri"/>
-              </a:rPr>
-              <a:t>Chaque worker : DataNode + NodeManager</a:t>
-            </a:r>
-          </a:p>
-          <a:p>
-            <a:pPr>
-              <a:spcAft>
-                <a:spcPts val="1000"/>
-              </a:spcAft>
-            </a:pPr>
-            <a:r>
-              <a:rPr sz="2000" b="1">
-                <a:solidFill>
-                  <a:srgbClr val="1E293B"/>
-                </a:solidFill>
-                <a:latin typeface="Calibri"/>
-              </a:rPr>
-              <a:t>Réseau Docker : hadoop-net</a:t>
-            </a:r>
-          </a:p>
-          <a:p>
-            <a:pPr>
-              <a:spcAft>
-                <a:spcPts val="1000"/>
-              </a:spcAft>
-            </a:pPr>
-            <a:r>
-              <a:rPr sz="2000" b="0">
-                <a:solidFill>
-                  <a:srgbClr val="1E293B"/>
-                </a:solidFill>
-                <a:latin typeface="Calibri"/>
-              </a:rPr>
-              <a:t>Ports : 9870 (UI HDFS) · 8088 (UI YARN) · 9000 (HDFS RPC)</a:t>
-            </a:r>
-          </a:p>
-          <a:p>
-            <a:pPr>
-              <a:spcAft>
-                <a:spcPts val="1000"/>
-              </a:spcAft>
-            </a:pPr>
-            <a:r>
-              <a:rPr sz="2000" b="0">
-                <a:solidFill>
-                  <a:srgbClr val="1E293B"/>
-                </a:solidFill>
-                <a:latin typeface="Calibri"/>
-              </a:rPr>
-              <a:t>Image : leshadoopriders/hadoop-tp-g4:1.0</a:t>
-            </a:r>
-          </a:p>
-        </p:txBody>
-      </p:sp>
-      <p:sp>
-        <p:nvSpPr>
-          <p:cNvPr id="7" name="Rectangle 6"/>
+              <a:t>Architecture Docker — 1 master + 5 workers</a:t>
+            </a:r>
+          </a:p>
+        </p:txBody>
+      </p:sp>
+      <p:sp>
+        <p:nvSpPr>
+          <p:cNvPr id="6" name="Rounded Rectangle 5"/>
           <p:cNvSpPr/>
           <p:nvPr/>
         </p:nvSpPr>
         <p:spPr>
           <a:xfrm>
-            <a:off x="0" y="6355080"/>
-            <a:ext cx="12191695" cy="502920"/>
-          </a:xfrm>
-          <a:prstGeom prst="rect">
-            <a:avLst/>
+            <a:off x="3200400" y="1234440"/>
+            <a:ext cx="5760720" cy="1417320"/>
+          </a:xfrm>
+          <a:prstGeom prst="roundRect">
+            <a:avLst>
+              <a:gd name="adj" fmla="val 8000"/>
+            </a:avLst>
           </a:prstGeom>
           <a:solidFill>
             <a:srgbClr val="0F5C4C"/>
@@ -8034,14 +11512,781 @@
       </p:sp>
       <p:sp>
         <p:nvSpPr>
-          <p:cNvPr id="8" name="TextBox 7"/>
+          <p:cNvPr id="7" name="TextBox 6"/>
           <p:cNvSpPr txBox="1"/>
           <p:nvPr/>
         </p:nvSpPr>
         <p:spPr>
           <a:xfrm>
-            <a:off x="365760" y="6446520"/>
-            <a:ext cx="9144000" cy="320040"/>
+            <a:off x="3291840" y="1307592"/>
+            <a:ext cx="5577840" cy="1280160"/>
+          </a:xfrm>
+          <a:prstGeom prst="rect">
+            <a:avLst/>
+          </a:prstGeom>
+          <a:noFill/>
+        </p:spPr>
+        <p:txBody>
+          <a:bodyPr wrap="square">
+            <a:spAutoFit/>
+          </a:bodyPr>
+          <a:lstStyle/>
+          <a:p>
+            <a:pPr algn="l">
+              <a:spcAft>
+                <a:spcPts val="400"/>
+              </a:spcAft>
+            </a:pPr>
+            <a:r>
+              <a:rPr sz="1400" b="1">
+                <a:solidFill>
+                  <a:srgbClr val="FFFFFF"/>
+                </a:solidFill>
+                <a:latin typeface="Calibri"/>
+              </a:rPr>
+              <a:t>hadoop-master</a:t>
+            </a:r>
+          </a:p>
+          <a:p>
+            <a:pPr algn="l">
+              <a:spcAft>
+                <a:spcPts val="200"/>
+              </a:spcAft>
+            </a:pPr>
+            <a:r>
+              <a:rPr sz="1100" b="0">
+                <a:solidFill>
+                  <a:srgbClr val="FFFFFF"/>
+                </a:solidFill>
+                <a:latin typeface="Calibri"/>
+              </a:rPr>
+              <a:t>NameNode · ResourceManager · SecondaryNameNode</a:t>
+            </a:r>
+          </a:p>
+          <a:p>
+            <a:pPr algn="l">
+              <a:spcAft>
+                <a:spcPts val="200"/>
+              </a:spcAft>
+            </a:pPr>
+            <a:r>
+              <a:rPr sz="1100" b="0">
+                <a:solidFill>
+                  <a:srgbClr val="FFFFFF"/>
+                </a:solidFill>
+                <a:latin typeface="Calibri"/>
+              </a:rPr>
+              <a:t>Ports : 9870 · 8088 · 9000</a:t>
+            </a:r>
+          </a:p>
+        </p:txBody>
+      </p:sp>
+      <p:sp>
+        <p:nvSpPr>
+          <p:cNvPr id="8" name="Rounded Rectangle 7"/>
+          <p:cNvSpPr/>
+          <p:nvPr/>
+        </p:nvSpPr>
+        <p:spPr>
+          <a:xfrm>
+            <a:off x="411480" y="3017520"/>
+            <a:ext cx="2194560" cy="1325880"/>
+          </a:xfrm>
+          <a:prstGeom prst="roundRect">
+            <a:avLst>
+              <a:gd name="adj" fmla="val 8000"/>
+            </a:avLst>
+          </a:prstGeom>
+          <a:solidFill>
+            <a:srgbClr val="147A66"/>
+          </a:solidFill>
+          <a:ln>
+            <a:noFill/>
+          </a:ln>
+        </p:spPr>
+        <p:style>
+          <a:lnRef idx="1">
+            <a:schemeClr val="accent1"/>
+          </a:lnRef>
+          <a:fillRef idx="3">
+            <a:schemeClr val="accent1"/>
+          </a:fillRef>
+          <a:effectRef idx="2">
+            <a:schemeClr val="accent1"/>
+          </a:effectRef>
+          <a:fontRef idx="minor">
+            <a:schemeClr val="lt1"/>
+          </a:fontRef>
+        </p:style>
+        <p:txBody>
+          <a:bodyPr rtlCol="0" anchor="ctr"/>
+          <a:lstStyle/>
+          <a:p>
+            <a:pPr algn="ctr"/>
+          </a:p>
+        </p:txBody>
+      </p:sp>
+      <p:sp>
+        <p:nvSpPr>
+          <p:cNvPr id="9" name="TextBox 8"/>
+          <p:cNvSpPr txBox="1"/>
+          <p:nvPr/>
+        </p:nvSpPr>
+        <p:spPr>
+          <a:xfrm>
+            <a:off x="502920" y="3090672"/>
+            <a:ext cx="2011679" cy="1188720"/>
+          </a:xfrm>
+          <a:prstGeom prst="rect">
+            <a:avLst/>
+          </a:prstGeom>
+          <a:noFill/>
+        </p:spPr>
+        <p:txBody>
+          <a:bodyPr wrap="square">
+            <a:spAutoFit/>
+          </a:bodyPr>
+          <a:lstStyle/>
+          <a:p>
+            <a:pPr algn="l">
+              <a:spcAft>
+                <a:spcPts val="400"/>
+              </a:spcAft>
+            </a:pPr>
+            <a:r>
+              <a:rPr sz="1400" b="1">
+                <a:solidFill>
+                  <a:srgbClr val="FFFFFF"/>
+                </a:solidFill>
+                <a:latin typeface="Calibri"/>
+              </a:rPr>
+              <a:t>worker1</a:t>
+            </a:r>
+          </a:p>
+          <a:p>
+            <a:pPr algn="l">
+              <a:spcAft>
+                <a:spcPts val="200"/>
+              </a:spcAft>
+            </a:pPr>
+            <a:r>
+              <a:rPr sz="1100" b="0">
+                <a:solidFill>
+                  <a:srgbClr val="FFFFFF"/>
+                </a:solidFill>
+                <a:latin typeface="Calibri"/>
+              </a:rPr>
+              <a:t>DataNode</a:t>
+            </a:r>
+          </a:p>
+          <a:p>
+            <a:pPr algn="l">
+              <a:spcAft>
+                <a:spcPts val="200"/>
+              </a:spcAft>
+            </a:pPr>
+            <a:r>
+              <a:rPr sz="1100" b="0">
+                <a:solidFill>
+                  <a:srgbClr val="FFFFFF"/>
+                </a:solidFill>
+                <a:latin typeface="Calibri"/>
+              </a:rPr>
+              <a:t>NodeManager</a:t>
+            </a:r>
+          </a:p>
+        </p:txBody>
+      </p:sp>
+      <p:sp>
+        <p:nvSpPr>
+          <p:cNvPr id="10" name="Rounded Rectangle 9"/>
+          <p:cNvSpPr/>
+          <p:nvPr/>
+        </p:nvSpPr>
+        <p:spPr>
+          <a:xfrm>
+            <a:off x="2743200" y="3017520"/>
+            <a:ext cx="2194560" cy="1325880"/>
+          </a:xfrm>
+          <a:prstGeom prst="roundRect">
+            <a:avLst>
+              <a:gd name="adj" fmla="val 8000"/>
+            </a:avLst>
+          </a:prstGeom>
+          <a:solidFill>
+            <a:srgbClr val="147A66"/>
+          </a:solidFill>
+          <a:ln>
+            <a:noFill/>
+          </a:ln>
+        </p:spPr>
+        <p:style>
+          <a:lnRef idx="1">
+            <a:schemeClr val="accent1"/>
+          </a:lnRef>
+          <a:fillRef idx="3">
+            <a:schemeClr val="accent1"/>
+          </a:fillRef>
+          <a:effectRef idx="2">
+            <a:schemeClr val="accent1"/>
+          </a:effectRef>
+          <a:fontRef idx="minor">
+            <a:schemeClr val="lt1"/>
+          </a:fontRef>
+        </p:style>
+        <p:txBody>
+          <a:bodyPr rtlCol="0" anchor="ctr"/>
+          <a:lstStyle/>
+          <a:p>
+            <a:pPr algn="ctr"/>
+          </a:p>
+        </p:txBody>
+      </p:sp>
+      <p:sp>
+        <p:nvSpPr>
+          <p:cNvPr id="11" name="TextBox 10"/>
+          <p:cNvSpPr txBox="1"/>
+          <p:nvPr/>
+        </p:nvSpPr>
+        <p:spPr>
+          <a:xfrm>
+            <a:off x="2834640" y="3090672"/>
+            <a:ext cx="2011679" cy="1188720"/>
+          </a:xfrm>
+          <a:prstGeom prst="rect">
+            <a:avLst/>
+          </a:prstGeom>
+          <a:noFill/>
+        </p:spPr>
+        <p:txBody>
+          <a:bodyPr wrap="square">
+            <a:spAutoFit/>
+          </a:bodyPr>
+          <a:lstStyle/>
+          <a:p>
+            <a:pPr algn="l">
+              <a:spcAft>
+                <a:spcPts val="400"/>
+              </a:spcAft>
+            </a:pPr>
+            <a:r>
+              <a:rPr sz="1400" b="1">
+                <a:solidFill>
+                  <a:srgbClr val="FFFFFF"/>
+                </a:solidFill>
+                <a:latin typeface="Calibri"/>
+              </a:rPr>
+              <a:t>worker2</a:t>
+            </a:r>
+          </a:p>
+          <a:p>
+            <a:pPr algn="l">
+              <a:spcAft>
+                <a:spcPts val="200"/>
+              </a:spcAft>
+            </a:pPr>
+            <a:r>
+              <a:rPr sz="1100" b="0">
+                <a:solidFill>
+                  <a:srgbClr val="FFFFFF"/>
+                </a:solidFill>
+                <a:latin typeface="Calibri"/>
+              </a:rPr>
+              <a:t>DataNode</a:t>
+            </a:r>
+          </a:p>
+          <a:p>
+            <a:pPr algn="l">
+              <a:spcAft>
+                <a:spcPts val="200"/>
+              </a:spcAft>
+            </a:pPr>
+            <a:r>
+              <a:rPr sz="1100" b="0">
+                <a:solidFill>
+                  <a:srgbClr val="FFFFFF"/>
+                </a:solidFill>
+                <a:latin typeface="Calibri"/>
+              </a:rPr>
+              <a:t>NodeManager</a:t>
+            </a:r>
+          </a:p>
+        </p:txBody>
+      </p:sp>
+      <p:sp>
+        <p:nvSpPr>
+          <p:cNvPr id="12" name="Rounded Rectangle 11"/>
+          <p:cNvSpPr/>
+          <p:nvPr/>
+        </p:nvSpPr>
+        <p:spPr>
+          <a:xfrm>
+            <a:off x="5074920" y="3017520"/>
+            <a:ext cx="2194560" cy="1325880"/>
+          </a:xfrm>
+          <a:prstGeom prst="roundRect">
+            <a:avLst>
+              <a:gd name="adj" fmla="val 8000"/>
+            </a:avLst>
+          </a:prstGeom>
+          <a:solidFill>
+            <a:srgbClr val="147A66"/>
+          </a:solidFill>
+          <a:ln>
+            <a:noFill/>
+          </a:ln>
+        </p:spPr>
+        <p:style>
+          <a:lnRef idx="1">
+            <a:schemeClr val="accent1"/>
+          </a:lnRef>
+          <a:fillRef idx="3">
+            <a:schemeClr val="accent1"/>
+          </a:fillRef>
+          <a:effectRef idx="2">
+            <a:schemeClr val="accent1"/>
+          </a:effectRef>
+          <a:fontRef idx="minor">
+            <a:schemeClr val="lt1"/>
+          </a:fontRef>
+        </p:style>
+        <p:txBody>
+          <a:bodyPr rtlCol="0" anchor="ctr"/>
+          <a:lstStyle/>
+          <a:p>
+            <a:pPr algn="ctr"/>
+          </a:p>
+        </p:txBody>
+      </p:sp>
+      <p:sp>
+        <p:nvSpPr>
+          <p:cNvPr id="13" name="TextBox 12"/>
+          <p:cNvSpPr txBox="1"/>
+          <p:nvPr/>
+        </p:nvSpPr>
+        <p:spPr>
+          <a:xfrm>
+            <a:off x="5166359" y="3090672"/>
+            <a:ext cx="2011679" cy="1188720"/>
+          </a:xfrm>
+          <a:prstGeom prst="rect">
+            <a:avLst/>
+          </a:prstGeom>
+          <a:noFill/>
+        </p:spPr>
+        <p:txBody>
+          <a:bodyPr wrap="square">
+            <a:spAutoFit/>
+          </a:bodyPr>
+          <a:lstStyle/>
+          <a:p>
+            <a:pPr algn="l">
+              <a:spcAft>
+                <a:spcPts val="400"/>
+              </a:spcAft>
+            </a:pPr>
+            <a:r>
+              <a:rPr sz="1400" b="1">
+                <a:solidFill>
+                  <a:srgbClr val="FFFFFF"/>
+                </a:solidFill>
+                <a:latin typeface="Calibri"/>
+              </a:rPr>
+              <a:t>worker3</a:t>
+            </a:r>
+          </a:p>
+          <a:p>
+            <a:pPr algn="l">
+              <a:spcAft>
+                <a:spcPts val="200"/>
+              </a:spcAft>
+            </a:pPr>
+            <a:r>
+              <a:rPr sz="1100" b="0">
+                <a:solidFill>
+                  <a:srgbClr val="FFFFFF"/>
+                </a:solidFill>
+                <a:latin typeface="Calibri"/>
+              </a:rPr>
+              <a:t>DataNode</a:t>
+            </a:r>
+          </a:p>
+          <a:p>
+            <a:pPr algn="l">
+              <a:spcAft>
+                <a:spcPts val="200"/>
+              </a:spcAft>
+            </a:pPr>
+            <a:r>
+              <a:rPr sz="1100" b="0">
+                <a:solidFill>
+                  <a:srgbClr val="FFFFFF"/>
+                </a:solidFill>
+                <a:latin typeface="Calibri"/>
+              </a:rPr>
+              <a:t>NodeManager</a:t>
+            </a:r>
+          </a:p>
+        </p:txBody>
+      </p:sp>
+      <p:sp>
+        <p:nvSpPr>
+          <p:cNvPr id="14" name="Rounded Rectangle 13"/>
+          <p:cNvSpPr/>
+          <p:nvPr/>
+        </p:nvSpPr>
+        <p:spPr>
+          <a:xfrm>
+            <a:off x="7406640" y="3017520"/>
+            <a:ext cx="2194560" cy="1325880"/>
+          </a:xfrm>
+          <a:prstGeom prst="roundRect">
+            <a:avLst>
+              <a:gd name="adj" fmla="val 8000"/>
+            </a:avLst>
+          </a:prstGeom>
+          <a:solidFill>
+            <a:srgbClr val="147A66"/>
+          </a:solidFill>
+          <a:ln>
+            <a:noFill/>
+          </a:ln>
+        </p:spPr>
+        <p:style>
+          <a:lnRef idx="1">
+            <a:schemeClr val="accent1"/>
+          </a:lnRef>
+          <a:fillRef idx="3">
+            <a:schemeClr val="accent1"/>
+          </a:fillRef>
+          <a:effectRef idx="2">
+            <a:schemeClr val="accent1"/>
+          </a:effectRef>
+          <a:fontRef idx="minor">
+            <a:schemeClr val="lt1"/>
+          </a:fontRef>
+        </p:style>
+        <p:txBody>
+          <a:bodyPr rtlCol="0" anchor="ctr"/>
+          <a:lstStyle/>
+          <a:p>
+            <a:pPr algn="ctr"/>
+          </a:p>
+        </p:txBody>
+      </p:sp>
+      <p:sp>
+        <p:nvSpPr>
+          <p:cNvPr id="15" name="TextBox 14"/>
+          <p:cNvSpPr txBox="1"/>
+          <p:nvPr/>
+        </p:nvSpPr>
+        <p:spPr>
+          <a:xfrm>
+            <a:off x="7498079" y="3090672"/>
+            <a:ext cx="2011679" cy="1188720"/>
+          </a:xfrm>
+          <a:prstGeom prst="rect">
+            <a:avLst/>
+          </a:prstGeom>
+          <a:noFill/>
+        </p:spPr>
+        <p:txBody>
+          <a:bodyPr wrap="square">
+            <a:spAutoFit/>
+          </a:bodyPr>
+          <a:lstStyle/>
+          <a:p>
+            <a:pPr algn="l">
+              <a:spcAft>
+                <a:spcPts val="400"/>
+              </a:spcAft>
+            </a:pPr>
+            <a:r>
+              <a:rPr sz="1400" b="1">
+                <a:solidFill>
+                  <a:srgbClr val="FFFFFF"/>
+                </a:solidFill>
+                <a:latin typeface="Calibri"/>
+              </a:rPr>
+              <a:t>worker4</a:t>
+            </a:r>
+          </a:p>
+          <a:p>
+            <a:pPr algn="l">
+              <a:spcAft>
+                <a:spcPts val="200"/>
+              </a:spcAft>
+            </a:pPr>
+            <a:r>
+              <a:rPr sz="1100" b="0">
+                <a:solidFill>
+                  <a:srgbClr val="FFFFFF"/>
+                </a:solidFill>
+                <a:latin typeface="Calibri"/>
+              </a:rPr>
+              <a:t>DataNode</a:t>
+            </a:r>
+          </a:p>
+          <a:p>
+            <a:pPr algn="l">
+              <a:spcAft>
+                <a:spcPts val="200"/>
+              </a:spcAft>
+            </a:pPr>
+            <a:r>
+              <a:rPr sz="1100" b="0">
+                <a:solidFill>
+                  <a:srgbClr val="FFFFFF"/>
+                </a:solidFill>
+                <a:latin typeface="Calibri"/>
+              </a:rPr>
+              <a:t>NodeManager</a:t>
+            </a:r>
+          </a:p>
+        </p:txBody>
+      </p:sp>
+      <p:sp>
+        <p:nvSpPr>
+          <p:cNvPr id="16" name="Rounded Rectangle 15"/>
+          <p:cNvSpPr/>
+          <p:nvPr/>
+        </p:nvSpPr>
+        <p:spPr>
+          <a:xfrm>
+            <a:off x="9738359" y="3017520"/>
+            <a:ext cx="2194560" cy="1325880"/>
+          </a:xfrm>
+          <a:prstGeom prst="roundRect">
+            <a:avLst>
+              <a:gd name="adj" fmla="val 8000"/>
+            </a:avLst>
+          </a:prstGeom>
+          <a:solidFill>
+            <a:srgbClr val="147A66"/>
+          </a:solidFill>
+          <a:ln>
+            <a:noFill/>
+          </a:ln>
+        </p:spPr>
+        <p:style>
+          <a:lnRef idx="1">
+            <a:schemeClr val="accent1"/>
+          </a:lnRef>
+          <a:fillRef idx="3">
+            <a:schemeClr val="accent1"/>
+          </a:fillRef>
+          <a:effectRef idx="2">
+            <a:schemeClr val="accent1"/>
+          </a:effectRef>
+          <a:fontRef idx="minor">
+            <a:schemeClr val="lt1"/>
+          </a:fontRef>
+        </p:style>
+        <p:txBody>
+          <a:bodyPr rtlCol="0" anchor="ctr"/>
+          <a:lstStyle/>
+          <a:p>
+            <a:pPr algn="ctr"/>
+          </a:p>
+        </p:txBody>
+      </p:sp>
+      <p:sp>
+        <p:nvSpPr>
+          <p:cNvPr id="17" name="TextBox 16"/>
+          <p:cNvSpPr txBox="1"/>
+          <p:nvPr/>
+        </p:nvSpPr>
+        <p:spPr>
+          <a:xfrm>
+            <a:off x="9829799" y="3090672"/>
+            <a:ext cx="2011679" cy="1188720"/>
+          </a:xfrm>
+          <a:prstGeom prst="rect">
+            <a:avLst/>
+          </a:prstGeom>
+          <a:noFill/>
+        </p:spPr>
+        <p:txBody>
+          <a:bodyPr wrap="square">
+            <a:spAutoFit/>
+          </a:bodyPr>
+          <a:lstStyle/>
+          <a:p>
+            <a:pPr algn="l">
+              <a:spcAft>
+                <a:spcPts val="400"/>
+              </a:spcAft>
+            </a:pPr>
+            <a:r>
+              <a:rPr sz="1400" b="1">
+                <a:solidFill>
+                  <a:srgbClr val="FFFFFF"/>
+                </a:solidFill>
+                <a:latin typeface="Calibri"/>
+              </a:rPr>
+              <a:t>worker5</a:t>
+            </a:r>
+          </a:p>
+          <a:p>
+            <a:pPr algn="l">
+              <a:spcAft>
+                <a:spcPts val="200"/>
+              </a:spcAft>
+            </a:pPr>
+            <a:r>
+              <a:rPr sz="1100" b="0">
+                <a:solidFill>
+                  <a:srgbClr val="FFFFFF"/>
+                </a:solidFill>
+                <a:latin typeface="Calibri"/>
+              </a:rPr>
+              <a:t>DataNode</a:t>
+            </a:r>
+          </a:p>
+          <a:p>
+            <a:pPr algn="l">
+              <a:spcAft>
+                <a:spcPts val="200"/>
+              </a:spcAft>
+            </a:pPr>
+            <a:r>
+              <a:rPr sz="1100" b="0">
+                <a:solidFill>
+                  <a:srgbClr val="FFFFFF"/>
+                </a:solidFill>
+                <a:latin typeface="Calibri"/>
+              </a:rPr>
+              <a:t>NodeManager</a:t>
+            </a:r>
+          </a:p>
+        </p:txBody>
+      </p:sp>
+      <p:sp>
+        <p:nvSpPr>
+          <p:cNvPr id="18" name="TextBox 17"/>
+          <p:cNvSpPr txBox="1"/>
+          <p:nvPr/>
+        </p:nvSpPr>
+        <p:spPr>
+          <a:xfrm>
+            <a:off x="457200" y="4617720"/>
+            <a:ext cx="11155680" cy="1371600"/>
+          </a:xfrm>
+          <a:prstGeom prst="rect">
+            <a:avLst/>
+          </a:prstGeom>
+          <a:noFill/>
+        </p:spPr>
+        <p:txBody>
+          <a:bodyPr wrap="square">
+            <a:spAutoFit/>
+          </a:bodyPr>
+          <a:lstStyle/>
+          <a:p>
+            <a:pPr algn="l">
+              <a:spcAft>
+                <a:spcPts val="800"/>
+              </a:spcAft>
+            </a:pPr>
+            <a:r>
+              <a:rPr sz="1500" b="1">
+                <a:solidFill>
+                  <a:srgbClr val="1E293B"/>
+                </a:solidFill>
+                <a:latin typeface="Calibri"/>
+              </a:rPr>
+              <a:t>Réseau Docker : hadoop-net     |     Image : leshadoopriders/hadoop-tp-g4:1.0</a:t>
+            </a:r>
+          </a:p>
+          <a:p>
+            <a:pPr algn="l">
+              <a:spcAft>
+                <a:spcPts val="400"/>
+              </a:spcAft>
+            </a:pPr>
+            <a:r>
+              <a:rPr sz="1400" b="0">
+                <a:solidFill>
+                  <a:srgbClr val="1D4E89"/>
+                </a:solidFill>
+                <a:latin typeface="Calibri"/>
+                <a:hlinkClick r:id="rId2"/>
+              </a:rPr>
+              <a:t>UI HDFS →  localhost:9870</a:t>
+            </a:r>
+          </a:p>
+          <a:p>
+            <a:pPr algn="l">
+              <a:spcAft>
+                <a:spcPts val="600"/>
+              </a:spcAft>
+            </a:pPr>
+            <a:r>
+              <a:rPr sz="1400" b="0">
+                <a:solidFill>
+                  <a:srgbClr val="1D4E89"/>
+                </a:solidFill>
+                <a:latin typeface="Calibri"/>
+                <a:hlinkClick r:id="rId3"/>
+              </a:rPr>
+              <a:t>UI YARN →  localhost:8088</a:t>
+            </a:r>
+          </a:p>
+        </p:txBody>
+      </p:sp>
+      <p:sp>
+        <p:nvSpPr>
+          <p:cNvPr id="19" name="Rectangle 18"/>
+          <p:cNvSpPr/>
+          <p:nvPr/>
+        </p:nvSpPr>
+        <p:spPr>
+          <a:xfrm>
+            <a:off x="0" y="6355080"/>
+            <a:ext cx="12191695" cy="502920"/>
+          </a:xfrm>
+          <a:prstGeom prst="rect">
+            <a:avLst/>
+          </a:prstGeom>
+          <a:solidFill>
+            <a:srgbClr val="0F5C4C"/>
+          </a:solidFill>
+          <a:ln>
+            <a:noFill/>
+          </a:ln>
+        </p:spPr>
+        <p:style>
+          <a:lnRef idx="1">
+            <a:schemeClr val="accent1"/>
+          </a:lnRef>
+          <a:fillRef idx="3">
+            <a:schemeClr val="accent1"/>
+          </a:fillRef>
+          <a:effectRef idx="2">
+            <a:schemeClr val="accent1"/>
+          </a:effectRef>
+          <a:fontRef idx="minor">
+            <a:schemeClr val="lt1"/>
+          </a:fontRef>
+        </p:style>
+        <p:txBody>
+          <a:bodyPr rtlCol="0" anchor="ctr"/>
+          <a:lstStyle/>
+          <a:p>
+            <a:pPr algn="ctr"/>
+          </a:p>
+        </p:txBody>
+      </p:sp>
+      <p:sp>
+        <p:nvSpPr>
+          <p:cNvPr id="20" name="TextBox 19"/>
+          <p:cNvSpPr txBox="1"/>
+          <p:nvPr/>
+        </p:nvSpPr>
+        <p:spPr>
+          <a:xfrm>
+            <a:off x="320040" y="6446520"/>
+            <a:ext cx="9326880" cy="320040"/>
           </a:xfrm>
           <a:prstGeom prst="rect">
             <a:avLst/>
@@ -8068,14 +12313,14 @@
       </p:sp>
       <p:sp>
         <p:nvSpPr>
-          <p:cNvPr id="9" name="TextBox 8"/>
+          <p:cNvPr id="21" name="TextBox 20"/>
           <p:cNvSpPr txBox="1"/>
           <p:nvPr/>
         </p:nvSpPr>
         <p:spPr>
           <a:xfrm>
-            <a:off x="10515600" y="6446520"/>
-            <a:ext cx="1371600" cy="320040"/>
+            <a:off x="10424160" y="6446520"/>
+            <a:ext cx="1463040" cy="320040"/>
           </a:xfrm>
           <a:prstGeom prst="rect">
             <a:avLst/>
@@ -8134,7 +12379,7 @@
             <a:avLst/>
           </a:prstGeom>
           <a:solidFill>
-            <a:srgbClr val="F8FAF9"/>
+            <a:srgbClr val="F1F5F4"/>
           </a:solidFill>
           <a:ln>
             <a:noFill/>
@@ -8171,7 +12416,7 @@
         <p:spPr>
           <a:xfrm>
             <a:off x="0" y="0"/>
-            <a:ext cx="12191695" cy="1051560"/>
+            <a:ext cx="12191695" cy="960120"/>
           </a:xfrm>
           <a:prstGeom prst="rect">
             <a:avLst/>
@@ -8213,8 +12458,8 @@
         </p:nvSpPr>
         <p:spPr>
           <a:xfrm>
-            <a:off x="0" y="1051560"/>
-            <a:ext cx="12191695" cy="73152"/>
+            <a:off x="0" y="960120"/>
+            <a:ext cx="12191695" cy="64008"/>
           </a:xfrm>
           <a:prstGeom prst="rect">
             <a:avLst/>
@@ -8256,8 +12501,8 @@
         </p:nvSpPr>
         <p:spPr>
           <a:xfrm>
-            <a:off x="457200" y="274320"/>
-            <a:ext cx="11247120" cy="640080"/>
+            <a:off x="411480" y="256032"/>
+            <a:ext cx="11338560" cy="548640"/>
           </a:xfrm>
           <a:prstGeom prst="rect">
             <a:avLst/>
@@ -8271,13 +12516,13 @@
           <a:lstStyle/>
           <a:p>
             <a:r>
-              <a:rPr sz="2800" b="1">
+              <a:rPr sz="2600" b="1">
                 <a:solidFill>
                   <a:srgbClr val="FFFFFF"/>
                 </a:solidFill>
                 <a:latin typeface="Calibri"/>
               </a:rPr>
-              <a:t>Déploiement et publication Docker Hub</a:t>
+              <a:t>Déploiement + publication Docker Hub</a:t>
             </a:r>
           </a:p>
         </p:txBody>
@@ -8290,8 +12535,8 @@
         </p:nvSpPr>
         <p:spPr>
           <a:xfrm>
-            <a:off x="457200" y="1371600"/>
-            <a:ext cx="11247120" cy="4754880"/>
+            <a:off x="411480" y="1188720"/>
+            <a:ext cx="5303520" cy="3474720"/>
           </a:xfrm>
           <a:prstGeom prst="rect">
             <a:avLst/>
@@ -8304,122 +12549,227 @@
           </a:bodyPr>
           <a:lstStyle/>
           <a:p>
-            <a:pPr>
+            <a:pPr algn="l">
               <a:spcAft>
                 <a:spcPts val="1000"/>
               </a:spcAft>
             </a:pPr>
             <a:r>
-              <a:rPr sz="2000" b="1">
+              <a:rPr sz="1800" b="1">
                 <a:solidFill>
                   <a:srgbClr val="0F5C4C"/>
                 </a:solidFill>
                 <a:latin typeface="Calibri"/>
               </a:rPr>
-              <a:t>Lancer le cluster</a:t>
-            </a:r>
-          </a:p>
-          <a:p>
-            <a:pPr>
+              <a:t>Commandes clés</a:t>
+            </a:r>
+          </a:p>
+          <a:p>
+            <a:pPr algn="l">
+              <a:spcAft>
+                <a:spcPts val="800"/>
+              </a:spcAft>
+            </a:pPr>
+            <a:r>
+              <a:rPr sz="1500" b="0">
+                <a:solidFill>
+                  <a:srgbClr val="1E293B"/>
+                </a:solidFill>
+                <a:latin typeface="Calibri"/>
+              </a:rPr>
+              <a:t>docker compose up --build -d</a:t>
+            </a:r>
+          </a:p>
+          <a:p>
+            <a:pPr algn="l">
+              <a:spcAft>
+                <a:spcPts val="800"/>
+              </a:spcAft>
+            </a:pPr>
+            <a:r>
+              <a:rPr sz="1500" b="0">
+                <a:solidFill>
+                  <a:srgbClr val="1E293B"/>
+                </a:solidFill>
+                <a:latin typeface="Calibri"/>
+              </a:rPr>
+              <a:t>docker ps   →  6 conteneurs</a:t>
+            </a:r>
+          </a:p>
+          <a:p>
+            <a:pPr algn="l">
+              <a:spcAft>
+                <a:spcPts val="800"/>
+              </a:spcAft>
+            </a:pPr>
+            <a:r>
+              <a:rPr sz="1500" b="0">
+                <a:solidFill>
+                  <a:srgbClr val="1E293B"/>
+                </a:solidFill>
+                <a:latin typeface="Calibri"/>
+              </a:rPr>
+              <a:t>hdfs dfsadmin -report</a:t>
+            </a:r>
+          </a:p>
+          <a:p>
+            <a:pPr algn="l">
+              <a:spcAft>
+                <a:spcPts val="1200"/>
+              </a:spcAft>
+            </a:pPr>
+            <a:r>
+              <a:rPr sz="1500" b="1">
+                <a:solidFill>
+                  <a:srgbClr val="15803D"/>
+                </a:solidFill>
+                <a:latin typeface="Calibri"/>
+              </a:rPr>
+              <a:t>→ Live datanodes (5)</a:t>
+            </a:r>
+          </a:p>
+          <a:p>
+            <a:pPr algn="l">
               <a:spcAft>
                 <a:spcPts val="1000"/>
               </a:spcAft>
             </a:pPr>
             <a:r>
-              <a:rPr sz="2000" b="0">
+              <a:rPr sz="1500" b="0">
                 <a:solidFill>
                   <a:srgbClr val="1E293B"/>
                 </a:solidFill>
                 <a:latin typeface="Calibri"/>
               </a:rPr>
-              <a:t>docker compose up --build -d</a:t>
-            </a:r>
-          </a:p>
-          <a:p>
-            <a:pPr>
+              <a:t>docker push …/hadoop-tp-g4:1.0</a:t>
+            </a:r>
+          </a:p>
+          <a:p>
+            <a:pPr algn="l">
               <a:spcAft>
-                <a:spcPts val="1000"/>
+                <a:spcPts val="400"/>
               </a:spcAft>
             </a:pPr>
             <a:r>
-              <a:rPr sz="2000" b="0">
-                <a:solidFill>
-                  <a:srgbClr val="1E293B"/>
-                </a:solidFill>
-                <a:latin typeface="Calibri"/>
-              </a:rPr>
-              <a:t>Vérifier : docker ps  →  6 conteneurs</a:t>
-            </a:r>
-          </a:p>
-          <a:p>
-            <a:pPr>
+              <a:rPr sz="1400" b="1">
+                <a:solidFill>
+                  <a:srgbClr val="1D4E89"/>
+                </a:solidFill>
+                <a:latin typeface="Calibri"/>
+                <a:hlinkClick r:id="rId2"/>
+              </a:rPr>
+              <a:t>Ouvrir Docker Hub →</a:t>
+            </a:r>
+          </a:p>
+          <a:p>
+            <a:pPr algn="l">
               <a:spcAft>
-                <a:spcPts val="1000"/>
+                <a:spcPts val="600"/>
               </a:spcAft>
             </a:pPr>
             <a:r>
-              <a:rPr sz="2000" b="0">
-                <a:solidFill>
-                  <a:srgbClr val="1E293B"/>
-                </a:solidFill>
-                <a:latin typeface="Calibri"/>
-              </a:rPr>
-              <a:t>hdfs dfsadmin -report  →  Live datanodes (5)</a:t>
-            </a:r>
-          </a:p>
-          <a:p>
-            <a:pPr>
+              <a:rPr sz="1400" b="1">
+                <a:solidFill>
+                  <a:srgbClr val="1D4E89"/>
+                </a:solidFill>
+                <a:latin typeface="Calibri"/>
+                <a:hlinkClick r:id="rId3"/>
+              </a:rPr>
+              <a:t>Ouvrir GitHub →</a:t>
+            </a:r>
+          </a:p>
+        </p:txBody>
+      </p:sp>
+      <p:pic>
+        <p:nvPicPr>
+          <p:cNvPr id="7" name="Picture 6" descr="screenshot-terminal-01.png"/>
+          <p:cNvPicPr>
+            <a:picLocks noChangeAspect="1"/>
+          </p:cNvPicPr>
+          <p:nvPr/>
+        </p:nvPicPr>
+        <p:blipFill>
+          <a:blip r:embed="rId4"/>
+          <a:stretch>
+            <a:fillRect/>
+          </a:stretch>
+        </p:blipFill>
+        <p:spPr>
+          <a:xfrm>
+            <a:off x="5852160" y="1143000"/>
+            <a:ext cx="5943600" cy="3807619"/>
+          </a:xfrm>
+          <a:prstGeom prst="rect">
+            <a:avLst/>
+          </a:prstGeom>
+        </p:spPr>
+      </p:pic>
+      <p:sp>
+        <p:nvSpPr>
+          <p:cNvPr id="8" name="TextBox 7"/>
+          <p:cNvSpPr txBox="1"/>
+          <p:nvPr/>
+        </p:nvSpPr>
+        <p:spPr>
+          <a:xfrm>
+            <a:off x="5852160" y="4617720"/>
+            <a:ext cx="5943600" cy="274320"/>
+          </a:xfrm>
+          <a:prstGeom prst="rect">
+            <a:avLst/>
+          </a:prstGeom>
+          <a:noFill/>
+        </p:spPr>
+        <p:txBody>
+          <a:bodyPr wrap="square">
+            <a:spAutoFit/>
+          </a:bodyPr>
+          <a:lstStyle/>
+          <a:p>
+            <a:pPr algn="l">
               <a:spcAft>
-                <a:spcPts val="1000"/>
+                <a:spcPts val="600"/>
               </a:spcAft>
             </a:pPr>
             <a:r>
-              <a:rPr sz="2000" b="1">
-                <a:solidFill>
-                  <a:srgbClr val="0F5C4C"/>
-                </a:solidFill>
-                <a:latin typeface="Calibri"/>
-              </a:rPr>
-              <a:t>Publier l’image</a:t>
-            </a:r>
-          </a:p>
-          <a:p>
-            <a:pPr>
-              <a:spcAft>
-                <a:spcPts val="1000"/>
-              </a:spcAft>
-            </a:pPr>
-            <a:r>
-              <a:rPr sz="2000" b="0">
-                <a:solidFill>
-                  <a:srgbClr val="1E293B"/>
-                </a:solidFill>
-                <a:latin typeface="Calibri"/>
-              </a:rPr>
-              <a:t>docker push leshadoopriders/hadoop-tp-g4:1.0</a:t>
-            </a:r>
-          </a:p>
-          <a:p>
-            <a:pPr>
-              <a:spcAft>
-                <a:spcPts val="1000"/>
-              </a:spcAft>
-            </a:pPr>
-            <a:r>
-              <a:rPr sz="2000" b="0">
-                <a:solidFill>
-                  <a:srgbClr val="1E293B"/>
-                </a:solidFill>
-                <a:latin typeface="Calibri"/>
-              </a:rPr>
-              <a:t>Hub : hub.docker.com/r/leshadoopriders/hadoop-tp-g4</a:t>
-            </a:r>
-          </a:p>
-        </p:txBody>
-      </p:sp>
-      <p:sp>
-        <p:nvSpPr>
-          <p:cNvPr id="7" name="Rectangle 6"/>
+              <a:rPr sz="1100" b="0">
+                <a:solidFill>
+                  <a:srgbClr val="64748B"/>
+                </a:solidFill>
+                <a:latin typeface="Calibri"/>
+              </a:rPr>
+              <a:t>Terminal — docker ps / dfsadmin</a:t>
+            </a:r>
+          </a:p>
+        </p:txBody>
+      </p:sp>
+      <p:pic>
+        <p:nvPicPr>
+          <p:cNvPr id="9" name="Picture 8" descr="screenshot-namenode.png"/>
+          <p:cNvPicPr>
+            <a:picLocks noChangeAspect="1"/>
+          </p:cNvPicPr>
+          <p:nvPr/>
+        </p:nvPicPr>
+        <p:blipFill>
+          <a:blip r:embed="rId5"/>
+          <a:stretch>
+            <a:fillRect/>
+          </a:stretch>
+        </p:blipFill>
+        <p:spPr>
+          <a:xfrm>
+            <a:off x="5852160" y="4892040"/>
+            <a:ext cx="1792224" cy="1280160"/>
+          </a:xfrm>
+          <a:prstGeom prst="rect">
+            <a:avLst/>
+          </a:prstGeom>
+        </p:spPr>
+      </p:pic>
+      <p:sp>
+        <p:nvSpPr>
+          <p:cNvPr id="10" name="Rectangle 9"/>
           <p:cNvSpPr/>
           <p:nvPr/>
         </p:nvSpPr>
@@ -8462,14 +12812,14 @@
       </p:sp>
       <p:sp>
         <p:nvSpPr>
-          <p:cNvPr id="8" name="TextBox 7"/>
+          <p:cNvPr id="11" name="TextBox 10"/>
           <p:cNvSpPr txBox="1"/>
           <p:nvPr/>
         </p:nvSpPr>
         <p:spPr>
           <a:xfrm>
-            <a:off x="365760" y="6446520"/>
-            <a:ext cx="9144000" cy="320040"/>
+            <a:off x="320040" y="6446520"/>
+            <a:ext cx="9326880" cy="320040"/>
           </a:xfrm>
           <a:prstGeom prst="rect">
             <a:avLst/>
@@ -8496,14 +12846,14 @@
       </p:sp>
       <p:sp>
         <p:nvSpPr>
-          <p:cNvPr id="9" name="TextBox 8"/>
+          <p:cNvPr id="12" name="TextBox 11"/>
           <p:cNvSpPr txBox="1"/>
           <p:nvPr/>
         </p:nvSpPr>
         <p:spPr>
           <a:xfrm>
-            <a:off x="10515600" y="6446520"/>
-            <a:ext cx="1371600" cy="320040"/>
+            <a:off x="10424160" y="6446520"/>
+            <a:ext cx="1463040" cy="320040"/>
           </a:xfrm>
           <a:prstGeom prst="rect">
             <a:avLst/>
@@ -8562,7 +12912,7 @@
             <a:avLst/>
           </a:prstGeom>
           <a:solidFill>
-            <a:srgbClr val="F8FAF9"/>
+            <a:srgbClr val="F1F5F4"/>
           </a:solidFill>
           <a:ln>
             <a:noFill/>
@@ -8599,7 +12949,7 @@
         <p:spPr>
           <a:xfrm>
             <a:off x="0" y="0"/>
-            <a:ext cx="12191695" cy="1051560"/>
+            <a:ext cx="12191695" cy="960120"/>
           </a:xfrm>
           <a:prstGeom prst="rect">
             <a:avLst/>
@@ -8641,8 +12991,8 @@
         </p:nvSpPr>
         <p:spPr>
           <a:xfrm>
-            <a:off x="0" y="1051560"/>
-            <a:ext cx="12191695" cy="73152"/>
+            <a:off x="0" y="960120"/>
+            <a:ext cx="12191695" cy="64008"/>
           </a:xfrm>
           <a:prstGeom prst="rect">
             <a:avLst/>
@@ -8684,8 +13034,8 @@
         </p:nvSpPr>
         <p:spPr>
           <a:xfrm>
-            <a:off x="457200" y="274320"/>
-            <a:ext cx="11247120" cy="640080"/>
+            <a:off x="411480" y="256032"/>
+            <a:ext cx="11338560" cy="548640"/>
           </a:xfrm>
           <a:prstGeom prst="rect">
             <a:avLst/>
@@ -8699,13 +13049,13 @@
           <a:lstStyle/>
           <a:p>
             <a:r>
-              <a:rPr sz="2800" b="1">
+              <a:rPr sz="2600" b="1">
                 <a:solidFill>
                   <a:srgbClr val="FFFFFF"/>
                 </a:solidFill>
                 <a:latin typeface="Calibri"/>
               </a:rPr>
-              <a:t>Manipulations HDFS (données ventes)</a:t>
+              <a:t>Manipulations HDFS — /data/ventes/2026</a:t>
             </a:r>
           </a:p>
         </p:txBody>
@@ -8718,8 +13068,8 @@
         </p:nvSpPr>
         <p:spPr>
           <a:xfrm>
-            <a:off x="457200" y="1371600"/>
-            <a:ext cx="11247120" cy="4754880"/>
+            <a:off x="365760" y="1143000"/>
+            <a:ext cx="5120640" cy="4754880"/>
           </a:xfrm>
           <a:prstGeom prst="rect">
             <a:avLst/>
@@ -8732,106 +13082,201 @@
           </a:bodyPr>
           <a:lstStyle/>
           <a:p>
-            <a:pPr>
+            <a:pPr algn="l">
               <a:spcAft>
-                <a:spcPts val="1000"/>
+                <a:spcPts val="800"/>
               </a:spcAft>
             </a:pPr>
             <a:r>
-              <a:rPr sz="2000" b="0">
-                <a:solidFill>
-                  <a:srgbClr val="1E293B"/>
-                </a:solidFill>
-                <a:latin typeface="Calibri"/>
-              </a:rPr>
-              <a:t>mkdir + chmod + put  →  /data/ventes/2026/transactions.csv</a:t>
-            </a:r>
-          </a:p>
-          <a:p>
-            <a:pPr>
+              <a:rPr sz="1700" b="1">
+                <a:solidFill>
+                  <a:srgbClr val="0F5C4C"/>
+                </a:solidFill>
+                <a:latin typeface="Calibri"/>
+              </a:rPr>
+              <a:t>Étapes réalisées</a:t>
+            </a:r>
+          </a:p>
+          <a:p>
+            <a:pPr algn="l">
               <a:spcAft>
-                <a:spcPts val="1000"/>
+                <a:spcPts val="700"/>
               </a:spcAft>
             </a:pPr>
             <a:r>
-              <a:rPr sz="2000" b="0">
+              <a:rPr sz="1500" b="0">
                 <a:solidFill>
                   <a:srgbClr val="1E293B"/>
                 </a:solidFill>
                 <a:latin typeface="Calibri"/>
               </a:rPr>
-              <a:t>fsck / stat  →  1 bloc, réplication 3, HEALTHY</a:t>
-            </a:r>
-          </a:p>
-          <a:p>
-            <a:pPr>
+              <a:t>1. mkdir + chmod + put (CSV)</a:t>
+            </a:r>
+          </a:p>
+          <a:p>
+            <a:pPr algn="l">
               <a:spcAft>
-                <a:spcPts val="1000"/>
+                <a:spcPts val="700"/>
               </a:spcAft>
             </a:pPr>
             <a:r>
-              <a:rPr sz="2000" b="0">
+              <a:rPr sz="1500" b="0">
                 <a:solidFill>
                   <a:srgbClr val="1E293B"/>
                 </a:solidFill>
                 <a:latin typeface="Calibri"/>
               </a:rPr>
-              <a:t>cat | head  →  lecture des 5 premières lignes</a:t>
-            </a:r>
-          </a:p>
-          <a:p>
-            <a:pPr>
+              <a:t>2. fsck / stat → HEALTHY, rep=3</a:t>
+            </a:r>
+          </a:p>
+          <a:p>
+            <a:pPr algn="l">
               <a:spcAft>
-                <a:spcPts val="1000"/>
+                <a:spcPts val="700"/>
               </a:spcAft>
             </a:pPr>
             <a:r>
-              <a:rPr sz="2000" b="0">
+              <a:rPr sz="1500" b="0">
                 <a:solidFill>
                   <a:srgbClr val="1E293B"/>
                 </a:solidFill>
                 <a:latin typeface="Calibri"/>
               </a:rPr>
-              <a:t>getmerge  →  fusion de deux CSV</a:t>
-            </a:r>
-          </a:p>
-          <a:p>
-            <a:pPr>
+              <a:t>3. cat | head (5 lignes)</a:t>
+            </a:r>
+          </a:p>
+          <a:p>
+            <a:pPr algn="l">
               <a:spcAft>
-                <a:spcPts val="1000"/>
+                <a:spcPts val="700"/>
               </a:spcAft>
             </a:pPr>
             <a:r>
-              <a:rPr sz="2000" b="0">
+              <a:rPr sz="1500" b="0">
                 <a:solidFill>
                   <a:srgbClr val="1E293B"/>
                 </a:solidFill>
                 <a:latin typeface="Calibri"/>
               </a:rPr>
-              <a:t>rm + Trash  →  suppression avec corbeille</a:t>
-            </a:r>
-          </a:p>
-          <a:p>
-            <a:pPr>
+              <a:t>4. getmerge (2 fichiers)</a:t>
+            </a:r>
+          </a:p>
+          <a:p>
+            <a:pPr algn="l">
               <a:spcAft>
-                <a:spcPts val="1000"/>
+                <a:spcPts val="700"/>
               </a:spcAft>
             </a:pPr>
             <a:r>
-              <a:rPr sz="2000" b="0">
+              <a:rPr sz="1500" b="0">
                 <a:solidFill>
                   <a:srgbClr val="1E293B"/>
                 </a:solidFill>
                 <a:latin typeface="Calibri"/>
               </a:rPr>
-              <a:t>setrep -w 2  →  réplication passée à 2</a:t>
-            </a:r>
-          </a:p>
-        </p:txBody>
-      </p:sp>
-      <p:sp>
-        <p:nvSpPr>
-          <p:cNvPr id="7" name="Rectangle 6"/>
+              <a:t>5. rm + Trash</a:t>
+            </a:r>
+          </a:p>
+          <a:p>
+            <a:pPr algn="l">
+              <a:spcAft>
+                <a:spcPts val="1200"/>
+              </a:spcAft>
+            </a:pPr>
+            <a:r>
+              <a:rPr sz="1500" b="1">
+                <a:solidFill>
+                  <a:srgbClr val="15803D"/>
+                </a:solidFill>
+                <a:latin typeface="Calibri"/>
+              </a:rPr>
+              <a:t>6. setrep -w 2 → réplication 2</a:t>
+            </a:r>
+          </a:p>
+          <a:p>
+            <a:pPr algn="l">
+              <a:spcAft>
+                <a:spcPts val="600"/>
+              </a:spcAft>
+            </a:pPr>
+            <a:r>
+              <a:rPr sz="1300" b="0">
+                <a:solidFill>
+                  <a:srgbClr val="64748B"/>
+                </a:solidFill>
+                <a:latin typeface="Calibri"/>
+              </a:rPr>
+              <a:t>Fichier petit = 1 bloc (128 Mo)</a:t>
+            </a:r>
+          </a:p>
+        </p:txBody>
+      </p:sp>
+      <p:pic>
+        <p:nvPicPr>
+          <p:cNvPr id="7" name="Picture 6" descr="screenshot-terminal-02.png"/>
+          <p:cNvPicPr>
+            <a:picLocks noChangeAspect="1"/>
+          </p:cNvPicPr>
+          <p:nvPr/>
+        </p:nvPicPr>
+        <p:blipFill>
+          <a:blip r:embed="rId2"/>
+          <a:stretch>
+            <a:fillRect/>
+          </a:stretch>
+        </p:blipFill>
+        <p:spPr>
+          <a:xfrm>
+            <a:off x="5669280" y="1188720"/>
+            <a:ext cx="6126480" cy="3924776"/>
+          </a:xfrm>
+          <a:prstGeom prst="rect">
+            <a:avLst/>
+          </a:prstGeom>
+        </p:spPr>
+      </p:pic>
+      <p:sp>
+        <p:nvSpPr>
+          <p:cNvPr id="8" name="TextBox 7"/>
+          <p:cNvSpPr txBox="1"/>
+          <p:nvPr/>
+        </p:nvSpPr>
+        <p:spPr>
+          <a:xfrm>
+            <a:off x="5669280" y="4709160"/>
+            <a:ext cx="6126480" cy="274320"/>
+          </a:xfrm>
+          <a:prstGeom prst="rect">
+            <a:avLst/>
+          </a:prstGeom>
+          <a:noFill/>
+        </p:spPr>
+        <p:txBody>
+          <a:bodyPr wrap="square">
+            <a:spAutoFit/>
+          </a:bodyPr>
+          <a:lstStyle/>
+          <a:p>
+            <a:pPr algn="l">
+              <a:spcAft>
+                <a:spcPts val="600"/>
+              </a:spcAft>
+            </a:pPr>
+            <a:r>
+              <a:rPr sz="1100" b="0">
+                <a:solidFill>
+                  <a:srgbClr val="64748B"/>
+                </a:solidFill>
+                <a:latin typeface="Calibri"/>
+              </a:rPr>
+              <a:t>Terminal — commandes HDFS</a:t>
+            </a:r>
+          </a:p>
+        </p:txBody>
+      </p:sp>
+      <p:sp>
+        <p:nvSpPr>
+          <p:cNvPr id="9" name="Rectangle 8"/>
           <p:cNvSpPr/>
           <p:nvPr/>
         </p:nvSpPr>
@@ -8874,14 +13319,14 @@
       </p:sp>
       <p:sp>
         <p:nvSpPr>
-          <p:cNvPr id="8" name="TextBox 7"/>
+          <p:cNvPr id="10" name="TextBox 9"/>
           <p:cNvSpPr txBox="1"/>
           <p:nvPr/>
         </p:nvSpPr>
         <p:spPr>
           <a:xfrm>
-            <a:off x="365760" y="6446520"/>
-            <a:ext cx="9144000" cy="320040"/>
+            <a:off x="320040" y="6446520"/>
+            <a:ext cx="9326880" cy="320040"/>
           </a:xfrm>
           <a:prstGeom prst="rect">
             <a:avLst/>
@@ -8908,14 +13353,14 @@
       </p:sp>
       <p:sp>
         <p:nvSpPr>
-          <p:cNvPr id="9" name="TextBox 8"/>
+          <p:cNvPr id="11" name="TextBox 10"/>
           <p:cNvSpPr txBox="1"/>
           <p:nvPr/>
         </p:nvSpPr>
         <p:spPr>
           <a:xfrm>
-            <a:off x="10515600" y="6446520"/>
-            <a:ext cx="1371600" cy="320040"/>
+            <a:off x="10424160" y="6446520"/>
+            <a:ext cx="1463040" cy="320040"/>
           </a:xfrm>
           <a:prstGeom prst="rect">
             <a:avLst/>
@@ -8974,7 +13419,7 @@
             <a:avLst/>
           </a:prstGeom>
           <a:solidFill>
-            <a:srgbClr val="F8FAF9"/>
+            <a:srgbClr val="F1F5F4"/>
           </a:solidFill>
           <a:ln>
             <a:noFill/>
@@ -9011,7 +13456,7 @@
         <p:spPr>
           <a:xfrm>
             <a:off x="0" y="0"/>
-            <a:ext cx="12191695" cy="1051560"/>
+            <a:ext cx="12191695" cy="960120"/>
           </a:xfrm>
           <a:prstGeom prst="rect">
             <a:avLst/>
@@ -9053,8 +13498,8 @@
         </p:nvSpPr>
         <p:spPr>
           <a:xfrm>
-            <a:off x="0" y="1051560"/>
-            <a:ext cx="12191695" cy="73152"/>
+            <a:off x="0" y="960120"/>
+            <a:ext cx="12191695" cy="64008"/>
           </a:xfrm>
           <a:prstGeom prst="rect">
             <a:avLst/>
@@ -9096,8 +13541,8 @@
         </p:nvSpPr>
         <p:spPr>
           <a:xfrm>
-            <a:off x="457200" y="274320"/>
-            <a:ext cx="11247120" cy="640080"/>
+            <a:off x="411480" y="256032"/>
+            <a:ext cx="11338560" cy="548640"/>
           </a:xfrm>
           <a:prstGeom prst="rect">
             <a:avLst/>
@@ -9111,13 +13556,13 @@
           <a:lstStyle/>
           <a:p>
             <a:r>
-              <a:rPr sz="2800" b="1">
+              <a:rPr sz="2600" b="1">
                 <a:solidFill>
                   <a:srgbClr val="FFFFFF"/>
                 </a:solidFill>
                 <a:latin typeface="Calibri"/>
               </a:rPr>
-              <a:t>Job YARN : calcul de π (Monte Carlo)</a:t>
+              <a:t>Job YARN — calcul de π (SUCCEEDED)</a:t>
             </a:r>
           </a:p>
         </p:txBody>
@@ -9130,8 +13575,8 @@
         </p:nvSpPr>
         <p:spPr>
           <a:xfrm>
-            <a:off x="457200" y="1371600"/>
-            <a:ext cx="11247120" cy="4754880"/>
+            <a:off x="365760" y="1143000"/>
+            <a:ext cx="5029200" cy="4114800"/>
           </a:xfrm>
           <a:prstGeom prst="rect">
             <a:avLst/>
@@ -9144,45 +13589,45 @@
           </a:bodyPr>
           <a:lstStyle/>
           <a:p>
-            <a:pPr>
+            <a:pPr algn="l">
               <a:spcAft>
                 <a:spcPts val="1000"/>
               </a:spcAft>
             </a:pPr>
             <a:r>
-              <a:rPr sz="2000" b="1">
-                <a:solidFill>
-                  <a:srgbClr val="1E293B"/>
-                </a:solidFill>
-                <a:latin typeface="Calibri"/>
-              </a:rPr>
-              <a:t>yarn jar …/hadoop-mapreduce-examples-3.3.6.jar pi 4 1000</a:t>
-            </a:r>
-          </a:p>
-          <a:p>
-            <a:pPr>
+              <a:rPr sz="1500" b="1">
+                <a:solidFill>
+                  <a:srgbClr val="0F5C4C"/>
+                </a:solidFill>
+                <a:latin typeface="Calibri"/>
+              </a:rPr>
+              <a:t>yarn jar … examples … pi 4 1000</a:t>
+            </a:r>
+          </a:p>
+          <a:p>
+            <a:pPr algn="l">
               <a:spcAft>
-                <a:spcPts val="1000"/>
+                <a:spcPts val="700"/>
               </a:spcAft>
             </a:pPr>
             <a:r>
-              <a:rPr sz="2000" b="0">
+              <a:rPr sz="1500" b="0">
                 <a:solidFill>
                   <a:srgbClr val="1E293B"/>
                 </a:solidFill>
                 <a:latin typeface="Calibri"/>
               </a:rPr>
-              <a:t>Application : application_1791039798429_0001</a:t>
-            </a:r>
-          </a:p>
-          <a:p>
-            <a:pPr>
+              <a:t>App : application_…_0001</a:t>
+            </a:r>
+          </a:p>
+          <a:p>
+            <a:pPr algn="l">
               <a:spcAft>
-                <a:spcPts val="1000"/>
+                <a:spcPts val="700"/>
               </a:spcAft>
             </a:pPr>
             <a:r>
-              <a:rPr sz="2000" b="0">
+              <a:rPr sz="1500" b="0">
                 <a:solidFill>
                   <a:srgbClr val="1E293B"/>
                 </a:solidFill>
@@ -9192,58 +13637,163 @@
             </a:r>
           </a:p>
           <a:p>
-            <a:pPr>
+            <a:pPr algn="l">
               <a:spcAft>
-                <a:spcPts val="1000"/>
+                <a:spcPts val="700"/>
               </a:spcAft>
             </a:pPr>
             <a:r>
-              <a:rPr sz="2000" b="0">
-                <a:solidFill>
-                  <a:srgbClr val="1E293B"/>
-                </a:solidFill>
-                <a:latin typeface="Calibri"/>
-              </a:rPr>
-              <a:t>État final : SUCCEEDED</a:t>
-            </a:r>
-          </a:p>
-          <a:p>
-            <a:pPr>
+              <a:rPr sz="1800" b="1">
+                <a:solidFill>
+                  <a:srgbClr val="15803D"/>
+                </a:solidFill>
+                <a:latin typeface="Calibri"/>
+              </a:rPr>
+              <a:t>État : SUCCEEDED</a:t>
+            </a:r>
+          </a:p>
+          <a:p>
+            <a:pPr algn="l">
               <a:spcAft>
-                <a:spcPts val="1000"/>
+                <a:spcPts val="1200"/>
               </a:spcAft>
             </a:pPr>
             <a:r>
-              <a:rPr sz="2000" b="0">
+              <a:rPr sz="1800" b="1">
                 <a:solidFill>
                   <a:srgbClr val="1E293B"/>
                 </a:solidFill>
                 <a:latin typeface="Calibri"/>
               </a:rPr>
-              <a:t>Estimation de π ≈ 3.14</a:t>
-            </a:r>
-          </a:p>
-          <a:p>
-            <a:pPr>
+              <a:t>π ≈ 3.14</a:t>
+            </a:r>
+          </a:p>
+          <a:p>
+            <a:pPr algn="l">
               <a:spcAft>
-                <a:spcPts val="1000"/>
+                <a:spcPts val="400"/>
               </a:spcAft>
             </a:pPr>
             <a:r>
-              <a:rPr sz="2000" b="0">
-                <a:solidFill>
-                  <a:srgbClr val="1E293B"/>
-                </a:solidFill>
-                <a:latin typeface="Calibri"/>
-              </a:rPr>
-              <a:t>Visible dans l’UI YARN : http://localhost:8088</a:t>
-            </a:r>
-          </a:p>
-        </p:txBody>
-      </p:sp>
-      <p:sp>
-        <p:nvSpPr>
-          <p:cNvPr id="7" name="Rectangle 6"/>
+              <a:rPr sz="1400" b="1">
+                <a:solidFill>
+                  <a:srgbClr val="1D4E89"/>
+                </a:solidFill>
+                <a:latin typeface="Calibri"/>
+                <a:hlinkClick r:id="rId2"/>
+              </a:rPr>
+              <a:t>UI YARN →</a:t>
+            </a:r>
+          </a:p>
+          <a:p>
+            <a:pPr algn="l">
+              <a:spcAft>
+                <a:spcPts val="600"/>
+              </a:spcAft>
+            </a:pPr>
+            <a:r>
+              <a:rPr sz="1400" b="1">
+                <a:solidFill>
+                  <a:srgbClr val="1D4E89"/>
+                </a:solidFill>
+                <a:latin typeface="Calibri"/>
+                <a:hlinkClick r:id="rId2"/>
+              </a:rPr>
+              <a:t>Détail application →</a:t>
+            </a:r>
+          </a:p>
+        </p:txBody>
+      </p:sp>
+      <p:pic>
+        <p:nvPicPr>
+          <p:cNvPr id="7" name="Picture 6" descr="screenshot-yarn-app.png"/>
+          <p:cNvPicPr>
+            <a:picLocks noChangeAspect="1"/>
+          </p:cNvPicPr>
+          <p:nvPr/>
+        </p:nvPicPr>
+        <p:blipFill>
+          <a:blip r:embed="rId3"/>
+          <a:stretch>
+            <a:fillRect/>
+          </a:stretch>
+        </p:blipFill>
+        <p:spPr>
+          <a:xfrm>
+            <a:off x="5577840" y="1143000"/>
+            <a:ext cx="6217920" cy="4441371"/>
+          </a:xfrm>
+          <a:prstGeom prst="rect">
+            <a:avLst/>
+          </a:prstGeom>
+        </p:spPr>
+      </p:pic>
+      <p:sp>
+        <p:nvSpPr>
+          <p:cNvPr id="8" name="TextBox 7"/>
+          <p:cNvSpPr txBox="1"/>
+          <p:nvPr/>
+        </p:nvSpPr>
+        <p:spPr>
+          <a:xfrm>
+            <a:off x="5577840" y="4434840"/>
+            <a:ext cx="6217920" cy="274320"/>
+          </a:xfrm>
+          <a:prstGeom prst="rect">
+            <a:avLst/>
+          </a:prstGeom>
+          <a:noFill/>
+        </p:spPr>
+        <p:txBody>
+          <a:bodyPr wrap="square">
+            <a:spAutoFit/>
+          </a:bodyPr>
+          <a:lstStyle/>
+          <a:p>
+            <a:pPr algn="l">
+              <a:spcAft>
+                <a:spcPts val="600"/>
+              </a:spcAft>
+            </a:pPr>
+            <a:r>
+              <a:rPr sz="1100" b="0">
+                <a:solidFill>
+                  <a:srgbClr val="64748B"/>
+                </a:solidFill>
+                <a:latin typeface="Calibri"/>
+              </a:rPr>
+              <a:t>Détail application — FINISHED / SUCCEEDED</a:t>
+            </a:r>
+          </a:p>
+        </p:txBody>
+      </p:sp>
+      <p:pic>
+        <p:nvPicPr>
+          <p:cNvPr id="9" name="Picture 8" descr="screenshot-terminal-03.png"/>
+          <p:cNvPicPr>
+            <a:picLocks noChangeAspect="1"/>
+          </p:cNvPicPr>
+          <p:nvPr/>
+        </p:nvPicPr>
+        <p:blipFill>
+          <a:blip r:embed="rId4"/>
+          <a:stretch>
+            <a:fillRect/>
+          </a:stretch>
+        </p:blipFill>
+        <p:spPr>
+          <a:xfrm>
+            <a:off x="5577840" y="4709160"/>
+            <a:ext cx="2212402" cy="1417320"/>
+          </a:xfrm>
+          <a:prstGeom prst="rect">
+            <a:avLst/>
+          </a:prstGeom>
+        </p:spPr>
+      </p:pic>
+      <p:sp>
+        <p:nvSpPr>
+          <p:cNvPr id="10" name="Rectangle 9"/>
           <p:cNvSpPr/>
           <p:nvPr/>
         </p:nvSpPr>
@@ -9286,14 +13836,14 @@
       </p:sp>
       <p:sp>
         <p:nvSpPr>
-          <p:cNvPr id="8" name="TextBox 7"/>
+          <p:cNvPr id="11" name="TextBox 10"/>
           <p:cNvSpPr txBox="1"/>
           <p:nvPr/>
         </p:nvSpPr>
         <p:spPr>
           <a:xfrm>
-            <a:off x="365760" y="6446520"/>
-            <a:ext cx="9144000" cy="320040"/>
+            <a:off x="320040" y="6446520"/>
+            <a:ext cx="9326880" cy="320040"/>
           </a:xfrm>
           <a:prstGeom prst="rect">
             <a:avLst/>
@@ -9320,14 +13870,14 @@
       </p:sp>
       <p:sp>
         <p:nvSpPr>
-          <p:cNvPr id="9" name="TextBox 8"/>
+          <p:cNvPr id="12" name="TextBox 11"/>
           <p:cNvSpPr txBox="1"/>
           <p:nvPr/>
         </p:nvSpPr>
         <p:spPr>
           <a:xfrm>
-            <a:off x="10515600" y="6446520"/>
-            <a:ext cx="1371600" cy="320040"/>
+            <a:off x="10424160" y="6446520"/>
+            <a:ext cx="1463040" cy="320040"/>
           </a:xfrm>
           <a:prstGeom prst="rect">
             <a:avLst/>

--- a/presentation/PRESENTATION-G4-Les_Hadoop_Riders.pptx
+++ b/presentation/PRESENTATION-G4-Les_Hadoop_Riders.pptx
@@ -513,7 +513,7 @@
           <a:lstStyle/>
           <a:p>
             <a:r>
-              <a:t>Introduire le groupe. Montrer qu’on a une vraie UI avec 5 DataNodes. Citer Hub + GitHub.</a:t>
+              <a:t>Bonjour, G4 Les_Hadoop_Riders. On présente notre cluster Hadoop Docker. Objectif en une phrase. Liens Hub et GitHub.</a:t>
             </a:r>
           </a:p>
         </p:txBody>
@@ -583,7 +583,7 @@
           <a:lstStyle/>
           <a:p>
             <a:r>
-              <a:t>Montrer les deux captures. Cliquer les liens si connexion live.</a:t>
+              <a:t>Montrer les 2 captures. Citer missing block / setrep.</a:t>
             </a:r>
           </a:p>
         </p:txBody>
@@ -653,7 +653,7 @@
           <a:lstStyle/>
           <a:p>
             <a:r>
-              <a:t>3 problèmes, 3 solutions. Lien Hub pour prouver la publication.</a:t>
+              <a:t>Un problème = une cause = une solution. Puis passer à Wren pour conclure.</a:t>
             </a:r>
           </a:p>
         </p:txBody>
@@ -723,7 +723,7 @@
           <a:lstStyle/>
           <a:p>
             <a:r>
-              <a:t>Récap 20 s. Pointer Hub + GitHub. Ouvrir les questions.</a:t>
+              <a:t>Wren conclut : 5 points rapidement, liens Hub/GitHub, puis « Merci, questions ? ».</a:t>
             </a:r>
           </a:p>
         </p:txBody>
@@ -793,7 +793,7 @@
           <a:lstStyle/>
           <a:p>
             <a:r>
-              <a:t>Annoncer le plan rapidement, sans lire chaque carte.</a:t>
+              <a:t>Annoncer l’ordre. Préciser que Wren (dernière) fait la conclusion.</a:t>
             </a:r>
           </a:p>
         </p:txBody>
@@ -863,7 +863,7 @@
           <a:lstStyle/>
           <a:p>
             <a:r>
-              <a:t>Un exemple concret par V. Finir sur HDFS + YARN.</a:t>
+              <a:t>Lire le contexte, puis chaque V avec un exemple. Finir sur HDFS + YARN.</a:t>
             </a:r>
           </a:p>
         </p:txBody>
@@ -933,7 +933,7 @@
           <a:lstStyle/>
           <a:p>
             <a:r>
-              <a:t>Pointer le schéma : NameNode en haut, DataNodes en bas avec réplication.</a:t>
+              <a:t>Comparer les 2 colonnes. Insister blocs + réplication + rôle NameNode.</a:t>
             </a:r>
           </a:p>
         </p:txBody>
@@ -1003,7 +1003,7 @@
           <a:lstStyle/>
           <a:p>
             <a:r>
-              <a:t>Suivre les 3 boîtes. Montrer la capture YARN.</a:t>
+              <a:t>Suivre 1→2→3. Si question ApplicationMaster : chef du job lancé via le RM.</a:t>
             </a:r>
           </a:p>
         </p:txBody>
@@ -1073,7 +1073,7 @@
           <a:lstStyle/>
           <a:p>
             <a:r>
-              <a:t>Montrer le schéma master au-dessus, 5 workers en dessous.</a:t>
+              <a:t>Schéma master puis 5 workers. Citer ports et image.</a:t>
             </a:r>
           </a:p>
         </p:txBody>
@@ -1143,7 +1143,7 @@
           <a:lstStyle/>
           <a:p>
             <a:r>
-              <a:t>Montrer le terminal. Rappeler Hub en minuscules.</a:t>
+              <a:t>Dire les 3 commandes. Montrer capture. Rappeler Hub.</a:t>
             </a:r>
           </a:p>
         </p:txBody>
@@ -1213,7 +1213,7 @@
           <a:lstStyle/>
           <a:p>
             <a:r>
-              <a:t>Parcourir la liste en montrant la capture.</a:t>
+              <a:t>Suivre les 5 étapes. Expliquer Trash et setrep. Reviendra pour la conclusion.</a:t>
             </a:r>
           </a:p>
         </p:txBody>
@@ -1283,7 +1283,7 @@
           <a:lstStyle/>
           <a:p>
             <a:r>
-              <a:t>Insister SUCCEEDED + numéro d’app. Capture UI à droite.</a:t>
+              <a:t>Expliquer vite Monte Carlo. Insister SUCCEEDED + id application.</a:t>
             </a:r>
           </a:p>
         </p:txBody>
@@ -4391,7 +4391,7 @@
         </p:blipFill>
         <p:spPr>
           <a:xfrm>
-            <a:off x="7726679" y="1280160"/>
+            <a:off x="7726679" y="1143000"/>
             <a:ext cx="4297680" cy="3069771"/>
           </a:xfrm>
           <a:prstGeom prst="rect">
@@ -4407,8 +4407,8 @@
         </p:nvSpPr>
         <p:spPr>
           <a:xfrm>
-            <a:off x="7726679" y="5074920"/>
-            <a:ext cx="4297680" cy="274320"/>
+            <a:off x="7726679" y="4892040"/>
+            <a:ext cx="4297680" cy="256032"/>
           </a:xfrm>
           <a:prstGeom prst="rect">
             <a:avLst/>
@@ -4423,7 +4423,7 @@
           <a:p>
             <a:pPr algn="l">
               <a:spcAft>
-                <a:spcPts val="600"/>
+                <a:spcPts val="500"/>
               </a:spcAft>
             </a:pPr>
             <a:r>
@@ -4433,7 +4433,7 @@
                 </a:solidFill>
                 <a:latin typeface="Calibri"/>
               </a:rPr>
-              <a:t>Capture UI — 5 DataNodes actifs</a:t>
+              <a:t>Preuve : UI NameNode — 5 DataNodes Live</a:t>
             </a:r>
           </a:p>
         </p:txBody>
@@ -4446,8 +4446,8 @@
         </p:nvSpPr>
         <p:spPr>
           <a:xfrm>
-            <a:off x="548640" y="1371600"/>
-            <a:ext cx="6583680" cy="1097280"/>
+            <a:off x="502920" y="1097280"/>
+            <a:ext cx="6675120" cy="2011680"/>
           </a:xfrm>
           <a:prstGeom prst="rect">
             <a:avLst/>
@@ -4462,17 +4462,33 @@
           <a:p>
             <a:pPr algn="l">
               <a:spcAft>
-                <a:spcPts val="400"/>
-              </a:spcAft>
-            </a:pPr>
-            <a:r>
-              <a:rPr sz="3800" b="1">
+                <a:spcPts val="800"/>
+              </a:spcAft>
+            </a:pPr>
+            <a:r>
+              <a:rPr sz="3200" b="1">
                 <a:solidFill>
                   <a:srgbClr val="FFFFFF"/>
                 </a:solidFill>
                 <a:latin typeface="Calibri"/>
               </a:rPr>
-              <a:t>Cluster Hadoop</a:t>
+              <a:t>Cluster Hadoop avec Docker</a:t>
+            </a:r>
+          </a:p>
+          <a:p>
+            <a:pPr algn="l">
+              <a:spcAft>
+                <a:spcPts val="1000"/>
+              </a:spcAft>
+            </a:pPr>
+            <a:r>
+              <a:rPr sz="1800" b="0">
+                <a:solidFill>
+                  <a:srgbClr val="D1FAE5"/>
+                </a:solidFill>
+                <a:latin typeface="Calibri"/>
+              </a:rPr>
+              <a:t>Déploiement et exploitation HDFS + YARN</a:t>
             </a:r>
           </a:p>
           <a:p>
@@ -4482,13 +4498,29 @@
               </a:spcAft>
             </a:pPr>
             <a:r>
-              <a:rPr sz="3400" b="1">
-                <a:solidFill>
-                  <a:srgbClr val="D1FAE5"/>
-                </a:solidFill>
-                <a:latin typeface="Calibri"/>
-              </a:rPr>
-              <a:t>avec Docker</a:t>
+              <a:rPr sz="1500" b="0">
+                <a:solidFill>
+                  <a:srgbClr val="FFFFFF"/>
+                </a:solidFill>
+                <a:latin typeface="Calibri"/>
+              </a:rPr>
+              <a:t>Cours IFM30522 — UA1 Projet 1</a:t>
+            </a:r>
+          </a:p>
+          <a:p>
+            <a:pPr algn="l">
+              <a:spcAft>
+                <a:spcPts val="500"/>
+              </a:spcAft>
+            </a:pPr>
+            <a:r>
+              <a:rPr sz="1800" b="1">
+                <a:solidFill>
+                  <a:srgbClr val="FFFFFF"/>
+                </a:solidFill>
+                <a:latin typeface="Calibri"/>
+              </a:rPr>
+              <a:t>Groupe G4 — Les_Hadoop_Riders</a:t>
             </a:r>
           </a:p>
         </p:txBody>
@@ -4501,8 +4533,8 @@
         </p:nvSpPr>
         <p:spPr>
           <a:xfrm>
-            <a:off x="548640" y="3017520"/>
-            <a:ext cx="6583680" cy="1280160"/>
+            <a:off x="502920" y="3383280"/>
+            <a:ext cx="6675120" cy="1097280"/>
           </a:xfrm>
           <a:prstGeom prst="rect">
             <a:avLst/>
@@ -4517,49 +4549,33 @@
           <a:p>
             <a:pPr algn="l">
               <a:spcAft>
-                <a:spcPts val="800"/>
-              </a:spcAft>
-            </a:pPr>
-            <a:r>
-              <a:rPr sz="1800" b="0">
-                <a:solidFill>
-                  <a:srgbClr val="FFFFFF"/>
-                </a:solidFill>
-                <a:latin typeface="Calibri"/>
-              </a:rPr>
-              <a:t>UA1 — Projet 1  |  Groupe G4</a:t>
-            </a:r>
-          </a:p>
-          <a:p>
-            <a:pPr algn="l">
-              <a:spcAft>
-                <a:spcPts val="1000"/>
-              </a:spcAft>
-            </a:pPr>
-            <a:r>
-              <a:rPr sz="2200" b="1">
-                <a:solidFill>
-                  <a:srgbClr val="FFFFFF"/>
-                </a:solidFill>
-                <a:latin typeface="Calibri"/>
-              </a:rPr>
-              <a:t>Les_Hadoop_Riders</a:t>
-            </a:r>
-          </a:p>
-          <a:p>
-            <a:pPr algn="l">
-              <a:spcAft>
-                <a:spcPts val="600"/>
+                <a:spcPts val="400"/>
               </a:spcAft>
             </a:pPr>
             <a:r>
               <a:rPr sz="1400" b="0">
                 <a:solidFill>
-                  <a:srgbClr val="CBD5E1"/>
-                </a:solidFill>
-                <a:latin typeface="Calibri"/>
-              </a:rPr>
-              <a:t>HDFS · YARN · Docker Compose · MapReduce π</a:t>
+                  <a:srgbClr val="E2E8F0"/>
+                </a:solidFill>
+                <a:latin typeface="Calibri"/>
+              </a:rPr>
+              <a:t>Objectif : montrer qu’on sait déployer un cluster multi-nœuds,</a:t>
+            </a:r>
+          </a:p>
+          <a:p>
+            <a:pPr algn="l">
+              <a:spcAft>
+                <a:spcPts val="500"/>
+              </a:spcAft>
+            </a:pPr>
+            <a:r>
+              <a:rPr sz="1400" b="0">
+                <a:solidFill>
+                  <a:srgbClr val="E2E8F0"/>
+                </a:solidFill>
+                <a:latin typeface="Calibri"/>
+              </a:rPr>
+              <a:t>manipuler HDFS, lancer un job YARN et publier l’image Docker.</a:t>
             </a:r>
           </a:p>
         </p:txBody>
@@ -4572,8 +4588,8 @@
         </p:nvSpPr>
         <p:spPr>
           <a:xfrm>
-            <a:off x="548640" y="4754880"/>
-            <a:ext cx="3017520" cy="384048"/>
+            <a:off x="502920" y="4709160"/>
+            <a:ext cx="3108960" cy="365760"/>
           </a:xfrm>
           <a:prstGeom prst="roundRect">
             <a:avLst>
@@ -4617,8 +4633,8 @@
         </p:nvSpPr>
         <p:spPr>
           <a:xfrm>
-            <a:off x="548640" y="4800600"/>
-            <a:ext cx="3017520" cy="320040"/>
+            <a:off x="502920" y="4754880"/>
+            <a:ext cx="3108960" cy="292608"/>
           </a:xfrm>
           <a:prstGeom prst="rect">
             <a:avLst/>
@@ -4633,7 +4649,7 @@
           <a:p>
             <a:pPr algn="ctr"/>
             <a:r>
-              <a:rPr sz="1200" b="1">
+              <a:rPr sz="1100" b="1">
                 <a:solidFill>
                   <a:srgbClr val="FFFFFF"/>
                 </a:solidFill>
@@ -4653,8 +4669,8 @@
         </p:nvSpPr>
         <p:spPr>
           <a:xfrm>
-            <a:off x="3749039" y="4754880"/>
-            <a:ext cx="2743200" cy="384048"/>
+            <a:off x="3794760" y="4709160"/>
+            <a:ext cx="2926080" cy="365760"/>
           </a:xfrm>
           <a:prstGeom prst="roundRect">
             <a:avLst>
@@ -4698,8 +4714,8 @@
         </p:nvSpPr>
         <p:spPr>
           <a:xfrm>
-            <a:off x="3749039" y="4800600"/>
-            <a:ext cx="2743200" cy="320040"/>
+            <a:off x="3794760" y="4754880"/>
+            <a:ext cx="2926080" cy="292608"/>
           </a:xfrm>
           <a:prstGeom prst="rect">
             <a:avLst/>
@@ -4714,7 +4730,7 @@
           <a:p>
             <a:pPr algn="ctr"/>
             <a:r>
-              <a:rPr sz="1200" b="1">
+              <a:rPr sz="1100" b="1">
                 <a:solidFill>
                   <a:srgbClr val="FFFFFF"/>
                 </a:solidFill>
@@ -5008,20 +5024,59 @@
           <a:lstStyle/>
           <a:p>
             <a:r>
-              <a:rPr sz="2600" b="1">
+              <a:rPr sz="2400" b="1">
                 <a:solidFill>
                   <a:srgbClr val="FFFFFF"/>
                 </a:solidFill>
                 <a:latin typeface="Calibri"/>
               </a:rPr>
-              <a:t>Monitoring — interfaces web</a:t>
+              <a:t>Monitoring : interfaces web NameNode et YARN</a:t>
+            </a:r>
+          </a:p>
+        </p:txBody>
+      </p:sp>
+      <p:sp>
+        <p:nvSpPr>
+          <p:cNvPr id="6" name="TextBox 5"/>
+          <p:cNvSpPr txBox="1"/>
+          <p:nvPr/>
+        </p:nvSpPr>
+        <p:spPr>
+          <a:xfrm>
+            <a:off x="320040" y="1051560"/>
+            <a:ext cx="11430000" cy="365760"/>
+          </a:xfrm>
+          <a:prstGeom prst="rect">
+            <a:avLst/>
+          </a:prstGeom>
+          <a:noFill/>
+        </p:spPr>
+        <p:txBody>
+          <a:bodyPr wrap="square">
+            <a:spAutoFit/>
+          </a:bodyPr>
+          <a:lstStyle/>
+          <a:p>
+            <a:pPr algn="l">
+              <a:spcAft>
+                <a:spcPts val="500"/>
+              </a:spcAft>
+            </a:pPr>
+            <a:r>
+              <a:rPr sz="1300" b="0">
+                <a:solidFill>
+                  <a:srgbClr val="64748B"/>
+                </a:solidFill>
+                <a:latin typeface="Calibri"/>
+              </a:rPr>
+              <a:t>Les UI permettent de vérifier l’état du cluster sans rester uniquement en ligne de commande.</a:t>
             </a:r>
           </a:p>
         </p:txBody>
       </p:sp>
       <p:pic>
         <p:nvPicPr>
-          <p:cNvPr id="6" name="Picture 5" descr="screenshot-namenode.png"/>
+          <p:cNvPr id="7" name="Picture 6" descr="screenshot-namenode.png"/>
           <p:cNvPicPr>
             <a:picLocks noChangeAspect="1"/>
           </p:cNvPicPr>
@@ -5035,8 +5090,8 @@
         </p:blipFill>
         <p:spPr>
           <a:xfrm>
-            <a:off x="320040" y="1188720"/>
-            <a:ext cx="5669280" cy="4049486"/>
+            <a:off x="320040" y="1463040"/>
+            <a:ext cx="5623560" cy="4016829"/>
           </a:xfrm>
           <a:prstGeom prst="rect">
             <a:avLst/>
@@ -5045,14 +5100,14 @@
       </p:pic>
       <p:sp>
         <p:nvSpPr>
-          <p:cNvPr id="7" name="TextBox 6"/>
+          <p:cNvPr id="8" name="TextBox 7"/>
           <p:cNvSpPr txBox="1"/>
           <p:nvPr/>
         </p:nvSpPr>
         <p:spPr>
           <a:xfrm>
             <a:off x="320040" y="4160520"/>
-            <a:ext cx="5669280" cy="274320"/>
+            <a:ext cx="5623560" cy="256032"/>
           </a:xfrm>
           <a:prstGeom prst="rect">
             <a:avLst/>
@@ -5067,7 +5122,7 @@
           <a:p>
             <a:pPr algn="l">
               <a:spcAft>
-                <a:spcPts val="600"/>
+                <a:spcPts val="500"/>
               </a:spcAft>
             </a:pPr>
             <a:r>
@@ -5077,14 +5132,14 @@
                 </a:solidFill>
                 <a:latin typeface="Calibri"/>
               </a:rPr>
-              <a:t>NameNode — localhost:9870</a:t>
+              <a:t>NameNode — vue d’ensemble du DFS</a:t>
             </a:r>
           </a:p>
         </p:txBody>
       </p:sp>
       <p:pic>
         <p:nvPicPr>
-          <p:cNvPr id="8" name="Picture 7" descr="screenshot-datanodes.png"/>
+          <p:cNvPr id="9" name="Picture 8" descr="screenshot-datanodes.png"/>
           <p:cNvPicPr>
             <a:picLocks noChangeAspect="1"/>
           </p:cNvPicPr>
@@ -5098,7 +5153,7 @@
         </p:blipFill>
         <p:spPr>
           <a:xfrm>
-            <a:off x="6217920" y="1188720"/>
+            <a:off x="6217920" y="1463040"/>
             <a:ext cx="5577840" cy="3984171"/>
           </a:xfrm>
           <a:prstGeom prst="rect">
@@ -5108,14 +5163,14 @@
       </p:pic>
       <p:sp>
         <p:nvSpPr>
-          <p:cNvPr id="9" name="TextBox 8"/>
+          <p:cNvPr id="10" name="TextBox 9"/>
           <p:cNvSpPr txBox="1"/>
           <p:nvPr/>
         </p:nvSpPr>
         <p:spPr>
           <a:xfrm>
             <a:off x="6217920" y="4160520"/>
-            <a:ext cx="5577840" cy="274320"/>
+            <a:ext cx="5577840" cy="256032"/>
           </a:xfrm>
           <a:prstGeom prst="rect">
             <a:avLst/>
@@ -5130,7 +5185,7 @@
           <a:p>
             <a:pPr algn="l">
               <a:spcAft>
-                <a:spcPts val="600"/>
+                <a:spcPts val="500"/>
               </a:spcAft>
             </a:pPr>
             <a:r>
@@ -5140,53 +5195,8 @@
                 </a:solidFill>
                 <a:latin typeface="Calibri"/>
               </a:rPr>
-              <a:t>DataNodes — 5 Live</a:t>
-            </a:r>
-          </a:p>
-        </p:txBody>
-      </p:sp>
-      <p:sp>
-        <p:nvSpPr>
-          <p:cNvPr id="10" name="Rounded Rectangle 9"/>
-          <p:cNvSpPr/>
-          <p:nvPr/>
-        </p:nvSpPr>
-        <p:spPr>
-          <a:xfrm>
-            <a:off x="320040" y="4572000"/>
-            <a:ext cx="3200400" cy="384048"/>
-          </a:xfrm>
-          <a:prstGeom prst="roundRect">
-            <a:avLst>
-              <a:gd name="adj" fmla="val 8000"/>
-            </a:avLst>
-          </a:prstGeom>
-          <a:solidFill>
-            <a:srgbClr val="147A66"/>
-          </a:solidFill>
-          <a:ln>
-            <a:noFill/>
-          </a:ln>
-        </p:spPr>
-        <p:style>
-          <a:lnRef idx="1">
-            <a:schemeClr val="accent1"/>
-          </a:lnRef>
-          <a:fillRef idx="3">
-            <a:schemeClr val="accent1"/>
-          </a:fillRef>
-          <a:effectRef idx="2">
-            <a:schemeClr val="accent1"/>
-          </a:effectRef>
-          <a:fontRef idx="minor">
-            <a:schemeClr val="lt1"/>
-          </a:fontRef>
-        </p:style>
-        <p:txBody>
-          <a:bodyPr rtlCol="0" anchor="ctr"/>
-          <a:lstStyle/>
-          <a:p>
-            <a:pPr algn="ctr"/>
+              <a:t>Onglet DataNodes — 5 nœuds actifs</a:t>
+            </a:r>
           </a:p>
         </p:txBody>
       </p:sp>
@@ -5198,206 +5208,8 @@
         </p:nvSpPr>
         <p:spPr>
           <a:xfrm>
-            <a:off x="320040" y="4617720"/>
-            <a:ext cx="3200400" cy="320040"/>
-          </a:xfrm>
-          <a:prstGeom prst="rect">
-            <a:avLst/>
-          </a:prstGeom>
-          <a:noFill/>
-        </p:spPr>
-        <p:txBody>
-          <a:bodyPr wrap="none">
-            <a:spAutoFit/>
-          </a:bodyPr>
-          <a:lstStyle/>
-          <a:p>
-            <a:pPr algn="ctr"/>
-            <a:r>
-              <a:rPr sz="1200" b="1">
-                <a:solidFill>
-                  <a:srgbClr val="FFFFFF"/>
-                </a:solidFill>
-                <a:latin typeface="Calibri"/>
-                <a:hlinkClick r:id="rId4"/>
-              </a:rPr>
-              <a:t>Ouvrir NameNode →</a:t>
-            </a:r>
-          </a:p>
-        </p:txBody>
-      </p:sp>
-      <p:sp>
-        <p:nvSpPr>
-          <p:cNvPr id="12" name="Rounded Rectangle 11"/>
-          <p:cNvSpPr/>
-          <p:nvPr/>
-        </p:nvSpPr>
-        <p:spPr>
-          <a:xfrm>
-            <a:off x="3657600" y="4572000"/>
-            <a:ext cx="3200400" cy="384048"/>
-          </a:xfrm>
-          <a:prstGeom prst="roundRect">
-            <a:avLst>
-              <a:gd name="adj" fmla="val 8000"/>
-            </a:avLst>
-          </a:prstGeom>
-          <a:solidFill>
-            <a:srgbClr val="1D4E89"/>
-          </a:solidFill>
-          <a:ln>
-            <a:noFill/>
-          </a:ln>
-        </p:spPr>
-        <p:style>
-          <a:lnRef idx="1">
-            <a:schemeClr val="accent1"/>
-          </a:lnRef>
-          <a:fillRef idx="3">
-            <a:schemeClr val="accent1"/>
-          </a:fillRef>
-          <a:effectRef idx="2">
-            <a:schemeClr val="accent1"/>
-          </a:effectRef>
-          <a:fontRef idx="minor">
-            <a:schemeClr val="lt1"/>
-          </a:fontRef>
-        </p:style>
-        <p:txBody>
-          <a:bodyPr rtlCol="0" anchor="ctr"/>
-          <a:lstStyle/>
-          <a:p>
-            <a:pPr algn="ctr"/>
-          </a:p>
-        </p:txBody>
-      </p:sp>
-      <p:sp>
-        <p:nvSpPr>
-          <p:cNvPr id="13" name="TextBox 12"/>
-          <p:cNvSpPr txBox="1"/>
-          <p:nvPr/>
-        </p:nvSpPr>
-        <p:spPr>
-          <a:xfrm>
-            <a:off x="3657600" y="4617720"/>
-            <a:ext cx="3200400" cy="320040"/>
-          </a:xfrm>
-          <a:prstGeom prst="rect">
-            <a:avLst/>
-          </a:prstGeom>
-          <a:noFill/>
-        </p:spPr>
-        <p:txBody>
-          <a:bodyPr wrap="none">
-            <a:spAutoFit/>
-          </a:bodyPr>
-          <a:lstStyle/>
-          <a:p>
-            <a:pPr algn="ctr"/>
-            <a:r>
-              <a:rPr sz="1200" b="1">
-                <a:solidFill>
-                  <a:srgbClr val="FFFFFF"/>
-                </a:solidFill>
-                <a:latin typeface="Calibri"/>
-                <a:hlinkClick r:id="rId5"/>
-              </a:rPr>
-              <a:t>Liste DataNodes →</a:t>
-            </a:r>
-          </a:p>
-        </p:txBody>
-      </p:sp>
-      <p:sp>
-        <p:nvSpPr>
-          <p:cNvPr id="14" name="Rounded Rectangle 13"/>
-          <p:cNvSpPr/>
-          <p:nvPr/>
-        </p:nvSpPr>
-        <p:spPr>
-          <a:xfrm>
-            <a:off x="7040880" y="4572000"/>
-            <a:ext cx="3200400" cy="384048"/>
-          </a:xfrm>
-          <a:prstGeom prst="roundRect">
-            <a:avLst>
-              <a:gd name="adj" fmla="val 8000"/>
-            </a:avLst>
-          </a:prstGeom>
-          <a:solidFill>
-            <a:srgbClr val="EA580C"/>
-          </a:solidFill>
-          <a:ln>
-            <a:noFill/>
-          </a:ln>
-        </p:spPr>
-        <p:style>
-          <a:lnRef idx="1">
-            <a:schemeClr val="accent1"/>
-          </a:lnRef>
-          <a:fillRef idx="3">
-            <a:schemeClr val="accent1"/>
-          </a:fillRef>
-          <a:effectRef idx="2">
-            <a:schemeClr val="accent1"/>
-          </a:effectRef>
-          <a:fontRef idx="minor">
-            <a:schemeClr val="lt1"/>
-          </a:fontRef>
-        </p:style>
-        <p:txBody>
-          <a:bodyPr rtlCol="0" anchor="ctr"/>
-          <a:lstStyle/>
-          <a:p>
-            <a:pPr algn="ctr"/>
-          </a:p>
-        </p:txBody>
-      </p:sp>
-      <p:sp>
-        <p:nvSpPr>
-          <p:cNvPr id="15" name="TextBox 14"/>
-          <p:cNvSpPr txBox="1"/>
-          <p:nvPr/>
-        </p:nvSpPr>
-        <p:spPr>
-          <a:xfrm>
-            <a:off x="7040880" y="4617720"/>
-            <a:ext cx="3200400" cy="320040"/>
-          </a:xfrm>
-          <a:prstGeom prst="rect">
-            <a:avLst/>
-          </a:prstGeom>
-          <a:noFill/>
-        </p:spPr>
-        <p:txBody>
-          <a:bodyPr wrap="none">
-            <a:spAutoFit/>
-          </a:bodyPr>
-          <a:lstStyle/>
-          <a:p>
-            <a:pPr algn="ctr"/>
-            <a:r>
-              <a:rPr sz="1200" b="1">
-                <a:solidFill>
-                  <a:srgbClr val="FFFFFF"/>
-                </a:solidFill>
-                <a:latin typeface="Calibri"/>
-                <a:hlinkClick r:id="rId6"/>
-              </a:rPr>
-              <a:t>Ouvrir YARN →</a:t>
-            </a:r>
-          </a:p>
-        </p:txBody>
-      </p:sp>
-      <p:sp>
-        <p:nvSpPr>
-          <p:cNvPr id="16" name="TextBox 15"/>
-          <p:cNvSpPr txBox="1"/>
-          <p:nvPr/>
-        </p:nvSpPr>
-        <p:spPr>
-          <a:xfrm>
-            <a:off x="365760" y="5120640"/>
-            <a:ext cx="11155680" cy="914400"/>
+            <a:off x="320040" y="4434840"/>
+            <a:ext cx="11430000" cy="1554480"/>
           </a:xfrm>
           <a:prstGeom prst="rect">
             <a:avLst/>
@@ -5412,24 +5224,107 @@
           <a:p>
             <a:pPr algn="l">
               <a:spcAft>
+                <a:spcPts val="400"/>
+              </a:spcAft>
+            </a:pPr>
+            <a:r>
+              <a:rPr sz="1300" b="0">
+                <a:solidFill>
+                  <a:srgbClr val="1E293B"/>
+                </a:solidFill>
+                <a:latin typeface="Calibri"/>
+              </a:rPr>
+              <a:t>NameNode (9870) : 5 DataNodes Live, espace DFS faible (labo), aucun missing block pendant nos tests.</a:t>
+            </a:r>
+          </a:p>
+          <a:p>
+            <a:pPr algn="l">
+              <a:spcAft>
+                <a:spcPts val="400"/>
+              </a:spcAft>
+            </a:pPr>
+            <a:r>
+              <a:rPr sz="1300" b="0">
+                <a:solidFill>
+                  <a:srgbClr val="1E293B"/>
+                </a:solidFill>
+                <a:latin typeface="Calibri"/>
+              </a:rPr>
+              <a:t>YARN (8088) : job π en FINISHED/SUCCEEDED ; métriques mémoire et vcores visibles.</a:t>
+            </a:r>
+          </a:p>
+          <a:p>
+            <a:pPr algn="l">
+              <a:spcAft>
                 <a:spcPts val="600"/>
               </a:spcAft>
             </a:pPr>
             <a:r>
-              <a:rPr sz="1400" b="0">
+              <a:rPr sz="1300" b="0">
                 <a:solidFill>
                   <a:srgbClr val="1E293B"/>
                 </a:solidFill>
                 <a:latin typeface="Calibri"/>
               </a:rPr>
-              <a:t>Pas de missing block  ·  setrep met à jour la cible de réplication sur le NameNode</a:t>
-            </a:r>
-          </a:p>
-        </p:txBody>
-      </p:sp>
-      <p:sp>
-        <p:nvSpPr>
-          <p:cNvPr id="17" name="Rectangle 16"/>
+              <a:t>Après setrep -w 2, le NameNode met à jour la cible de réplication du fichier.</a:t>
+            </a:r>
+          </a:p>
+          <a:p>
+            <a:pPr algn="l">
+              <a:spcAft>
+                <a:spcPts val="200"/>
+              </a:spcAft>
+            </a:pPr>
+            <a:r>
+              <a:rPr sz="1200" b="1">
+                <a:solidFill>
+                  <a:srgbClr val="1D4E89"/>
+                </a:solidFill>
+                <a:latin typeface="Calibri"/>
+                <a:hlinkClick r:id="rId4"/>
+              </a:rPr>
+              <a:t>NameNode →</a:t>
+            </a:r>
+          </a:p>
+          <a:p>
+            <a:pPr algn="l">
+              <a:spcAft>
+                <a:spcPts val="200"/>
+              </a:spcAft>
+            </a:pPr>
+            <a:r>
+              <a:rPr sz="1200" b="1">
+                <a:solidFill>
+                  <a:srgbClr val="1D4E89"/>
+                </a:solidFill>
+                <a:latin typeface="Calibri"/>
+                <a:hlinkClick r:id="rId5"/>
+              </a:rPr>
+              <a:t>DataNodes →</a:t>
+            </a:r>
+          </a:p>
+          <a:p>
+            <a:pPr algn="l">
+              <a:spcAft>
+                <a:spcPts val="500"/>
+              </a:spcAft>
+            </a:pPr>
+            <a:r>
+              <a:rPr sz="1200" b="1">
+                <a:solidFill>
+                  <a:srgbClr val="1D4E89"/>
+                </a:solidFill>
+                <a:latin typeface="Calibri"/>
+                <a:hlinkClick r:id="rId6"/>
+              </a:rPr>
+              <a:t>YARN →</a:t>
+            </a:r>
+          </a:p>
+        </p:txBody>
+      </p:sp>
+      <p:sp>
+        <p:nvSpPr>
+          <p:cNvPr id="12" name="Rectangle 11"/>
           <p:cNvSpPr/>
           <p:nvPr/>
         </p:nvSpPr>
@@ -5472,7 +5367,7 @@
       </p:sp>
       <p:sp>
         <p:nvSpPr>
-          <p:cNvPr id="18" name="TextBox 17"/>
+          <p:cNvPr id="13" name="TextBox 12"/>
           <p:cNvSpPr txBox="1"/>
           <p:nvPr/>
         </p:nvSpPr>
@@ -5506,7 +5401,7 @@
       </p:sp>
       <p:sp>
         <p:nvSpPr>
-          <p:cNvPr id="19" name="TextBox 18"/>
+          <p:cNvPr id="14" name="TextBox 13"/>
           <p:cNvSpPr txBox="1"/>
           <p:nvPr/>
         </p:nvSpPr>
@@ -5709,27 +5604,66 @@
           <a:lstStyle/>
           <a:p>
             <a:r>
-              <a:rPr sz="2600" b="1">
+              <a:rPr sz="2400" b="1">
                 <a:solidFill>
                   <a:srgbClr val="FFFFFF"/>
                 </a:solidFill>
                 <a:latin typeface="Calibri"/>
               </a:rPr>
-              <a:t>Problèmes rencontrés → solutions</a:t>
-            </a:r>
-          </a:p>
-        </p:txBody>
-      </p:sp>
-      <p:sp>
-        <p:nvSpPr>
-          <p:cNvPr id="6" name="Rounded Rectangle 5"/>
+              <a:t>Problèmes rencontrés et solutions</a:t>
+            </a:r>
+          </a:p>
+        </p:txBody>
+      </p:sp>
+      <p:sp>
+        <p:nvSpPr>
+          <p:cNvPr id="6" name="TextBox 5"/>
+          <p:cNvSpPr txBox="1"/>
+          <p:nvPr/>
+        </p:nvSpPr>
+        <p:spPr>
+          <a:xfrm>
+            <a:off x="365760" y="1051560"/>
+            <a:ext cx="11338560" cy="365760"/>
+          </a:xfrm>
+          <a:prstGeom prst="rect">
+            <a:avLst/>
+          </a:prstGeom>
+          <a:noFill/>
+        </p:spPr>
+        <p:txBody>
+          <a:bodyPr wrap="square">
+            <a:spAutoFit/>
+          </a:bodyPr>
+          <a:lstStyle/>
+          <a:p>
+            <a:pPr algn="l">
+              <a:spcAft>
+                <a:spcPts val="500"/>
+              </a:spcAft>
+            </a:pPr>
+            <a:r>
+              <a:rPr sz="1400" b="0">
+                <a:solidFill>
+                  <a:srgbClr val="64748B"/>
+                </a:solidFill>
+                <a:latin typeface="Calibri"/>
+              </a:rPr>
+              <a:t>Trois blocages réels pendant le projet — et comment on les a corrigés.</a:t>
+            </a:r>
+          </a:p>
+        </p:txBody>
+      </p:sp>
+      <p:sp>
+        <p:nvSpPr>
+          <p:cNvPr id="7" name="Rounded Rectangle 6"/>
           <p:cNvSpPr/>
           <p:nvPr/>
         </p:nvSpPr>
         <p:spPr>
           <a:xfrm>
-            <a:off x="411480" y="1234440"/>
-            <a:ext cx="11338560" cy="1417320"/>
+            <a:off x="365760" y="1463040"/>
+            <a:ext cx="11430000" cy="1371600"/>
           </a:xfrm>
           <a:prstGeom prst="roundRect">
             <a:avLst>
@@ -5769,14 +5703,14 @@
       </p:sp>
       <p:sp>
         <p:nvSpPr>
-          <p:cNvPr id="7" name="Rectangle 6"/>
+          <p:cNvPr id="8" name="Rectangle 7"/>
           <p:cNvSpPr/>
           <p:nvPr/>
         </p:nvSpPr>
         <p:spPr>
           <a:xfrm>
-            <a:off x="411480" y="1234440"/>
-            <a:ext cx="164592" cy="1417320"/>
+            <a:off x="365760" y="1463040"/>
+            <a:ext cx="146304" cy="1371600"/>
           </a:xfrm>
           <a:prstGeom prst="rect">
             <a:avLst/>
@@ -5812,14 +5746,14 @@
       </p:sp>
       <p:sp>
         <p:nvSpPr>
-          <p:cNvPr id="8" name="TextBox 7"/>
+          <p:cNvPr id="9" name="TextBox 8"/>
           <p:cNvSpPr txBox="1"/>
           <p:nvPr/>
         </p:nvSpPr>
         <p:spPr>
           <a:xfrm>
-            <a:off x="777240" y="1371600"/>
-            <a:ext cx="10698480" cy="1188720"/>
+            <a:off x="685800" y="1572768"/>
+            <a:ext cx="10881360" cy="1188720"/>
           </a:xfrm>
           <a:prstGeom prst="rect">
             <a:avLst/>
@@ -5834,63 +5768,63 @@
           <a:p>
             <a:pPr algn="l">
               <a:spcAft>
-                <a:spcPts val="400"/>
-              </a:spcAft>
-            </a:pPr>
-            <a:r>
-              <a:rPr sz="1700" b="1">
+                <a:spcPts val="300"/>
+              </a:spcAft>
+            </a:pPr>
+            <a:r>
+              <a:rPr sz="1500" b="1">
                 <a:solidFill>
                   <a:srgbClr val="1E293B"/>
                 </a:solidFill>
                 <a:latin typeface="Calibri"/>
               </a:rPr>
-              <a:t>1. Pull access denied</a:t>
-            </a:r>
-          </a:p>
-          <a:p>
-            <a:pPr algn="l">
-              <a:spcAft>
-                <a:spcPts val="400"/>
-              </a:spcAft>
-            </a:pPr>
-            <a:r>
-              <a:rPr sz="1400" b="0">
+              <a:t>1. pull access denied</a:t>
+            </a:r>
+          </a:p>
+          <a:p>
+            <a:pPr algn="l">
+              <a:spcAft>
+                <a:spcPts val="300"/>
+              </a:spcAft>
+            </a:pPr>
+            <a:r>
+              <a:rPr sz="1200" b="0">
                 <a:solidFill>
                   <a:srgbClr val="64748B"/>
                 </a:solidFill>
                 <a:latin typeface="Calibri"/>
               </a:rPr>
-              <a:t>Cause : Image pas encore sur Hub</a:t>
-            </a:r>
-          </a:p>
-          <a:p>
-            <a:pPr algn="l">
-              <a:spcAft>
-                <a:spcPts val="600"/>
-              </a:spcAft>
-            </a:pPr>
-            <a:r>
-              <a:rPr sz="1500" b="1">
+              <a:t>Cause : Compose essayait de télécharger l’image du groupe avant qu’elle existe sur Hub.</a:t>
+            </a:r>
+          </a:p>
+          <a:p>
+            <a:pPr algn="l">
+              <a:spcAft>
+                <a:spcPts val="500"/>
+              </a:spcAft>
+            </a:pPr>
+            <a:r>
+              <a:rPr sz="1300" b="1">
                 <a:solidFill>
                   <a:srgbClr val="0F5C4C"/>
                 </a:solidFill>
                 <a:latin typeface="Calibri"/>
               </a:rPr>
-              <a:t>Solution : pull_policy: never + build local</a:t>
-            </a:r>
-          </a:p>
-        </p:txBody>
-      </p:sp>
-      <p:sp>
-        <p:nvSpPr>
-          <p:cNvPr id="9" name="Rounded Rectangle 8"/>
+              <a:t>Solution : pull_policy: never + build local de l’image, puis push une fois prête.</a:t>
+            </a:r>
+          </a:p>
+        </p:txBody>
+      </p:sp>
+      <p:sp>
+        <p:nvSpPr>
+          <p:cNvPr id="10" name="Rounded Rectangle 9"/>
           <p:cNvSpPr/>
           <p:nvPr/>
         </p:nvSpPr>
         <p:spPr>
           <a:xfrm>
-            <a:off x="411480" y="2788920"/>
-            <a:ext cx="11338560" cy="1417320"/>
+            <a:off x="365760" y="2971800"/>
+            <a:ext cx="11430000" cy="1371600"/>
           </a:xfrm>
           <a:prstGeom prst="roundRect">
             <a:avLst>
@@ -5930,14 +5864,14 @@
       </p:sp>
       <p:sp>
         <p:nvSpPr>
-          <p:cNvPr id="10" name="Rectangle 9"/>
+          <p:cNvPr id="11" name="Rectangle 10"/>
           <p:cNvSpPr/>
           <p:nvPr/>
         </p:nvSpPr>
         <p:spPr>
           <a:xfrm>
-            <a:off x="411480" y="2788920"/>
-            <a:ext cx="164592" cy="1417320"/>
+            <a:off x="365760" y="2971800"/>
+            <a:ext cx="146304" cy="1371600"/>
           </a:xfrm>
           <a:prstGeom prst="rect">
             <a:avLst/>
@@ -5973,14 +5907,14 @@
       </p:sp>
       <p:sp>
         <p:nvSpPr>
-          <p:cNvPr id="11" name="TextBox 10"/>
+          <p:cNvPr id="12" name="TextBox 11"/>
           <p:cNvSpPr txBox="1"/>
           <p:nvPr/>
         </p:nvSpPr>
         <p:spPr>
           <a:xfrm>
-            <a:off x="777240" y="2926079"/>
-            <a:ext cx="10698480" cy="1188720"/>
+            <a:off x="685800" y="3081528"/>
+            <a:ext cx="10881360" cy="1188720"/>
           </a:xfrm>
           <a:prstGeom prst="rect">
             <a:avLst/>
@@ -5995,63 +5929,63 @@
           <a:p>
             <a:pPr algn="l">
               <a:spcAft>
-                <a:spcPts val="400"/>
-              </a:spcAft>
-            </a:pPr>
-            <a:r>
-              <a:rPr sz="1700" b="1">
+                <a:spcPts val="300"/>
+              </a:spcAft>
+            </a:pPr>
+            <a:r>
+              <a:rPr sz="1500" b="1">
                 <a:solidFill>
                   <a:srgbClr val="1E293B"/>
                 </a:solidFill>
                 <a:latin typeface="Calibri"/>
               </a:rPr>
-              <a:t>2. Tag majuscules</a:t>
-            </a:r>
-          </a:p>
-          <a:p>
-            <a:pPr algn="l">
-              <a:spcAft>
-                <a:spcPts val="400"/>
-              </a:spcAft>
-            </a:pPr>
-            <a:r>
-              <a:rPr sz="1400" b="0">
+              <a:t>2. Tag avec majuscules refusé</a:t>
+            </a:r>
+          </a:p>
+          <a:p>
+            <a:pPr algn="l">
+              <a:spcAft>
+                <a:spcPts val="300"/>
+              </a:spcAft>
+            </a:pPr>
+            <a:r>
+              <a:rPr sz="1200" b="0">
                 <a:solidFill>
                   <a:srgbClr val="64748B"/>
                 </a:solidFill>
                 <a:latin typeface="Calibri"/>
               </a:rPr>
-              <a:t>Cause : Docker Hub refuse G4</a:t>
-            </a:r>
-          </a:p>
-          <a:p>
-            <a:pPr algn="l">
-              <a:spcAft>
-                <a:spcPts val="600"/>
-              </a:spcAft>
-            </a:pPr>
-            <a:r>
-              <a:rPr sz="1500" b="1">
+              <a:t>Cause : Docker Hub n’accepte pas les majuscules dans le nom de dépôt (ex. G4).</a:t>
+            </a:r>
+          </a:p>
+          <a:p>
+            <a:pPr algn="l">
+              <a:spcAft>
+                <a:spcPts val="500"/>
+              </a:spcAft>
+            </a:pPr>
+            <a:r>
+              <a:rPr sz="1300" b="1">
                 <a:solidFill>
                   <a:srgbClr val="0F5C4C"/>
                 </a:solidFill>
                 <a:latin typeface="Calibri"/>
               </a:rPr>
-              <a:t>Solution : leshadoopriders/hadoop-tp-g4:1.0</a:t>
-            </a:r>
-          </a:p>
-        </p:txBody>
-      </p:sp>
-      <p:sp>
-        <p:nvSpPr>
-          <p:cNvPr id="12" name="Rounded Rectangle 11"/>
+              <a:t>Solution : Tag final : leshadoopriders/hadoop-tp-g4:1.0 (tout en minuscules).</a:t>
+            </a:r>
+          </a:p>
+        </p:txBody>
+      </p:sp>
+      <p:sp>
+        <p:nvSpPr>
+          <p:cNvPr id="13" name="Rounded Rectangle 12"/>
           <p:cNvSpPr/>
           <p:nvPr/>
         </p:nvSpPr>
         <p:spPr>
           <a:xfrm>
-            <a:off x="411480" y="4343400"/>
-            <a:ext cx="11338560" cy="1417320"/>
+            <a:off x="365760" y="4480560"/>
+            <a:ext cx="11430000" cy="1371600"/>
           </a:xfrm>
           <a:prstGeom prst="roundRect">
             <a:avLst>
@@ -6091,14 +6025,14 @@
       </p:sp>
       <p:sp>
         <p:nvSpPr>
-          <p:cNvPr id="13" name="Rectangle 12"/>
+          <p:cNvPr id="14" name="Rectangle 13"/>
           <p:cNvSpPr/>
           <p:nvPr/>
         </p:nvSpPr>
         <p:spPr>
           <a:xfrm>
-            <a:off x="411480" y="4343400"/>
-            <a:ext cx="164592" cy="1417320"/>
+            <a:off x="365760" y="4480560"/>
+            <a:ext cx="146304" cy="1371600"/>
           </a:xfrm>
           <a:prstGeom prst="rect">
             <a:avLst/>
@@ -6134,14 +6068,14 @@
       </p:sp>
       <p:sp>
         <p:nvSpPr>
-          <p:cNvPr id="14" name="TextBox 13"/>
+          <p:cNvPr id="15" name="TextBox 14"/>
           <p:cNvSpPr txBox="1"/>
           <p:nvPr/>
         </p:nvSpPr>
         <p:spPr>
           <a:xfrm>
-            <a:off x="777240" y="4480560"/>
-            <a:ext cx="10698480" cy="1188720"/>
+            <a:off x="685800" y="4590288"/>
+            <a:ext cx="10881360" cy="1188720"/>
           </a:xfrm>
           <a:prstGeom prst="rect">
             <a:avLst/>
@@ -6156,56 +6090,56 @@
           <a:p>
             <a:pPr algn="l">
               <a:spcAft>
-                <a:spcPts val="400"/>
-              </a:spcAft>
-            </a:pPr>
-            <a:r>
-              <a:rPr sz="1700" b="1">
+                <a:spcPts val="300"/>
+              </a:spcAft>
+            </a:pPr>
+            <a:r>
+              <a:rPr sz="1500" b="1">
                 <a:solidFill>
                   <a:srgbClr val="1E293B"/>
                 </a:solidFill>
                 <a:latin typeface="Calibri"/>
               </a:rPr>
-              <a:t>3. Download trop lent</a:t>
-            </a:r>
-          </a:p>
-          <a:p>
-            <a:pPr algn="l">
-              <a:spcAft>
-                <a:spcPts val="400"/>
-              </a:spcAft>
-            </a:pPr>
-            <a:r>
-              <a:rPr sz="1400" b="0">
+              <a:t>3. Téléchargement Hadoop trop lent</a:t>
+            </a:r>
+          </a:p>
+          <a:p>
+            <a:pPr algn="l">
+              <a:spcAft>
+                <a:spcPts val="300"/>
+              </a:spcAft>
+            </a:pPr>
+            <a:r>
+              <a:rPr sz="1200" b="0">
                 <a:solidFill>
                   <a:srgbClr val="64748B"/>
                 </a:solidFill>
                 <a:latin typeface="Calibri"/>
               </a:rPr>
-              <a:t>Cause : archive.apache.org bloqué</a:t>
-            </a:r>
-          </a:p>
-          <a:p>
-            <a:pPr algn="l">
-              <a:spcAft>
-                <a:spcPts val="600"/>
-              </a:spcAft>
-            </a:pPr>
-            <a:r>
-              <a:rPr sz="1500" b="1">
+              <a:t>Cause : Le build restait bloqué longtemps sur archive.apache.org.</a:t>
+            </a:r>
+          </a:p>
+          <a:p>
+            <a:pPr algn="l">
+              <a:spcAft>
+                <a:spcPts val="500"/>
+              </a:spcAft>
+            </a:pPr>
+            <a:r>
+              <a:rPr sz="1300" b="1">
                 <a:solidFill>
                   <a:srgbClr val="0F5C4C"/>
                 </a:solidFill>
                 <a:latin typeface="Calibri"/>
               </a:rPr>
-              <a:t>Solution : Base apache/hadoop:3.3.6</a:t>
-            </a:r>
-          </a:p>
-        </p:txBody>
-      </p:sp>
-      <p:sp>
-        <p:nvSpPr>
-          <p:cNvPr id="15" name="Rectangle 14"/>
+              <a:t>Solution : Image de base apache/hadoop:3.3.6 + notre config XML et entrypoint.sh.</a:t>
+            </a:r>
+          </a:p>
+        </p:txBody>
+      </p:sp>
+      <p:sp>
+        <p:nvSpPr>
+          <p:cNvPr id="16" name="Rectangle 15"/>
           <p:cNvSpPr/>
           <p:nvPr/>
         </p:nvSpPr>
@@ -6248,7 +6182,7 @@
       </p:sp>
       <p:sp>
         <p:nvSpPr>
-          <p:cNvPr id="16" name="TextBox 15"/>
+          <p:cNvPr id="17" name="TextBox 16"/>
           <p:cNvSpPr txBox="1"/>
           <p:nvPr/>
         </p:nvSpPr>
@@ -6282,7 +6216,7 @@
       </p:sp>
       <p:sp>
         <p:nvSpPr>
-          <p:cNvPr id="17" name="TextBox 16"/>
+          <p:cNvPr id="18" name="TextBox 17"/>
           <p:cNvSpPr txBox="1"/>
           <p:nvPr/>
         </p:nvSpPr>
@@ -6485,27 +6419,66 @@
           <a:lstStyle/>
           <a:p>
             <a:r>
-              <a:rPr sz="2600" b="1">
+              <a:rPr sz="2400" b="1">
                 <a:solidFill>
                   <a:srgbClr val="FFFFFF"/>
                 </a:solidFill>
                 <a:latin typeface="Calibri"/>
               </a:rPr>
-              <a:t>Conclusion — merci !</a:t>
-            </a:r>
-          </a:p>
-        </p:txBody>
-      </p:sp>
-      <p:sp>
-        <p:nvSpPr>
-          <p:cNvPr id="6" name="Rounded Rectangle 5"/>
+              <a:t>Conclusion — ce que nous avons livré</a:t>
+            </a:r>
+          </a:p>
+        </p:txBody>
+      </p:sp>
+      <p:sp>
+        <p:nvSpPr>
+          <p:cNvPr id="6" name="TextBox 5"/>
+          <p:cNvSpPr txBox="1"/>
+          <p:nvPr/>
+        </p:nvSpPr>
+        <p:spPr>
+          <a:xfrm>
+            <a:off x="365760" y="1051560"/>
+            <a:ext cx="7223760" cy="411480"/>
+          </a:xfrm>
+          <a:prstGeom prst="rect">
+            <a:avLst/>
+          </a:prstGeom>
+          <a:noFill/>
+        </p:spPr>
+        <p:txBody>
+          <a:bodyPr wrap="square">
+            <a:spAutoFit/>
+          </a:bodyPr>
+          <a:lstStyle/>
+          <a:p>
+            <a:pPr algn="l">
+              <a:spcAft>
+                <a:spcPts val="500"/>
+              </a:spcAft>
+            </a:pPr>
+            <a:r>
+              <a:rPr sz="1400" b="0">
+                <a:solidFill>
+                  <a:srgbClr val="64748B"/>
+                </a:solidFill>
+                <a:latin typeface="Calibri"/>
+              </a:rPr>
+              <a:t>En résumé, le groupe a déployé, testé et documenté un cluster Hadoop complet.</a:t>
+            </a:r>
+          </a:p>
+        </p:txBody>
+      </p:sp>
+      <p:sp>
+        <p:nvSpPr>
+          <p:cNvPr id="7" name="Rounded Rectangle 6"/>
           <p:cNvSpPr/>
           <p:nvPr/>
         </p:nvSpPr>
         <p:spPr>
           <a:xfrm>
-            <a:off x="457200" y="1234440"/>
-            <a:ext cx="7132320" cy="658368"/>
+            <a:off x="365760" y="1508760"/>
+            <a:ext cx="7223760" cy="566928"/>
           </a:xfrm>
           <a:prstGeom prst="roundRect">
             <a:avLst>
@@ -6545,14 +6518,14 @@
       </p:sp>
       <p:sp>
         <p:nvSpPr>
-          <p:cNvPr id="7" name="TextBox 6"/>
+          <p:cNvPr id="8" name="TextBox 7"/>
           <p:cNvSpPr txBox="1"/>
           <p:nvPr/>
         </p:nvSpPr>
         <p:spPr>
           <a:xfrm>
-            <a:off x="685800" y="1399032"/>
-            <a:ext cx="6766560" cy="457200"/>
+            <a:off x="548640" y="1636776"/>
+            <a:ext cx="6858000" cy="365760"/>
           </a:xfrm>
           <a:prstGeom prst="rect">
             <a:avLst/>
@@ -6567,31 +6540,31 @@
           <a:p>
             <a:pPr algn="l">
               <a:spcAft>
-                <a:spcPts val="600"/>
-              </a:spcAft>
-            </a:pPr>
-            <a:r>
-              <a:rPr sz="1600" b="1">
+                <a:spcPts val="500"/>
+              </a:spcAft>
+            </a:pPr>
+            <a:r>
+              <a:rPr sz="1300" b="1">
                 <a:solidFill>
                   <a:srgbClr val="1E293B"/>
                 </a:solidFill>
                 <a:latin typeface="Calibri"/>
               </a:rPr>
-              <a:t>✓  Cluster 1 master + 5 DataNodes opérationnel</a:t>
-            </a:r>
-          </a:p>
-        </p:txBody>
-      </p:sp>
-      <p:sp>
-        <p:nvSpPr>
-          <p:cNvPr id="8" name="Rounded Rectangle 7"/>
+              <a:t>✓  Cluster opérationnel : 1 master + 5 DataNodes / NodeManagers</a:t>
+            </a:r>
+          </a:p>
+        </p:txBody>
+      </p:sp>
+      <p:sp>
+        <p:nvSpPr>
+          <p:cNvPr id="9" name="Rounded Rectangle 8"/>
           <p:cNvSpPr/>
           <p:nvPr/>
         </p:nvSpPr>
         <p:spPr>
           <a:xfrm>
-            <a:off x="457200" y="2011680"/>
-            <a:ext cx="7132320" cy="658368"/>
+            <a:off x="365760" y="2167128"/>
+            <a:ext cx="7223760" cy="566928"/>
           </a:xfrm>
           <a:prstGeom prst="roundRect">
             <a:avLst>
@@ -6631,14 +6604,14 @@
       </p:sp>
       <p:sp>
         <p:nvSpPr>
-          <p:cNvPr id="9" name="TextBox 8"/>
+          <p:cNvPr id="10" name="TextBox 9"/>
           <p:cNvSpPr txBox="1"/>
           <p:nvPr/>
         </p:nvSpPr>
         <p:spPr>
           <a:xfrm>
-            <a:off x="685800" y="2176272"/>
-            <a:ext cx="6766560" cy="457200"/>
+            <a:off x="548640" y="2295144"/>
+            <a:ext cx="6858000" cy="365760"/>
           </a:xfrm>
           <a:prstGeom prst="rect">
             <a:avLst/>
@@ -6653,31 +6626,31 @@
           <a:p>
             <a:pPr algn="l">
               <a:spcAft>
-                <a:spcPts val="600"/>
-              </a:spcAft>
-            </a:pPr>
-            <a:r>
-              <a:rPr sz="1600" b="1">
+                <a:spcPts val="500"/>
+              </a:spcAft>
+            </a:pPr>
+            <a:r>
+              <a:rPr sz="1300" b="1">
                 <a:solidFill>
                   <a:srgbClr val="1E293B"/>
                 </a:solidFill>
                 <a:latin typeface="Calibri"/>
               </a:rPr>
-              <a:t>✓  HDFS : droits, fsck, merge, trash, setrep</a:t>
-            </a:r>
-          </a:p>
-        </p:txBody>
-      </p:sp>
-      <p:sp>
-        <p:nvSpPr>
-          <p:cNvPr id="10" name="Rounded Rectangle 9"/>
+              <a:t>✓  HDFS maîtrisé : droits, fsck, lecture, getmerge, Trash, setrep</a:t>
+            </a:r>
+          </a:p>
+        </p:txBody>
+      </p:sp>
+      <p:sp>
+        <p:nvSpPr>
+          <p:cNvPr id="11" name="Rounded Rectangle 10"/>
           <p:cNvSpPr/>
           <p:nvPr/>
         </p:nvSpPr>
         <p:spPr>
           <a:xfrm>
-            <a:off x="457200" y="2788920"/>
-            <a:ext cx="7132320" cy="658368"/>
+            <a:off x="365760" y="2825496"/>
+            <a:ext cx="7223760" cy="566928"/>
           </a:xfrm>
           <a:prstGeom prst="roundRect">
             <a:avLst>
@@ -6717,14 +6690,14 @@
       </p:sp>
       <p:sp>
         <p:nvSpPr>
-          <p:cNvPr id="11" name="TextBox 10"/>
+          <p:cNvPr id="12" name="TextBox 11"/>
           <p:cNvSpPr txBox="1"/>
           <p:nvPr/>
         </p:nvSpPr>
         <p:spPr>
           <a:xfrm>
-            <a:off x="685800" y="2953512"/>
-            <a:ext cx="6766560" cy="457200"/>
+            <a:off x="548640" y="2953512"/>
+            <a:ext cx="6858000" cy="365760"/>
           </a:xfrm>
           <a:prstGeom prst="rect">
             <a:avLst/>
@@ -6739,31 +6712,31 @@
           <a:p>
             <a:pPr algn="l">
               <a:spcAft>
-                <a:spcPts val="600"/>
-              </a:spcAft>
-            </a:pPr>
-            <a:r>
-              <a:rPr sz="1600" b="1">
+                <a:spcPts val="500"/>
+              </a:spcAft>
+            </a:pPr>
+            <a:r>
+              <a:rPr sz="1300" b="1">
                 <a:solidFill>
                   <a:srgbClr val="1E293B"/>
                 </a:solidFill>
                 <a:latin typeface="Calibri"/>
               </a:rPr>
-              <a:t>✓  Job MapReduce π → SUCCEEDED (π ≈ 3.14)</a:t>
-            </a:r>
-          </a:p>
-        </p:txBody>
-      </p:sp>
-      <p:sp>
-        <p:nvSpPr>
-          <p:cNvPr id="12" name="Rounded Rectangle 11"/>
+              <a:t>✓  Job MapReduce π terminé avec succès (SUCCEEDED, π ≈ 3.14)</a:t>
+            </a:r>
+          </a:p>
+        </p:txBody>
+      </p:sp>
+      <p:sp>
+        <p:nvSpPr>
+          <p:cNvPr id="13" name="Rounded Rectangle 12"/>
           <p:cNvSpPr/>
           <p:nvPr/>
         </p:nvSpPr>
         <p:spPr>
           <a:xfrm>
-            <a:off x="457200" y="3566160"/>
-            <a:ext cx="7132320" cy="658368"/>
+            <a:off x="365760" y="3483864"/>
+            <a:ext cx="7223760" cy="566928"/>
           </a:xfrm>
           <a:prstGeom prst="roundRect">
             <a:avLst>
@@ -6803,14 +6776,14 @@
       </p:sp>
       <p:sp>
         <p:nvSpPr>
-          <p:cNvPr id="13" name="TextBox 12"/>
+          <p:cNvPr id="14" name="TextBox 13"/>
           <p:cNvSpPr txBox="1"/>
           <p:nvPr/>
         </p:nvSpPr>
         <p:spPr>
           <a:xfrm>
-            <a:off x="685800" y="3730752"/>
-            <a:ext cx="6766560" cy="457200"/>
+            <a:off x="548640" y="3611880"/>
+            <a:ext cx="6858000" cy="365760"/>
           </a:xfrm>
           <a:prstGeom prst="rect">
             <a:avLst/>
@@ -6825,24 +6798,110 @@
           <a:p>
             <a:pPr algn="l">
               <a:spcAft>
-                <a:spcPts val="600"/>
-              </a:spcAft>
-            </a:pPr>
-            <a:r>
-              <a:rPr sz="1600" b="1">
+                <a:spcPts val="500"/>
+              </a:spcAft>
+            </a:pPr>
+            <a:r>
+              <a:rPr sz="1300" b="1">
                 <a:solidFill>
                   <a:srgbClr val="1E293B"/>
                 </a:solidFill>
                 <a:latin typeface="Calibri"/>
               </a:rPr>
-              <a:t>✓  Image publique sur Docker Hub</a:t>
+              <a:t>✓  Image publiée : leshadoopriders/hadoop-tp-g4:1.0</a:t>
+            </a:r>
+          </a:p>
+        </p:txBody>
+      </p:sp>
+      <p:sp>
+        <p:nvSpPr>
+          <p:cNvPr id="15" name="Rounded Rectangle 14"/>
+          <p:cNvSpPr/>
+          <p:nvPr/>
+        </p:nvSpPr>
+        <p:spPr>
+          <a:xfrm>
+            <a:off x="365760" y="4142231"/>
+            <a:ext cx="7223760" cy="566928"/>
+          </a:xfrm>
+          <a:prstGeom prst="roundRect">
+            <a:avLst>
+              <a:gd name="adj" fmla="val 8000"/>
+            </a:avLst>
+          </a:prstGeom>
+          <a:solidFill>
+            <a:srgbClr val="FFFFFF"/>
+          </a:solidFill>
+          <a:ln w="15875">
+            <a:solidFill>
+              <a:srgbClr val="147A66"/>
+            </a:solidFill>
+          </a:ln>
+        </p:spPr>
+        <p:style>
+          <a:lnRef idx="1">
+            <a:schemeClr val="accent1"/>
+          </a:lnRef>
+          <a:fillRef idx="3">
+            <a:schemeClr val="accent1"/>
+          </a:fillRef>
+          <a:effectRef idx="2">
+            <a:schemeClr val="accent1"/>
+          </a:effectRef>
+          <a:fontRef idx="minor">
+            <a:schemeClr val="lt1"/>
+          </a:fontRef>
+        </p:style>
+        <p:txBody>
+          <a:bodyPr rtlCol="0" anchor="ctr"/>
+          <a:lstStyle/>
+          <a:p>
+            <a:pPr algn="ctr"/>
+          </a:p>
+        </p:txBody>
+      </p:sp>
+      <p:sp>
+        <p:nvSpPr>
+          <p:cNvPr id="16" name="TextBox 15"/>
+          <p:cNvSpPr txBox="1"/>
+          <p:nvPr/>
+        </p:nvSpPr>
+        <p:spPr>
+          <a:xfrm>
+            <a:off x="548640" y="4270247"/>
+            <a:ext cx="6858000" cy="365760"/>
+          </a:xfrm>
+          <a:prstGeom prst="rect">
+            <a:avLst/>
+          </a:prstGeom>
+          <a:noFill/>
+        </p:spPr>
+        <p:txBody>
+          <a:bodyPr wrap="square">
+            <a:spAutoFit/>
+          </a:bodyPr>
+          <a:lstStyle/>
+          <a:p>
+            <a:pPr algn="l">
+              <a:spcAft>
+                <a:spcPts val="500"/>
+              </a:spcAft>
+            </a:pPr>
+            <a:r>
+              <a:rPr sz="1300" b="1">
+                <a:solidFill>
+                  <a:srgbClr val="1E293B"/>
+                </a:solidFill>
+                <a:latin typeface="Calibri"/>
+              </a:rPr>
+              <a:t>✓  Rapport + code source + captures pour le rendu</a:t>
             </a:r>
           </a:p>
         </p:txBody>
       </p:sp>
       <p:pic>
         <p:nvPicPr>
-          <p:cNvPr id="14" name="Picture 13" descr="screenshot-yarn-app.png"/>
+          <p:cNvPr id="17" name="Picture 16" descr="screenshot-yarn-app.png"/>
           <p:cNvPicPr>
             <a:picLocks noChangeAspect="1"/>
           </p:cNvPicPr>
@@ -6856,8 +6915,8 @@
         </p:blipFill>
         <p:spPr>
           <a:xfrm>
-            <a:off x="7863840" y="1234440"/>
-            <a:ext cx="3931920" cy="2808514"/>
+            <a:off x="7818120" y="1417320"/>
+            <a:ext cx="4023360" cy="2873829"/>
           </a:xfrm>
           <a:prstGeom prst="rect">
             <a:avLst/>
@@ -6866,14 +6925,14 @@
       </p:pic>
       <p:sp>
         <p:nvSpPr>
-          <p:cNvPr id="15" name="TextBox 14"/>
+          <p:cNvPr id="18" name="TextBox 17"/>
           <p:cNvSpPr txBox="1"/>
           <p:nvPr/>
         </p:nvSpPr>
         <p:spPr>
           <a:xfrm>
-            <a:off x="7863840" y="3931920"/>
-            <a:ext cx="3931920" cy="274320"/>
+            <a:off x="7818120" y="3977639"/>
+            <a:ext cx="4023360" cy="256032"/>
           </a:xfrm>
           <a:prstGeom prst="rect">
             <a:avLst/>
@@ -6888,7 +6947,7 @@
           <a:p>
             <a:pPr algn="l">
               <a:spcAft>
-                <a:spcPts val="600"/>
+                <a:spcPts val="500"/>
               </a:spcAft>
             </a:pPr>
             <a:r>
@@ -6905,14 +6964,14 @@
       </p:sp>
       <p:sp>
         <p:nvSpPr>
-          <p:cNvPr id="16" name="Rounded Rectangle 15"/>
+          <p:cNvPr id="19" name="Rounded Rectangle 18"/>
           <p:cNvSpPr/>
           <p:nvPr/>
         </p:nvSpPr>
         <p:spPr>
           <a:xfrm>
-            <a:off x="7863840" y="4297680"/>
-            <a:ext cx="3931920" cy="384048"/>
+            <a:off x="7818120" y="4297680"/>
+            <a:ext cx="4023360" cy="365760"/>
           </a:xfrm>
           <a:prstGeom prst="roundRect">
             <a:avLst>
@@ -6950,14 +7009,14 @@
       </p:sp>
       <p:sp>
         <p:nvSpPr>
-          <p:cNvPr id="17" name="TextBox 16"/>
+          <p:cNvPr id="20" name="TextBox 19"/>
           <p:cNvSpPr txBox="1"/>
           <p:nvPr/>
         </p:nvSpPr>
         <p:spPr>
           <a:xfrm>
-            <a:off x="7863840" y="4343400"/>
-            <a:ext cx="3931920" cy="320040"/>
+            <a:off x="7818120" y="4343400"/>
+            <a:ext cx="4023360" cy="292608"/>
           </a:xfrm>
           <a:prstGeom prst="rect">
             <a:avLst/>
@@ -6972,7 +7031,7 @@
           <a:p>
             <a:pPr algn="ctr"/>
             <a:r>
-              <a:rPr sz="1200" b="1">
+              <a:rPr sz="1100" b="1">
                 <a:solidFill>
                   <a:srgbClr val="FFFFFF"/>
                 </a:solidFill>
@@ -6986,14 +7045,14 @@
       </p:sp>
       <p:sp>
         <p:nvSpPr>
-          <p:cNvPr id="18" name="Rounded Rectangle 17"/>
+          <p:cNvPr id="21" name="Rounded Rectangle 20"/>
           <p:cNvSpPr/>
           <p:nvPr/>
         </p:nvSpPr>
         <p:spPr>
           <a:xfrm>
-            <a:off x="7863840" y="4846320"/>
-            <a:ext cx="3931920" cy="384048"/>
+            <a:off x="7818120" y="4800600"/>
+            <a:ext cx="4023360" cy="365760"/>
           </a:xfrm>
           <a:prstGeom prst="roundRect">
             <a:avLst>
@@ -7031,14 +7090,14 @@
       </p:sp>
       <p:sp>
         <p:nvSpPr>
-          <p:cNvPr id="19" name="TextBox 18"/>
+          <p:cNvPr id="22" name="TextBox 21"/>
           <p:cNvSpPr txBox="1"/>
           <p:nvPr/>
         </p:nvSpPr>
         <p:spPr>
           <a:xfrm>
-            <a:off x="7863840" y="4892040"/>
-            <a:ext cx="3931920" cy="320040"/>
+            <a:off x="7818120" y="4846320"/>
+            <a:ext cx="4023360" cy="292608"/>
           </a:xfrm>
           <a:prstGeom prst="rect">
             <a:avLst/>
@@ -7053,28 +7112,28 @@
           <a:p>
             <a:pPr algn="ctr"/>
             <a:r>
-              <a:rPr sz="1200" b="1">
+              <a:rPr sz="1100" b="1">
                 <a:solidFill>
                   <a:srgbClr val="FFFFFF"/>
                 </a:solidFill>
                 <a:latin typeface="Calibri"/>
                 <a:hlinkClick r:id="rId4"/>
               </a:rPr>
-              <a:t>GitHub du projet →</a:t>
-            </a:r>
-          </a:p>
-        </p:txBody>
-      </p:sp>
-      <p:sp>
-        <p:nvSpPr>
-          <p:cNvPr id="20" name="TextBox 19"/>
+              <a:t>GitHub →</a:t>
+            </a:r>
+          </a:p>
+        </p:txBody>
+      </p:sp>
+      <p:sp>
+        <p:nvSpPr>
+          <p:cNvPr id="23" name="TextBox 22"/>
           <p:cNvSpPr txBox="1"/>
           <p:nvPr/>
         </p:nvSpPr>
         <p:spPr>
           <a:xfrm>
-            <a:off x="457200" y="4572000"/>
-            <a:ext cx="7132320" cy="1280160"/>
+            <a:off x="365760" y="4937760"/>
+            <a:ext cx="7223760" cy="1097280"/>
           </a:xfrm>
           <a:prstGeom prst="rect">
             <a:avLst/>
@@ -7093,36 +7152,36 @@
               </a:spcAft>
             </a:pPr>
             <a:r>
-              <a:rPr sz="2800" b="1">
+              <a:rPr sz="2600" b="1">
                 <a:solidFill>
                   <a:srgbClr val="0F5C4C"/>
                 </a:solidFill>
                 <a:latin typeface="Calibri"/>
               </a:rPr>
-              <a:t>Questions ?</a:t>
-            </a:r>
-          </a:p>
-          <a:p>
-            <a:pPr algn="l">
-              <a:spcAft>
-                <a:spcPts val="600"/>
-              </a:spcAft>
-            </a:pPr>
-            <a:r>
-              <a:rPr sz="1300" b="0">
+              <a:t>Merci — des questions ?</a:t>
+            </a:r>
+          </a:p>
+          <a:p>
+            <a:pPr algn="l">
+              <a:spcAft>
+                <a:spcPts val="500"/>
+              </a:spcAft>
+            </a:pPr>
+            <a:r>
+              <a:rPr sz="1200" b="0">
                 <a:solidFill>
                   <a:srgbClr val="64748B"/>
                 </a:solidFill>
                 <a:latin typeface="Calibri"/>
               </a:rPr>
-              <a:t>Komla · Kassoum · Joel · Forbes · Frank · Wren</a:t>
-            </a:r>
-          </a:p>
-        </p:txBody>
-      </p:sp>
-      <p:sp>
-        <p:nvSpPr>
-          <p:cNvPr id="21" name="Rectangle 20"/>
+              <a:t>Les_Hadoop_Riders  ·  Komla · Kassoum · Joel · Forbes · Frank · Wren</a:t>
+            </a:r>
+          </a:p>
+        </p:txBody>
+      </p:sp>
+      <p:sp>
+        <p:nvSpPr>
+          <p:cNvPr id="24" name="Rectangle 23"/>
           <p:cNvSpPr/>
           <p:nvPr/>
         </p:nvSpPr>
@@ -7165,7 +7224,7 @@
       </p:sp>
       <p:sp>
         <p:nvSpPr>
-          <p:cNvPr id="22" name="TextBox 21"/>
+          <p:cNvPr id="25" name="TextBox 24"/>
           <p:cNvSpPr txBox="1"/>
           <p:nvPr/>
         </p:nvSpPr>
@@ -7192,14 +7251,14 @@
                 </a:solidFill>
                 <a:latin typeface="Calibri"/>
               </a:rPr>
-              <a:t>Présenté par : Komla Petro Asinyo</a:t>
-            </a:r>
-          </a:p>
-        </p:txBody>
-      </p:sp>
-      <p:sp>
-        <p:nvSpPr>
-          <p:cNvPr id="23" name="TextBox 22"/>
+              <a:t>Présenté par : Wren Surprenant-Nicolson</a:t>
+            </a:r>
+          </a:p>
+        </p:txBody>
+      </p:sp>
+      <p:sp>
+        <p:nvSpPr>
+          <p:cNvPr id="26" name="TextBox 25"/>
           <p:cNvSpPr txBox="1"/>
           <p:nvPr/>
         </p:nvSpPr>
@@ -7402,27 +7461,66 @@
           <a:lstStyle/>
           <a:p>
             <a:r>
-              <a:rPr sz="2600" b="1">
+              <a:rPr sz="2400" b="1">
                 <a:solidFill>
                   <a:srgbClr val="FFFFFF"/>
                 </a:solidFill>
                 <a:latin typeface="Calibri"/>
               </a:rPr>
-              <a:t>Plan de la présentation</a:t>
-            </a:r>
-          </a:p>
-        </p:txBody>
-      </p:sp>
-      <p:sp>
-        <p:nvSpPr>
-          <p:cNvPr id="6" name="Rounded Rectangle 5"/>
+              <a:t>Plan — qui présente quoi</a:t>
+            </a:r>
+          </a:p>
+        </p:txBody>
+      </p:sp>
+      <p:sp>
+        <p:nvSpPr>
+          <p:cNvPr id="6" name="TextBox 5"/>
+          <p:cNvSpPr txBox="1"/>
+          <p:nvPr/>
+        </p:nvSpPr>
+        <p:spPr>
+          <a:xfrm>
+            <a:off x="411480" y="1097280"/>
+            <a:ext cx="11247120" cy="411480"/>
+          </a:xfrm>
+          <a:prstGeom prst="rect">
+            <a:avLst/>
+          </a:prstGeom>
+          <a:noFill/>
+        </p:spPr>
+        <p:txBody>
+          <a:bodyPr wrap="square">
+            <a:spAutoFit/>
+          </a:bodyPr>
+          <a:lstStyle/>
+          <a:p>
+            <a:pPr algn="l">
+              <a:spcAft>
+                <a:spcPts val="500"/>
+              </a:spcAft>
+            </a:pPr>
+            <a:r>
+              <a:rPr sz="1400" b="0">
+                <a:solidFill>
+                  <a:srgbClr val="64748B"/>
+                </a:solidFill>
+                <a:latin typeface="Calibri"/>
+              </a:rPr>
+              <a:t>Environ 8–10 minutes. Chaque slide indique le présentateur en bas.</a:t>
+            </a:r>
+          </a:p>
+        </p:txBody>
+      </p:sp>
+      <p:sp>
+        <p:nvSpPr>
+          <p:cNvPr id="7" name="Rounded Rectangle 6"/>
           <p:cNvSpPr/>
           <p:nvPr/>
         </p:nvSpPr>
         <p:spPr>
           <a:xfrm>
-            <a:off x="411480" y="1325880"/>
-            <a:ext cx="2743200" cy="1920240"/>
+            <a:off x="411480" y="1600200"/>
+            <a:ext cx="3657600" cy="1280160"/>
           </a:xfrm>
           <a:prstGeom prst="roundRect">
             <a:avLst>
@@ -7462,14 +7560,14 @@
       </p:sp>
       <p:sp>
         <p:nvSpPr>
-          <p:cNvPr id="7" name="TextBox 6"/>
+          <p:cNvPr id="8" name="TextBox 7"/>
           <p:cNvSpPr txBox="1"/>
           <p:nvPr/>
         </p:nvSpPr>
         <p:spPr>
           <a:xfrm>
-            <a:off x="548640" y="1554480"/>
-            <a:ext cx="2468880" cy="1554480"/>
+            <a:off x="594360" y="1783080"/>
+            <a:ext cx="3291840" cy="1005840"/>
           </a:xfrm>
           <a:prstGeom prst="rect">
             <a:avLst/>
@@ -7484,23 +7582,23 @@
           <a:p>
             <a:pPr algn="l">
               <a:spcAft>
-                <a:spcPts val="600"/>
-              </a:spcAft>
-            </a:pPr>
-            <a:r>
-              <a:rPr sz="2200" b="1">
+                <a:spcPts val="400"/>
+              </a:spcAft>
+            </a:pPr>
+            <a:r>
+              <a:rPr sz="1200" b="1">
                 <a:solidFill>
                   <a:srgbClr val="0F5C4C"/>
                 </a:solidFill>
                 <a:latin typeface="Calibri"/>
               </a:rPr>
-              <a:t>01</a:t>
-            </a:r>
-          </a:p>
-          <a:p>
-            <a:pPr algn="l">
-              <a:spcAft>
-                <a:spcPts val="800"/>
+              <a:t>Slide 3</a:t>
+            </a:r>
+          </a:p>
+          <a:p>
+            <a:pPr algn="l">
+              <a:spcAft>
+                <a:spcPts val="400"/>
               </a:spcAft>
             </a:pPr>
             <a:r>
@@ -7510,13 +7608,13 @@
                 </a:solidFill>
                 <a:latin typeface="Calibri"/>
               </a:rPr>
-              <a:t>E-commerce &amp; 3V</a:t>
-            </a:r>
-          </a:p>
-          <a:p>
-            <a:pPr algn="l">
-              <a:spcAft>
-                <a:spcPts val="600"/>
+              <a:t>3V e-commerce</a:t>
+            </a:r>
+          </a:p>
+          <a:p>
+            <a:pPr algn="l">
+              <a:spcAft>
+                <a:spcPts val="500"/>
               </a:spcAft>
             </a:pPr>
             <a:r>
@@ -7533,14 +7631,14 @@
       </p:sp>
       <p:sp>
         <p:nvSpPr>
-          <p:cNvPr id="8" name="Rounded Rectangle 7"/>
+          <p:cNvPr id="9" name="Rounded Rectangle 8"/>
           <p:cNvSpPr/>
           <p:nvPr/>
         </p:nvSpPr>
         <p:spPr>
           <a:xfrm>
-            <a:off x="3337560" y="1325880"/>
-            <a:ext cx="2743200" cy="1920240"/>
+            <a:off x="4251960" y="1600200"/>
+            <a:ext cx="3657600" cy="1280160"/>
           </a:xfrm>
           <a:prstGeom prst="roundRect">
             <a:avLst>
@@ -7580,14 +7678,14 @@
       </p:sp>
       <p:sp>
         <p:nvSpPr>
-          <p:cNvPr id="9" name="TextBox 8"/>
+          <p:cNvPr id="10" name="TextBox 9"/>
           <p:cNvSpPr txBox="1"/>
           <p:nvPr/>
         </p:nvSpPr>
         <p:spPr>
           <a:xfrm>
-            <a:off x="3474720" y="1554480"/>
-            <a:ext cx="2468880" cy="1554480"/>
+            <a:off x="4434840" y="1783080"/>
+            <a:ext cx="3291840" cy="1005840"/>
           </a:xfrm>
           <a:prstGeom prst="rect">
             <a:avLst/>
@@ -7602,23 +7700,23 @@
           <a:p>
             <a:pPr algn="l">
               <a:spcAft>
-                <a:spcPts val="600"/>
-              </a:spcAft>
-            </a:pPr>
-            <a:r>
-              <a:rPr sz="2200" b="1">
+                <a:spcPts val="400"/>
+              </a:spcAft>
+            </a:pPr>
+            <a:r>
+              <a:rPr sz="1200" b="1">
                 <a:solidFill>
                   <a:srgbClr val="0F5C4C"/>
                 </a:solidFill>
                 <a:latin typeface="Calibri"/>
               </a:rPr>
-              <a:t>02</a:t>
-            </a:r>
-          </a:p>
-          <a:p>
-            <a:pPr algn="l">
-              <a:spcAft>
-                <a:spcPts val="800"/>
+              <a:t>Slide 4</a:t>
+            </a:r>
+          </a:p>
+          <a:p>
+            <a:pPr algn="l">
+              <a:spcAft>
+                <a:spcPts val="400"/>
               </a:spcAft>
             </a:pPr>
             <a:r>
@@ -7628,13 +7726,13 @@
                 </a:solidFill>
                 <a:latin typeface="Calibri"/>
               </a:rPr>
-              <a:t>HDFS vs FS local</a:t>
-            </a:r>
-          </a:p>
-          <a:p>
-            <a:pPr algn="l">
-              <a:spcAft>
-                <a:spcPts val="600"/>
+              <a:t>HDFS vs local</a:t>
+            </a:r>
+          </a:p>
+          <a:p>
+            <a:pPr algn="l">
+              <a:spcAft>
+                <a:spcPts val="500"/>
               </a:spcAft>
             </a:pPr>
             <a:r>
@@ -7651,14 +7749,14 @@
       </p:sp>
       <p:sp>
         <p:nvSpPr>
-          <p:cNvPr id="10" name="Rounded Rectangle 9"/>
+          <p:cNvPr id="11" name="Rounded Rectangle 10"/>
           <p:cNvSpPr/>
           <p:nvPr/>
         </p:nvSpPr>
         <p:spPr>
           <a:xfrm>
-            <a:off x="6263640" y="1325880"/>
-            <a:ext cx="2743200" cy="1920240"/>
+            <a:off x="8092440" y="1600200"/>
+            <a:ext cx="3657600" cy="1280160"/>
           </a:xfrm>
           <a:prstGeom prst="roundRect">
             <a:avLst>
@@ -7698,14 +7796,14 @@
       </p:sp>
       <p:sp>
         <p:nvSpPr>
-          <p:cNvPr id="11" name="TextBox 10"/>
+          <p:cNvPr id="12" name="TextBox 11"/>
           <p:cNvSpPr txBox="1"/>
           <p:nvPr/>
         </p:nvSpPr>
         <p:spPr>
           <a:xfrm>
-            <a:off x="6400800" y="1554480"/>
-            <a:ext cx="2468880" cy="1554480"/>
+            <a:off x="8275319" y="1783080"/>
+            <a:ext cx="3291840" cy="1005840"/>
           </a:xfrm>
           <a:prstGeom prst="rect">
             <a:avLst/>
@@ -7720,23 +7818,23 @@
           <a:p>
             <a:pPr algn="l">
               <a:spcAft>
-                <a:spcPts val="600"/>
-              </a:spcAft>
-            </a:pPr>
-            <a:r>
-              <a:rPr sz="2200" b="1">
+                <a:spcPts val="400"/>
+              </a:spcAft>
+            </a:pPr>
+            <a:r>
+              <a:rPr sz="1200" b="1">
                 <a:solidFill>
                   <a:srgbClr val="0F5C4C"/>
                 </a:solidFill>
                 <a:latin typeface="Calibri"/>
               </a:rPr>
-              <a:t>03</a:t>
-            </a:r>
-          </a:p>
-          <a:p>
-            <a:pPr algn="l">
-              <a:spcAft>
-                <a:spcPts val="800"/>
+              <a:t>Slide 5</a:t>
+            </a:r>
+          </a:p>
+          <a:p>
+            <a:pPr algn="l">
+              <a:spcAft>
+                <a:spcPts val="400"/>
               </a:spcAft>
             </a:pPr>
             <a:r>
@@ -7746,13 +7844,13 @@
                 </a:solidFill>
                 <a:latin typeface="Calibri"/>
               </a:rPr>
-              <a:t>YARN (RM / NM)</a:t>
-            </a:r>
-          </a:p>
-          <a:p>
-            <a:pPr algn="l">
-              <a:spcAft>
-                <a:spcPts val="600"/>
+              <a:t>YARN RM / NM</a:t>
+            </a:r>
+          </a:p>
+          <a:p>
+            <a:pPr algn="l">
+              <a:spcAft>
+                <a:spcPts val="500"/>
               </a:spcAft>
             </a:pPr>
             <a:r>
@@ -7769,14 +7867,14 @@
       </p:sp>
       <p:sp>
         <p:nvSpPr>
-          <p:cNvPr id="12" name="Rounded Rectangle 11"/>
+          <p:cNvPr id="13" name="Rounded Rectangle 12"/>
           <p:cNvSpPr/>
           <p:nvPr/>
         </p:nvSpPr>
         <p:spPr>
           <a:xfrm>
-            <a:off x="9189720" y="1325880"/>
-            <a:ext cx="2743200" cy="1920240"/>
+            <a:off x="411480" y="3017520"/>
+            <a:ext cx="3657600" cy="1280160"/>
           </a:xfrm>
           <a:prstGeom prst="roundRect">
             <a:avLst>
@@ -7816,14 +7914,14 @@
       </p:sp>
       <p:sp>
         <p:nvSpPr>
-          <p:cNvPr id="13" name="TextBox 12"/>
+          <p:cNvPr id="14" name="TextBox 13"/>
           <p:cNvSpPr txBox="1"/>
           <p:nvPr/>
         </p:nvSpPr>
         <p:spPr>
           <a:xfrm>
-            <a:off x="9326880" y="1554480"/>
-            <a:ext cx="2468880" cy="1554480"/>
+            <a:off x="594360" y="3200400"/>
+            <a:ext cx="3291840" cy="1005840"/>
           </a:xfrm>
           <a:prstGeom prst="rect">
             <a:avLst/>
@@ -7838,23 +7936,23 @@
           <a:p>
             <a:pPr algn="l">
               <a:spcAft>
-                <a:spcPts val="600"/>
-              </a:spcAft>
-            </a:pPr>
-            <a:r>
-              <a:rPr sz="2200" b="1">
+                <a:spcPts val="400"/>
+              </a:spcAft>
+            </a:pPr>
+            <a:r>
+              <a:rPr sz="1200" b="1">
                 <a:solidFill>
                   <a:srgbClr val="0F5C4C"/>
                 </a:solidFill>
                 <a:latin typeface="Calibri"/>
               </a:rPr>
-              <a:t>04</a:t>
-            </a:r>
-          </a:p>
-          <a:p>
-            <a:pPr algn="l">
-              <a:spcAft>
-                <a:spcPts val="800"/>
+              <a:t>Slide 6–7</a:t>
+            </a:r>
+          </a:p>
+          <a:p>
+            <a:pPr algn="l">
+              <a:spcAft>
+                <a:spcPts val="400"/>
               </a:spcAft>
             </a:pPr>
             <a:r>
@@ -7864,13 +7962,13 @@
                 </a:solidFill>
                 <a:latin typeface="Calibri"/>
               </a:rPr>
-              <a:t>Architecture Docker</a:t>
-            </a:r>
-          </a:p>
-          <a:p>
-            <a:pPr algn="l">
-              <a:spcAft>
-                <a:spcPts val="600"/>
+              <a:t>Archi + Hub</a:t>
+            </a:r>
+          </a:p>
+          <a:p>
+            <a:pPr algn="l">
+              <a:spcAft>
+                <a:spcPts val="500"/>
               </a:spcAft>
             </a:pPr>
             <a:r>
@@ -7887,14 +7985,14 @@
       </p:sp>
       <p:sp>
         <p:nvSpPr>
-          <p:cNvPr id="14" name="Rounded Rectangle 13"/>
+          <p:cNvPr id="15" name="Rounded Rectangle 14"/>
           <p:cNvSpPr/>
           <p:nvPr/>
         </p:nvSpPr>
         <p:spPr>
           <a:xfrm>
-            <a:off x="411480" y="3520439"/>
-            <a:ext cx="2743200" cy="1920240"/>
+            <a:off x="4251960" y="3017520"/>
+            <a:ext cx="3657600" cy="1280160"/>
           </a:xfrm>
           <a:prstGeom prst="roundRect">
             <a:avLst>
@@ -7934,14 +8032,14 @@
       </p:sp>
       <p:sp>
         <p:nvSpPr>
-          <p:cNvPr id="15" name="TextBox 14"/>
+          <p:cNvPr id="16" name="TextBox 15"/>
           <p:cNvSpPr txBox="1"/>
           <p:nvPr/>
         </p:nvSpPr>
         <p:spPr>
           <a:xfrm>
-            <a:off x="548640" y="3749039"/>
-            <a:ext cx="2468880" cy="1554480"/>
+            <a:off x="4434840" y="3200400"/>
+            <a:ext cx="3291840" cy="1005840"/>
           </a:xfrm>
           <a:prstGeom prst="rect">
             <a:avLst/>
@@ -7956,23 +8054,23 @@
           <a:p>
             <a:pPr algn="l">
               <a:spcAft>
-                <a:spcPts val="600"/>
-              </a:spcAft>
-            </a:pPr>
-            <a:r>
-              <a:rPr sz="2200" b="1">
+                <a:spcPts val="400"/>
+              </a:spcAft>
+            </a:pPr>
+            <a:r>
+              <a:rPr sz="1200" b="1">
                 <a:solidFill>
                   <a:srgbClr val="0F5C4C"/>
                 </a:solidFill>
                 <a:latin typeface="Calibri"/>
               </a:rPr>
-              <a:t>05</a:t>
-            </a:r>
-          </a:p>
-          <a:p>
-            <a:pPr algn="l">
-              <a:spcAft>
-                <a:spcPts val="800"/>
+              <a:t>Slide 8</a:t>
+            </a:r>
+          </a:p>
+          <a:p>
+            <a:pPr algn="l">
+              <a:spcAft>
+                <a:spcPts val="400"/>
               </a:spcAft>
             </a:pPr>
             <a:r>
@@ -7982,13 +8080,13 @@
                 </a:solidFill>
                 <a:latin typeface="Calibri"/>
               </a:rPr>
-              <a:t>Déploiement &amp; Hub</a:t>
-            </a:r>
-          </a:p>
-          <a:p>
-            <a:pPr algn="l">
-              <a:spcAft>
-                <a:spcPts val="600"/>
+              <a:t>HDFS pratique</a:t>
+            </a:r>
+          </a:p>
+          <a:p>
+            <a:pPr algn="l">
+              <a:spcAft>
+                <a:spcPts val="500"/>
               </a:spcAft>
             </a:pPr>
             <a:r>
@@ -7998,21 +8096,21 @@
                 </a:solidFill>
                 <a:latin typeface="Calibri"/>
               </a:rPr>
-              <a:t>Frank</a:t>
-            </a:r>
-          </a:p>
-        </p:txBody>
-      </p:sp>
-      <p:sp>
-        <p:nvSpPr>
-          <p:cNvPr id="16" name="Rounded Rectangle 15"/>
+              <a:t>Wren</a:t>
+            </a:r>
+          </a:p>
+        </p:txBody>
+      </p:sp>
+      <p:sp>
+        <p:nvSpPr>
+          <p:cNvPr id="17" name="Rounded Rectangle 16"/>
           <p:cNvSpPr/>
           <p:nvPr/>
         </p:nvSpPr>
         <p:spPr>
           <a:xfrm>
-            <a:off x="3337560" y="3520439"/>
-            <a:ext cx="2743200" cy="1920240"/>
+            <a:off x="8092440" y="3017520"/>
+            <a:ext cx="3657600" cy="1280160"/>
           </a:xfrm>
           <a:prstGeom prst="roundRect">
             <a:avLst>
@@ -8052,14 +8150,14 @@
       </p:sp>
       <p:sp>
         <p:nvSpPr>
-          <p:cNvPr id="17" name="TextBox 16"/>
+          <p:cNvPr id="18" name="TextBox 17"/>
           <p:cNvSpPr txBox="1"/>
           <p:nvPr/>
         </p:nvSpPr>
         <p:spPr>
           <a:xfrm>
-            <a:off x="3474720" y="3749039"/>
-            <a:ext cx="2468880" cy="1554480"/>
+            <a:off x="8275319" y="3200400"/>
+            <a:ext cx="3291840" cy="1005840"/>
           </a:xfrm>
           <a:prstGeom prst="rect">
             <a:avLst/>
@@ -8074,23 +8172,23 @@
           <a:p>
             <a:pPr algn="l">
               <a:spcAft>
-                <a:spcPts val="600"/>
-              </a:spcAft>
-            </a:pPr>
-            <a:r>
-              <a:rPr sz="2200" b="1">
+                <a:spcPts val="400"/>
+              </a:spcAft>
+            </a:pPr>
+            <a:r>
+              <a:rPr sz="1200" b="1">
                 <a:solidFill>
                   <a:srgbClr val="0F5C4C"/>
                 </a:solidFill>
                 <a:latin typeface="Calibri"/>
               </a:rPr>
-              <a:t>06</a:t>
-            </a:r>
-          </a:p>
-          <a:p>
-            <a:pPr algn="l">
-              <a:spcAft>
-                <a:spcPts val="800"/>
+              <a:t>Slide 9</a:t>
+            </a:r>
+          </a:p>
+          <a:p>
+            <a:pPr algn="l">
+              <a:spcAft>
+                <a:spcPts val="400"/>
               </a:spcAft>
             </a:pPr>
             <a:r>
@@ -8100,13 +8198,13 @@
                 </a:solidFill>
                 <a:latin typeface="Calibri"/>
               </a:rPr>
-              <a:t>Manipulations HDFS</a:t>
-            </a:r>
-          </a:p>
-          <a:p>
-            <a:pPr algn="l">
-              <a:spcAft>
-                <a:spcPts val="600"/>
+              <a:t>Job π</a:t>
+            </a:r>
+          </a:p>
+          <a:p>
+            <a:pPr algn="l">
+              <a:spcAft>
+                <a:spcPts val="500"/>
               </a:spcAft>
             </a:pPr>
             <a:r>
@@ -8116,21 +8214,21 @@
                 </a:solidFill>
                 <a:latin typeface="Calibri"/>
               </a:rPr>
-              <a:t>Wren</a:t>
-            </a:r>
-          </a:p>
-        </p:txBody>
-      </p:sp>
-      <p:sp>
-        <p:nvSpPr>
-          <p:cNvPr id="18" name="Rounded Rectangle 17"/>
+              <a:t>Forbes</a:t>
+            </a:r>
+          </a:p>
+        </p:txBody>
+      </p:sp>
+      <p:sp>
+        <p:nvSpPr>
+          <p:cNvPr id="19" name="Rounded Rectangle 18"/>
           <p:cNvSpPr/>
           <p:nvPr/>
         </p:nvSpPr>
         <p:spPr>
           <a:xfrm>
-            <a:off x="6263640" y="3520439"/>
-            <a:ext cx="2743200" cy="1920240"/>
+            <a:off x="411480" y="4434840"/>
+            <a:ext cx="3657600" cy="1280160"/>
           </a:xfrm>
           <a:prstGeom prst="roundRect">
             <a:avLst>
@@ -8170,14 +8268,14 @@
       </p:sp>
       <p:sp>
         <p:nvSpPr>
-          <p:cNvPr id="19" name="TextBox 18"/>
+          <p:cNvPr id="20" name="TextBox 19"/>
           <p:cNvSpPr txBox="1"/>
           <p:nvPr/>
         </p:nvSpPr>
         <p:spPr>
           <a:xfrm>
-            <a:off x="6400800" y="3749039"/>
-            <a:ext cx="2468880" cy="1554480"/>
+            <a:off x="594360" y="4617720"/>
+            <a:ext cx="3291840" cy="1005840"/>
           </a:xfrm>
           <a:prstGeom prst="rect">
             <a:avLst/>
@@ -8192,23 +8290,23 @@
           <a:p>
             <a:pPr algn="l">
               <a:spcAft>
-                <a:spcPts val="600"/>
-              </a:spcAft>
-            </a:pPr>
-            <a:r>
-              <a:rPr sz="2200" b="1">
+                <a:spcPts val="400"/>
+              </a:spcAft>
+            </a:pPr>
+            <a:r>
+              <a:rPr sz="1200" b="1">
                 <a:solidFill>
                   <a:srgbClr val="0F5C4C"/>
                 </a:solidFill>
                 <a:latin typeface="Calibri"/>
               </a:rPr>
-              <a:t>07</a:t>
-            </a:r>
-          </a:p>
-          <a:p>
-            <a:pPr algn="l">
-              <a:spcAft>
-                <a:spcPts val="800"/>
+              <a:t>Slide 10</a:t>
+            </a:r>
+          </a:p>
+          <a:p>
+            <a:pPr algn="l">
+              <a:spcAft>
+                <a:spcPts val="400"/>
               </a:spcAft>
             </a:pPr>
             <a:r>
@@ -8218,13 +8316,13 @@
                 </a:solidFill>
                 <a:latin typeface="Calibri"/>
               </a:rPr>
-              <a:t>Job π + monitoring</a:t>
-            </a:r>
-          </a:p>
-          <a:p>
-            <a:pPr algn="l">
-              <a:spcAft>
-                <a:spcPts val="600"/>
+              <a:t>Monitoring</a:t>
+            </a:r>
+          </a:p>
+          <a:p>
+            <a:pPr algn="l">
+              <a:spcAft>
+                <a:spcPts val="500"/>
               </a:spcAft>
             </a:pPr>
             <a:r>
@@ -8234,21 +8332,21 @@
                 </a:solidFill>
                 <a:latin typeface="Calibri"/>
               </a:rPr>
-              <a:t>Forbes / Joel</a:t>
-            </a:r>
-          </a:p>
-        </p:txBody>
-      </p:sp>
-      <p:sp>
-        <p:nvSpPr>
-          <p:cNvPr id="20" name="Rounded Rectangle 19"/>
+              <a:t>Joel</a:t>
+            </a:r>
+          </a:p>
+        </p:txBody>
+      </p:sp>
+      <p:sp>
+        <p:nvSpPr>
+          <p:cNvPr id="21" name="Rounded Rectangle 20"/>
           <p:cNvSpPr/>
           <p:nvPr/>
         </p:nvSpPr>
         <p:spPr>
           <a:xfrm>
-            <a:off x="9189720" y="3520439"/>
-            <a:ext cx="2743200" cy="1920240"/>
+            <a:off x="4251960" y="4434840"/>
+            <a:ext cx="3657600" cy="1280160"/>
           </a:xfrm>
           <a:prstGeom prst="roundRect">
             <a:avLst>
@@ -8288,14 +8386,14 @@
       </p:sp>
       <p:sp>
         <p:nvSpPr>
-          <p:cNvPr id="21" name="TextBox 20"/>
+          <p:cNvPr id="22" name="TextBox 21"/>
           <p:cNvSpPr txBox="1"/>
           <p:nvPr/>
         </p:nvSpPr>
         <p:spPr>
           <a:xfrm>
-            <a:off x="9326880" y="3749039"/>
-            <a:ext cx="2468880" cy="1554480"/>
+            <a:off x="4434840" y="4617720"/>
+            <a:ext cx="3291840" cy="1005840"/>
           </a:xfrm>
           <a:prstGeom prst="rect">
             <a:avLst/>
@@ -8310,23 +8408,23 @@
           <a:p>
             <a:pPr algn="l">
               <a:spcAft>
-                <a:spcPts val="600"/>
-              </a:spcAft>
-            </a:pPr>
-            <a:r>
-              <a:rPr sz="2200" b="1">
+                <a:spcPts val="400"/>
+              </a:spcAft>
+            </a:pPr>
+            <a:r>
+              <a:rPr sz="1200" b="1">
                 <a:solidFill>
                   <a:srgbClr val="0F5C4C"/>
                 </a:solidFill>
                 <a:latin typeface="Calibri"/>
               </a:rPr>
-              <a:t>08</a:t>
-            </a:r>
-          </a:p>
-          <a:p>
-            <a:pPr algn="l">
-              <a:spcAft>
-                <a:spcPts val="800"/>
+              <a:t>Slide 11</a:t>
+            </a:r>
+          </a:p>
+          <a:p>
+            <a:pPr algn="l">
+              <a:spcAft>
+                <a:spcPts val="400"/>
               </a:spcAft>
             </a:pPr>
             <a:r>
@@ -8336,13 +8434,13 @@
                 </a:solidFill>
                 <a:latin typeface="Calibri"/>
               </a:rPr>
-              <a:t>Troubles &amp; conclusion</a:t>
-            </a:r>
-          </a:p>
-          <a:p>
-            <a:pPr algn="l">
-              <a:spcAft>
-                <a:spcPts val="600"/>
+              <a:t>Problèmes</a:t>
+            </a:r>
+          </a:p>
+          <a:p>
+            <a:pPr algn="l">
+              <a:spcAft>
+                <a:spcPts val="500"/>
               </a:spcAft>
             </a:pPr>
             <a:r>
@@ -8352,14 +8450,132 @@
                 </a:solidFill>
                 <a:latin typeface="Calibri"/>
               </a:rPr>
-              <a:t>Kassoum / Komla</a:t>
-            </a:r>
-          </a:p>
-        </p:txBody>
-      </p:sp>
-      <p:sp>
-        <p:nvSpPr>
-          <p:cNvPr id="22" name="Rectangle 21"/>
+              <a:t>Kassoum</a:t>
+            </a:r>
+          </a:p>
+        </p:txBody>
+      </p:sp>
+      <p:sp>
+        <p:nvSpPr>
+          <p:cNvPr id="23" name="Rounded Rectangle 22"/>
+          <p:cNvSpPr/>
+          <p:nvPr/>
+        </p:nvSpPr>
+        <p:spPr>
+          <a:xfrm>
+            <a:off x="8092440" y="4434840"/>
+            <a:ext cx="3657600" cy="1280160"/>
+          </a:xfrm>
+          <a:prstGeom prst="roundRect">
+            <a:avLst>
+              <a:gd name="adj" fmla="val 8000"/>
+            </a:avLst>
+          </a:prstGeom>
+          <a:solidFill>
+            <a:srgbClr val="FFFFFF"/>
+          </a:solidFill>
+          <a:ln w="15875">
+            <a:solidFill>
+              <a:srgbClr val="147A66"/>
+            </a:solidFill>
+          </a:ln>
+        </p:spPr>
+        <p:style>
+          <a:lnRef idx="1">
+            <a:schemeClr val="accent1"/>
+          </a:lnRef>
+          <a:fillRef idx="3">
+            <a:schemeClr val="accent1"/>
+          </a:fillRef>
+          <a:effectRef idx="2">
+            <a:schemeClr val="accent1"/>
+          </a:effectRef>
+          <a:fontRef idx="minor">
+            <a:schemeClr val="lt1"/>
+          </a:fontRef>
+        </p:style>
+        <p:txBody>
+          <a:bodyPr rtlCol="0" anchor="ctr"/>
+          <a:lstStyle/>
+          <a:p>
+            <a:pPr algn="ctr"/>
+          </a:p>
+        </p:txBody>
+      </p:sp>
+      <p:sp>
+        <p:nvSpPr>
+          <p:cNvPr id="24" name="TextBox 23"/>
+          <p:cNvSpPr txBox="1"/>
+          <p:nvPr/>
+        </p:nvSpPr>
+        <p:spPr>
+          <a:xfrm>
+            <a:off x="8275319" y="4617720"/>
+            <a:ext cx="3291840" cy="1005840"/>
+          </a:xfrm>
+          <a:prstGeom prst="rect">
+            <a:avLst/>
+          </a:prstGeom>
+          <a:noFill/>
+        </p:spPr>
+        <p:txBody>
+          <a:bodyPr wrap="square">
+            <a:spAutoFit/>
+          </a:bodyPr>
+          <a:lstStyle/>
+          <a:p>
+            <a:pPr algn="l">
+              <a:spcAft>
+                <a:spcPts val="400"/>
+              </a:spcAft>
+            </a:pPr>
+            <a:r>
+              <a:rPr sz="1200" b="1">
+                <a:solidFill>
+                  <a:srgbClr val="0F5C4C"/>
+                </a:solidFill>
+                <a:latin typeface="Calibri"/>
+              </a:rPr>
+              <a:t>Slide 12</a:t>
+            </a:r>
+          </a:p>
+          <a:p>
+            <a:pPr algn="l">
+              <a:spcAft>
+                <a:spcPts val="400"/>
+              </a:spcAft>
+            </a:pPr>
+            <a:r>
+              <a:rPr sz="1600" b="1">
+                <a:solidFill>
+                  <a:srgbClr val="1E293B"/>
+                </a:solidFill>
+                <a:latin typeface="Calibri"/>
+              </a:rPr>
+              <a:t>Conclusion</a:t>
+            </a:r>
+          </a:p>
+          <a:p>
+            <a:pPr algn="l">
+              <a:spcAft>
+                <a:spcPts val="500"/>
+              </a:spcAft>
+            </a:pPr>
+            <a:r>
+              <a:rPr sz="1300" b="0">
+                <a:solidFill>
+                  <a:srgbClr val="64748B"/>
+                </a:solidFill>
+                <a:latin typeface="Calibri"/>
+              </a:rPr>
+              <a:t>Wren</a:t>
+            </a:r>
+          </a:p>
+        </p:txBody>
+      </p:sp>
+      <p:sp>
+        <p:nvSpPr>
+          <p:cNvPr id="25" name="Rectangle 24"/>
           <p:cNvSpPr/>
           <p:nvPr/>
         </p:nvSpPr>
@@ -8402,7 +8618,7 @@
       </p:sp>
       <p:sp>
         <p:nvSpPr>
-          <p:cNvPr id="23" name="TextBox 22"/>
+          <p:cNvPr id="26" name="TextBox 25"/>
           <p:cNvSpPr txBox="1"/>
           <p:nvPr/>
         </p:nvSpPr>
@@ -8436,7 +8652,7 @@
       </p:sp>
       <p:sp>
         <p:nvSpPr>
-          <p:cNvPr id="24" name="TextBox 23"/>
+          <p:cNvPr id="27" name="TextBox 26"/>
           <p:cNvSpPr txBox="1"/>
           <p:nvPr/>
         </p:nvSpPr>
@@ -8639,27 +8855,82 @@
           <a:lstStyle/>
           <a:p>
             <a:r>
-              <a:rPr sz="2600" b="1">
+              <a:rPr sz="2400" b="1">
                 <a:solidFill>
                   <a:srgbClr val="FFFFFF"/>
                 </a:solidFill>
                 <a:latin typeface="Calibri"/>
               </a:rPr>
-              <a:t>Cas d’usage e-commerce — les 3V</a:t>
-            </a:r>
-          </a:p>
-        </p:txBody>
-      </p:sp>
-      <p:sp>
-        <p:nvSpPr>
-          <p:cNvPr id="6" name="Rounded Rectangle 5"/>
+              <a:t>Cas d’usage : e-commerce et les 3V du Big Data</a:t>
+            </a:r>
+          </a:p>
+        </p:txBody>
+      </p:sp>
+      <p:sp>
+        <p:nvSpPr>
+          <p:cNvPr id="6" name="TextBox 5"/>
+          <p:cNvSpPr txBox="1"/>
+          <p:nvPr/>
+        </p:nvSpPr>
+        <p:spPr>
+          <a:xfrm>
+            <a:off x="411480" y="1097280"/>
+            <a:ext cx="11247120" cy="640080"/>
+          </a:xfrm>
+          <a:prstGeom prst="rect">
+            <a:avLst/>
+          </a:prstGeom>
+          <a:noFill/>
+        </p:spPr>
+        <p:txBody>
+          <a:bodyPr wrap="square">
+            <a:spAutoFit/>
+          </a:bodyPr>
+          <a:lstStyle/>
+          <a:p>
+            <a:pPr algn="l">
+              <a:spcAft>
+                <a:spcPts val="300"/>
+              </a:spcAft>
+            </a:pPr>
+            <a:r>
+              <a:rPr sz="1400" b="0">
+                <a:solidFill>
+                  <a:srgbClr val="1E293B"/>
+                </a:solidFill>
+                <a:latin typeface="Calibri"/>
+              </a:rPr>
+              <a:t>Nous avons choisi une chaîne de magasins e-commerce : tickets de caisse, logs du site web,</a:t>
+            </a:r>
+          </a:p>
+          <a:p>
+            <a:pPr algn="l">
+              <a:spcAft>
+                <a:spcPts val="500"/>
+              </a:spcAft>
+            </a:pPr>
+            <a:r>
+              <a:rPr sz="1400" b="0">
+                <a:solidFill>
+                  <a:srgbClr val="1E293B"/>
+                </a:solidFill>
+                <a:latin typeface="Calibri"/>
+              </a:rPr>
+              <a:t>mouvements de stock et images produits. Les données grossissent vite et arrivent en continu.</a:t>
+            </a:r>
+          </a:p>
+        </p:txBody>
+      </p:sp>
+      <p:sp>
+        <p:nvSpPr>
+          <p:cNvPr id="7" name="Rounded Rectangle 6"/>
           <p:cNvSpPr/>
           <p:nvPr/>
         </p:nvSpPr>
         <p:spPr>
           <a:xfrm>
-            <a:off x="365760" y="1280160"/>
-            <a:ext cx="3520440" cy="3108960"/>
+            <a:off x="365760" y="1874519"/>
+            <a:ext cx="3520440" cy="2743200"/>
           </a:xfrm>
           <a:prstGeom prst="roundRect">
             <a:avLst>
@@ -8699,14 +8970,14 @@
       </p:sp>
       <p:sp>
         <p:nvSpPr>
-          <p:cNvPr id="7" name="Rectangle 6"/>
+          <p:cNvPr id="8" name="Rectangle 7"/>
           <p:cNvSpPr/>
           <p:nvPr/>
         </p:nvSpPr>
         <p:spPr>
           <a:xfrm>
-            <a:off x="365760" y="1280160"/>
-            <a:ext cx="3520440" cy="640080"/>
+            <a:off x="365760" y="1874519"/>
+            <a:ext cx="3520440" cy="502920"/>
           </a:xfrm>
           <a:prstGeom prst="rect">
             <a:avLst/>
@@ -8742,14 +9013,14 @@
       </p:sp>
       <p:sp>
         <p:nvSpPr>
-          <p:cNvPr id="8" name="TextBox 7"/>
+          <p:cNvPr id="9" name="TextBox 8"/>
           <p:cNvSpPr txBox="1"/>
           <p:nvPr/>
         </p:nvSpPr>
         <p:spPr>
           <a:xfrm>
-            <a:off x="548640" y="1371600"/>
-            <a:ext cx="3108960" cy="457200"/>
+            <a:off x="548640" y="1938528"/>
+            <a:ext cx="3108960" cy="411480"/>
           </a:xfrm>
           <a:prstGeom prst="rect">
             <a:avLst/>
@@ -8764,30 +9035,30 @@
           <a:p>
             <a:pPr algn="l">
               <a:spcAft>
-                <a:spcPts val="600"/>
-              </a:spcAft>
-            </a:pPr>
-            <a:r>
-              <a:rPr sz="2000" b="1">
+                <a:spcPts val="500"/>
+              </a:spcAft>
+            </a:pPr>
+            <a:r>
+              <a:rPr sz="1800" b="1">
                 <a:solidFill>
                   <a:srgbClr val="FFFFFF"/>
                 </a:solidFill>
                 <a:latin typeface="Calibri"/>
               </a:rPr>
-              <a:t>📦  Volume</a:t>
-            </a:r>
-          </a:p>
-        </p:txBody>
-      </p:sp>
-      <p:sp>
-        <p:nvSpPr>
-          <p:cNvPr id="9" name="TextBox 8"/>
+              <a:t>Volume</a:t>
+            </a:r>
+          </a:p>
+        </p:txBody>
+      </p:sp>
+      <p:sp>
+        <p:nvSpPr>
+          <p:cNvPr id="10" name="TextBox 9"/>
           <p:cNvSpPr txBox="1"/>
           <p:nvPr/>
         </p:nvSpPr>
         <p:spPr>
           <a:xfrm>
-            <a:off x="594360" y="2194560"/>
+            <a:off x="594360" y="2560320"/>
             <a:ext cx="3108960" cy="1828800"/>
           </a:xfrm>
           <a:prstGeom prst="rect">
@@ -8803,47 +9074,79 @@
           <a:p>
             <a:pPr algn="l">
               <a:spcAft>
-                <a:spcPts val="800"/>
-              </a:spcAft>
-            </a:pPr>
-            <a:r>
-              <a:rPr sz="1600" b="0">
+                <a:spcPts val="500"/>
+              </a:spcAft>
+            </a:pPr>
+            <a:r>
+              <a:rPr sz="1400" b="0">
                 <a:solidFill>
                   <a:srgbClr val="1E293B"/>
                 </a:solidFill>
                 <a:latin typeface="Calibri"/>
               </a:rPr>
-              <a:t>Millions d’événements</a:t>
-            </a:r>
-          </a:p>
-          <a:p>
-            <a:pPr algn="l">
-              <a:spcAft>
-                <a:spcPts val="800"/>
-              </a:spcAft>
-            </a:pPr>
-            <a:r>
-              <a:rPr sz="1600" b="0">
+              <a:t>Beaucoup d’événements</a:t>
+            </a:r>
+          </a:p>
+          <a:p>
+            <a:pPr algn="l">
+              <a:spcAft>
+                <a:spcPts val="500"/>
+              </a:spcAft>
+            </a:pPr>
+            <a:r>
+              <a:rPr sz="1400" b="0">
                 <a:solidFill>
                   <a:srgbClr val="1E293B"/>
                 </a:solidFill>
                 <a:latin typeface="Calibri"/>
               </a:rPr>
-              <a:t>historique multi-années</a:t>
-            </a:r>
-          </a:p>
-        </p:txBody>
-      </p:sp>
-      <p:sp>
-        <p:nvSpPr>
-          <p:cNvPr id="10" name="Rounded Rectangle 9"/>
+              <a:t>sur plusieurs années.</a:t>
+            </a:r>
+          </a:p>
+          <a:p>
+            <a:pPr algn="l">
+              <a:spcAft>
+                <a:spcPts val="500"/>
+              </a:spcAft>
+            </a:pPr>
+            <a:r>
+              <a:rPr sz="1400" b="0">
+                <a:solidFill>
+                  <a:srgbClr val="1E293B"/>
+                </a:solidFill>
+                <a:latin typeface="Calibri"/>
+              </a:rPr>
+              <a:t>Une seule machine</a:t>
+            </a:r>
+          </a:p>
+          <a:p>
+            <a:pPr algn="l">
+              <a:spcAft>
+                <a:spcPts val="500"/>
+              </a:spcAft>
+            </a:pPr>
+            <a:r>
+              <a:rPr sz="1400" b="0">
+                <a:solidFill>
+                  <a:srgbClr val="1E293B"/>
+                </a:solidFill>
+                <a:latin typeface="Calibri"/>
+              </a:rPr>
+              <a:t>ne suffit plus.</a:t>
+            </a:r>
+          </a:p>
+        </p:txBody>
+      </p:sp>
+      <p:sp>
+        <p:nvSpPr>
+          <p:cNvPr id="11" name="Rounded Rectangle 10"/>
           <p:cNvSpPr/>
           <p:nvPr/>
         </p:nvSpPr>
         <p:spPr>
           <a:xfrm>
-            <a:off x="4160520" y="1280160"/>
-            <a:ext cx="3520440" cy="3108960"/>
+            <a:off x="4160520" y="1874519"/>
+            <a:ext cx="3520440" cy="2743200"/>
           </a:xfrm>
           <a:prstGeom prst="roundRect">
             <a:avLst>
@@ -8883,14 +9186,14 @@
       </p:sp>
       <p:sp>
         <p:nvSpPr>
-          <p:cNvPr id="11" name="Rectangle 10"/>
+          <p:cNvPr id="12" name="Rectangle 11"/>
           <p:cNvSpPr/>
           <p:nvPr/>
         </p:nvSpPr>
         <p:spPr>
           <a:xfrm>
-            <a:off x="4160520" y="1280160"/>
-            <a:ext cx="3520440" cy="640080"/>
+            <a:off x="4160520" y="1874519"/>
+            <a:ext cx="3520440" cy="502920"/>
           </a:xfrm>
           <a:prstGeom prst="rect">
             <a:avLst/>
@@ -8926,14 +9229,14 @@
       </p:sp>
       <p:sp>
         <p:nvSpPr>
-          <p:cNvPr id="12" name="TextBox 11"/>
+          <p:cNvPr id="13" name="TextBox 12"/>
           <p:cNvSpPr txBox="1"/>
           <p:nvPr/>
         </p:nvSpPr>
         <p:spPr>
           <a:xfrm>
-            <a:off x="4343400" y="1371600"/>
-            <a:ext cx="3108960" cy="457200"/>
+            <a:off x="4343400" y="1938528"/>
+            <a:ext cx="3108960" cy="411480"/>
           </a:xfrm>
           <a:prstGeom prst="rect">
             <a:avLst/>
@@ -8948,30 +9251,30 @@
           <a:p>
             <a:pPr algn="l">
               <a:spcAft>
-                <a:spcPts val="600"/>
-              </a:spcAft>
-            </a:pPr>
-            <a:r>
-              <a:rPr sz="2000" b="1">
+                <a:spcPts val="500"/>
+              </a:spcAft>
+            </a:pPr>
+            <a:r>
+              <a:rPr sz="1800" b="1">
                 <a:solidFill>
                   <a:srgbClr val="FFFFFF"/>
                 </a:solidFill>
                 <a:latin typeface="Calibri"/>
               </a:rPr>
-              <a:t>⚡  Vélocité</a:t>
-            </a:r>
-          </a:p>
-        </p:txBody>
-      </p:sp>
-      <p:sp>
-        <p:nvSpPr>
-          <p:cNvPr id="13" name="TextBox 12"/>
+              <a:t>Vélocité</a:t>
+            </a:r>
+          </a:p>
+        </p:txBody>
+      </p:sp>
+      <p:sp>
+        <p:nvSpPr>
+          <p:cNvPr id="14" name="TextBox 13"/>
           <p:cNvSpPr txBox="1"/>
           <p:nvPr/>
         </p:nvSpPr>
         <p:spPr>
           <a:xfrm>
-            <a:off x="4389120" y="2194560"/>
+            <a:off x="4389120" y="2560320"/>
             <a:ext cx="3108960" cy="1828800"/>
           </a:xfrm>
           <a:prstGeom prst="rect">
@@ -8987,47 +9290,79 @@
           <a:p>
             <a:pPr algn="l">
               <a:spcAft>
-                <a:spcPts val="800"/>
-              </a:spcAft>
-            </a:pPr>
-            <a:r>
-              <a:rPr sz="1600" b="0">
+                <a:spcPts val="500"/>
+              </a:spcAft>
+            </a:pPr>
+            <a:r>
+              <a:rPr sz="1400" b="0">
                 <a:solidFill>
                   <a:srgbClr val="1E293B"/>
                 </a:solidFill>
                 <a:latin typeface="Calibri"/>
               </a:rPr>
-              <a:t>Commandes &amp; paiements</a:t>
-            </a:r>
-          </a:p>
-          <a:p>
-            <a:pPr algn="l">
-              <a:spcAft>
-                <a:spcPts val="800"/>
-              </a:spcAft>
-            </a:pPr>
-            <a:r>
-              <a:rPr sz="1600" b="0">
+              <a:t>Commandes et paiements</a:t>
+            </a:r>
+          </a:p>
+          <a:p>
+            <a:pPr algn="l">
+              <a:spcAft>
+                <a:spcPts val="500"/>
+              </a:spcAft>
+            </a:pPr>
+            <a:r>
+              <a:rPr sz="1400" b="0">
                 <a:solidFill>
                   <a:srgbClr val="1E293B"/>
                 </a:solidFill>
                 <a:latin typeface="Calibri"/>
               </a:rPr>
-              <a:t>en continu</a:t>
-            </a:r>
-          </a:p>
-        </p:txBody>
-      </p:sp>
-      <p:sp>
-        <p:nvSpPr>
-          <p:cNvPr id="14" name="Rounded Rectangle 13"/>
+              <a:t>en quasi temps réel.</a:t>
+            </a:r>
+          </a:p>
+          <a:p>
+            <a:pPr algn="l">
+              <a:spcAft>
+                <a:spcPts val="500"/>
+              </a:spcAft>
+            </a:pPr>
+            <a:r>
+              <a:rPr sz="1400" b="0">
+                <a:solidFill>
+                  <a:srgbClr val="1E293B"/>
+                </a:solidFill>
+                <a:latin typeface="Calibri"/>
+              </a:rPr>
+              <a:t>Il faut pouvoir réagir</a:t>
+            </a:r>
+          </a:p>
+          <a:p>
+            <a:pPr algn="l">
+              <a:spcAft>
+                <a:spcPts val="500"/>
+              </a:spcAft>
+            </a:pPr>
+            <a:r>
+              <a:rPr sz="1400" b="0">
+                <a:solidFill>
+                  <a:srgbClr val="1E293B"/>
+                </a:solidFill>
+                <a:latin typeface="Calibri"/>
+              </a:rPr>
+              <a:t>(fraude, rupture).</a:t>
+            </a:r>
+          </a:p>
+        </p:txBody>
+      </p:sp>
+      <p:sp>
+        <p:nvSpPr>
+          <p:cNvPr id="15" name="Rounded Rectangle 14"/>
           <p:cNvSpPr/>
           <p:nvPr/>
         </p:nvSpPr>
         <p:spPr>
           <a:xfrm>
-            <a:off x="7955279" y="1280160"/>
-            <a:ext cx="3520440" cy="3108960"/>
+            <a:off x="7955279" y="1874519"/>
+            <a:ext cx="3520440" cy="2743200"/>
           </a:xfrm>
           <a:prstGeom prst="roundRect">
             <a:avLst>
@@ -9067,14 +9402,14 @@
       </p:sp>
       <p:sp>
         <p:nvSpPr>
-          <p:cNvPr id="15" name="Rectangle 14"/>
+          <p:cNvPr id="16" name="Rectangle 15"/>
           <p:cNvSpPr/>
           <p:nvPr/>
         </p:nvSpPr>
         <p:spPr>
           <a:xfrm>
-            <a:off x="7955279" y="1280160"/>
-            <a:ext cx="3520440" cy="640080"/>
+            <a:off x="7955279" y="1874519"/>
+            <a:ext cx="3520440" cy="502920"/>
           </a:xfrm>
           <a:prstGeom prst="rect">
             <a:avLst/>
@@ -9110,14 +9445,14 @@
       </p:sp>
       <p:sp>
         <p:nvSpPr>
-          <p:cNvPr id="16" name="TextBox 15"/>
+          <p:cNvPr id="17" name="TextBox 16"/>
           <p:cNvSpPr txBox="1"/>
           <p:nvPr/>
         </p:nvSpPr>
         <p:spPr>
           <a:xfrm>
-            <a:off x="8138159" y="1371600"/>
-            <a:ext cx="3108960" cy="457200"/>
+            <a:off x="8138159" y="1938528"/>
+            <a:ext cx="3108960" cy="411480"/>
           </a:xfrm>
           <a:prstGeom prst="rect">
             <a:avLst/>
@@ -9132,30 +9467,30 @@
           <a:p>
             <a:pPr algn="l">
               <a:spcAft>
-                <a:spcPts val="600"/>
-              </a:spcAft>
-            </a:pPr>
-            <a:r>
-              <a:rPr sz="2000" b="1">
+                <a:spcPts val="500"/>
+              </a:spcAft>
+            </a:pPr>
+            <a:r>
+              <a:rPr sz="1800" b="1">
                 <a:solidFill>
                   <a:srgbClr val="FFFFFF"/>
                 </a:solidFill>
                 <a:latin typeface="Calibri"/>
               </a:rPr>
-              <a:t>🧩  Variété</a:t>
-            </a:r>
-          </a:p>
-        </p:txBody>
-      </p:sp>
-      <p:sp>
-        <p:nvSpPr>
-          <p:cNvPr id="17" name="TextBox 16"/>
+              <a:t>Variété</a:t>
+            </a:r>
+          </a:p>
+        </p:txBody>
+      </p:sp>
+      <p:sp>
+        <p:nvSpPr>
+          <p:cNvPr id="18" name="TextBox 17"/>
           <p:cNvSpPr txBox="1"/>
           <p:nvPr/>
         </p:nvSpPr>
         <p:spPr>
           <a:xfrm>
-            <a:off x="8183879" y="2194560"/>
+            <a:off x="8183879" y="2560320"/>
             <a:ext cx="3108960" cy="1828800"/>
           </a:xfrm>
           <a:prstGeom prst="rect">
@@ -9171,47 +9506,63 @@
           <a:p>
             <a:pPr algn="l">
               <a:spcAft>
-                <a:spcPts val="800"/>
-              </a:spcAft>
-            </a:pPr>
-            <a:r>
-              <a:rPr sz="1600" b="0">
+                <a:spcPts val="500"/>
+              </a:spcAft>
+            </a:pPr>
+            <a:r>
+              <a:rPr sz="1400" b="0">
                 <a:solidFill>
                   <a:srgbClr val="1E293B"/>
                 </a:solidFill>
                 <a:latin typeface="Calibri"/>
               </a:rPr>
-              <a:t>CSV, JSON, logs,</a:t>
-            </a:r>
-          </a:p>
-          <a:p>
-            <a:pPr algn="l">
-              <a:spcAft>
-                <a:spcPts val="800"/>
-              </a:spcAft>
-            </a:pPr>
-            <a:r>
-              <a:rPr sz="1600" b="0">
+              <a:t>Formats mixtes :</a:t>
+            </a:r>
+          </a:p>
+          <a:p>
+            <a:pPr algn="l">
+              <a:spcAft>
+                <a:spcPts val="500"/>
+              </a:spcAft>
+            </a:pPr>
+            <a:r>
+              <a:rPr sz="1400" b="0">
                 <a:solidFill>
                   <a:srgbClr val="1E293B"/>
                 </a:solidFill>
                 <a:latin typeface="Calibri"/>
               </a:rPr>
-              <a:t>images produits</a:t>
-            </a:r>
-          </a:p>
-        </p:txBody>
-      </p:sp>
-      <p:sp>
-        <p:nvSpPr>
-          <p:cNvPr id="18" name="TextBox 17"/>
+              <a:t>CSV, JSON, logs texte,</a:t>
+            </a:r>
+          </a:p>
+          <a:p>
+            <a:pPr algn="l">
+              <a:spcAft>
+                <a:spcPts val="500"/>
+              </a:spcAft>
+            </a:pPr>
+            <a:r>
+              <a:rPr sz="1400" b="0">
+                <a:solidFill>
+                  <a:srgbClr val="1E293B"/>
+                </a:solidFill>
+                <a:latin typeface="Calibri"/>
+              </a:rPr>
+              <a:t>images produits.</a:t>
+            </a:r>
+          </a:p>
+        </p:txBody>
+      </p:sp>
+      <p:sp>
+        <p:nvSpPr>
+          <p:cNvPr id="19" name="TextBox 18"/>
           <p:cNvSpPr txBox="1"/>
           <p:nvPr/>
         </p:nvSpPr>
         <p:spPr>
           <a:xfrm>
-            <a:off x="457200" y="4663440"/>
-            <a:ext cx="11155680" cy="1280160"/>
+            <a:off x="411480" y="4800600"/>
+            <a:ext cx="11247120" cy="1188720"/>
           </a:xfrm>
           <a:prstGeom prst="rect">
             <a:avLst/>
@@ -9226,40 +9577,40 @@
           <a:p>
             <a:pPr algn="l">
               <a:spcAft>
-                <a:spcPts val="600"/>
-              </a:spcAft>
-            </a:pPr>
-            <a:r>
-              <a:rPr sz="1600" b="1">
-                <a:solidFill>
-                  <a:srgbClr val="0F5C4C"/>
-                </a:solidFill>
-                <a:latin typeface="Calibri"/>
-              </a:rPr>
-              <a:t>Chaîne de magasins : tickets de caisse + logs web + stocks</a:t>
-            </a:r>
-          </a:p>
-          <a:p>
-            <a:pPr algn="l">
-              <a:spcAft>
-                <a:spcPts val="600"/>
-              </a:spcAft>
-            </a:pPr>
-            <a:r>
-              <a:rPr sz="1600" b="0">
+                <a:spcPts val="300"/>
+              </a:spcAft>
+            </a:pPr>
+            <a:r>
+              <a:rPr sz="1400" b="0">
                 <a:solidFill>
                   <a:srgbClr val="1E293B"/>
                 </a:solidFill>
                 <a:latin typeface="Calibri"/>
               </a:rPr>
-              <a:t>HDFS → stockage distribué     |     YARN → traitements (MapReduce, etc.)</a:t>
-            </a:r>
-          </a:p>
-        </p:txBody>
-      </p:sp>
-      <p:sp>
-        <p:nvSpPr>
-          <p:cNvPr id="19" name="Rectangle 18"/>
+              <a:t>Lien avec Hadoop : HDFS stocke ces données de façon distribuée ; YARN permet de lancer</a:t>
+            </a:r>
+          </a:p>
+          <a:p>
+            <a:pPr algn="l">
+              <a:spcAft>
+                <a:spcPts val="500"/>
+              </a:spcAft>
+            </a:pPr>
+            <a:r>
+              <a:rPr sz="1400" b="0">
+                <a:solidFill>
+                  <a:srgbClr val="1E293B"/>
+                </a:solidFill>
+                <a:latin typeface="Calibri"/>
+              </a:rPr>
+              <a:t>des traitements (ex. MapReduce) sur le cluster sans tout centraliser sur un seul serveur.</a:t>
+            </a:r>
+          </a:p>
+        </p:txBody>
+      </p:sp>
+      <p:sp>
+        <p:nvSpPr>
+          <p:cNvPr id="20" name="Rectangle 19"/>
           <p:cNvSpPr/>
           <p:nvPr/>
         </p:nvSpPr>
@@ -9302,7 +9653,7 @@
       </p:sp>
       <p:sp>
         <p:nvSpPr>
-          <p:cNvPr id="20" name="TextBox 19"/>
+          <p:cNvPr id="21" name="TextBox 20"/>
           <p:cNvSpPr txBox="1"/>
           <p:nvPr/>
         </p:nvSpPr>
@@ -9336,7 +9687,7 @@
       </p:sp>
       <p:sp>
         <p:nvSpPr>
-          <p:cNvPr id="21" name="TextBox 20"/>
+          <p:cNvPr id="22" name="TextBox 21"/>
           <p:cNvSpPr txBox="1"/>
           <p:nvPr/>
         </p:nvSpPr>
@@ -9539,7 +9890,7 @@
           <a:lstStyle/>
           <a:p>
             <a:r>
-              <a:rPr sz="2600" b="1">
+              <a:rPr sz="2400" b="1">
                 <a:solidFill>
                   <a:srgbClr val="FFFFFF"/>
                 </a:solidFill>
@@ -9552,14 +9903,53 @@
       </p:sp>
       <p:sp>
         <p:nvSpPr>
-          <p:cNvPr id="6" name="Rounded Rectangle 5"/>
+          <p:cNvPr id="6" name="TextBox 5"/>
+          <p:cNvSpPr txBox="1"/>
+          <p:nvPr/>
+        </p:nvSpPr>
+        <p:spPr>
+          <a:xfrm>
+            <a:off x="365760" y="1078992"/>
+            <a:ext cx="11338560" cy="365760"/>
+          </a:xfrm>
+          <a:prstGeom prst="rect">
+            <a:avLst/>
+          </a:prstGeom>
+          <a:noFill/>
+        </p:spPr>
+        <p:txBody>
+          <a:bodyPr wrap="square">
+            <a:spAutoFit/>
+          </a:bodyPr>
+          <a:lstStyle/>
+          <a:p>
+            <a:pPr algn="l">
+              <a:spcAft>
+                <a:spcPts val="500"/>
+              </a:spcAft>
+            </a:pPr>
+            <a:r>
+              <a:rPr sz="1400" b="0">
+                <a:solidFill>
+                  <a:srgbClr val="64748B"/>
+                </a:solidFill>
+                <a:latin typeface="Calibri"/>
+              </a:rPr>
+              <a:t>Différence clé : stockage centralisé sur une machine vs stockage distribué et répliqué.</a:t>
+            </a:r>
+          </a:p>
+        </p:txBody>
+      </p:sp>
+      <p:sp>
+        <p:nvSpPr>
+          <p:cNvPr id="7" name="Rounded Rectangle 6"/>
           <p:cNvSpPr/>
           <p:nvPr/>
         </p:nvSpPr>
         <p:spPr>
           <a:xfrm>
-            <a:off x="365760" y="1234440"/>
-            <a:ext cx="5394960" cy="4754880"/>
+            <a:off x="320040" y="1508760"/>
+            <a:ext cx="5623560" cy="4480560"/>
           </a:xfrm>
           <a:prstGeom prst="roundRect">
             <a:avLst>
@@ -9599,14 +9989,14 @@
       </p:sp>
       <p:sp>
         <p:nvSpPr>
-          <p:cNvPr id="7" name="TextBox 6"/>
+          <p:cNvPr id="8" name="TextBox 7"/>
           <p:cNvSpPr txBox="1"/>
           <p:nvPr/>
         </p:nvSpPr>
         <p:spPr>
           <a:xfrm>
-            <a:off x="548640" y="1371600"/>
-            <a:ext cx="5029200" cy="457200"/>
+            <a:off x="502920" y="1645920"/>
+            <a:ext cx="5303520" cy="365760"/>
           </a:xfrm>
           <a:prstGeom prst="rect">
             <a:avLst/>
@@ -9621,31 +10011,31 @@
           <a:p>
             <a:pPr algn="l">
               <a:spcAft>
-                <a:spcPts val="600"/>
-              </a:spcAft>
-            </a:pPr>
-            <a:r>
-              <a:rPr sz="1800" b="1">
+                <a:spcPts val="500"/>
+              </a:spcAft>
+            </a:pPr>
+            <a:r>
+              <a:rPr sz="1700" b="1">
                 <a:solidFill>
                   <a:srgbClr val="475569"/>
                 </a:solidFill>
                 <a:latin typeface="Calibri"/>
               </a:rPr>
-              <a:t>FS classique (NTFS / ext4)</a:t>
-            </a:r>
-          </a:p>
-        </p:txBody>
-      </p:sp>
-      <p:sp>
-        <p:nvSpPr>
-          <p:cNvPr id="8" name="Rounded Rectangle 7"/>
+              <a:t>FS classique (NTFS, ext4…)</a:t>
+            </a:r>
+          </a:p>
+        </p:txBody>
+      </p:sp>
+      <p:sp>
+        <p:nvSpPr>
+          <p:cNvPr id="9" name="Rounded Rectangle 8"/>
           <p:cNvSpPr/>
           <p:nvPr/>
         </p:nvSpPr>
         <p:spPr>
           <a:xfrm>
-            <a:off x="1554480" y="2194560"/>
-            <a:ext cx="2926080" cy="1463040"/>
+            <a:off x="1463040" y="2194560"/>
+            <a:ext cx="3200400" cy="1234440"/>
           </a:xfrm>
           <a:prstGeom prst="roundRect">
             <a:avLst>
@@ -9683,14 +10073,14 @@
       </p:sp>
       <p:sp>
         <p:nvSpPr>
-          <p:cNvPr id="9" name="TextBox 8"/>
+          <p:cNvPr id="10" name="TextBox 9"/>
           <p:cNvSpPr txBox="1"/>
           <p:nvPr/>
         </p:nvSpPr>
         <p:spPr>
           <a:xfrm>
-            <a:off x="1645920" y="2267712"/>
-            <a:ext cx="2743200" cy="1325880"/>
+            <a:off x="1554480" y="2267712"/>
+            <a:ext cx="3017520" cy="1097280"/>
           </a:xfrm>
           <a:prstGeom prst="rect">
             <a:avLst/>
@@ -9705,17 +10095,17 @@
           <a:p>
             <a:pPr algn="l">
               <a:spcAft>
-                <a:spcPts val="400"/>
-              </a:spcAft>
-            </a:pPr>
-            <a:r>
-              <a:rPr sz="1400" b="1">
+                <a:spcPts val="300"/>
+              </a:spcAft>
+            </a:pPr>
+            <a:r>
+              <a:rPr sz="1300" b="1">
                 <a:solidFill>
                   <a:srgbClr val="FFFFFF"/>
                 </a:solidFill>
                 <a:latin typeface="Calibri"/>
               </a:rPr>
-              <a:t>1 machine</a:t>
+              <a:t>Une seule machine</a:t>
             </a:r>
           </a:p>
           <a:p>
@@ -9731,7 +10121,7 @@
                 </a:solidFill>
                 <a:latin typeface="Calibri"/>
               </a:rPr>
-              <a:t>Fichier entier</a:t>
+              <a:t>fichier stocké en entier</a:t>
             </a:r>
           </a:p>
           <a:p>
@@ -9747,21 +10137,21 @@
                 </a:solidFill>
                 <a:latin typeface="Calibri"/>
               </a:rPr>
-              <a:t>OS local = métadonnées</a:t>
-            </a:r>
-          </a:p>
-        </p:txBody>
-      </p:sp>
-      <p:sp>
-        <p:nvSpPr>
-          <p:cNvPr id="10" name="TextBox 9"/>
+              <a:t>métadonnées gérées par l’OS</a:t>
+            </a:r>
+          </a:p>
+        </p:txBody>
+      </p:sp>
+      <p:sp>
+        <p:nvSpPr>
+          <p:cNvPr id="11" name="TextBox 10"/>
           <p:cNvSpPr txBox="1"/>
           <p:nvPr/>
         </p:nvSpPr>
         <p:spPr>
           <a:xfrm>
-            <a:off x="640080" y="4023360"/>
-            <a:ext cx="4846320" cy="1463040"/>
+            <a:off x="502920" y="3657600"/>
+            <a:ext cx="5303520" cy="2011680"/>
           </a:xfrm>
           <a:prstGeom prst="rect">
             <a:avLst/>
@@ -9780,13 +10170,13 @@
               </a:spcAft>
             </a:pPr>
             <a:r>
-              <a:rPr sz="1500" b="0">
+              <a:rPr sz="1400" b="0">
                 <a:solidFill>
                   <a:srgbClr val="1E293B"/>
                 </a:solidFill>
                 <a:latin typeface="Calibri"/>
               </a:rPr>
-              <a:t>• Un seul point de défaillance</a:t>
+              <a:t>• Si le disque tombe, les données sont perdues</a:t>
             </a:r>
           </a:p>
           <a:p>
@@ -9796,13 +10186,13 @@
               </a:spcAft>
             </a:pPr>
             <a:r>
-              <a:rPr sz="1500" b="0">
+              <a:rPr sz="1400" b="0">
                 <a:solidFill>
                   <a:srgbClr val="1E293B"/>
                 </a:solidFill>
                 <a:latin typeface="Calibri"/>
               </a:rPr>
-              <a:t>• Pas de réplication native</a:t>
+              <a:t>• Pas de réplication automatique entre machines</a:t>
             </a:r>
           </a:p>
           <a:p>
@@ -9812,27 +10202,43 @@
               </a:spcAft>
             </a:pPr>
             <a:r>
-              <a:rPr sz="1500" b="0">
+              <a:rPr sz="1400" b="0">
                 <a:solidFill>
                   <a:srgbClr val="1E293B"/>
                 </a:solidFill>
                 <a:latin typeface="Calibri"/>
               </a:rPr>
-              <a:t>• Limité à la capacité du disque</a:t>
-            </a:r>
-          </a:p>
-        </p:txBody>
-      </p:sp>
-      <p:sp>
-        <p:nvSpPr>
-          <p:cNvPr id="11" name="Rounded Rectangle 10"/>
+              <a:t>• Capacité limitée au matériel local</a:t>
+            </a:r>
+          </a:p>
+          <a:p>
+            <a:pPr algn="l">
+              <a:spcAft>
+                <a:spcPts val="500"/>
+              </a:spcAft>
+            </a:pPr>
+            <a:r>
+              <a:rPr sz="1400" b="0">
+                <a:solidFill>
+                  <a:srgbClr val="1E293B"/>
+                </a:solidFill>
+                <a:latin typeface="Calibri"/>
+              </a:rPr>
+              <a:t>• Adapté aux petits volumes du quotidien</a:t>
+            </a:r>
+          </a:p>
+        </p:txBody>
+      </p:sp>
+      <p:sp>
+        <p:nvSpPr>
+          <p:cNvPr id="12" name="Rounded Rectangle 11"/>
           <p:cNvSpPr/>
           <p:nvPr/>
         </p:nvSpPr>
         <p:spPr>
           <a:xfrm>
-            <a:off x="6126480" y="1234440"/>
-            <a:ext cx="5669280" cy="4754880"/>
+            <a:off x="6217920" y="1508760"/>
+            <a:ext cx="5623560" cy="4480560"/>
           </a:xfrm>
           <a:prstGeom prst="roundRect">
             <a:avLst>
@@ -9872,14 +10278,14 @@
       </p:sp>
       <p:sp>
         <p:nvSpPr>
-          <p:cNvPr id="12" name="TextBox 11"/>
+          <p:cNvPr id="13" name="TextBox 12"/>
           <p:cNvSpPr txBox="1"/>
           <p:nvPr/>
         </p:nvSpPr>
         <p:spPr>
           <a:xfrm>
-            <a:off x="6309360" y="1371600"/>
-            <a:ext cx="5303520" cy="411480"/>
+            <a:off x="6400800" y="1645920"/>
+            <a:ext cx="5303520" cy="365760"/>
           </a:xfrm>
           <a:prstGeom prst="rect">
             <a:avLst/>
@@ -9894,31 +10300,31 @@
           <a:p>
             <a:pPr algn="l">
               <a:spcAft>
-                <a:spcPts val="600"/>
-              </a:spcAft>
-            </a:pPr>
-            <a:r>
-              <a:rPr sz="1800" b="1">
+                <a:spcPts val="500"/>
+              </a:spcAft>
+            </a:pPr>
+            <a:r>
+              <a:rPr sz="1700" b="1">
                 <a:solidFill>
                   <a:srgbClr val="0F5C4C"/>
                 </a:solidFill>
                 <a:latin typeface="Calibri"/>
               </a:rPr>
-              <a:t>HDFS (distribué)</a:t>
-            </a:r>
-          </a:p>
-        </p:txBody>
-      </p:sp>
-      <p:sp>
-        <p:nvSpPr>
-          <p:cNvPr id="13" name="Rounded Rectangle 12"/>
+              <a:t>HDFS (Hadoop)</a:t>
+            </a:r>
+          </a:p>
+        </p:txBody>
+      </p:sp>
+      <p:sp>
+        <p:nvSpPr>
+          <p:cNvPr id="14" name="Rounded Rectangle 13"/>
           <p:cNvSpPr/>
           <p:nvPr/>
         </p:nvSpPr>
         <p:spPr>
           <a:xfrm>
-            <a:off x="7589520" y="1965960"/>
-            <a:ext cx="2560320" cy="914400"/>
+            <a:off x="7498079" y="2148840"/>
+            <a:ext cx="2926080" cy="960120"/>
           </a:xfrm>
           <a:prstGeom prst="roundRect">
             <a:avLst>
@@ -9956,14 +10362,14 @@
       </p:sp>
       <p:sp>
         <p:nvSpPr>
-          <p:cNvPr id="14" name="TextBox 13"/>
+          <p:cNvPr id="15" name="TextBox 14"/>
           <p:cNvSpPr txBox="1"/>
           <p:nvPr/>
         </p:nvSpPr>
         <p:spPr>
           <a:xfrm>
-            <a:off x="7680960" y="2039112"/>
-            <a:ext cx="2377439" cy="777240"/>
+            <a:off x="7589519" y="2221992"/>
+            <a:ext cx="2743200" cy="822960"/>
           </a:xfrm>
           <a:prstGeom prst="rect">
             <a:avLst/>
@@ -9978,11 +10384,11 @@
           <a:p>
             <a:pPr algn="l">
               <a:spcAft>
-                <a:spcPts val="400"/>
-              </a:spcAft>
-            </a:pPr>
-            <a:r>
-              <a:rPr sz="1400" b="1">
+                <a:spcPts val="300"/>
+              </a:spcAft>
+            </a:pPr>
+            <a:r>
+              <a:rPr sz="1300" b="1">
                 <a:solidFill>
                   <a:srgbClr val="FFFFFF"/>
                 </a:solidFill>
@@ -10004,21 +10410,21 @@
                 </a:solidFill>
                 <a:latin typeface="Calibri"/>
               </a:rPr>
-              <a:t>namespace + blocs</a:t>
-            </a:r>
-          </a:p>
-        </p:txBody>
-      </p:sp>
-      <p:sp>
-        <p:nvSpPr>
-          <p:cNvPr id="15" name="Rounded Rectangle 14"/>
+              <a:t>noms, dossiers, emplacement des blocs</a:t>
+            </a:r>
+          </a:p>
+        </p:txBody>
+      </p:sp>
+      <p:sp>
+        <p:nvSpPr>
+          <p:cNvPr id="16" name="Rounded Rectangle 15"/>
           <p:cNvSpPr/>
           <p:nvPr/>
         </p:nvSpPr>
         <p:spPr>
           <a:xfrm>
-            <a:off x="6400800" y="3200400"/>
-            <a:ext cx="1645920" cy="1051560"/>
+            <a:off x="6446520" y="3337560"/>
+            <a:ext cx="1645920" cy="960120"/>
           </a:xfrm>
           <a:prstGeom prst="roundRect">
             <a:avLst>
@@ -10056,14 +10462,14 @@
       </p:sp>
       <p:sp>
         <p:nvSpPr>
-          <p:cNvPr id="16" name="TextBox 15"/>
+          <p:cNvPr id="17" name="TextBox 16"/>
           <p:cNvSpPr txBox="1"/>
           <p:nvPr/>
         </p:nvSpPr>
         <p:spPr>
           <a:xfrm>
-            <a:off x="6492240" y="3273552"/>
-            <a:ext cx="1463040" cy="914399"/>
+            <a:off x="6537959" y="3410712"/>
+            <a:ext cx="1463040" cy="822960"/>
           </a:xfrm>
           <a:prstGeom prst="rect">
             <a:avLst/>
@@ -10078,17 +10484,17 @@
           <a:p>
             <a:pPr algn="l">
               <a:spcAft>
-                <a:spcPts val="400"/>
-              </a:spcAft>
-            </a:pPr>
-            <a:r>
-              <a:rPr sz="1400" b="1">
+                <a:spcPts val="300"/>
+              </a:spcAft>
+            </a:pPr>
+            <a:r>
+              <a:rPr sz="1300" b="1">
                 <a:solidFill>
                   <a:srgbClr val="FFFFFF"/>
                 </a:solidFill>
                 <a:latin typeface="Calibri"/>
               </a:rPr>
-              <a:t>DN1</a:t>
+              <a:t>DataNode 1</a:t>
             </a:r>
           </a:p>
           <a:p>
@@ -10111,14 +10517,14 @@
       </p:sp>
       <p:sp>
         <p:nvSpPr>
-          <p:cNvPr id="17" name="Rounded Rectangle 16"/>
+          <p:cNvPr id="18" name="Rounded Rectangle 17"/>
           <p:cNvSpPr/>
           <p:nvPr/>
         </p:nvSpPr>
         <p:spPr>
           <a:xfrm>
-            <a:off x="8229600" y="3200400"/>
-            <a:ext cx="1645920" cy="1051560"/>
+            <a:off x="8229600" y="3337560"/>
+            <a:ext cx="1645920" cy="960120"/>
           </a:xfrm>
           <a:prstGeom prst="roundRect">
             <a:avLst>
@@ -10156,14 +10562,14 @@
       </p:sp>
       <p:sp>
         <p:nvSpPr>
-          <p:cNvPr id="18" name="TextBox 17"/>
+          <p:cNvPr id="19" name="TextBox 18"/>
           <p:cNvSpPr txBox="1"/>
           <p:nvPr/>
         </p:nvSpPr>
         <p:spPr>
           <a:xfrm>
-            <a:off x="8321040" y="3273552"/>
-            <a:ext cx="1463040" cy="914399"/>
+            <a:off x="8321040" y="3410712"/>
+            <a:ext cx="1463040" cy="822960"/>
           </a:xfrm>
           <a:prstGeom prst="rect">
             <a:avLst/>
@@ -10178,17 +10584,17 @@
           <a:p>
             <a:pPr algn="l">
               <a:spcAft>
-                <a:spcPts val="400"/>
-              </a:spcAft>
-            </a:pPr>
-            <a:r>
-              <a:rPr sz="1400" b="1">
+                <a:spcPts val="300"/>
+              </a:spcAft>
+            </a:pPr>
+            <a:r>
+              <a:rPr sz="1300" b="1">
                 <a:solidFill>
                   <a:srgbClr val="FFFFFF"/>
                 </a:solidFill>
                 <a:latin typeface="Calibri"/>
               </a:rPr>
-              <a:t>DN2</a:t>
+              <a:t>DataNode 2</a:t>
             </a:r>
           </a:p>
           <a:p>
@@ -10211,14 +10617,14 @@
       </p:sp>
       <p:sp>
         <p:nvSpPr>
-          <p:cNvPr id="19" name="Rounded Rectangle 18"/>
+          <p:cNvPr id="20" name="Rounded Rectangle 19"/>
           <p:cNvSpPr/>
           <p:nvPr/>
         </p:nvSpPr>
         <p:spPr>
           <a:xfrm>
-            <a:off x="10058400" y="3200400"/>
-            <a:ext cx="1645920" cy="1051560"/>
+            <a:off x="10012680" y="3337560"/>
+            <a:ext cx="1645920" cy="960120"/>
           </a:xfrm>
           <a:prstGeom prst="roundRect">
             <a:avLst>
@@ -10256,14 +10662,14 @@
       </p:sp>
       <p:sp>
         <p:nvSpPr>
-          <p:cNvPr id="20" name="TextBox 19"/>
+          <p:cNvPr id="21" name="TextBox 20"/>
           <p:cNvSpPr txBox="1"/>
           <p:nvPr/>
         </p:nvSpPr>
         <p:spPr>
           <a:xfrm>
-            <a:off x="10149840" y="3273552"/>
-            <a:ext cx="1463040" cy="914399"/>
+            <a:off x="10104119" y="3410712"/>
+            <a:ext cx="1463040" cy="822960"/>
           </a:xfrm>
           <a:prstGeom prst="rect">
             <a:avLst/>
@@ -10278,17 +10684,17 @@
           <a:p>
             <a:pPr algn="l">
               <a:spcAft>
-                <a:spcPts val="400"/>
-              </a:spcAft>
-            </a:pPr>
-            <a:r>
-              <a:rPr sz="1400" b="1">
+                <a:spcPts val="300"/>
+              </a:spcAft>
+            </a:pPr>
+            <a:r>
+              <a:rPr sz="1300" b="1">
                 <a:solidFill>
                   <a:srgbClr val="FFFFFF"/>
                 </a:solidFill>
                 <a:latin typeface="Calibri"/>
               </a:rPr>
-              <a:t>DN3</a:t>
+              <a:t>DataNode 3</a:t>
             </a:r>
           </a:p>
           <a:p>
@@ -10311,14 +10717,14 @@
       </p:sp>
       <p:sp>
         <p:nvSpPr>
-          <p:cNvPr id="21" name="TextBox 20"/>
+          <p:cNvPr id="22" name="TextBox 21"/>
           <p:cNvSpPr txBox="1"/>
           <p:nvPr/>
         </p:nvSpPr>
         <p:spPr>
           <a:xfrm>
-            <a:off x="6309360" y="4572000"/>
-            <a:ext cx="5303520" cy="1097280"/>
+            <a:off x="6400800" y="4572000"/>
+            <a:ext cx="5303520" cy="1188720"/>
           </a:xfrm>
           <a:prstGeom prst="rect">
             <a:avLst/>
@@ -10337,36 +10743,52 @@
               </a:spcAft>
             </a:pPr>
             <a:r>
-              <a:rPr sz="1400" b="1">
+              <a:rPr sz="1300" b="0">
                 <a:solidFill>
                   <a:srgbClr val="1E293B"/>
                 </a:solidFill>
                 <a:latin typeface="Calibri"/>
               </a:rPr>
-              <a:t>Fichier découpé en blocs + réplication</a:t>
-            </a:r>
-          </a:p>
-          <a:p>
-            <a:pPr algn="l">
-              <a:spcAft>
-                <a:spcPts val="600"/>
-              </a:spcAft>
-            </a:pPr>
-            <a:r>
-              <a:rPr sz="1400" b="0">
+              <a:t>Fichier découpé en blocs (souvent 128 Mo).</a:t>
+            </a:r>
+          </a:p>
+          <a:p>
+            <a:pPr algn="l">
+              <a:spcAft>
+                <a:spcPts val="400"/>
+              </a:spcAft>
+            </a:pPr>
+            <a:r>
+              <a:rPr sz="1300" b="0">
                 <a:solidFill>
                   <a:srgbClr val="1E293B"/>
                 </a:solidFill>
                 <a:latin typeface="Calibri"/>
               </a:rPr>
-              <a:t>Tolérance aux pannes sur plusieurs nœuds</a:t>
-            </a:r>
-          </a:p>
-        </p:txBody>
-      </p:sp>
-      <p:sp>
-        <p:nvSpPr>
-          <p:cNvPr id="22" name="Rectangle 21"/>
+              <a:t>Plusieurs copies sur le cluster → tolérance aux pannes.</a:t>
+            </a:r>
+          </a:p>
+          <a:p>
+            <a:pPr algn="l">
+              <a:spcAft>
+                <a:spcPts val="500"/>
+              </a:spcAft>
+            </a:pPr>
+            <a:r>
+              <a:rPr sz="1300" b="0">
+                <a:solidFill>
+                  <a:srgbClr val="1E293B"/>
+                </a:solidFill>
+                <a:latin typeface="Calibri"/>
+              </a:rPr>
+              <a:t>Le NameNode ne stocke pas le contenu des fichiers.</a:t>
+            </a:r>
+          </a:p>
+        </p:txBody>
+      </p:sp>
+      <p:sp>
+        <p:nvSpPr>
+          <p:cNvPr id="23" name="Rectangle 22"/>
           <p:cNvSpPr/>
           <p:nvPr/>
         </p:nvSpPr>
@@ -10409,7 +10831,7 @@
       </p:sp>
       <p:sp>
         <p:nvSpPr>
-          <p:cNvPr id="23" name="TextBox 22"/>
+          <p:cNvPr id="24" name="TextBox 23"/>
           <p:cNvSpPr txBox="1"/>
           <p:nvPr/>
         </p:nvSpPr>
@@ -10443,7 +10865,7 @@
       </p:sp>
       <p:sp>
         <p:nvSpPr>
-          <p:cNvPr id="24" name="TextBox 23"/>
+          <p:cNvPr id="25" name="TextBox 24"/>
           <p:cNvSpPr txBox="1"/>
           <p:nvPr/>
         </p:nvSpPr>
@@ -10646,27 +11068,66 @@
           <a:lstStyle/>
           <a:p>
             <a:r>
-              <a:rPr sz="2600" b="1">
+              <a:rPr sz="2400" b="1">
                 <a:solidFill>
                   <a:srgbClr val="FFFFFF"/>
                 </a:solidFill>
                 <a:latin typeface="Calibri"/>
               </a:rPr>
-              <a:t>YARN : ResourceManager et NodeManager</a:t>
-            </a:r>
-          </a:p>
-        </p:txBody>
-      </p:sp>
-      <p:sp>
-        <p:nvSpPr>
-          <p:cNvPr id="6" name="Rounded Rectangle 5"/>
+              <a:t>YARN : qui orchestre, qui exécute ?</a:t>
+            </a:r>
+          </a:p>
+        </p:txBody>
+      </p:sp>
+      <p:sp>
+        <p:nvSpPr>
+          <p:cNvPr id="6" name="TextBox 5"/>
+          <p:cNvSpPr txBox="1"/>
+          <p:nvPr/>
+        </p:nvSpPr>
+        <p:spPr>
+          <a:xfrm>
+            <a:off x="365760" y="1078992"/>
+            <a:ext cx="11338560" cy="411480"/>
+          </a:xfrm>
+          <a:prstGeom prst="rect">
+            <a:avLst/>
+          </a:prstGeom>
+          <a:noFill/>
+        </p:spPr>
+        <p:txBody>
+          <a:bodyPr wrap="square">
+            <a:spAutoFit/>
+          </a:bodyPr>
+          <a:lstStyle/>
+          <a:p>
+            <a:pPr algn="l">
+              <a:spcAft>
+                <a:spcPts val="500"/>
+              </a:spcAft>
+            </a:pPr>
+            <a:r>
+              <a:rPr sz="1400" b="0">
+                <a:solidFill>
+                  <a:srgbClr val="64748B"/>
+                </a:solidFill>
+                <a:latin typeface="Calibri"/>
+              </a:rPr>
+              <a:t>YARN (Yet Another Resource Negotiator) gère les ressources CPU/mémoire du cluster pour les jobs.</a:t>
+            </a:r>
+          </a:p>
+        </p:txBody>
+      </p:sp>
+      <p:sp>
+        <p:nvSpPr>
+          <p:cNvPr id="7" name="Rounded Rectangle 6"/>
           <p:cNvSpPr/>
           <p:nvPr/>
         </p:nvSpPr>
         <p:spPr>
           <a:xfrm>
-            <a:off x="457200" y="1371600"/>
-            <a:ext cx="3291840" cy="2011680"/>
+            <a:off x="365760" y="1600200"/>
+            <a:ext cx="3566160" cy="2148840"/>
           </a:xfrm>
           <a:prstGeom prst="roundRect">
             <a:avLst>
@@ -10704,14 +11165,14 @@
       </p:sp>
       <p:sp>
         <p:nvSpPr>
-          <p:cNvPr id="7" name="TextBox 6"/>
+          <p:cNvPr id="8" name="TextBox 7"/>
           <p:cNvSpPr txBox="1"/>
           <p:nvPr/>
         </p:nvSpPr>
         <p:spPr>
           <a:xfrm>
-            <a:off x="548640" y="1444752"/>
-            <a:ext cx="3108960" cy="1874520"/>
+            <a:off x="457200" y="1673352"/>
+            <a:ext cx="3383279" cy="2011680"/>
           </a:xfrm>
           <a:prstGeom prst="rect">
             <a:avLst/>
@@ -10726,11 +11187,11 @@
           <a:p>
             <a:pPr algn="l">
               <a:spcAft>
-                <a:spcPts val="400"/>
-              </a:spcAft>
-            </a:pPr>
-            <a:r>
-              <a:rPr sz="1400" b="1">
+                <a:spcPts val="300"/>
+              </a:spcAft>
+            </a:pPr>
+            <a:r>
+              <a:rPr sz="1300" b="1">
                 <a:solidFill>
                   <a:srgbClr val="FFFFFF"/>
                 </a:solidFill>
@@ -10752,7 +11213,7 @@
                 </a:solidFill>
                 <a:latin typeface="Calibri"/>
               </a:rPr>
-              <a:t>soumet le job</a:t>
+              <a:t>Soumet une application</a:t>
             </a:r>
           </a:p>
           <a:p>
@@ -10768,21 +11229,37 @@
                 </a:solidFill>
                 <a:latin typeface="Calibri"/>
               </a:rPr>
-              <a:t>yarn jar … pi 4 1000</a:t>
-            </a:r>
-          </a:p>
-        </p:txBody>
-      </p:sp>
-      <p:sp>
-        <p:nvSpPr>
-          <p:cNvPr id="8" name="Rounded Rectangle 7"/>
+              <a:t>ex. yarn jar … pi 4 1000</a:t>
+            </a:r>
+          </a:p>
+          <a:p>
+            <a:pPr algn="l">
+              <a:spcAft>
+                <a:spcPts val="200"/>
+              </a:spcAft>
+            </a:pPr>
+            <a:r>
+              <a:rPr sz="1100" b="0">
+                <a:solidFill>
+                  <a:srgbClr val="FFFFFF"/>
+                </a:solidFill>
+                <a:latin typeface="Calibri"/>
+              </a:rPr>
+              <a:t>demande des ressources</a:t>
+            </a:r>
+          </a:p>
+        </p:txBody>
+      </p:sp>
+      <p:sp>
+        <p:nvSpPr>
+          <p:cNvPr id="9" name="Rounded Rectangle 8"/>
           <p:cNvSpPr/>
           <p:nvPr/>
         </p:nvSpPr>
         <p:spPr>
           <a:xfrm>
-            <a:off x="4389120" y="1371600"/>
-            <a:ext cx="3474720" cy="2011680"/>
+            <a:off x="4206240" y="1600200"/>
+            <a:ext cx="3749039" cy="2148840"/>
           </a:xfrm>
           <a:prstGeom prst="roundRect">
             <a:avLst>
@@ -10820,14 +11297,14 @@
       </p:sp>
       <p:sp>
         <p:nvSpPr>
-          <p:cNvPr id="9" name="TextBox 8"/>
+          <p:cNvPr id="10" name="TextBox 9"/>
           <p:cNvSpPr txBox="1"/>
           <p:nvPr/>
         </p:nvSpPr>
         <p:spPr>
           <a:xfrm>
-            <a:off x="4480559" y="1444752"/>
-            <a:ext cx="3291839" cy="1874520"/>
+            <a:off x="4297679" y="1673352"/>
+            <a:ext cx="3566159" cy="2011680"/>
           </a:xfrm>
           <a:prstGeom prst="rect">
             <a:avLst/>
@@ -10842,11 +11319,11 @@
           <a:p>
             <a:pPr algn="l">
               <a:spcAft>
-                <a:spcPts val="400"/>
-              </a:spcAft>
-            </a:pPr>
-            <a:r>
-              <a:rPr sz="1400" b="1">
+                <a:spcPts val="300"/>
+              </a:spcAft>
+            </a:pPr>
+            <a:r>
+              <a:rPr sz="1300" b="1">
                 <a:solidFill>
                   <a:srgbClr val="FFFFFF"/>
                 </a:solidFill>
@@ -10868,7 +11345,7 @@
                 </a:solidFill>
                 <a:latin typeface="Calibri"/>
               </a:rPr>
-              <a:t>master</a:t>
+              <a:t>Sur le master</a:t>
             </a:r>
           </a:p>
           <a:p>
@@ -10884,7 +11361,7 @@
                 </a:solidFill>
                 <a:latin typeface="Calibri"/>
               </a:rPr>
-              <a:t>alloue conteneurs</a:t>
+              <a:t>Connaît le cluster</a:t>
             </a:r>
           </a:p>
           <a:p>
@@ -10900,21 +11377,37 @@
                 </a:solidFill>
                 <a:latin typeface="Calibri"/>
               </a:rPr>
-              <a:t>lance ApplicationMaster</a:t>
-            </a:r>
-          </a:p>
-        </p:txBody>
-      </p:sp>
-      <p:sp>
-        <p:nvSpPr>
-          <p:cNvPr id="10" name="Rounded Rectangle 9"/>
+              <a:t>Alloue des conteneurs</a:t>
+            </a:r>
+          </a:p>
+          <a:p>
+            <a:pPr algn="l">
+              <a:spcAft>
+                <a:spcPts val="200"/>
+              </a:spcAft>
+            </a:pPr>
+            <a:r>
+              <a:rPr sz="1100" b="0">
+                <a:solidFill>
+                  <a:srgbClr val="FFFFFF"/>
+                </a:solidFill>
+                <a:latin typeface="Calibri"/>
+              </a:rPr>
+              <a:t>Démarre l’ApplicationMaster</a:t>
+            </a:r>
+          </a:p>
+        </p:txBody>
+      </p:sp>
+      <p:sp>
+        <p:nvSpPr>
+          <p:cNvPr id="11" name="Rounded Rectangle 10"/>
           <p:cNvSpPr/>
           <p:nvPr/>
         </p:nvSpPr>
         <p:spPr>
           <a:xfrm>
-            <a:off x="8503920" y="1371600"/>
-            <a:ext cx="3200400" cy="2011680"/>
+            <a:off x="8229600" y="1600200"/>
+            <a:ext cx="3566160" cy="2148840"/>
           </a:xfrm>
           <a:prstGeom prst="roundRect">
             <a:avLst>
@@ -10952,14 +11445,14 @@
       </p:sp>
       <p:sp>
         <p:nvSpPr>
-          <p:cNvPr id="11" name="TextBox 10"/>
+          <p:cNvPr id="12" name="TextBox 11"/>
           <p:cNvSpPr txBox="1"/>
           <p:nvPr/>
         </p:nvSpPr>
         <p:spPr>
           <a:xfrm>
-            <a:off x="8595360" y="1444752"/>
-            <a:ext cx="3017520" cy="1874520"/>
+            <a:off x="8321040" y="1673352"/>
+            <a:ext cx="3383279" cy="2011680"/>
           </a:xfrm>
           <a:prstGeom prst="rect">
             <a:avLst/>
@@ -10974,17 +11467,17 @@
           <a:p>
             <a:pPr algn="l">
               <a:spcAft>
-                <a:spcPts val="400"/>
-              </a:spcAft>
-            </a:pPr>
-            <a:r>
-              <a:rPr sz="1400" b="1">
+                <a:spcPts val="300"/>
+              </a:spcAft>
+            </a:pPr>
+            <a:r>
+              <a:rPr sz="1300" b="1">
                 <a:solidFill>
                   <a:srgbClr val="FFFFFF"/>
                 </a:solidFill>
                 <a:latin typeface="Calibri"/>
               </a:rPr>
-              <a:t>3. NodeManagers</a:t>
+              <a:t>3. NodeManager</a:t>
             </a:r>
           </a:p>
           <a:p>
@@ -11000,7 +11493,7 @@
                 </a:solidFill>
                 <a:latin typeface="Calibri"/>
               </a:rPr>
-              <a:t>sur chaque worker</a:t>
+              <a:t>Sur chaque worker</a:t>
             </a:r>
           </a:p>
           <a:p>
@@ -11016,14 +11509,46 @@
                 </a:solidFill>
                 <a:latin typeface="Calibri"/>
               </a:rPr>
-              <a:t>exécutent les tâches</a:t>
+              <a:t>Lance les conteneurs</a:t>
+            </a:r>
+          </a:p>
+          <a:p>
+            <a:pPr algn="l">
+              <a:spcAft>
+                <a:spcPts val="200"/>
+              </a:spcAft>
+            </a:pPr>
+            <a:r>
+              <a:rPr sz="1100" b="0">
+                <a:solidFill>
+                  <a:srgbClr val="FFFFFF"/>
+                </a:solidFill>
+                <a:latin typeface="Calibri"/>
+              </a:rPr>
+              <a:t>Surveille l’exécution</a:t>
+            </a:r>
+          </a:p>
+          <a:p>
+            <a:pPr algn="l">
+              <a:spcAft>
+                <a:spcPts val="200"/>
+              </a:spcAft>
+            </a:pPr>
+            <a:r>
+              <a:rPr sz="1100" b="0">
+                <a:solidFill>
+                  <a:srgbClr val="FFFFFF"/>
+                </a:solidFill>
+                <a:latin typeface="Calibri"/>
+              </a:rPr>
+              <a:t>Remonte l’état au RM</a:t>
             </a:r>
           </a:p>
         </p:txBody>
       </p:sp>
       <p:pic>
         <p:nvPicPr>
-          <p:cNvPr id="12" name="Picture 11" descr="screenshot-yarn.png"/>
+          <p:cNvPr id="13" name="Picture 12" descr="screenshot-yarn.png"/>
           <p:cNvPicPr>
             <a:picLocks noChangeAspect="1"/>
           </p:cNvPicPr>
@@ -11037,8 +11562,8 @@
         </p:blipFill>
         <p:spPr>
           <a:xfrm>
-            <a:off x="457200" y="3657600"/>
-            <a:ext cx="7132320" cy="5094514"/>
+            <a:off x="365760" y="3977639"/>
+            <a:ext cx="6858000" cy="4898571"/>
           </a:xfrm>
           <a:prstGeom prst="rect">
             <a:avLst/>
@@ -11047,14 +11572,14 @@
       </p:pic>
       <p:sp>
         <p:nvSpPr>
-          <p:cNvPr id="13" name="TextBox 12"/>
+          <p:cNvPr id="14" name="TextBox 13"/>
           <p:cNvSpPr txBox="1"/>
           <p:nvPr/>
         </p:nvSpPr>
         <p:spPr>
           <a:xfrm>
-            <a:off x="457200" y="5897880"/>
-            <a:ext cx="7132320" cy="274320"/>
+            <a:off x="365760" y="5943600"/>
+            <a:ext cx="6858000" cy="256032"/>
           </a:xfrm>
           <a:prstGeom prst="rect">
             <a:avLst/>
@@ -11069,7 +11594,7 @@
           <a:p>
             <a:pPr algn="l">
               <a:spcAft>
-                <a:spcPts val="600"/>
+                <a:spcPts val="500"/>
               </a:spcAft>
             </a:pPr>
             <a:r>
@@ -11079,21 +11604,21 @@
                 </a:solidFill>
                 <a:latin typeface="Calibri"/>
               </a:rPr>
-              <a:t>UI YARN — http://localhost:8088</a:t>
-            </a:r>
-          </a:p>
-        </p:txBody>
-      </p:sp>
-      <p:sp>
-        <p:nvSpPr>
-          <p:cNvPr id="14" name="TextBox 13"/>
+              <a:t>Capture UI YARN — applications du cluster</a:t>
+            </a:r>
+          </a:p>
+        </p:txBody>
+      </p:sp>
+      <p:sp>
+        <p:nvSpPr>
+          <p:cNvPr id="15" name="TextBox 14"/>
           <p:cNvSpPr txBox="1"/>
           <p:nvPr/>
         </p:nvSpPr>
         <p:spPr>
           <a:xfrm>
-            <a:off x="7772400" y="3657600"/>
-            <a:ext cx="4023360" cy="2286000"/>
+            <a:off x="7498079" y="3977639"/>
+            <a:ext cx="4297680" cy="2011680"/>
           </a:xfrm>
           <a:prstGeom prst="rect">
             <a:avLst/>
@@ -11118,7 +11643,7 @@
                 </a:solidFill>
                 <a:latin typeface="Calibri"/>
               </a:rPr>
-              <a:t>En résumé</a:t>
+              <a:t>À retenir</a:t>
             </a:r>
           </a:p>
           <a:p>
@@ -11128,13 +11653,13 @@
               </a:spcAft>
             </a:pPr>
             <a:r>
-              <a:rPr sz="1500" b="0">
+              <a:rPr sz="1300" b="0">
                 <a:solidFill>
                   <a:srgbClr val="1E293B"/>
                 </a:solidFill>
                 <a:latin typeface="Calibri"/>
               </a:rPr>
-              <a:t>RM orchestre</a:t>
+              <a:t>ResourceManager = décide et coordonne</a:t>
             </a:r>
           </a:p>
           <a:p>
@@ -11144,37 +11669,37 @@
               </a:spcAft>
             </a:pPr>
             <a:r>
-              <a:rPr sz="1500" b="0">
+              <a:rPr sz="1300" b="0">
                 <a:solidFill>
                   <a:srgbClr val="1E293B"/>
                 </a:solidFill>
                 <a:latin typeface="Calibri"/>
               </a:rPr>
-              <a:t>NM exécute localement</a:t>
-            </a:r>
-          </a:p>
-          <a:p>
-            <a:pPr algn="l">
-              <a:spcAft>
-                <a:spcPts val="600"/>
-              </a:spcAft>
-            </a:pPr>
-            <a:r>
-              <a:rPr sz="1400" b="1">
+              <a:t>NodeManager = exécute sur sa machine</a:t>
+            </a:r>
+          </a:p>
+          <a:p>
+            <a:pPr algn="l">
+              <a:spcAft>
+                <a:spcPts val="500"/>
+              </a:spcAft>
+            </a:pPr>
+            <a:r>
+              <a:rPr sz="1300" b="1">
                 <a:solidFill>
                   <a:srgbClr val="1D4E89"/>
                 </a:solidFill>
                 <a:latin typeface="Calibri"/>
                 <a:hlinkClick r:id="rId3"/>
               </a:rPr>
-              <a:t>Ouvrir l’UI →</a:t>
-            </a:r>
-          </a:p>
-        </p:txBody>
-      </p:sp>
-      <p:sp>
-        <p:nvSpPr>
-          <p:cNvPr id="15" name="Rectangle 14"/>
+              <a:t>Ouvrir UI YARN →</a:t>
+            </a:r>
+          </a:p>
+        </p:txBody>
+      </p:sp>
+      <p:sp>
+        <p:nvSpPr>
+          <p:cNvPr id="16" name="Rectangle 15"/>
           <p:cNvSpPr/>
           <p:nvPr/>
         </p:nvSpPr>
@@ -11217,7 +11742,7 @@
       </p:sp>
       <p:sp>
         <p:nvSpPr>
-          <p:cNvPr id="16" name="TextBox 15"/>
+          <p:cNvPr id="17" name="TextBox 16"/>
           <p:cNvSpPr txBox="1"/>
           <p:nvPr/>
         </p:nvSpPr>
@@ -11251,7 +11776,7 @@
       </p:sp>
       <p:sp>
         <p:nvSpPr>
-          <p:cNvPr id="17" name="TextBox 16"/>
+          <p:cNvPr id="18" name="TextBox 17"/>
           <p:cNvSpPr txBox="1"/>
           <p:nvPr/>
         </p:nvSpPr>
@@ -11454,27 +11979,66 @@
           <a:lstStyle/>
           <a:p>
             <a:r>
-              <a:rPr sz="2600" b="1">
+              <a:rPr sz="2400" b="1">
                 <a:solidFill>
                   <a:srgbClr val="FFFFFF"/>
                 </a:solidFill>
                 <a:latin typeface="Calibri"/>
               </a:rPr>
-              <a:t>Architecture Docker — 1 master + 5 workers</a:t>
-            </a:r>
-          </a:p>
-        </p:txBody>
-      </p:sp>
-      <p:sp>
-        <p:nvSpPr>
-          <p:cNvPr id="6" name="Rounded Rectangle 5"/>
+              <a:t>Architecture : 1 master + 5 workers (Docker)</a:t>
+            </a:r>
+          </a:p>
+        </p:txBody>
+      </p:sp>
+      <p:sp>
+        <p:nvSpPr>
+          <p:cNvPr id="6" name="TextBox 5"/>
+          <p:cNvSpPr txBox="1"/>
+          <p:nvPr/>
+        </p:nvSpPr>
+        <p:spPr>
+          <a:xfrm>
+            <a:off x="365760" y="1078992"/>
+            <a:ext cx="11338560" cy="365760"/>
+          </a:xfrm>
+          <a:prstGeom prst="rect">
+            <a:avLst/>
+          </a:prstGeom>
+          <a:noFill/>
+        </p:spPr>
+        <p:txBody>
+          <a:bodyPr wrap="square">
+            <a:spAutoFit/>
+          </a:bodyPr>
+          <a:lstStyle/>
+          <a:p>
+            <a:pPr algn="l">
+              <a:spcAft>
+                <a:spcPts val="500"/>
+              </a:spcAft>
+            </a:pPr>
+            <a:r>
+              <a:rPr sz="1400" b="0">
+                <a:solidFill>
+                  <a:srgbClr val="64748B"/>
+                </a:solidFill>
+                <a:latin typeface="Calibri"/>
+              </a:rPr>
+              <a:t>Six conteneurs sur le réseau Docker hadoop-net, construits depuis la même image du groupe.</a:t>
+            </a:r>
+          </a:p>
+        </p:txBody>
+      </p:sp>
+      <p:sp>
+        <p:nvSpPr>
+          <p:cNvPr id="7" name="Rounded Rectangle 6"/>
           <p:cNvSpPr/>
           <p:nvPr/>
         </p:nvSpPr>
         <p:spPr>
           <a:xfrm>
-            <a:off x="3200400" y="1234440"/>
-            <a:ext cx="5760720" cy="1417320"/>
+            <a:off x="2560320" y="1554480"/>
+            <a:ext cx="7040880" cy="1417320"/>
           </a:xfrm>
           <a:prstGeom prst="roundRect">
             <a:avLst>
@@ -11512,14 +12076,14 @@
       </p:sp>
       <p:sp>
         <p:nvSpPr>
-          <p:cNvPr id="7" name="TextBox 6"/>
+          <p:cNvPr id="8" name="TextBox 7"/>
           <p:cNvSpPr txBox="1"/>
           <p:nvPr/>
         </p:nvSpPr>
         <p:spPr>
           <a:xfrm>
-            <a:off x="3291840" y="1307592"/>
-            <a:ext cx="5577840" cy="1280160"/>
+            <a:off x="2651760" y="1627632"/>
+            <a:ext cx="6858000" cy="1280160"/>
           </a:xfrm>
           <a:prstGeom prst="rect">
             <a:avLst/>
@@ -11534,11 +12098,11 @@
           <a:p>
             <a:pPr algn="l">
               <a:spcAft>
-                <a:spcPts val="400"/>
-              </a:spcAft>
-            </a:pPr>
-            <a:r>
-              <a:rPr sz="1400" b="1">
+                <a:spcPts val="300"/>
+              </a:spcAft>
+            </a:pPr>
+            <a:r>
+              <a:rPr sz="1300" b="1">
                 <a:solidFill>
                   <a:srgbClr val="FFFFFF"/>
                 </a:solidFill>
@@ -11560,7 +12124,7 @@
                 </a:solidFill>
                 <a:latin typeface="Calibri"/>
               </a:rPr>
-              <a:t>NameNode · ResourceManager · SecondaryNameNode</a:t>
+              <a:t>NameNode (HDFS)  ·  ResourceManager (YARN)  ·  SecondaryNameNode</a:t>
             </a:r>
           </a:p>
           <a:p>
@@ -11576,21 +12140,21 @@
                 </a:solidFill>
                 <a:latin typeface="Calibri"/>
               </a:rPr>
-              <a:t>Ports : 9870 · 8088 · 9000</a:t>
-            </a:r>
-          </a:p>
-        </p:txBody>
-      </p:sp>
-      <p:sp>
-        <p:nvSpPr>
-          <p:cNvPr id="8" name="Rounded Rectangle 7"/>
+              <a:t>Ports exposés : 9870 (UI HDFS) · 8088 (UI YARN) · 9000 (RPC)</a:t>
+            </a:r>
+          </a:p>
+        </p:txBody>
+      </p:sp>
+      <p:sp>
+        <p:nvSpPr>
+          <p:cNvPr id="9" name="Rounded Rectangle 8"/>
           <p:cNvSpPr/>
           <p:nvPr/>
         </p:nvSpPr>
         <p:spPr>
           <a:xfrm>
-            <a:off x="411480" y="3017520"/>
-            <a:ext cx="2194560" cy="1325880"/>
+            <a:off x="365760" y="3246120"/>
+            <a:ext cx="2194560" cy="1234440"/>
           </a:xfrm>
           <a:prstGeom prst="roundRect">
             <a:avLst>
@@ -11628,14 +12192,14 @@
       </p:sp>
       <p:sp>
         <p:nvSpPr>
-          <p:cNvPr id="9" name="TextBox 8"/>
+          <p:cNvPr id="10" name="TextBox 9"/>
           <p:cNvSpPr txBox="1"/>
           <p:nvPr/>
         </p:nvSpPr>
         <p:spPr>
           <a:xfrm>
-            <a:off x="502920" y="3090672"/>
-            <a:ext cx="2011679" cy="1188720"/>
+            <a:off x="457200" y="3319272"/>
+            <a:ext cx="2011679" cy="1097280"/>
           </a:xfrm>
           <a:prstGeom prst="rect">
             <a:avLst/>
@@ -11650,17 +12214,17 @@
           <a:p>
             <a:pPr algn="l">
               <a:spcAft>
-                <a:spcPts val="400"/>
-              </a:spcAft>
-            </a:pPr>
-            <a:r>
-              <a:rPr sz="1400" b="1">
+                <a:spcPts val="300"/>
+              </a:spcAft>
+            </a:pPr>
+            <a:r>
+              <a:rPr sz="1300" b="1">
                 <a:solidFill>
                   <a:srgbClr val="FFFFFF"/>
                 </a:solidFill>
                 <a:latin typeface="Calibri"/>
               </a:rPr>
-              <a:t>worker1</a:t>
+              <a:t>hadoop-worker1</a:t>
             </a:r>
           </a:p>
           <a:p>
@@ -11676,7 +12240,7 @@
                 </a:solidFill>
                 <a:latin typeface="Calibri"/>
               </a:rPr>
-              <a:t>DataNode</a:t>
+              <a:t>DataNode (stockage)</a:t>
             </a:r>
           </a:p>
           <a:p>
@@ -11692,21 +12256,21 @@
                 </a:solidFill>
                 <a:latin typeface="Calibri"/>
               </a:rPr>
-              <a:t>NodeManager</a:t>
-            </a:r>
-          </a:p>
-        </p:txBody>
-      </p:sp>
-      <p:sp>
-        <p:nvSpPr>
-          <p:cNvPr id="10" name="Rounded Rectangle 9"/>
+              <a:t>NodeManager (jobs)</a:t>
+            </a:r>
+          </a:p>
+        </p:txBody>
+      </p:sp>
+      <p:sp>
+        <p:nvSpPr>
+          <p:cNvPr id="11" name="Rounded Rectangle 10"/>
           <p:cNvSpPr/>
           <p:nvPr/>
         </p:nvSpPr>
         <p:spPr>
           <a:xfrm>
-            <a:off x="2743200" y="3017520"/>
-            <a:ext cx="2194560" cy="1325880"/>
+            <a:off x="2697479" y="3246120"/>
+            <a:ext cx="2194560" cy="1234440"/>
           </a:xfrm>
           <a:prstGeom prst="roundRect">
             <a:avLst>
@@ -11744,14 +12308,14 @@
       </p:sp>
       <p:sp>
         <p:nvSpPr>
-          <p:cNvPr id="11" name="TextBox 10"/>
+          <p:cNvPr id="12" name="TextBox 11"/>
           <p:cNvSpPr txBox="1"/>
           <p:nvPr/>
         </p:nvSpPr>
         <p:spPr>
           <a:xfrm>
-            <a:off x="2834640" y="3090672"/>
-            <a:ext cx="2011679" cy="1188720"/>
+            <a:off x="2788920" y="3319272"/>
+            <a:ext cx="2011679" cy="1097280"/>
           </a:xfrm>
           <a:prstGeom prst="rect">
             <a:avLst/>
@@ -11766,17 +12330,17 @@
           <a:p>
             <a:pPr algn="l">
               <a:spcAft>
-                <a:spcPts val="400"/>
-              </a:spcAft>
-            </a:pPr>
-            <a:r>
-              <a:rPr sz="1400" b="1">
+                <a:spcPts val="300"/>
+              </a:spcAft>
+            </a:pPr>
+            <a:r>
+              <a:rPr sz="1300" b="1">
                 <a:solidFill>
                   <a:srgbClr val="FFFFFF"/>
                 </a:solidFill>
                 <a:latin typeface="Calibri"/>
               </a:rPr>
-              <a:t>worker2</a:t>
+              <a:t>hadoop-worker2</a:t>
             </a:r>
           </a:p>
           <a:p>
@@ -11792,7 +12356,7 @@
                 </a:solidFill>
                 <a:latin typeface="Calibri"/>
               </a:rPr>
-              <a:t>DataNode</a:t>
+              <a:t>DataNode (stockage)</a:t>
             </a:r>
           </a:p>
           <a:p>
@@ -11808,21 +12372,21 @@
                 </a:solidFill>
                 <a:latin typeface="Calibri"/>
               </a:rPr>
-              <a:t>NodeManager</a:t>
-            </a:r>
-          </a:p>
-        </p:txBody>
-      </p:sp>
-      <p:sp>
-        <p:nvSpPr>
-          <p:cNvPr id="12" name="Rounded Rectangle 11"/>
+              <a:t>NodeManager (jobs)</a:t>
+            </a:r>
+          </a:p>
+        </p:txBody>
+      </p:sp>
+      <p:sp>
+        <p:nvSpPr>
+          <p:cNvPr id="13" name="Rounded Rectangle 12"/>
           <p:cNvSpPr/>
           <p:nvPr/>
         </p:nvSpPr>
         <p:spPr>
           <a:xfrm>
-            <a:off x="5074920" y="3017520"/>
-            <a:ext cx="2194560" cy="1325880"/>
+            <a:off x="5029200" y="3246120"/>
+            <a:ext cx="2194560" cy="1234440"/>
           </a:xfrm>
           <a:prstGeom prst="roundRect">
             <a:avLst>
@@ -11860,14 +12424,14 @@
       </p:sp>
       <p:sp>
         <p:nvSpPr>
-          <p:cNvPr id="13" name="TextBox 12"/>
+          <p:cNvPr id="14" name="TextBox 13"/>
           <p:cNvSpPr txBox="1"/>
           <p:nvPr/>
         </p:nvSpPr>
         <p:spPr>
           <a:xfrm>
-            <a:off x="5166359" y="3090672"/>
-            <a:ext cx="2011679" cy="1188720"/>
+            <a:off x="5120640" y="3319272"/>
+            <a:ext cx="2011679" cy="1097280"/>
           </a:xfrm>
           <a:prstGeom prst="rect">
             <a:avLst/>
@@ -11882,17 +12446,17 @@
           <a:p>
             <a:pPr algn="l">
               <a:spcAft>
-                <a:spcPts val="400"/>
-              </a:spcAft>
-            </a:pPr>
-            <a:r>
-              <a:rPr sz="1400" b="1">
+                <a:spcPts val="300"/>
+              </a:spcAft>
+            </a:pPr>
+            <a:r>
+              <a:rPr sz="1300" b="1">
                 <a:solidFill>
                   <a:srgbClr val="FFFFFF"/>
                 </a:solidFill>
                 <a:latin typeface="Calibri"/>
               </a:rPr>
-              <a:t>worker3</a:t>
+              <a:t>hadoop-worker3</a:t>
             </a:r>
           </a:p>
           <a:p>
@@ -11908,7 +12472,7 @@
                 </a:solidFill>
                 <a:latin typeface="Calibri"/>
               </a:rPr>
-              <a:t>DataNode</a:t>
+              <a:t>DataNode (stockage)</a:t>
             </a:r>
           </a:p>
           <a:p>
@@ -11924,21 +12488,21 @@
                 </a:solidFill>
                 <a:latin typeface="Calibri"/>
               </a:rPr>
-              <a:t>NodeManager</a:t>
-            </a:r>
-          </a:p>
-        </p:txBody>
-      </p:sp>
-      <p:sp>
-        <p:nvSpPr>
-          <p:cNvPr id="14" name="Rounded Rectangle 13"/>
+              <a:t>NodeManager (jobs)</a:t>
+            </a:r>
+          </a:p>
+        </p:txBody>
+      </p:sp>
+      <p:sp>
+        <p:nvSpPr>
+          <p:cNvPr id="15" name="Rounded Rectangle 14"/>
           <p:cNvSpPr/>
           <p:nvPr/>
         </p:nvSpPr>
         <p:spPr>
           <a:xfrm>
-            <a:off x="7406640" y="3017520"/>
-            <a:ext cx="2194560" cy="1325880"/>
+            <a:off x="7360919" y="3246120"/>
+            <a:ext cx="2194560" cy="1234440"/>
           </a:xfrm>
           <a:prstGeom prst="roundRect">
             <a:avLst>
@@ -11976,14 +12540,14 @@
       </p:sp>
       <p:sp>
         <p:nvSpPr>
-          <p:cNvPr id="15" name="TextBox 14"/>
+          <p:cNvPr id="16" name="TextBox 15"/>
           <p:cNvSpPr txBox="1"/>
           <p:nvPr/>
         </p:nvSpPr>
         <p:spPr>
           <a:xfrm>
-            <a:off x="7498079" y="3090672"/>
-            <a:ext cx="2011679" cy="1188720"/>
+            <a:off x="7452359" y="3319272"/>
+            <a:ext cx="2011679" cy="1097280"/>
           </a:xfrm>
           <a:prstGeom prst="rect">
             <a:avLst/>
@@ -11998,17 +12562,17 @@
           <a:p>
             <a:pPr algn="l">
               <a:spcAft>
-                <a:spcPts val="400"/>
-              </a:spcAft>
-            </a:pPr>
-            <a:r>
-              <a:rPr sz="1400" b="1">
+                <a:spcPts val="300"/>
+              </a:spcAft>
+            </a:pPr>
+            <a:r>
+              <a:rPr sz="1300" b="1">
                 <a:solidFill>
                   <a:srgbClr val="FFFFFF"/>
                 </a:solidFill>
                 <a:latin typeface="Calibri"/>
               </a:rPr>
-              <a:t>worker4</a:t>
+              <a:t>hadoop-worker4</a:t>
             </a:r>
           </a:p>
           <a:p>
@@ -12024,7 +12588,7 @@
                 </a:solidFill>
                 <a:latin typeface="Calibri"/>
               </a:rPr>
-              <a:t>DataNode</a:t>
+              <a:t>DataNode (stockage)</a:t>
             </a:r>
           </a:p>
           <a:p>
@@ -12040,21 +12604,21 @@
                 </a:solidFill>
                 <a:latin typeface="Calibri"/>
               </a:rPr>
-              <a:t>NodeManager</a:t>
-            </a:r>
-          </a:p>
-        </p:txBody>
-      </p:sp>
-      <p:sp>
-        <p:nvSpPr>
-          <p:cNvPr id="16" name="Rounded Rectangle 15"/>
+              <a:t>NodeManager (jobs)</a:t>
+            </a:r>
+          </a:p>
+        </p:txBody>
+      </p:sp>
+      <p:sp>
+        <p:nvSpPr>
+          <p:cNvPr id="17" name="Rounded Rectangle 16"/>
           <p:cNvSpPr/>
           <p:nvPr/>
         </p:nvSpPr>
         <p:spPr>
           <a:xfrm>
-            <a:off x="9738359" y="3017520"/>
-            <a:ext cx="2194560" cy="1325880"/>
+            <a:off x="9692640" y="3246120"/>
+            <a:ext cx="2194560" cy="1234440"/>
           </a:xfrm>
           <a:prstGeom prst="roundRect">
             <a:avLst>
@@ -12092,14 +12656,14 @@
       </p:sp>
       <p:sp>
         <p:nvSpPr>
-          <p:cNvPr id="17" name="TextBox 16"/>
+          <p:cNvPr id="18" name="TextBox 17"/>
           <p:cNvSpPr txBox="1"/>
           <p:nvPr/>
         </p:nvSpPr>
         <p:spPr>
           <a:xfrm>
-            <a:off x="9829799" y="3090672"/>
-            <a:ext cx="2011679" cy="1188720"/>
+            <a:off x="9784080" y="3319272"/>
+            <a:ext cx="2011679" cy="1097280"/>
           </a:xfrm>
           <a:prstGeom prst="rect">
             <a:avLst/>
@@ -12114,17 +12678,17 @@
           <a:p>
             <a:pPr algn="l">
               <a:spcAft>
-                <a:spcPts val="400"/>
-              </a:spcAft>
-            </a:pPr>
-            <a:r>
-              <a:rPr sz="1400" b="1">
+                <a:spcPts val="300"/>
+              </a:spcAft>
+            </a:pPr>
+            <a:r>
+              <a:rPr sz="1300" b="1">
                 <a:solidFill>
                   <a:srgbClr val="FFFFFF"/>
                 </a:solidFill>
                 <a:latin typeface="Calibri"/>
               </a:rPr>
-              <a:t>worker5</a:t>
+              <a:t>hadoop-worker5</a:t>
             </a:r>
           </a:p>
           <a:p>
@@ -12140,7 +12704,7 @@
                 </a:solidFill>
                 <a:latin typeface="Calibri"/>
               </a:rPr>
-              <a:t>DataNode</a:t>
+              <a:t>DataNode (stockage)</a:t>
             </a:r>
           </a:p>
           <a:p>
@@ -12156,21 +12720,21 @@
                 </a:solidFill>
                 <a:latin typeface="Calibri"/>
               </a:rPr>
-              <a:t>NodeManager</a:t>
-            </a:r>
-          </a:p>
-        </p:txBody>
-      </p:sp>
-      <p:sp>
-        <p:nvSpPr>
-          <p:cNvPr id="18" name="TextBox 17"/>
+              <a:t>NodeManager (jobs)</a:t>
+            </a:r>
+          </a:p>
+        </p:txBody>
+      </p:sp>
+      <p:sp>
+        <p:nvSpPr>
+          <p:cNvPr id="19" name="TextBox 18"/>
           <p:cNvSpPr txBox="1"/>
           <p:nvPr/>
         </p:nvSpPr>
         <p:spPr>
           <a:xfrm>
-            <a:off x="457200" y="4617720"/>
-            <a:ext cx="11155680" cy="1371600"/>
+            <a:off x="365760" y="4709160"/>
+            <a:ext cx="11338560" cy="1280160"/>
           </a:xfrm>
           <a:prstGeom prst="rect">
             <a:avLst/>
@@ -12185,58 +12749,58 @@
           <a:p>
             <a:pPr algn="l">
               <a:spcAft>
-                <a:spcPts val="800"/>
-              </a:spcAft>
-            </a:pPr>
-            <a:r>
-              <a:rPr sz="1500" b="1">
+                <a:spcPts val="600"/>
+              </a:spcAft>
+            </a:pPr>
+            <a:r>
+              <a:rPr sz="1400" b="1">
                 <a:solidFill>
                   <a:srgbClr val="1E293B"/>
                 </a:solidFill>
                 <a:latin typeface="Calibri"/>
               </a:rPr>
-              <a:t>Réseau Docker : hadoop-net     |     Image : leshadoopriders/hadoop-tp-g4:1.0</a:t>
-            </a:r>
-          </a:p>
-          <a:p>
-            <a:pPr algn="l">
-              <a:spcAft>
-                <a:spcPts val="400"/>
-              </a:spcAft>
-            </a:pPr>
-            <a:r>
-              <a:rPr sz="1400" b="0">
+              <a:t>Image Docker : leshadoopriders/hadoop-tp-g4:1.0   (Hadoop 3.3.6)</a:t>
+            </a:r>
+          </a:p>
+          <a:p>
+            <a:pPr algn="l">
+              <a:spcAft>
+                <a:spcPts val="300"/>
+              </a:spcAft>
+            </a:pPr>
+            <a:r>
+              <a:rPr sz="1300" b="0">
                 <a:solidFill>
                   <a:srgbClr val="1D4E89"/>
                 </a:solidFill>
                 <a:latin typeface="Calibri"/>
                 <a:hlinkClick r:id="rId2"/>
               </a:rPr>
-              <a:t>UI HDFS →  localhost:9870</a:t>
-            </a:r>
-          </a:p>
-          <a:p>
-            <a:pPr algn="l">
-              <a:spcAft>
-                <a:spcPts val="600"/>
-              </a:spcAft>
-            </a:pPr>
-            <a:r>
-              <a:rPr sz="1400" b="0">
+              <a:t>UI HDFS → http://localhost:9870</a:t>
+            </a:r>
+          </a:p>
+          <a:p>
+            <a:pPr algn="l">
+              <a:spcAft>
+                <a:spcPts val="500"/>
+              </a:spcAft>
+            </a:pPr>
+            <a:r>
+              <a:rPr sz="1300" b="0">
                 <a:solidFill>
                   <a:srgbClr val="1D4E89"/>
                 </a:solidFill>
                 <a:latin typeface="Calibri"/>
                 <a:hlinkClick r:id="rId3"/>
               </a:rPr>
-              <a:t>UI YARN →  localhost:8088</a:t>
-            </a:r>
-          </a:p>
-        </p:txBody>
-      </p:sp>
-      <p:sp>
-        <p:nvSpPr>
-          <p:cNvPr id="19" name="Rectangle 18"/>
+              <a:t>UI YARN → http://localhost:8088</a:t>
+            </a:r>
+          </a:p>
+        </p:txBody>
+      </p:sp>
+      <p:sp>
+        <p:nvSpPr>
+          <p:cNvPr id="20" name="Rectangle 19"/>
           <p:cNvSpPr/>
           <p:nvPr/>
         </p:nvSpPr>
@@ -12279,7 +12843,7 @@
       </p:sp>
       <p:sp>
         <p:nvSpPr>
-          <p:cNvPr id="20" name="TextBox 19"/>
+          <p:cNvPr id="21" name="TextBox 20"/>
           <p:cNvSpPr txBox="1"/>
           <p:nvPr/>
         </p:nvSpPr>
@@ -12313,7 +12877,7 @@
       </p:sp>
       <p:sp>
         <p:nvSpPr>
-          <p:cNvPr id="21" name="TextBox 20"/>
+          <p:cNvPr id="22" name="TextBox 21"/>
           <p:cNvSpPr txBox="1"/>
           <p:nvPr/>
         </p:nvSpPr>
@@ -12516,13 +13080,13 @@
           <a:lstStyle/>
           <a:p>
             <a:r>
-              <a:rPr sz="2600" b="1">
+              <a:rPr sz="2400" b="1">
                 <a:solidFill>
                   <a:srgbClr val="FFFFFF"/>
                 </a:solidFill>
                 <a:latin typeface="Calibri"/>
               </a:rPr>
-              <a:t>Déploiement + publication Docker Hub</a:t>
+              <a:t>Déploiement du cluster et publication Hub</a:t>
             </a:r>
           </a:p>
         </p:txBody>
@@ -12535,8 +13099,8 @@
         </p:nvSpPr>
         <p:spPr>
           <a:xfrm>
-            <a:off x="411480" y="1188720"/>
-            <a:ext cx="5303520" cy="3474720"/>
+            <a:off x="365760" y="1097280"/>
+            <a:ext cx="5486400" cy="4846320"/>
           </a:xfrm>
           <a:prstGeom prst="rect">
             <a:avLst/>
@@ -12551,81 +13115,145 @@
           <a:p>
             <a:pPr algn="l">
               <a:spcAft>
+                <a:spcPts val="800"/>
+              </a:spcAft>
+            </a:pPr>
+            <a:r>
+              <a:rPr sz="1600" b="1">
+                <a:solidFill>
+                  <a:srgbClr val="0F5C4C"/>
+                </a:solidFill>
+                <a:latin typeface="Calibri"/>
+              </a:rPr>
+              <a:t>Mise en route</a:t>
+            </a:r>
+          </a:p>
+          <a:p>
+            <a:pPr algn="l">
+              <a:spcAft>
+                <a:spcPts val="500"/>
+              </a:spcAft>
+            </a:pPr>
+            <a:r>
+              <a:rPr sz="1400" b="0">
+                <a:solidFill>
+                  <a:srgbClr val="1E293B"/>
+                </a:solidFill>
+                <a:latin typeface="Calibri"/>
+              </a:rPr>
+              <a:t>1. docker compose up --build -d</a:t>
+            </a:r>
+          </a:p>
+          <a:p>
+            <a:pPr algn="l">
+              <a:spcAft>
+                <a:spcPts val="800"/>
+              </a:spcAft>
+            </a:pPr>
+            <a:r>
+              <a:rPr sz="1200" b="0">
+                <a:solidFill>
+                  <a:srgbClr val="64748B"/>
+                </a:solidFill>
+                <a:latin typeface="Calibri"/>
+              </a:rPr>
+              <a:t>   → build local + démarrage des 6 services</a:t>
+            </a:r>
+          </a:p>
+          <a:p>
+            <a:pPr algn="l">
+              <a:spcAft>
+                <a:spcPts val="500"/>
+              </a:spcAft>
+            </a:pPr>
+            <a:r>
+              <a:rPr sz="1400" b="0">
+                <a:solidFill>
+                  <a:srgbClr val="1E293B"/>
+                </a:solidFill>
+                <a:latin typeface="Calibri"/>
+              </a:rPr>
+              <a:t>2. docker ps</a:t>
+            </a:r>
+          </a:p>
+          <a:p>
+            <a:pPr algn="l">
+              <a:spcAft>
+                <a:spcPts val="800"/>
+              </a:spcAft>
+            </a:pPr>
+            <a:r>
+              <a:rPr sz="1200" b="0">
+                <a:solidFill>
+                  <a:srgbClr val="64748B"/>
+                </a:solidFill>
+                <a:latin typeface="Calibri"/>
+              </a:rPr>
+              <a:t>   → vérifier master + worker1…5</a:t>
+            </a:r>
+          </a:p>
+          <a:p>
+            <a:pPr algn="l">
+              <a:spcAft>
+                <a:spcPts val="500"/>
+              </a:spcAft>
+            </a:pPr>
+            <a:r>
+              <a:rPr sz="1400" b="0">
+                <a:solidFill>
+                  <a:srgbClr val="1E293B"/>
+                </a:solidFill>
+                <a:latin typeface="Calibri"/>
+              </a:rPr>
+              <a:t>3. hdfs dfsadmin -report</a:t>
+            </a:r>
+          </a:p>
+          <a:p>
+            <a:pPr algn="l">
+              <a:spcAft>
                 <a:spcPts val="1000"/>
               </a:spcAft>
             </a:pPr>
             <a:r>
-              <a:rPr sz="1800" b="1">
+              <a:rPr sz="1200" b="0">
+                <a:solidFill>
+                  <a:srgbClr val="15803D"/>
+                </a:solidFill>
+                <a:latin typeface="Calibri"/>
+              </a:rPr>
+              <a:t>   → Live datanodes (5) = cluster OK</a:t>
+            </a:r>
+          </a:p>
+          <a:p>
+            <a:pPr algn="l">
+              <a:spcAft>
+                <a:spcPts val="800"/>
+              </a:spcAft>
+            </a:pPr>
+            <a:r>
+              <a:rPr sz="1600" b="1">
                 <a:solidFill>
                   <a:srgbClr val="0F5C4C"/>
                 </a:solidFill>
                 <a:latin typeface="Calibri"/>
               </a:rPr>
-              <a:t>Commandes clés</a:t>
-            </a:r>
-          </a:p>
-          <a:p>
-            <a:pPr algn="l">
-              <a:spcAft>
-                <a:spcPts val="800"/>
-              </a:spcAft>
-            </a:pPr>
-            <a:r>
-              <a:rPr sz="1500" b="0">
+              <a:t>Publication</a:t>
+            </a:r>
+          </a:p>
+          <a:p>
+            <a:pPr algn="l">
+              <a:spcAft>
+                <a:spcPts val="600"/>
+              </a:spcAft>
+            </a:pPr>
+            <a:r>
+              <a:rPr sz="1300" b="0">
                 <a:solidFill>
                   <a:srgbClr val="1E293B"/>
                 </a:solidFill>
                 <a:latin typeface="Calibri"/>
               </a:rPr>
-              <a:t>docker compose up --build -d</a:t>
-            </a:r>
-          </a:p>
-          <a:p>
-            <a:pPr algn="l">
-              <a:spcAft>
-                <a:spcPts val="800"/>
-              </a:spcAft>
-            </a:pPr>
-            <a:r>
-              <a:rPr sz="1500" b="0">
-                <a:solidFill>
-                  <a:srgbClr val="1E293B"/>
-                </a:solidFill>
-                <a:latin typeface="Calibri"/>
-              </a:rPr>
-              <a:t>docker ps   →  6 conteneurs</a:t>
-            </a:r>
-          </a:p>
-          <a:p>
-            <a:pPr algn="l">
-              <a:spcAft>
-                <a:spcPts val="800"/>
-              </a:spcAft>
-            </a:pPr>
-            <a:r>
-              <a:rPr sz="1500" b="0">
-                <a:solidFill>
-                  <a:srgbClr val="1E293B"/>
-                </a:solidFill>
-                <a:latin typeface="Calibri"/>
-              </a:rPr>
-              <a:t>hdfs dfsadmin -report</a:t>
-            </a:r>
-          </a:p>
-          <a:p>
-            <a:pPr algn="l">
-              <a:spcAft>
-                <a:spcPts val="1200"/>
-              </a:spcAft>
-            </a:pPr>
-            <a:r>
-              <a:rPr sz="1500" b="1">
-                <a:solidFill>
-                  <a:srgbClr val="15803D"/>
-                </a:solidFill>
-                <a:latin typeface="Calibri"/>
-              </a:rPr>
-              <a:t>→ Live datanodes (5)</a:t>
+              <a:t>docker push leshadoopriders/hadoop-tp-g4:1.0</a:t>
             </a:r>
           </a:p>
           <a:p>
@@ -12635,13 +13263,13 @@
               </a:spcAft>
             </a:pPr>
             <a:r>
-              <a:rPr sz="1500" b="0">
-                <a:solidFill>
-                  <a:srgbClr val="1E293B"/>
-                </a:solidFill>
-                <a:latin typeface="Calibri"/>
-              </a:rPr>
-              <a:t>docker push …/hadoop-tp-g4:1.0</a:t>
+              <a:rPr sz="1200" b="0">
+                <a:solidFill>
+                  <a:srgbClr val="64748B"/>
+                </a:solidFill>
+                <a:latin typeface="Calibri"/>
+              </a:rPr>
+              <a:t>Docker Hub impose les minuscules (g4, pas G4).</a:t>
             </a:r>
           </a:p>
           <a:p>
@@ -12651,31 +13279,31 @@
               </a:spcAft>
             </a:pPr>
             <a:r>
-              <a:rPr sz="1400" b="1">
+              <a:rPr sz="1300" b="1">
                 <a:solidFill>
                   <a:srgbClr val="1D4E89"/>
                 </a:solidFill>
                 <a:latin typeface="Calibri"/>
                 <a:hlinkClick r:id="rId2"/>
               </a:rPr>
-              <a:t>Ouvrir Docker Hub →</a:t>
-            </a:r>
-          </a:p>
-          <a:p>
-            <a:pPr algn="l">
-              <a:spcAft>
-                <a:spcPts val="600"/>
-              </a:spcAft>
-            </a:pPr>
-            <a:r>
-              <a:rPr sz="1400" b="1">
+              <a:t>Page Docker Hub →</a:t>
+            </a:r>
+          </a:p>
+          <a:p>
+            <a:pPr algn="l">
+              <a:spcAft>
+                <a:spcPts val="500"/>
+              </a:spcAft>
+            </a:pPr>
+            <a:r>
+              <a:rPr sz="1300" b="1">
                 <a:solidFill>
                   <a:srgbClr val="1D4E89"/>
                 </a:solidFill>
                 <a:latin typeface="Calibri"/>
                 <a:hlinkClick r:id="rId3"/>
               </a:rPr>
-              <a:t>Ouvrir GitHub →</a:t>
+              <a:t>Dépôt GitHub →</a:t>
             </a:r>
           </a:p>
         </p:txBody>
@@ -12696,8 +13324,8 @@
         </p:blipFill>
         <p:spPr>
           <a:xfrm>
-            <a:off x="5852160" y="1143000"/>
-            <a:ext cx="5943600" cy="3807619"/>
+            <a:off x="6035040" y="1143000"/>
+            <a:ext cx="5760720" cy="3690461"/>
           </a:xfrm>
           <a:prstGeom prst="rect">
             <a:avLst/>
@@ -12712,8 +13340,8 @@
         </p:nvSpPr>
         <p:spPr>
           <a:xfrm>
-            <a:off x="5852160" y="4617720"/>
-            <a:ext cx="5943600" cy="274320"/>
+            <a:off x="6035040" y="4434840"/>
+            <a:ext cx="5760720" cy="256032"/>
           </a:xfrm>
           <a:prstGeom prst="rect">
             <a:avLst/>
@@ -12728,7 +13356,7 @@
           <a:p>
             <a:pPr algn="l">
               <a:spcAft>
-                <a:spcPts val="600"/>
+                <a:spcPts val="500"/>
               </a:spcAft>
             </a:pPr>
             <a:r>
@@ -12738,7 +13366,7 @@
                 </a:solidFill>
                 <a:latin typeface="Calibri"/>
               </a:rPr>
-              <a:t>Terminal — docker ps / dfsadmin</a:t>
+              <a:t>Terminal : docker ps / dfsadmin -report</a:t>
             </a:r>
           </a:p>
         </p:txBody>
@@ -12759,8 +13387,8 @@
         </p:blipFill>
         <p:spPr>
           <a:xfrm>
-            <a:off x="5852160" y="4892040"/>
-            <a:ext cx="1792224" cy="1280160"/>
+            <a:off x="6035040" y="4709160"/>
+            <a:ext cx="1984248" cy="1417320"/>
           </a:xfrm>
           <a:prstGeom prst="rect">
             <a:avLst/>
@@ -13049,13 +13677,13 @@
           <a:lstStyle/>
           <a:p>
             <a:r>
-              <a:rPr sz="2600" b="1">
+              <a:rPr sz="2400" b="1">
                 <a:solidFill>
                   <a:srgbClr val="FFFFFF"/>
                 </a:solidFill>
                 <a:latin typeface="Calibri"/>
               </a:rPr>
-              <a:t>Manipulations HDFS — /data/ventes/2026</a:t>
+              <a:t>Manipulations HDFS — dossier /data/ventes/2026</a:t>
             </a:r>
           </a:p>
         </p:txBody>
@@ -13068,8 +13696,8 @@
         </p:nvSpPr>
         <p:spPr>
           <a:xfrm>
-            <a:off x="365760" y="1143000"/>
-            <a:ext cx="5120640" cy="4754880"/>
+            <a:off x="320040" y="1078992"/>
+            <a:ext cx="5394960" cy="4937760"/>
           </a:xfrm>
           <a:prstGeom prst="rect">
             <a:avLst/>
@@ -13088,13 +13716,29 @@
               </a:spcAft>
             </a:pPr>
             <a:r>
-              <a:rPr sz="1700" b="1">
+              <a:rPr sz="1300" b="0">
+                <a:solidFill>
+                  <a:srgbClr val="64748B"/>
+                </a:solidFill>
+                <a:latin typeface="Calibri"/>
+              </a:rPr>
+              <a:t>Scénario : données de ventes e-commerce (CSV).</a:t>
+            </a:r>
+          </a:p>
+          <a:p>
+            <a:pPr algn="l">
+              <a:spcAft>
+                <a:spcPts val="300"/>
+              </a:spcAft>
+            </a:pPr>
+            <a:r>
+              <a:rPr sz="1400" b="1">
                 <a:solidFill>
                   <a:srgbClr val="0F5C4C"/>
                 </a:solidFill>
                 <a:latin typeface="Calibri"/>
               </a:rPr>
-              <a:t>Étapes réalisées</a:t>
+              <a:t>1. Création du dossier + droits</a:t>
             </a:r>
           </a:p>
           <a:p>
@@ -13104,13 +13748,29 @@
               </a:spcAft>
             </a:pPr>
             <a:r>
-              <a:rPr sz="1500" b="0">
+              <a:rPr sz="1200" b="0">
                 <a:solidFill>
                   <a:srgbClr val="1E293B"/>
                 </a:solidFill>
                 <a:latin typeface="Calibri"/>
               </a:rPr>
-              <a:t>1. mkdir + chmod + put (CSV)</a:t>
+              <a:t>mkdir -p /data/ventes/2026  puis chmod 755</a:t>
+            </a:r>
+          </a:p>
+          <a:p>
+            <a:pPr algn="l">
+              <a:spcAft>
+                <a:spcPts val="300"/>
+              </a:spcAft>
+            </a:pPr>
+            <a:r>
+              <a:rPr sz="1400" b="1">
+                <a:solidFill>
+                  <a:srgbClr val="0F5C4C"/>
+                </a:solidFill>
+                <a:latin typeface="Calibri"/>
+              </a:rPr>
+              <a:t>2. Upload du fichier</a:t>
             </a:r>
           </a:p>
           <a:p>
@@ -13120,13 +13780,29 @@
               </a:spcAft>
             </a:pPr>
             <a:r>
-              <a:rPr sz="1500" b="0">
+              <a:rPr sz="1200" b="0">
                 <a:solidFill>
                   <a:srgbClr val="1E293B"/>
                 </a:solidFill>
                 <a:latin typeface="Calibri"/>
               </a:rPr>
-              <a:t>2. fsck / stat → HEALTHY, rep=3</a:t>
+              <a:t>put transactions.csv  + chmod 644</a:t>
+            </a:r>
+          </a:p>
+          <a:p>
+            <a:pPr algn="l">
+              <a:spcAft>
+                <a:spcPts val="300"/>
+              </a:spcAft>
+            </a:pPr>
+            <a:r>
+              <a:rPr sz="1400" b="1">
+                <a:solidFill>
+                  <a:srgbClr val="0F5C4C"/>
+                </a:solidFill>
+                <a:latin typeface="Calibri"/>
+              </a:rPr>
+              <a:t>3. Vérification des blocs</a:t>
             </a:r>
           </a:p>
           <a:p>
@@ -13136,13 +13812,29 @@
               </a:spcAft>
             </a:pPr>
             <a:r>
-              <a:rPr sz="1500" b="0">
+              <a:rPr sz="1200" b="0">
                 <a:solidFill>
                   <a:srgbClr val="1E293B"/>
                 </a:solidFill>
                 <a:latin typeface="Calibri"/>
               </a:rPr>
-              <a:t>3. cat | head (5 lignes)</a:t>
+              <a:t>fsck + stat → HEALTHY, 1 bloc, réplication 3</a:t>
+            </a:r>
+          </a:p>
+          <a:p>
+            <a:pPr algn="l">
+              <a:spcAft>
+                <a:spcPts val="300"/>
+              </a:spcAft>
+            </a:pPr>
+            <a:r>
+              <a:rPr sz="1400" b="1">
+                <a:solidFill>
+                  <a:srgbClr val="0F5C4C"/>
+                </a:solidFill>
+                <a:latin typeface="Calibri"/>
+              </a:rPr>
+              <a:t>4. Lecture et fusion</a:t>
             </a:r>
           </a:p>
           <a:p>
@@ -13152,61 +13844,45 @@
               </a:spcAft>
             </a:pPr>
             <a:r>
-              <a:rPr sz="1500" b="0">
+              <a:rPr sz="1200" b="0">
                 <a:solidFill>
                   <a:srgbClr val="1E293B"/>
                 </a:solidFill>
                 <a:latin typeface="Calibri"/>
               </a:rPr>
-              <a:t>4. getmerge (2 fichiers)</a:t>
-            </a:r>
-          </a:p>
-          <a:p>
-            <a:pPr algn="l">
-              <a:spcAft>
-                <a:spcPts val="700"/>
-              </a:spcAft>
-            </a:pPr>
-            <a:r>
-              <a:rPr sz="1500" b="0">
-                <a:solidFill>
-                  <a:srgbClr val="1E293B"/>
-                </a:solidFill>
-                <a:latin typeface="Calibri"/>
-              </a:rPr>
-              <a:t>5. rm + Trash</a:t>
-            </a:r>
-          </a:p>
-          <a:p>
-            <a:pPr algn="l">
-              <a:spcAft>
-                <a:spcPts val="1200"/>
-              </a:spcAft>
-            </a:pPr>
-            <a:r>
-              <a:rPr sz="1500" b="1">
+              <a:t>cat | head  puis  getmerge de 2 CSV</a:t>
+            </a:r>
+          </a:p>
+          <a:p>
+            <a:pPr algn="l">
+              <a:spcAft>
+                <a:spcPts val="300"/>
+              </a:spcAft>
+            </a:pPr>
+            <a:r>
+              <a:rPr sz="1400" b="1">
+                <a:solidFill>
+                  <a:srgbClr val="0F5C4C"/>
+                </a:solidFill>
+                <a:latin typeface="Calibri"/>
+              </a:rPr>
+              <a:t>5. Corbeille + setrep</a:t>
+            </a:r>
+          </a:p>
+          <a:p>
+            <a:pPr algn="l">
+              <a:spcAft>
+                <a:spcPts val="500"/>
+              </a:spcAft>
+            </a:pPr>
+            <a:r>
+              <a:rPr sz="1200" b="0">
                 <a:solidFill>
                   <a:srgbClr val="15803D"/>
                 </a:solidFill>
                 <a:latin typeface="Calibri"/>
               </a:rPr>
-              <a:t>6. setrep -w 2 → réplication 2</a:t>
-            </a:r>
-          </a:p>
-          <a:p>
-            <a:pPr algn="l">
-              <a:spcAft>
-                <a:spcPts val="600"/>
-              </a:spcAft>
-            </a:pPr>
-            <a:r>
-              <a:rPr sz="1300" b="0">
-                <a:solidFill>
-                  <a:srgbClr val="64748B"/>
-                </a:solidFill>
-                <a:latin typeface="Calibri"/>
-              </a:rPr>
-              <a:t>Fichier petit = 1 bloc (128 Mo)</a:t>
+              <a:t>rm vers .Trash  ;  setrep -w 2 → réplication 2</a:t>
             </a:r>
           </a:p>
         </p:txBody>
@@ -13227,8 +13903,8 @@
         </p:blipFill>
         <p:spPr>
           <a:xfrm>
-            <a:off x="5669280" y="1188720"/>
-            <a:ext cx="6126480" cy="3924776"/>
+            <a:off x="5852160" y="1143000"/>
+            <a:ext cx="5943600" cy="3807619"/>
           </a:xfrm>
           <a:prstGeom prst="rect">
             <a:avLst/>
@@ -13243,8 +13919,8 @@
         </p:nvSpPr>
         <p:spPr>
           <a:xfrm>
-            <a:off x="5669280" y="4709160"/>
-            <a:ext cx="6126480" cy="274320"/>
+            <a:off x="5852160" y="4892040"/>
+            <a:ext cx="5943600" cy="256032"/>
           </a:xfrm>
           <a:prstGeom prst="rect">
             <a:avLst/>
@@ -13259,7 +13935,7 @@
           <a:p>
             <a:pPr algn="l">
               <a:spcAft>
-                <a:spcPts val="600"/>
+                <a:spcPts val="500"/>
               </a:spcAft>
             </a:pPr>
             <a:r>
@@ -13269,14 +13945,53 @@
                 </a:solidFill>
                 <a:latin typeface="Calibri"/>
               </a:rPr>
-              <a:t>Terminal — commandes HDFS</a:t>
-            </a:r>
-          </a:p>
-        </p:txBody>
-      </p:sp>
-      <p:sp>
-        <p:nvSpPr>
-          <p:cNvPr id="9" name="Rectangle 8"/>
+              <a:t>Capture terminal — commandes HDFS réellement exécutées</a:t>
+            </a:r>
+          </a:p>
+        </p:txBody>
+      </p:sp>
+      <p:sp>
+        <p:nvSpPr>
+          <p:cNvPr id="9" name="TextBox 8"/>
+          <p:cNvSpPr txBox="1"/>
+          <p:nvPr/>
+        </p:nvSpPr>
+        <p:spPr>
+          <a:xfrm>
+            <a:off x="5852160" y="5166360"/>
+            <a:ext cx="5943600" cy="822960"/>
+          </a:xfrm>
+          <a:prstGeom prst="rect">
+            <a:avLst/>
+          </a:prstGeom>
+          <a:noFill/>
+        </p:spPr>
+        <p:txBody>
+          <a:bodyPr wrap="square">
+            <a:spAutoFit/>
+          </a:bodyPr>
+          <a:lstStyle/>
+          <a:p>
+            <a:pPr algn="l">
+              <a:spcAft>
+                <a:spcPts val="500"/>
+              </a:spcAft>
+            </a:pPr>
+            <a:r>
+              <a:rPr sz="1200" b="0">
+                <a:solidFill>
+                  <a:srgbClr val="64748B"/>
+                </a:solidFill>
+                <a:latin typeface="Calibri"/>
+              </a:rPr>
+              <a:t>Note : fichier petit (377 o) → 1 seul bloc. Normal avec une taille de bloc de 128 Mo.</a:t>
+            </a:r>
+          </a:p>
+        </p:txBody>
+      </p:sp>
+      <p:sp>
+        <p:nvSpPr>
+          <p:cNvPr id="10" name="Rectangle 9"/>
           <p:cNvSpPr/>
           <p:nvPr/>
         </p:nvSpPr>
@@ -13319,7 +14034,7 @@
       </p:sp>
       <p:sp>
         <p:nvSpPr>
-          <p:cNvPr id="10" name="TextBox 9"/>
+          <p:cNvPr id="11" name="TextBox 10"/>
           <p:cNvSpPr txBox="1"/>
           <p:nvPr/>
         </p:nvSpPr>
@@ -13353,7 +14068,7 @@
       </p:sp>
       <p:sp>
         <p:nvSpPr>
-          <p:cNvPr id="11" name="TextBox 10"/>
+          <p:cNvPr id="12" name="TextBox 11"/>
           <p:cNvSpPr txBox="1"/>
           <p:nvPr/>
         </p:nvSpPr>
@@ -13556,13 +14271,13 @@
           <a:lstStyle/>
           <a:p>
             <a:r>
-              <a:rPr sz="2600" b="1">
+              <a:rPr sz="2400" b="1">
                 <a:solidFill>
                   <a:srgbClr val="FFFFFF"/>
                 </a:solidFill>
                 <a:latin typeface="Calibri"/>
               </a:rPr>
-              <a:t>Job YARN — calcul de π (SUCCEEDED)</a:t>
+              <a:t>Job YARN : calcul de π (exemple MapReduce)</a:t>
             </a:r>
           </a:p>
         </p:txBody>
@@ -13575,8 +14290,8 @@
         </p:nvSpPr>
         <p:spPr>
           <a:xfrm>
-            <a:off x="365760" y="1143000"/>
-            <a:ext cx="5029200" cy="4114800"/>
+            <a:off x="320040" y="1078992"/>
+            <a:ext cx="5303520" cy="4937760"/>
           </a:xfrm>
           <a:prstGeom prst="rect">
             <a:avLst/>
@@ -13591,115 +14306,194 @@
           <a:p>
             <a:pPr algn="l">
               <a:spcAft>
+                <a:spcPts val="800"/>
+              </a:spcAft>
+            </a:pPr>
+            <a:r>
+              <a:rPr sz="1300" b="0">
+                <a:solidFill>
+                  <a:srgbClr val="64748B"/>
+                </a:solidFill>
+                <a:latin typeface="Calibri"/>
+              </a:rPr>
+              <a:t>Nous avons lancé l’exemple officiel Hadoop (Monte Carlo)</a:t>
+            </a:r>
+          </a:p>
+          <a:p>
+            <a:pPr algn="l">
+              <a:spcAft>
+                <a:spcPts val="400"/>
+              </a:spcAft>
+            </a:pPr>
+            <a:r>
+              <a:rPr sz="1400" b="1">
+                <a:solidFill>
+                  <a:srgbClr val="0F5C4C"/>
+                </a:solidFill>
+                <a:latin typeface="Calibri"/>
+              </a:rPr>
+              <a:t>Commande</a:t>
+            </a:r>
+          </a:p>
+          <a:p>
+            <a:pPr algn="l">
+              <a:spcAft>
+                <a:spcPts val="400"/>
+              </a:spcAft>
+            </a:pPr>
+            <a:r>
+              <a:rPr sz="1200" b="0">
+                <a:solidFill>
+                  <a:srgbClr val="1E293B"/>
+                </a:solidFill>
+                <a:latin typeface="Calibri"/>
+              </a:rPr>
+              <a:t>yarn jar …/hadoop-mapreduce-examples-3.3.6.jar pi 4 1000</a:t>
+            </a:r>
+          </a:p>
+          <a:p>
+            <a:pPr algn="l">
+              <a:spcAft>
                 <a:spcPts val="1000"/>
               </a:spcAft>
             </a:pPr>
             <a:r>
+              <a:rPr sz="1200" b="0">
+                <a:solidFill>
+                  <a:srgbClr val="64748B"/>
+                </a:solidFill>
+                <a:latin typeface="Calibri"/>
+              </a:rPr>
+              <a:t>→ 4 maps, 1000 samples par map</a:t>
+            </a:r>
+          </a:p>
+          <a:p>
+            <a:pPr algn="l">
+              <a:spcAft>
+                <a:spcPts val="600"/>
+              </a:spcAft>
+            </a:pPr>
+            <a:r>
+              <a:rPr sz="1400" b="1">
+                <a:solidFill>
+                  <a:srgbClr val="0F5C4C"/>
+                </a:solidFill>
+                <a:latin typeface="Calibri"/>
+              </a:rPr>
+              <a:t>Résultat obtenu</a:t>
+            </a:r>
+          </a:p>
+          <a:p>
+            <a:pPr algn="l">
+              <a:spcAft>
+                <a:spcPts val="500"/>
+              </a:spcAft>
+            </a:pPr>
+            <a:r>
+              <a:rPr sz="1300" b="0">
+                <a:solidFill>
+                  <a:srgbClr val="1E293B"/>
+                </a:solidFill>
+                <a:latin typeface="Calibri"/>
+              </a:rPr>
+              <a:t>Application : application_1791039798429_0001</a:t>
+            </a:r>
+          </a:p>
+          <a:p>
+            <a:pPr algn="l">
+              <a:spcAft>
+                <a:spcPts val="500"/>
+              </a:spcAft>
+            </a:pPr>
+            <a:r>
+              <a:rPr sz="1300" b="0">
+                <a:solidFill>
+                  <a:srgbClr val="1E293B"/>
+                </a:solidFill>
+                <a:latin typeface="Calibri"/>
+              </a:rPr>
+              <a:t>Nom : QuasiMonteCarlo</a:t>
+            </a:r>
+          </a:p>
+          <a:p>
+            <a:pPr algn="l">
+              <a:spcAft>
+                <a:spcPts val="500"/>
+              </a:spcAft>
+            </a:pPr>
+            <a:r>
+              <a:rPr sz="1600" b="1">
+                <a:solidFill>
+                  <a:srgbClr val="15803D"/>
+                </a:solidFill>
+                <a:latin typeface="Calibri"/>
+              </a:rPr>
+              <a:t>État final : SUCCEEDED</a:t>
+            </a:r>
+          </a:p>
+          <a:p>
+            <a:pPr algn="l">
+              <a:spcAft>
+                <a:spcPts val="1000"/>
+              </a:spcAft>
+            </a:pPr>
+            <a:r>
               <a:rPr sz="1500" b="1">
                 <a:solidFill>
-                  <a:srgbClr val="0F5C4C"/>
-                </a:solidFill>
-                <a:latin typeface="Calibri"/>
-              </a:rPr>
-              <a:t>yarn jar … examples … pi 4 1000</a:t>
-            </a:r>
-          </a:p>
-          <a:p>
-            <a:pPr algn="l">
-              <a:spcAft>
-                <a:spcPts val="700"/>
-              </a:spcAft>
-            </a:pPr>
-            <a:r>
-              <a:rPr sz="1500" b="0">
-                <a:solidFill>
                   <a:srgbClr val="1E293B"/>
                 </a:solidFill>
                 <a:latin typeface="Calibri"/>
               </a:rPr>
-              <a:t>App : application_…_0001</a:t>
-            </a:r>
-          </a:p>
-          <a:p>
-            <a:pPr algn="l">
-              <a:spcAft>
-                <a:spcPts val="700"/>
-              </a:spcAft>
-            </a:pPr>
-            <a:r>
-              <a:rPr sz="1500" b="0">
+              <a:t>Estimation : π ≈ 3.14</a:t>
+            </a:r>
+          </a:p>
+          <a:p>
+            <a:pPr algn="l">
+              <a:spcAft>
+                <a:spcPts val="300"/>
+              </a:spcAft>
+            </a:pPr>
+            <a:r>
+              <a:rPr sz="1200" b="0">
                 <a:solidFill>
                   <a:srgbClr val="1E293B"/>
                 </a:solidFill>
                 <a:latin typeface="Calibri"/>
               </a:rPr>
-              <a:t>Nom : QuasiMonteCarlo</a:t>
-            </a:r>
-          </a:p>
-          <a:p>
-            <a:pPr algn="l">
-              <a:spcAft>
-                <a:spcPts val="700"/>
-              </a:spcAft>
-            </a:pPr>
-            <a:r>
-              <a:rPr sz="1800" b="1">
-                <a:solidFill>
-                  <a:srgbClr val="15803D"/>
-                </a:solidFill>
-                <a:latin typeface="Calibri"/>
-              </a:rPr>
-              <a:t>État : SUCCEEDED</a:t>
-            </a:r>
-          </a:p>
-          <a:p>
-            <a:pPr algn="l">
-              <a:spcAft>
-                <a:spcPts val="1200"/>
-              </a:spcAft>
-            </a:pPr>
-            <a:r>
-              <a:rPr sz="1800" b="1">
+              <a:t>Cela prouve que YARN alloue bien des ressources</a:t>
+            </a:r>
+          </a:p>
+          <a:p>
+            <a:pPr algn="l">
+              <a:spcAft>
+                <a:spcPts val="800"/>
+              </a:spcAft>
+            </a:pPr>
+            <a:r>
+              <a:rPr sz="1200" b="0">
                 <a:solidFill>
                   <a:srgbClr val="1E293B"/>
                 </a:solidFill>
                 <a:latin typeface="Calibri"/>
               </a:rPr>
-              <a:t>π ≈ 3.14</a:t>
-            </a:r>
-          </a:p>
-          <a:p>
-            <a:pPr algn="l">
-              <a:spcAft>
-                <a:spcPts val="400"/>
-              </a:spcAft>
-            </a:pPr>
-            <a:r>
-              <a:rPr sz="1400" b="1">
+              <a:t>et que les NodeManagers exécutent le job.</a:t>
+            </a:r>
+          </a:p>
+          <a:p>
+            <a:pPr algn="l">
+              <a:spcAft>
+                <a:spcPts val="500"/>
+              </a:spcAft>
+            </a:pPr>
+            <a:r>
+              <a:rPr sz="1300" b="1">
                 <a:solidFill>
                   <a:srgbClr val="1D4E89"/>
                 </a:solidFill>
                 <a:latin typeface="Calibri"/>
                 <a:hlinkClick r:id="rId2"/>
               </a:rPr>
-              <a:t>UI YARN →</a:t>
-            </a:r>
-          </a:p>
-          <a:p>
-            <a:pPr algn="l">
-              <a:spcAft>
-                <a:spcPts val="600"/>
-              </a:spcAft>
-            </a:pPr>
-            <a:r>
-              <a:rPr sz="1400" b="1">
-                <a:solidFill>
-                  <a:srgbClr val="1D4E89"/>
-                </a:solidFill>
-                <a:latin typeface="Calibri"/>
-                <a:hlinkClick r:id="rId2"/>
-              </a:rPr>
-              <a:t>Détail application →</a:t>
+              <a:t>Ouvrir UI YARN →</a:t>
             </a:r>
           </a:p>
         </p:txBody>
@@ -13720,8 +14514,8 @@
         </p:blipFill>
         <p:spPr>
           <a:xfrm>
-            <a:off x="5577840" y="1143000"/>
-            <a:ext cx="6217920" cy="4441371"/>
+            <a:off x="5760720" y="1097280"/>
+            <a:ext cx="6035040" cy="4310743"/>
           </a:xfrm>
           <a:prstGeom prst="rect">
             <a:avLst/>
@@ -13736,8 +14530,8 @@
         </p:nvSpPr>
         <p:spPr>
           <a:xfrm>
-            <a:off x="5577840" y="4434840"/>
-            <a:ext cx="6217920" cy="274320"/>
+            <a:off x="5760720" y="4297680"/>
+            <a:ext cx="6035040" cy="256032"/>
           </a:xfrm>
           <a:prstGeom prst="rect">
             <a:avLst/>
@@ -13752,7 +14546,7 @@
           <a:p>
             <a:pPr algn="l">
               <a:spcAft>
-                <a:spcPts val="600"/>
+                <a:spcPts val="500"/>
               </a:spcAft>
             </a:pPr>
             <a:r>
@@ -13762,7 +14556,7 @@
                 </a:solidFill>
                 <a:latin typeface="Calibri"/>
               </a:rPr>
-              <a:t>Détail application — FINISHED / SUCCEEDED</a:t>
+              <a:t>UI — détail application FINISHED / SUCCEEDED</a:t>
             </a:r>
           </a:p>
         </p:txBody>
@@ -13783,8 +14577,8 @@
         </p:blipFill>
         <p:spPr>
           <a:xfrm>
-            <a:off x="5577840" y="4709160"/>
-            <a:ext cx="2212402" cy="1417320"/>
+            <a:off x="5760720" y="4572000"/>
+            <a:ext cx="2426505" cy="1554480"/>
           </a:xfrm>
           <a:prstGeom prst="rect">
             <a:avLst/>

--- a/presentation/PRESENTATION-G4-Les_Hadoop_Riders.pptx
+++ b/presentation/PRESENTATION-G4-Les_Hadoop_Riders.pptx
@@ -653,7 +653,7 @@
           <a:lstStyle/>
           <a:p>
             <a:r>
-              <a:t>Un problème = une cause = une solution. Puis passer à Wren pour conclure.</a:t>
+              <a:t>Un problème = une cause = une solution. Enchaîner directement sur la conclusion.</a:t>
             </a:r>
           </a:p>
         </p:txBody>
@@ -793,7 +793,7 @@
           <a:lstStyle/>
           <a:p>
             <a:r>
-              <a:t>Annoncer l’ordre. Préciser que Wren (dernière) fait la conclusion.</a:t>
+              <a:t>Annoncer : chacun a 2 slides, dans l’ordre. Wren (dernière) conclut.</a:t>
             </a:r>
           </a:p>
         </p:txBody>
@@ -1213,7 +1213,7 @@
           <a:lstStyle/>
           <a:p>
             <a:r>
-              <a:t>Suivre les 5 étapes. Expliquer Trash et setrep. Reviendra pour la conclusion.</a:t>
+              <a:t>Suivre les 5 étapes. Expliquer Trash et setrep.</a:t>
             </a:r>
           </a:p>
         </p:txBody>
@@ -5394,7 +5394,7 @@
                 </a:solidFill>
                 <a:latin typeface="Calibri"/>
               </a:rPr>
-              <a:t>Présenté par : Joel Kazoni Tugirimana</a:t>
+              <a:t>Présenté par : Frank A Simo Ngounou</a:t>
             </a:r>
           </a:p>
         </p:txBody>
@@ -6209,7 +6209,7 @@
                 </a:solidFill>
                 <a:latin typeface="Calibri"/>
               </a:rPr>
-              <a:t>Présenté par : Kassoum Dene</a:t>
+              <a:t>Présenté par : Wren Surprenant-Nicolson</a:t>
             </a:r>
           </a:p>
         </p:txBody>
@@ -7467,7 +7467,7 @@
                 </a:solidFill>
                 <a:latin typeface="Calibri"/>
               </a:rPr>
-              <a:t>Plan — qui présente quoi</a:t>
+              <a:t>Plan — 2 slides par personne, dans l’ordre</a:t>
             </a:r>
           </a:p>
         </p:txBody>
@@ -7506,7 +7506,7 @@
                 </a:solidFill>
                 <a:latin typeface="Calibri"/>
               </a:rPr>
-              <a:t>Environ 8–10 minutes. Chaque slide indique le présentateur en bas.</a:t>
+              <a:t>8–10 min · ordre du groupe · 2 slides chacun · Wren termine avec la conclusion</a:t>
             </a:r>
           </a:p>
         </p:txBody>
@@ -7519,8 +7519,8 @@
         </p:nvSpPr>
         <p:spPr>
           <a:xfrm>
-            <a:off x="411480" y="1600200"/>
-            <a:ext cx="3657600" cy="1280160"/>
+            <a:off x="411480" y="1691640"/>
+            <a:ext cx="3657600" cy="1783080"/>
           </a:xfrm>
           <a:prstGeom prst="roundRect">
             <a:avLst>
@@ -7566,8 +7566,8 @@
         </p:nvSpPr>
         <p:spPr>
           <a:xfrm>
-            <a:off x="594360" y="1783080"/>
-            <a:ext cx="3291840" cy="1005840"/>
+            <a:off x="594360" y="1920240"/>
+            <a:ext cx="3291840" cy="1417320"/>
           </a:xfrm>
           <a:prstGeom prst="rect">
             <a:avLst/>
@@ -7582,33 +7582,33 @@
           <a:p>
             <a:pPr algn="l">
               <a:spcAft>
-                <a:spcPts val="400"/>
-              </a:spcAft>
-            </a:pPr>
-            <a:r>
-              <a:rPr sz="1200" b="1">
+                <a:spcPts val="600"/>
+              </a:spcAft>
+            </a:pPr>
+            <a:r>
+              <a:rPr sz="1300" b="1">
                 <a:solidFill>
                   <a:srgbClr val="0F5C4C"/>
                 </a:solidFill>
                 <a:latin typeface="Calibri"/>
               </a:rPr>
-              <a:t>Slide 3</a:t>
-            </a:r>
-          </a:p>
-          <a:p>
-            <a:pPr algn="l">
-              <a:spcAft>
-                <a:spcPts val="400"/>
-              </a:spcAft>
-            </a:pPr>
-            <a:r>
-              <a:rPr sz="1600" b="1">
+              <a:t>Slides 1–2</a:t>
+            </a:r>
+          </a:p>
+          <a:p>
+            <a:pPr algn="l">
+              <a:spcAft>
+                <a:spcPts val="800"/>
+              </a:spcAft>
+            </a:pPr>
+            <a:r>
+              <a:rPr sz="1500" b="1">
                 <a:solidFill>
                   <a:srgbClr val="1E293B"/>
                 </a:solidFill>
                 <a:latin typeface="Calibri"/>
               </a:rPr>
-              <a:t>3V e-commerce</a:t>
+              <a:t>Titre + plan</a:t>
             </a:r>
           </a:p>
           <a:p>
@@ -7624,7 +7624,7 @@
                 </a:solidFill>
                 <a:latin typeface="Calibri"/>
               </a:rPr>
-              <a:t>Kassoum</a:t>
+              <a:t>Komla Petro Asinyo</a:t>
             </a:r>
           </a:p>
         </p:txBody>
@@ -7637,8 +7637,8 @@
         </p:nvSpPr>
         <p:spPr>
           <a:xfrm>
-            <a:off x="4251960" y="1600200"/>
-            <a:ext cx="3657600" cy="1280160"/>
+            <a:off x="4251960" y="1691640"/>
+            <a:ext cx="3657600" cy="1783080"/>
           </a:xfrm>
           <a:prstGeom prst="roundRect">
             <a:avLst>
@@ -7684,8 +7684,8 @@
         </p:nvSpPr>
         <p:spPr>
           <a:xfrm>
-            <a:off x="4434840" y="1783080"/>
-            <a:ext cx="3291840" cy="1005840"/>
+            <a:off x="4434840" y="1920240"/>
+            <a:ext cx="3291840" cy="1417320"/>
           </a:xfrm>
           <a:prstGeom prst="rect">
             <a:avLst/>
@@ -7700,33 +7700,33 @@
           <a:p>
             <a:pPr algn="l">
               <a:spcAft>
-                <a:spcPts val="400"/>
-              </a:spcAft>
-            </a:pPr>
-            <a:r>
-              <a:rPr sz="1200" b="1">
+                <a:spcPts val="600"/>
+              </a:spcAft>
+            </a:pPr>
+            <a:r>
+              <a:rPr sz="1300" b="1">
                 <a:solidFill>
                   <a:srgbClr val="0F5C4C"/>
                 </a:solidFill>
                 <a:latin typeface="Calibri"/>
               </a:rPr>
-              <a:t>Slide 4</a:t>
-            </a:r>
-          </a:p>
-          <a:p>
-            <a:pPr algn="l">
-              <a:spcAft>
-                <a:spcPts val="400"/>
-              </a:spcAft>
-            </a:pPr>
-            <a:r>
-              <a:rPr sz="1600" b="1">
+              <a:t>Slides 3–4</a:t>
+            </a:r>
+          </a:p>
+          <a:p>
+            <a:pPr algn="l">
+              <a:spcAft>
+                <a:spcPts val="800"/>
+              </a:spcAft>
+            </a:pPr>
+            <a:r>
+              <a:rPr sz="1500" b="1">
                 <a:solidFill>
                   <a:srgbClr val="1E293B"/>
                 </a:solidFill>
                 <a:latin typeface="Calibri"/>
               </a:rPr>
-              <a:t>HDFS vs local</a:t>
+              <a:t>3V + HDFS vs local</a:t>
             </a:r>
           </a:p>
           <a:p>
@@ -7742,7 +7742,7 @@
                 </a:solidFill>
                 <a:latin typeface="Calibri"/>
               </a:rPr>
-              <a:t>Joel</a:t>
+              <a:t>Kassoum Dene</a:t>
             </a:r>
           </a:p>
         </p:txBody>
@@ -7755,8 +7755,8 @@
         </p:nvSpPr>
         <p:spPr>
           <a:xfrm>
-            <a:off x="8092440" y="1600200"/>
-            <a:ext cx="3657600" cy="1280160"/>
+            <a:off x="8092440" y="1691640"/>
+            <a:ext cx="3657600" cy="1783080"/>
           </a:xfrm>
           <a:prstGeom prst="roundRect">
             <a:avLst>
@@ -7802,8 +7802,8 @@
         </p:nvSpPr>
         <p:spPr>
           <a:xfrm>
-            <a:off x="8275319" y="1783080"/>
-            <a:ext cx="3291840" cy="1005840"/>
+            <a:off x="8275319" y="1920240"/>
+            <a:ext cx="3291840" cy="1417320"/>
           </a:xfrm>
           <a:prstGeom prst="rect">
             <a:avLst/>
@@ -7818,33 +7818,33 @@
           <a:p>
             <a:pPr algn="l">
               <a:spcAft>
-                <a:spcPts val="400"/>
-              </a:spcAft>
-            </a:pPr>
-            <a:r>
-              <a:rPr sz="1200" b="1">
+                <a:spcPts val="600"/>
+              </a:spcAft>
+            </a:pPr>
+            <a:r>
+              <a:rPr sz="1300" b="1">
                 <a:solidFill>
                   <a:srgbClr val="0F5C4C"/>
                 </a:solidFill>
                 <a:latin typeface="Calibri"/>
               </a:rPr>
-              <a:t>Slide 5</a:t>
-            </a:r>
-          </a:p>
-          <a:p>
-            <a:pPr algn="l">
-              <a:spcAft>
-                <a:spcPts val="400"/>
-              </a:spcAft>
-            </a:pPr>
-            <a:r>
-              <a:rPr sz="1600" b="1">
+              <a:t>Slides 5–6</a:t>
+            </a:r>
+          </a:p>
+          <a:p>
+            <a:pPr algn="l">
+              <a:spcAft>
+                <a:spcPts val="800"/>
+              </a:spcAft>
+            </a:pPr>
+            <a:r>
+              <a:rPr sz="1500" b="1">
                 <a:solidFill>
                   <a:srgbClr val="1E293B"/>
                 </a:solidFill>
                 <a:latin typeface="Calibri"/>
               </a:rPr>
-              <a:t>YARN RM / NM</a:t>
+              <a:t>YARN + architecture</a:t>
             </a:r>
           </a:p>
           <a:p>
@@ -7860,7 +7860,7 @@
                 </a:solidFill>
                 <a:latin typeface="Calibri"/>
               </a:rPr>
-              <a:t>Forbes</a:t>
+              <a:t>Joel Kazoni Tugirimana</a:t>
             </a:r>
           </a:p>
         </p:txBody>
@@ -7873,8 +7873,8 @@
         </p:nvSpPr>
         <p:spPr>
           <a:xfrm>
-            <a:off x="411480" y="3017520"/>
-            <a:ext cx="3657600" cy="1280160"/>
+            <a:off x="411480" y="3703320"/>
+            <a:ext cx="3657600" cy="1783080"/>
           </a:xfrm>
           <a:prstGeom prst="roundRect">
             <a:avLst>
@@ -7920,8 +7920,8 @@
         </p:nvSpPr>
         <p:spPr>
           <a:xfrm>
-            <a:off x="594360" y="3200400"/>
-            <a:ext cx="3291840" cy="1005840"/>
+            <a:off x="594360" y="3931920"/>
+            <a:ext cx="3291840" cy="1417320"/>
           </a:xfrm>
           <a:prstGeom prst="rect">
             <a:avLst/>
@@ -7936,33 +7936,33 @@
           <a:p>
             <a:pPr algn="l">
               <a:spcAft>
-                <a:spcPts val="400"/>
-              </a:spcAft>
-            </a:pPr>
-            <a:r>
-              <a:rPr sz="1200" b="1">
+                <a:spcPts val="600"/>
+              </a:spcAft>
+            </a:pPr>
+            <a:r>
+              <a:rPr sz="1300" b="1">
                 <a:solidFill>
                   <a:srgbClr val="0F5C4C"/>
                 </a:solidFill>
                 <a:latin typeface="Calibri"/>
               </a:rPr>
-              <a:t>Slide 6–7</a:t>
-            </a:r>
-          </a:p>
-          <a:p>
-            <a:pPr algn="l">
-              <a:spcAft>
-                <a:spcPts val="400"/>
-              </a:spcAft>
-            </a:pPr>
-            <a:r>
-              <a:rPr sz="1600" b="1">
+              <a:t>Slides 7–8</a:t>
+            </a:r>
+          </a:p>
+          <a:p>
+            <a:pPr algn="l">
+              <a:spcAft>
+                <a:spcPts val="800"/>
+              </a:spcAft>
+            </a:pPr>
+            <a:r>
+              <a:rPr sz="1500" b="1">
                 <a:solidFill>
                   <a:srgbClr val="1E293B"/>
                 </a:solidFill>
                 <a:latin typeface="Calibri"/>
               </a:rPr>
-              <a:t>Archi + Hub</a:t>
+              <a:t>Déploiement Hub + HDFS</a:t>
             </a:r>
           </a:p>
           <a:p>
@@ -7978,7 +7978,7 @@
                 </a:solidFill>
                 <a:latin typeface="Calibri"/>
               </a:rPr>
-              <a:t>Frank</a:t>
+              <a:t>Forbes Magène</a:t>
             </a:r>
           </a:p>
         </p:txBody>
@@ -7991,8 +7991,8 @@
         </p:nvSpPr>
         <p:spPr>
           <a:xfrm>
-            <a:off x="4251960" y="3017520"/>
-            <a:ext cx="3657600" cy="1280160"/>
+            <a:off x="4251960" y="3703320"/>
+            <a:ext cx="3657600" cy="1783080"/>
           </a:xfrm>
           <a:prstGeom prst="roundRect">
             <a:avLst>
@@ -8038,8 +8038,8 @@
         </p:nvSpPr>
         <p:spPr>
           <a:xfrm>
-            <a:off x="4434840" y="3200400"/>
-            <a:ext cx="3291840" cy="1005840"/>
+            <a:off x="4434840" y="3931920"/>
+            <a:ext cx="3291840" cy="1417320"/>
           </a:xfrm>
           <a:prstGeom prst="rect">
             <a:avLst/>
@@ -8054,33 +8054,33 @@
           <a:p>
             <a:pPr algn="l">
               <a:spcAft>
-                <a:spcPts val="400"/>
-              </a:spcAft>
-            </a:pPr>
-            <a:r>
-              <a:rPr sz="1200" b="1">
+                <a:spcPts val="600"/>
+              </a:spcAft>
+            </a:pPr>
+            <a:r>
+              <a:rPr sz="1300" b="1">
                 <a:solidFill>
                   <a:srgbClr val="0F5C4C"/>
                 </a:solidFill>
                 <a:latin typeface="Calibri"/>
               </a:rPr>
-              <a:t>Slide 8</a:t>
-            </a:r>
-          </a:p>
-          <a:p>
-            <a:pPr algn="l">
-              <a:spcAft>
-                <a:spcPts val="400"/>
-              </a:spcAft>
-            </a:pPr>
-            <a:r>
-              <a:rPr sz="1600" b="1">
+              <a:t>Slides 9–10</a:t>
+            </a:r>
+          </a:p>
+          <a:p>
+            <a:pPr algn="l">
+              <a:spcAft>
+                <a:spcPts val="800"/>
+              </a:spcAft>
+            </a:pPr>
+            <a:r>
+              <a:rPr sz="1500" b="1">
                 <a:solidFill>
                   <a:srgbClr val="1E293B"/>
                 </a:solidFill>
                 <a:latin typeface="Calibri"/>
               </a:rPr>
-              <a:t>HDFS pratique</a:t>
+              <a:t>Job π + monitoring</a:t>
             </a:r>
           </a:p>
           <a:p>
@@ -8096,7 +8096,7 @@
                 </a:solidFill>
                 <a:latin typeface="Calibri"/>
               </a:rPr>
-              <a:t>Wren</a:t>
+              <a:t>Frank A Simo Ngounou</a:t>
             </a:r>
           </a:p>
         </p:txBody>
@@ -8109,8 +8109,8 @@
         </p:nvSpPr>
         <p:spPr>
           <a:xfrm>
-            <a:off x="8092440" y="3017520"/>
-            <a:ext cx="3657600" cy="1280160"/>
+            <a:off x="8092440" y="3703320"/>
+            <a:ext cx="3657600" cy="1783080"/>
           </a:xfrm>
           <a:prstGeom prst="roundRect">
             <a:avLst>
@@ -8156,8 +8156,8 @@
         </p:nvSpPr>
         <p:spPr>
           <a:xfrm>
-            <a:off x="8275319" y="3200400"/>
-            <a:ext cx="3291840" cy="1005840"/>
+            <a:off x="8275319" y="3931920"/>
+            <a:ext cx="3291840" cy="1417320"/>
           </a:xfrm>
           <a:prstGeom prst="rect">
             <a:avLst/>
@@ -8172,33 +8172,33 @@
           <a:p>
             <a:pPr algn="l">
               <a:spcAft>
-                <a:spcPts val="400"/>
-              </a:spcAft>
-            </a:pPr>
-            <a:r>
-              <a:rPr sz="1200" b="1">
+                <a:spcPts val="600"/>
+              </a:spcAft>
+            </a:pPr>
+            <a:r>
+              <a:rPr sz="1300" b="1">
                 <a:solidFill>
                   <a:srgbClr val="0F5C4C"/>
                 </a:solidFill>
                 <a:latin typeface="Calibri"/>
               </a:rPr>
-              <a:t>Slide 9</a:t>
-            </a:r>
-          </a:p>
-          <a:p>
-            <a:pPr algn="l">
-              <a:spcAft>
-                <a:spcPts val="400"/>
-              </a:spcAft>
-            </a:pPr>
-            <a:r>
-              <a:rPr sz="1600" b="1">
+              <a:t>Slides 11–12</a:t>
+            </a:r>
+          </a:p>
+          <a:p>
+            <a:pPr algn="l">
+              <a:spcAft>
+                <a:spcPts val="800"/>
+              </a:spcAft>
+            </a:pPr>
+            <a:r>
+              <a:rPr sz="1500" b="1">
                 <a:solidFill>
                   <a:srgbClr val="1E293B"/>
                 </a:solidFill>
                 <a:latin typeface="Calibri"/>
               </a:rPr>
-              <a:t>Job π</a:t>
+              <a:t>Problèmes + conclusion</a:t>
             </a:r>
           </a:p>
           <a:p>
@@ -8214,368 +8214,14 @@
                 </a:solidFill>
                 <a:latin typeface="Calibri"/>
               </a:rPr>
-              <a:t>Forbes</a:t>
-            </a:r>
-          </a:p>
-        </p:txBody>
-      </p:sp>
-      <p:sp>
-        <p:nvSpPr>
-          <p:cNvPr id="19" name="Rounded Rectangle 18"/>
-          <p:cNvSpPr/>
-          <p:nvPr/>
-        </p:nvSpPr>
-        <p:spPr>
-          <a:xfrm>
-            <a:off x="411480" y="4434840"/>
-            <a:ext cx="3657600" cy="1280160"/>
-          </a:xfrm>
-          <a:prstGeom prst="roundRect">
-            <a:avLst>
-              <a:gd name="adj" fmla="val 8000"/>
-            </a:avLst>
-          </a:prstGeom>
-          <a:solidFill>
-            <a:srgbClr val="FFFFFF"/>
-          </a:solidFill>
-          <a:ln w="15875">
-            <a:solidFill>
-              <a:srgbClr val="147A66"/>
-            </a:solidFill>
-          </a:ln>
-        </p:spPr>
-        <p:style>
-          <a:lnRef idx="1">
-            <a:schemeClr val="accent1"/>
-          </a:lnRef>
-          <a:fillRef idx="3">
-            <a:schemeClr val="accent1"/>
-          </a:fillRef>
-          <a:effectRef idx="2">
-            <a:schemeClr val="accent1"/>
-          </a:effectRef>
-          <a:fontRef idx="minor">
-            <a:schemeClr val="lt1"/>
-          </a:fontRef>
-        </p:style>
-        <p:txBody>
-          <a:bodyPr rtlCol="0" anchor="ctr"/>
-          <a:lstStyle/>
-          <a:p>
-            <a:pPr algn="ctr"/>
-          </a:p>
-        </p:txBody>
-      </p:sp>
-      <p:sp>
-        <p:nvSpPr>
-          <p:cNvPr id="20" name="TextBox 19"/>
-          <p:cNvSpPr txBox="1"/>
-          <p:nvPr/>
-        </p:nvSpPr>
-        <p:spPr>
-          <a:xfrm>
-            <a:off x="594360" y="4617720"/>
-            <a:ext cx="3291840" cy="1005840"/>
-          </a:xfrm>
-          <a:prstGeom prst="rect">
-            <a:avLst/>
-          </a:prstGeom>
-          <a:noFill/>
-        </p:spPr>
-        <p:txBody>
-          <a:bodyPr wrap="square">
-            <a:spAutoFit/>
-          </a:bodyPr>
-          <a:lstStyle/>
-          <a:p>
-            <a:pPr algn="l">
-              <a:spcAft>
-                <a:spcPts val="400"/>
-              </a:spcAft>
-            </a:pPr>
-            <a:r>
-              <a:rPr sz="1200" b="1">
-                <a:solidFill>
-                  <a:srgbClr val="0F5C4C"/>
-                </a:solidFill>
-                <a:latin typeface="Calibri"/>
-              </a:rPr>
-              <a:t>Slide 10</a:t>
-            </a:r>
-          </a:p>
-          <a:p>
-            <a:pPr algn="l">
-              <a:spcAft>
-                <a:spcPts val="400"/>
-              </a:spcAft>
-            </a:pPr>
-            <a:r>
-              <a:rPr sz="1600" b="1">
-                <a:solidFill>
-                  <a:srgbClr val="1E293B"/>
-                </a:solidFill>
-                <a:latin typeface="Calibri"/>
-              </a:rPr>
-              <a:t>Monitoring</a:t>
-            </a:r>
-          </a:p>
-          <a:p>
-            <a:pPr algn="l">
-              <a:spcAft>
-                <a:spcPts val="500"/>
-              </a:spcAft>
-            </a:pPr>
-            <a:r>
-              <a:rPr sz="1300" b="0">
-                <a:solidFill>
-                  <a:srgbClr val="64748B"/>
-                </a:solidFill>
-                <a:latin typeface="Calibri"/>
-              </a:rPr>
-              <a:t>Joel</a:t>
-            </a:r>
-          </a:p>
-        </p:txBody>
-      </p:sp>
-      <p:sp>
-        <p:nvSpPr>
-          <p:cNvPr id="21" name="Rounded Rectangle 20"/>
-          <p:cNvSpPr/>
-          <p:nvPr/>
-        </p:nvSpPr>
-        <p:spPr>
-          <a:xfrm>
-            <a:off x="4251960" y="4434840"/>
-            <a:ext cx="3657600" cy="1280160"/>
-          </a:xfrm>
-          <a:prstGeom prst="roundRect">
-            <a:avLst>
-              <a:gd name="adj" fmla="val 8000"/>
-            </a:avLst>
-          </a:prstGeom>
-          <a:solidFill>
-            <a:srgbClr val="FFFFFF"/>
-          </a:solidFill>
-          <a:ln w="15875">
-            <a:solidFill>
-              <a:srgbClr val="147A66"/>
-            </a:solidFill>
-          </a:ln>
-        </p:spPr>
-        <p:style>
-          <a:lnRef idx="1">
-            <a:schemeClr val="accent1"/>
-          </a:lnRef>
-          <a:fillRef idx="3">
-            <a:schemeClr val="accent1"/>
-          </a:fillRef>
-          <a:effectRef idx="2">
-            <a:schemeClr val="accent1"/>
-          </a:effectRef>
-          <a:fontRef idx="minor">
-            <a:schemeClr val="lt1"/>
-          </a:fontRef>
-        </p:style>
-        <p:txBody>
-          <a:bodyPr rtlCol="0" anchor="ctr"/>
-          <a:lstStyle/>
-          <a:p>
-            <a:pPr algn="ctr"/>
-          </a:p>
-        </p:txBody>
-      </p:sp>
-      <p:sp>
-        <p:nvSpPr>
-          <p:cNvPr id="22" name="TextBox 21"/>
-          <p:cNvSpPr txBox="1"/>
-          <p:nvPr/>
-        </p:nvSpPr>
-        <p:spPr>
-          <a:xfrm>
-            <a:off x="4434840" y="4617720"/>
-            <a:ext cx="3291840" cy="1005840"/>
-          </a:xfrm>
-          <a:prstGeom prst="rect">
-            <a:avLst/>
-          </a:prstGeom>
-          <a:noFill/>
-        </p:spPr>
-        <p:txBody>
-          <a:bodyPr wrap="square">
-            <a:spAutoFit/>
-          </a:bodyPr>
-          <a:lstStyle/>
-          <a:p>
-            <a:pPr algn="l">
-              <a:spcAft>
-                <a:spcPts val="400"/>
-              </a:spcAft>
-            </a:pPr>
-            <a:r>
-              <a:rPr sz="1200" b="1">
-                <a:solidFill>
-                  <a:srgbClr val="0F5C4C"/>
-                </a:solidFill>
-                <a:latin typeface="Calibri"/>
-              </a:rPr>
-              <a:t>Slide 11</a:t>
-            </a:r>
-          </a:p>
-          <a:p>
-            <a:pPr algn="l">
-              <a:spcAft>
-                <a:spcPts val="400"/>
-              </a:spcAft>
-            </a:pPr>
-            <a:r>
-              <a:rPr sz="1600" b="1">
-                <a:solidFill>
-                  <a:srgbClr val="1E293B"/>
-                </a:solidFill>
-                <a:latin typeface="Calibri"/>
-              </a:rPr>
-              <a:t>Problèmes</a:t>
-            </a:r>
-          </a:p>
-          <a:p>
-            <a:pPr algn="l">
-              <a:spcAft>
-                <a:spcPts val="500"/>
-              </a:spcAft>
-            </a:pPr>
-            <a:r>
-              <a:rPr sz="1300" b="0">
-                <a:solidFill>
-                  <a:srgbClr val="64748B"/>
-                </a:solidFill>
-                <a:latin typeface="Calibri"/>
-              </a:rPr>
-              <a:t>Kassoum</a:t>
-            </a:r>
-          </a:p>
-        </p:txBody>
-      </p:sp>
-      <p:sp>
-        <p:nvSpPr>
-          <p:cNvPr id="23" name="Rounded Rectangle 22"/>
-          <p:cNvSpPr/>
-          <p:nvPr/>
-        </p:nvSpPr>
-        <p:spPr>
-          <a:xfrm>
-            <a:off x="8092440" y="4434840"/>
-            <a:ext cx="3657600" cy="1280160"/>
-          </a:xfrm>
-          <a:prstGeom prst="roundRect">
-            <a:avLst>
-              <a:gd name="adj" fmla="val 8000"/>
-            </a:avLst>
-          </a:prstGeom>
-          <a:solidFill>
-            <a:srgbClr val="FFFFFF"/>
-          </a:solidFill>
-          <a:ln w="15875">
-            <a:solidFill>
-              <a:srgbClr val="147A66"/>
-            </a:solidFill>
-          </a:ln>
-        </p:spPr>
-        <p:style>
-          <a:lnRef idx="1">
-            <a:schemeClr val="accent1"/>
-          </a:lnRef>
-          <a:fillRef idx="3">
-            <a:schemeClr val="accent1"/>
-          </a:fillRef>
-          <a:effectRef idx="2">
-            <a:schemeClr val="accent1"/>
-          </a:effectRef>
-          <a:fontRef idx="minor">
-            <a:schemeClr val="lt1"/>
-          </a:fontRef>
-        </p:style>
-        <p:txBody>
-          <a:bodyPr rtlCol="0" anchor="ctr"/>
-          <a:lstStyle/>
-          <a:p>
-            <a:pPr algn="ctr"/>
-          </a:p>
-        </p:txBody>
-      </p:sp>
-      <p:sp>
-        <p:nvSpPr>
-          <p:cNvPr id="24" name="TextBox 23"/>
-          <p:cNvSpPr txBox="1"/>
-          <p:nvPr/>
-        </p:nvSpPr>
-        <p:spPr>
-          <a:xfrm>
-            <a:off x="8275319" y="4617720"/>
-            <a:ext cx="3291840" cy="1005840"/>
-          </a:xfrm>
-          <a:prstGeom prst="rect">
-            <a:avLst/>
-          </a:prstGeom>
-          <a:noFill/>
-        </p:spPr>
-        <p:txBody>
-          <a:bodyPr wrap="square">
-            <a:spAutoFit/>
-          </a:bodyPr>
-          <a:lstStyle/>
-          <a:p>
-            <a:pPr algn="l">
-              <a:spcAft>
-                <a:spcPts val="400"/>
-              </a:spcAft>
-            </a:pPr>
-            <a:r>
-              <a:rPr sz="1200" b="1">
-                <a:solidFill>
-                  <a:srgbClr val="0F5C4C"/>
-                </a:solidFill>
-                <a:latin typeface="Calibri"/>
-              </a:rPr>
-              <a:t>Slide 12</a:t>
-            </a:r>
-          </a:p>
-          <a:p>
-            <a:pPr algn="l">
-              <a:spcAft>
-                <a:spcPts val="400"/>
-              </a:spcAft>
-            </a:pPr>
-            <a:r>
-              <a:rPr sz="1600" b="1">
-                <a:solidFill>
-                  <a:srgbClr val="1E293B"/>
-                </a:solidFill>
-                <a:latin typeface="Calibri"/>
-              </a:rPr>
-              <a:t>Conclusion</a:t>
-            </a:r>
-          </a:p>
-          <a:p>
-            <a:pPr algn="l">
-              <a:spcAft>
-                <a:spcPts val="500"/>
-              </a:spcAft>
-            </a:pPr>
-            <a:r>
-              <a:rPr sz="1300" b="0">
-                <a:solidFill>
-                  <a:srgbClr val="64748B"/>
-                </a:solidFill>
-                <a:latin typeface="Calibri"/>
-              </a:rPr>
-              <a:t>Wren</a:t>
-            </a:r>
-          </a:p>
-        </p:txBody>
-      </p:sp>
-      <p:sp>
-        <p:nvSpPr>
-          <p:cNvPr id="25" name="Rectangle 24"/>
+              <a:t>Wren Surprenant-Nicolson</a:t>
+            </a:r>
+          </a:p>
+        </p:txBody>
+      </p:sp>
+      <p:sp>
+        <p:nvSpPr>
+          <p:cNvPr id="19" name="Rectangle 18"/>
           <p:cNvSpPr/>
           <p:nvPr/>
         </p:nvSpPr>
@@ -8618,7 +8264,7 @@
       </p:sp>
       <p:sp>
         <p:nvSpPr>
-          <p:cNvPr id="26" name="TextBox 25"/>
+          <p:cNvPr id="20" name="TextBox 19"/>
           <p:cNvSpPr txBox="1"/>
           <p:nvPr/>
         </p:nvSpPr>
@@ -8652,7 +8298,7 @@
       </p:sp>
       <p:sp>
         <p:nvSpPr>
-          <p:cNvPr id="27" name="TextBox 26"/>
+          <p:cNvPr id="21" name="TextBox 20"/>
           <p:cNvSpPr txBox="1"/>
           <p:nvPr/>
         </p:nvSpPr>
@@ -10858,7 +10504,7 @@
                 </a:solidFill>
                 <a:latin typeface="Calibri"/>
               </a:rPr>
-              <a:t>Présenté par : Joel Kazoni Tugirimana</a:t>
+              <a:t>Présenté par : Kassoum Dene</a:t>
             </a:r>
           </a:p>
         </p:txBody>
@@ -11769,7 +11415,7 @@
                 </a:solidFill>
                 <a:latin typeface="Calibri"/>
               </a:rPr>
-              <a:t>Présenté par : Forbes Magène</a:t>
+              <a:t>Présenté par : Joel Kazoni Tugirimana</a:t>
             </a:r>
           </a:p>
         </p:txBody>
@@ -12870,7 +12516,7 @@
                 </a:solidFill>
                 <a:latin typeface="Calibri"/>
               </a:rPr>
-              <a:t>Présenté par : Frank A Simo Ngounou</a:t>
+              <a:t>Présenté par : Joel Kazoni Tugirimana</a:t>
             </a:r>
           </a:p>
         </p:txBody>
@@ -13467,7 +13113,7 @@
                 </a:solidFill>
                 <a:latin typeface="Calibri"/>
               </a:rPr>
-              <a:t>Présenté par : Frank A Simo Ngounou</a:t>
+              <a:t>Présenté par : Forbes Magène</a:t>
             </a:r>
           </a:p>
         </p:txBody>
@@ -14061,7 +13707,7 @@
                 </a:solidFill>
                 <a:latin typeface="Calibri"/>
               </a:rPr>
-              <a:t>Présenté par : Wren Surprenant-Nicolson</a:t>
+              <a:t>Présenté par : Forbes Magène</a:t>
             </a:r>
           </a:p>
         </p:txBody>
@@ -14657,7 +14303,7 @@
                 </a:solidFill>
                 <a:latin typeface="Calibri"/>
               </a:rPr>
-              <a:t>Présenté par : Forbes Magène</a:t>
+              <a:t>Présenté par : Frank A Simo Ngounou</a:t>
             </a:r>
           </a:p>
         </p:txBody>
